--- a/assets/files/Business-Pitch-Deck-7-Slide.pptx
+++ b/assets/files/Business-Pitch-Deck-7-Slide.pptx
@@ -110,6 +110,11 @@
       </a:defRPr>
     </a:lvl9pPr>
   </p:defaultTextStyle>
+  <p:extLst>
+    <p:ext uri="{EFAFB233-063F-42B5-8137-9DF3F51BA10A}">
+      <p15:sldGuideLst xmlns:p15="http://schemas.microsoft.com/office/powerpoint/2012/main"/>
+    </p:ext>
+  </p:extLst>
 </p:presentation>
 </file>
 
@@ -15171,13 +15176,13 @@
   <p:clrMapOvr>
     <a:masterClrMapping/>
   </p:clrMapOvr>
-  <mc:AlternateContent xmlns:mc="http://schemas.openxmlformats.org/markup-compatibility/2006">
-    <mc:Choice xmlns:p159="http://schemas.microsoft.com/office/powerpoint/2015/09/main" Requires="p159">
+  <mc:AlternateContent xmlns:mc="http://schemas.openxmlformats.org/markup-compatibility/2006" xmlns:p159="http://schemas.microsoft.com/office/powerpoint/2015/09/main">
+    <mc:Choice Requires="p159">
       <p:transition xmlns:p14="http://schemas.microsoft.com/office/powerpoint/2010/main" spd="slow" p14:dur="2000">
         <p159:morph option="byObject"/>
       </p:transition>
     </mc:Choice>
-    <mc:Fallback>
+    <mc:Fallback xmlns="">
       <p:transition spd="slow">
         <p:fade/>
       </p:transition>
@@ -15873,13 +15878,13 @@
   <p:clrMapOvr>
     <a:masterClrMapping/>
   </p:clrMapOvr>
-  <mc:AlternateContent xmlns:mc="http://schemas.openxmlformats.org/markup-compatibility/2006">
-    <mc:Choice xmlns:p159="http://schemas.microsoft.com/office/powerpoint/2015/09/main" Requires="p159">
+  <mc:AlternateContent xmlns:mc="http://schemas.openxmlformats.org/markup-compatibility/2006" xmlns:p159="http://schemas.microsoft.com/office/powerpoint/2015/09/main">
+    <mc:Choice Requires="p159">
       <p:transition xmlns:p14="http://schemas.microsoft.com/office/powerpoint/2010/main" spd="slow" p14:dur="2000">
         <p159:morph option="byObject"/>
       </p:transition>
     </mc:Choice>
-    <mc:Fallback>
+    <mc:Fallback xmlns="">
       <p:transition spd="slow">
         <p:fade/>
       </p:transition>
@@ -16738,13 +16743,13 @@
   <p:clrMapOvr>
     <a:masterClrMapping/>
   </p:clrMapOvr>
-  <mc:AlternateContent xmlns:mc="http://schemas.openxmlformats.org/markup-compatibility/2006">
-    <mc:Choice xmlns:p159="http://schemas.microsoft.com/office/powerpoint/2015/09/main" Requires="p159">
+  <mc:AlternateContent xmlns:mc="http://schemas.openxmlformats.org/markup-compatibility/2006" xmlns:p159="http://schemas.microsoft.com/office/powerpoint/2015/09/main">
+    <mc:Choice Requires="p159">
       <p:transition xmlns:p14="http://schemas.microsoft.com/office/powerpoint/2010/main" spd="slow" p14:dur="2000">
         <p159:morph option="byObject"/>
       </p:transition>
     </mc:Choice>
-    <mc:Fallback>
+    <mc:Fallback xmlns="">
       <p:transition spd="slow">
         <p:fade/>
       </p:transition>
@@ -17278,13 +17283,13 @@
   <p:clrMapOvr>
     <a:masterClrMapping/>
   </p:clrMapOvr>
-  <mc:AlternateContent xmlns:mc="http://schemas.openxmlformats.org/markup-compatibility/2006">
-    <mc:Choice xmlns:p159="http://schemas.microsoft.com/office/powerpoint/2015/09/main" Requires="p159">
+  <mc:AlternateContent xmlns:mc="http://schemas.openxmlformats.org/markup-compatibility/2006" xmlns:p159="http://schemas.microsoft.com/office/powerpoint/2015/09/main">
+    <mc:Choice Requires="p159">
       <p:transition xmlns:p14="http://schemas.microsoft.com/office/powerpoint/2010/main" spd="slow" p14:dur="2000">
         <p159:morph option="byObject"/>
       </p:transition>
     </mc:Choice>
-    <mc:Fallback>
+    <mc:Fallback xmlns="">
       <p:transition spd="slow">
         <p:fade/>
       </p:transition>
@@ -17836,13 +17841,13 @@
   <p:clrMapOvr>
     <a:masterClrMapping/>
   </p:clrMapOvr>
-  <mc:AlternateContent xmlns:mc="http://schemas.openxmlformats.org/markup-compatibility/2006">
-    <mc:Choice xmlns:p159="http://schemas.microsoft.com/office/powerpoint/2015/09/main" Requires="p159">
+  <mc:AlternateContent xmlns:mc="http://schemas.openxmlformats.org/markup-compatibility/2006" xmlns:p159="http://schemas.microsoft.com/office/powerpoint/2015/09/main">
+    <mc:Choice Requires="p159">
       <p:transition xmlns:p14="http://schemas.microsoft.com/office/powerpoint/2010/main" spd="slow" p14:dur="2000">
         <p159:morph option="byObject"/>
       </p:transition>
     </mc:Choice>
-    <mc:Fallback>
+    <mc:Fallback xmlns="">
       <p:transition spd="slow">
         <p:fade/>
       </p:transition>
@@ -18408,13 +18413,13 @@
   <p:clrMapOvr>
     <a:masterClrMapping/>
   </p:clrMapOvr>
-  <mc:AlternateContent xmlns:mc="http://schemas.openxmlformats.org/markup-compatibility/2006">
-    <mc:Choice xmlns:p159="http://schemas.microsoft.com/office/powerpoint/2015/09/main" Requires="p159">
+  <mc:AlternateContent xmlns:mc="http://schemas.openxmlformats.org/markup-compatibility/2006" xmlns:p159="http://schemas.microsoft.com/office/powerpoint/2015/09/main">
+    <mc:Choice Requires="p159">
       <p:transition xmlns:p14="http://schemas.microsoft.com/office/powerpoint/2010/main" spd="slow" p14:dur="2000">
         <p159:morph option="byObject"/>
       </p:transition>
     </mc:Choice>
-    <mc:Fallback>
+    <mc:Fallback xmlns="">
       <p:transition spd="slow">
         <p:fade/>
       </p:transition>
@@ -18754,7 +18759,7 @@
                   </a:schemeClr>
                 </a:solidFill>
               </a:rPr>
-              <a:t>[hello@freshbox.id](mailto:hello@freshbox.id)</a:t>
+              <a:t>hello@freshbox.id</a:t>
             </a:r>
             <a:endParaRPr lang="en-US" dirty="0">
               <a:solidFill>
@@ -18800,7 +18805,7 @@
                   </a:schemeClr>
                 </a:solidFill>
               </a:rPr>
-              <a:t>[www.freshbox.id](http://www.freshbox.id)</a:t>
+              <a:t>http://www.freshbox.id</a:t>
             </a:r>
           </a:p>
         </p:txBody>
@@ -18856,13 +18861,13 @@
   <p:clrMapOvr>
     <a:masterClrMapping/>
   </p:clrMapOvr>
-  <mc:AlternateContent xmlns:mc="http://schemas.openxmlformats.org/markup-compatibility/2006">
-    <mc:Choice xmlns:p159="http://schemas.microsoft.com/office/powerpoint/2015/09/main" Requires="p159">
+  <mc:AlternateContent xmlns:mc="http://schemas.openxmlformats.org/markup-compatibility/2006" xmlns:p159="http://schemas.microsoft.com/office/powerpoint/2015/09/main">
+    <mc:Choice Requires="p159">
       <p:transition xmlns:p14="http://schemas.microsoft.com/office/powerpoint/2010/main" spd="slow" p14:dur="2000">
         <p159:morph option="byObject"/>
       </p:transition>
     </mc:Choice>
-    <mc:Fallback>
+    <mc:Fallback xmlns="">
       <p:transition spd="slow">
         <p:fade/>
       </p:transition>

--- a/assets/files/Business-Pitch-Deck-7-Slide.pptx
+++ b/assets/files/Business-Pitch-Deck-7-Slide.pptx
@@ -7560,7 +7560,7 @@
           <a:p>
             <a:fld id="{BAD00000-CC03-48C5-8C41-BDDBF8D27D19}" type="datetimeFigureOut">
               <a:rPr lang="id-ID" smtClean="0"/>
-              <a:t>27/06/2026</a:t>
+              <a:t>28/06/2026</a:t>
             </a:fld>
             <a:endParaRPr lang="id-ID"/>
           </a:p>
@@ -7898,7 +7898,7 @@
           <a:p>
             <a:fld id="{BAD00000-CC03-48C5-8C41-BDDBF8D27D19}" type="datetimeFigureOut">
               <a:rPr lang="id-ID" smtClean="0"/>
-              <a:t>27/06/2026</a:t>
+              <a:t>28/06/2026</a:t>
             </a:fld>
             <a:endParaRPr lang="id-ID"/>
           </a:p>
@@ -8299,7 +8299,7 @@
           <a:p>
             <a:fld id="{BAD00000-CC03-48C5-8C41-BDDBF8D27D19}" type="datetimeFigureOut">
               <a:rPr lang="id-ID" smtClean="0"/>
-              <a:t>27/06/2026</a:t>
+              <a:t>28/06/2026</a:t>
             </a:fld>
             <a:endParaRPr lang="id-ID"/>
           </a:p>
@@ -8635,7 +8635,7 @@
           <a:p>
             <a:fld id="{BAD00000-CC03-48C5-8C41-BDDBF8D27D19}" type="datetimeFigureOut">
               <a:rPr lang="id-ID" smtClean="0"/>
-              <a:t>27/06/2026</a:t>
+              <a:t>28/06/2026</a:t>
             </a:fld>
             <a:endParaRPr lang="id-ID"/>
           </a:p>
@@ -8955,7 +8955,7 @@
           <a:p>
             <a:fld id="{BAD00000-CC03-48C5-8C41-BDDBF8D27D19}" type="datetimeFigureOut">
               <a:rPr lang="id-ID" smtClean="0"/>
-              <a:t>27/06/2026</a:t>
+              <a:t>28/06/2026</a:t>
             </a:fld>
             <a:endParaRPr lang="id-ID"/>
           </a:p>
@@ -9351,7 +9351,7 @@
           <a:p>
             <a:fld id="{BAD00000-CC03-48C5-8C41-BDDBF8D27D19}" type="datetimeFigureOut">
               <a:rPr lang="id-ID" smtClean="0"/>
-              <a:t>27/06/2026</a:t>
+              <a:t>28/06/2026</a:t>
             </a:fld>
             <a:endParaRPr lang="id-ID"/>
           </a:p>
@@ -9608,7 +9608,7 @@
           <a:p>
             <a:fld id="{BAD00000-CC03-48C5-8C41-BDDBF8D27D19}" type="datetimeFigureOut">
               <a:rPr lang="id-ID" smtClean="0"/>
-              <a:t>27/06/2026</a:t>
+              <a:t>28/06/2026</a:t>
             </a:fld>
             <a:endParaRPr lang="id-ID"/>
           </a:p>
@@ -9870,7 +9870,7 @@
           <a:p>
             <a:fld id="{BAD00000-CC03-48C5-8C41-BDDBF8D27D19}" type="datetimeFigureOut">
               <a:rPr lang="id-ID" smtClean="0"/>
-              <a:t>27/06/2026</a:t>
+              <a:t>28/06/2026</a:t>
             </a:fld>
             <a:endParaRPr lang="id-ID"/>
           </a:p>
@@ -10132,7 +10132,7 @@
           <a:p>
             <a:fld id="{BAD00000-CC03-48C5-8C41-BDDBF8D27D19}" type="datetimeFigureOut">
               <a:rPr lang="id-ID" smtClean="0"/>
-              <a:t>27/06/2026</a:t>
+              <a:t>28/06/2026</a:t>
             </a:fld>
             <a:endParaRPr lang="id-ID"/>
           </a:p>
@@ -10461,7 +10461,7 @@
           <a:p>
             <a:fld id="{BAD00000-CC03-48C5-8C41-BDDBF8D27D19}" type="datetimeFigureOut">
               <a:rPr lang="id-ID" smtClean="0"/>
-              <a:t>27/06/2026</a:t>
+              <a:t>28/06/2026</a:t>
             </a:fld>
             <a:endParaRPr lang="id-ID"/>
           </a:p>
@@ -10784,7 +10784,7 @@
           <a:p>
             <a:fld id="{BAD00000-CC03-48C5-8C41-BDDBF8D27D19}" type="datetimeFigureOut">
               <a:rPr lang="id-ID" smtClean="0"/>
-              <a:t>27/06/2026</a:t>
+              <a:t>28/06/2026</a:t>
             </a:fld>
             <a:endParaRPr lang="id-ID"/>
           </a:p>
@@ -11241,7 +11241,7 @@
           <a:p>
             <a:fld id="{BAD00000-CC03-48C5-8C41-BDDBF8D27D19}" type="datetimeFigureOut">
               <a:rPr lang="id-ID" smtClean="0"/>
-              <a:t>27/06/2026</a:t>
+              <a:t>28/06/2026</a:t>
             </a:fld>
             <a:endParaRPr lang="id-ID"/>
           </a:p>
@@ -11446,7 +11446,7 @@
           <a:p>
             <a:fld id="{BAD00000-CC03-48C5-8C41-BDDBF8D27D19}" type="datetimeFigureOut">
               <a:rPr lang="id-ID" smtClean="0"/>
-              <a:t>27/06/2026</a:t>
+              <a:t>28/06/2026</a:t>
             </a:fld>
             <a:endParaRPr lang="id-ID"/>
           </a:p>
@@ -11623,7 +11623,7 @@
           <a:p>
             <a:fld id="{BAD00000-CC03-48C5-8C41-BDDBF8D27D19}" type="datetimeFigureOut">
               <a:rPr lang="id-ID" smtClean="0"/>
-              <a:t>27/06/2026</a:t>
+              <a:t>28/06/2026</a:t>
             </a:fld>
             <a:endParaRPr lang="id-ID"/>
           </a:p>
@@ -11956,7 +11956,7 @@
           <a:p>
             <a:fld id="{BAD00000-CC03-48C5-8C41-BDDBF8D27D19}" type="datetimeFigureOut">
               <a:rPr lang="id-ID" smtClean="0"/>
-              <a:t>27/06/2026</a:t>
+              <a:t>28/06/2026</a:t>
             </a:fld>
             <a:endParaRPr lang="id-ID"/>
           </a:p>
@@ -12301,7 +12301,7 @@
           <a:p>
             <a:fld id="{BAD00000-CC03-48C5-8C41-BDDBF8D27D19}" type="datetimeFigureOut">
               <a:rPr lang="id-ID" smtClean="0"/>
-              <a:t>27/06/2026</a:t>
+              <a:t>28/06/2026</a:t>
             </a:fld>
             <a:endParaRPr lang="id-ID"/>
           </a:p>
@@ -14418,7 +14418,7 @@
           <a:p>
             <a:fld id="{BAD00000-CC03-48C5-8C41-BDDBF8D27D19}" type="datetimeFigureOut">
               <a:rPr lang="id-ID" smtClean="0"/>
-              <a:t>27/06/2026</a:t>
+              <a:t>28/06/2026</a:t>
             </a:fld>
             <a:endParaRPr lang="id-ID"/>
           </a:p>
@@ -15246,30 +15246,21 @@
                             </p:childTnLst>
                           </p:cTn>
                         </p:par>
-                      </p:childTnLst>
-                    </p:cTn>
-                  </p:par>
-                  <p:par>
-                    <p:cTn id="8" fill="hold">
-                      <p:stCondLst>
-                        <p:cond delay="indefinite"/>
-                      </p:stCondLst>
-                      <p:childTnLst>
                         <p:par>
-                          <p:cTn id="9" fill="hold">
+                          <p:cTn id="8" fill="hold">
                             <p:stCondLst>
-                              <p:cond delay="0"/>
+                              <p:cond delay="500"/>
                             </p:stCondLst>
                             <p:childTnLst>
                               <p:par>
-                                <p:cTn id="10" presetID="1" presetClass="entr" presetSubtype="0" fill="hold" grpId="0" nodeType="clickEffect">
+                                <p:cTn id="9" presetID="1" presetClass="entr" presetSubtype="0" fill="hold" grpId="0" nodeType="afterEffect">
                                   <p:stCondLst>
                                     <p:cond delay="0"/>
                                   </p:stCondLst>
                                   <p:childTnLst>
                                     <p:set>
                                       <p:cBhvr>
-                                        <p:cTn id="11" dur="1" fill="hold">
+                                        <p:cTn id="10" dur="1" fill="hold">
                                           <p:stCondLst>
                                             <p:cond delay="0"/>
                                           </p:stCondLst>
@@ -15288,33 +15279,77 @@
                                   </p:childTnLst>
                                 </p:cTn>
                               </p:par>
-                            </p:childTnLst>
-                          </p:cTn>
-                        </p:par>
-                      </p:childTnLst>
-                    </p:cTn>
-                  </p:par>
-                  <p:par>
-                    <p:cTn id="12" fill="hold">
-                      <p:stCondLst>
-                        <p:cond delay="indefinite"/>
-                      </p:stCondLst>
-                      <p:childTnLst>
-                        <p:par>
-                          <p:cTn id="13" fill="hold">
-                            <p:stCondLst>
-                              <p:cond delay="0"/>
-                            </p:stCondLst>
-                            <p:childTnLst>
                               <p:par>
-                                <p:cTn id="14" presetID="53" presetClass="exit" presetSubtype="32" fill="hold" nodeType="clickEffect">
+                                <p:cTn id="11" presetID="22" presetClass="entr" presetSubtype="8" fill="hold" grpId="0" nodeType="withEffect">
                                   <p:stCondLst>
                                     <p:cond delay="0"/>
                                   </p:stCondLst>
                                   <p:childTnLst>
+                                    <p:set>
+                                      <p:cBhvr>
+                                        <p:cTn id="12" dur="1" fill="hold">
+                                          <p:stCondLst>
+                                            <p:cond delay="0"/>
+                                          </p:stCondLst>
+                                        </p:cTn>
+                                        <p:tgtEl>
+                                          <p:spTgt spid="6"/>
+                                        </p:tgtEl>
+                                        <p:attrNameLst>
+                                          <p:attrName>style.visibility</p:attrName>
+                                        </p:attrNameLst>
+                                      </p:cBhvr>
+                                      <p:to>
+                                        <p:strVal val="visible"/>
+                                      </p:to>
+                                    </p:set>
+                                    <p:animEffect transition="in" filter="wipe(left)">
+                                      <p:cBhvr>
+                                        <p:cTn id="13" dur="500"/>
+                                        <p:tgtEl>
+                                          <p:spTgt spid="6"/>
+                                        </p:tgtEl>
+                                      </p:cBhvr>
+                                    </p:animEffect>
+                                  </p:childTnLst>
+                                </p:cTn>
+                              </p:par>
+                            </p:childTnLst>
+                          </p:cTn>
+                        </p:par>
+                        <p:par>
+                          <p:cTn id="14" fill="hold">
+                            <p:stCondLst>
+                              <p:cond delay="1000"/>
+                            </p:stCondLst>
+                            <p:childTnLst>
+                              <p:par>
+                                <p:cTn id="15" presetID="53" presetClass="entr" presetSubtype="16" fill="hold" nodeType="afterEffect">
+                                  <p:stCondLst>
+                                    <p:cond delay="0"/>
+                                  </p:stCondLst>
+                                  <p:childTnLst>
+                                    <p:set>
+                                      <p:cBhvr>
+                                        <p:cTn id="16" dur="1" fill="hold">
+                                          <p:stCondLst>
+                                            <p:cond delay="0"/>
+                                          </p:stCondLst>
+                                        </p:cTn>
+                                        <p:tgtEl>
+                                          <p:spTgt spid="8"/>
+                                        </p:tgtEl>
+                                        <p:attrNameLst>
+                                          <p:attrName>style.visibility</p:attrName>
+                                        </p:attrNameLst>
+                                      </p:cBhvr>
+                                      <p:to>
+                                        <p:strVal val="visible"/>
+                                      </p:to>
+                                    </p:set>
                                     <p:anim calcmode="lin" valueType="num">
                                       <p:cBhvr>
-                                        <p:cTn id="15" dur="500"/>
+                                        <p:cTn id="17" dur="500" fill="hold"/>
                                         <p:tgtEl>
                                           <p:spTgt spid="8"/>
                                         </p:tgtEl>
@@ -15325,19 +15360,19 @@
                                       <p:tavLst>
                                         <p:tav tm="0">
                                           <p:val>
-                                            <p:strVal val="ppt_w"/>
+                                            <p:fltVal val="0"/>
                                           </p:val>
                                         </p:tav>
                                         <p:tav tm="100000">
                                           <p:val>
-                                            <p:fltVal val="0"/>
+                                            <p:strVal val="#ppt_w"/>
                                           </p:val>
                                         </p:tav>
                                       </p:tavLst>
                                     </p:anim>
                                     <p:anim calcmode="lin" valueType="num">
                                       <p:cBhvr>
-                                        <p:cTn id="16" dur="500"/>
+                                        <p:cTn id="18" dur="500" fill="hold"/>
                                         <p:tgtEl>
                                           <p:spTgt spid="8"/>
                                         </p:tgtEl>
@@ -15348,42 +15383,24 @@
                                       <p:tavLst>
                                         <p:tav tm="0">
                                           <p:val>
-                                            <p:strVal val="ppt_h"/>
+                                            <p:fltVal val="0"/>
                                           </p:val>
                                         </p:tav>
                                         <p:tav tm="100000">
                                           <p:val>
-                                            <p:fltVal val="0"/>
+                                            <p:strVal val="#ppt_h"/>
                                           </p:val>
                                         </p:tav>
                                       </p:tavLst>
                                     </p:anim>
-                                    <p:animEffect transition="out" filter="fade">
+                                    <p:animEffect transition="in" filter="fade">
                                       <p:cBhvr>
-                                        <p:cTn id="17" dur="500"/>
+                                        <p:cTn id="19" dur="500"/>
                                         <p:tgtEl>
                                           <p:spTgt spid="8"/>
                                         </p:tgtEl>
                                       </p:cBhvr>
                                     </p:animEffect>
-                                    <p:set>
-                                      <p:cBhvr>
-                                        <p:cTn id="18" dur="1" fill="hold">
-                                          <p:stCondLst>
-                                            <p:cond delay="499"/>
-                                          </p:stCondLst>
-                                        </p:cTn>
-                                        <p:tgtEl>
-                                          <p:spTgt spid="8"/>
-                                        </p:tgtEl>
-                                        <p:attrNameLst>
-                                          <p:attrName>style.visibility</p:attrName>
-                                        </p:attrNameLst>
-                                      </p:cBhvr>
-                                      <p:to>
-                                        <p:strVal val="hidden"/>
-                                      </p:to>
-                                    </p:set>
                                   </p:childTnLst>
                                 </p:cTn>
                               </p:par>
@@ -15417,6 +15434,7 @@
     <p:bldLst>
       <p:bldP spid="4" grpId="0"/>
       <p:bldP spid="5" grpId="0"/>
+      <p:bldP spid="6" grpId="0"/>
     </p:bldLst>
   </p:timing>
 </p:sld>
@@ -15902,6 +15920,9 @@
                     <p:cTn id="3" fill="hold">
                       <p:stCondLst>
                         <p:cond delay="indefinite"/>
+                        <p:cond evt="onBegin" delay="0">
+                          <p:tn val="2"/>
+                        </p:cond>
                       </p:stCondLst>
                       <p:childTnLst>
                         <p:par>
@@ -15911,7 +15932,7 @@
                             </p:stCondLst>
                             <p:childTnLst>
                               <p:par>
-                                <p:cTn id="5" presetID="1" presetClass="entr" presetSubtype="0" fill="hold" grpId="0" nodeType="clickEffect">
+                                <p:cTn id="5" presetID="10" presetClass="entr" presetSubtype="0" fill="hold" grpId="0" nodeType="withEffect">
                                   <p:stCondLst>
                                     <p:cond delay="0"/>
                                   </p:stCondLst>
@@ -15919,6 +15940,50 @@
                                     <p:set>
                                       <p:cBhvr>
                                         <p:cTn id="6" dur="1" fill="hold">
+                                          <p:stCondLst>
+                                            <p:cond delay="0"/>
+                                          </p:stCondLst>
+                                        </p:cTn>
+                                        <p:tgtEl>
+                                          <p:spTgt spid="2"/>
+                                        </p:tgtEl>
+                                        <p:attrNameLst>
+                                          <p:attrName>style.visibility</p:attrName>
+                                        </p:attrNameLst>
+                                      </p:cBhvr>
+                                      <p:to>
+                                        <p:strVal val="visible"/>
+                                      </p:to>
+                                    </p:set>
+                                    <p:animEffect transition="in" filter="fade">
+                                      <p:cBhvr>
+                                        <p:cTn id="7" dur="500"/>
+                                        <p:tgtEl>
+                                          <p:spTgt spid="2"/>
+                                        </p:tgtEl>
+                                      </p:cBhvr>
+                                    </p:animEffect>
+                                  </p:childTnLst>
+                                </p:cTn>
+                              </p:par>
+                            </p:childTnLst>
+                          </p:cTn>
+                        </p:par>
+                        <p:par>
+                          <p:cTn id="8" fill="hold">
+                            <p:stCondLst>
+                              <p:cond delay="500"/>
+                            </p:stCondLst>
+                            <p:childTnLst>
+                              <p:par>
+                                <p:cTn id="9" presetID="22" presetClass="entr" presetSubtype="8" fill="hold" grpId="0" nodeType="afterEffect">
+                                  <p:stCondLst>
+                                    <p:cond delay="0"/>
+                                  </p:stCondLst>
+                                  <p:childTnLst>
+                                    <p:set>
+                                      <p:cBhvr>
+                                        <p:cTn id="10" dur="1" fill="hold">
                                           <p:stCondLst>
                                             <p:cond delay="0"/>
                                           </p:stCondLst>
@@ -15938,36 +16003,39 @@
                                         <p:strVal val="visible"/>
                                       </p:to>
                                     </p:set>
+                                    <p:animEffect transition="in" filter="wipe(left)">
+                                      <p:cBhvr>
+                                        <p:cTn id="11" dur="500"/>
+                                        <p:tgtEl>
+                                          <p:spTgt spid="13">
+                                            <p:txEl>
+                                              <p:pRg st="0" end="0"/>
+                                            </p:txEl>
+                                          </p:spTgt>
+                                        </p:tgtEl>
+                                      </p:cBhvr>
+                                    </p:animEffect>
                                   </p:childTnLst>
                                 </p:cTn>
                               </p:par>
                             </p:childTnLst>
                           </p:cTn>
                         </p:par>
-                      </p:childTnLst>
-                    </p:cTn>
-                  </p:par>
-                  <p:par>
-                    <p:cTn id="7" fill="hold">
-                      <p:stCondLst>
-                        <p:cond delay="indefinite"/>
-                      </p:stCondLst>
-                      <p:childTnLst>
                         <p:par>
-                          <p:cTn id="8" fill="hold">
+                          <p:cTn id="12" fill="hold">
                             <p:stCondLst>
-                              <p:cond delay="0"/>
+                              <p:cond delay="1000"/>
                             </p:stCondLst>
                             <p:childTnLst>
                               <p:par>
-                                <p:cTn id="9" presetID="1" presetClass="entr" presetSubtype="0" fill="hold" grpId="0" nodeType="clickEffect">
+                                <p:cTn id="13" presetID="22" presetClass="entr" presetSubtype="8" fill="hold" grpId="0" nodeType="afterEffect">
                                   <p:stCondLst>
                                     <p:cond delay="0"/>
                                   </p:stCondLst>
                                   <p:childTnLst>
                                     <p:set>
                                       <p:cBhvr>
-                                        <p:cTn id="10" dur="1" fill="hold">
+                                        <p:cTn id="14" dur="1" fill="hold">
                                           <p:stCondLst>
                                             <p:cond delay="0"/>
                                           </p:stCondLst>
@@ -15987,36 +16055,39 @@
                                         <p:strVal val="visible"/>
                                       </p:to>
                                     </p:set>
+                                    <p:animEffect transition="in" filter="wipe(left)">
+                                      <p:cBhvr>
+                                        <p:cTn id="15" dur="500"/>
+                                        <p:tgtEl>
+                                          <p:spTgt spid="13">
+                                            <p:txEl>
+                                              <p:pRg st="1" end="1"/>
+                                            </p:txEl>
+                                          </p:spTgt>
+                                        </p:tgtEl>
+                                      </p:cBhvr>
+                                    </p:animEffect>
                                   </p:childTnLst>
                                 </p:cTn>
                               </p:par>
                             </p:childTnLst>
                           </p:cTn>
                         </p:par>
-                      </p:childTnLst>
-                    </p:cTn>
-                  </p:par>
-                  <p:par>
-                    <p:cTn id="11" fill="hold">
-                      <p:stCondLst>
-                        <p:cond delay="indefinite"/>
-                      </p:stCondLst>
-                      <p:childTnLst>
                         <p:par>
-                          <p:cTn id="12" fill="hold">
+                          <p:cTn id="16" fill="hold">
                             <p:stCondLst>
-                              <p:cond delay="0"/>
+                              <p:cond delay="1500"/>
                             </p:stCondLst>
                             <p:childTnLst>
                               <p:par>
-                                <p:cTn id="13" presetID="1" presetClass="entr" presetSubtype="0" fill="hold" grpId="0" nodeType="clickEffect">
+                                <p:cTn id="17" presetID="22" presetClass="entr" presetSubtype="8" fill="hold" grpId="0" nodeType="afterEffect">
                                   <p:stCondLst>
                                     <p:cond delay="0"/>
                                   </p:stCondLst>
                                   <p:childTnLst>
                                     <p:set>
                                       <p:cBhvr>
-                                        <p:cTn id="14" dur="1" fill="hold">
+                                        <p:cTn id="18" dur="1" fill="hold">
                                           <p:stCondLst>
                                             <p:cond delay="0"/>
                                           </p:stCondLst>
@@ -16036,36 +16107,39 @@
                                         <p:strVal val="visible"/>
                                       </p:to>
                                     </p:set>
+                                    <p:animEffect transition="in" filter="wipe(left)">
+                                      <p:cBhvr>
+                                        <p:cTn id="19" dur="500"/>
+                                        <p:tgtEl>
+                                          <p:spTgt spid="13">
+                                            <p:txEl>
+                                              <p:pRg st="2" end="2"/>
+                                            </p:txEl>
+                                          </p:spTgt>
+                                        </p:tgtEl>
+                                      </p:cBhvr>
+                                    </p:animEffect>
                                   </p:childTnLst>
                                 </p:cTn>
                               </p:par>
                             </p:childTnLst>
                           </p:cTn>
                         </p:par>
-                      </p:childTnLst>
-                    </p:cTn>
-                  </p:par>
-                  <p:par>
-                    <p:cTn id="15" fill="hold">
-                      <p:stCondLst>
-                        <p:cond delay="indefinite"/>
-                      </p:stCondLst>
-                      <p:childTnLst>
                         <p:par>
-                          <p:cTn id="16" fill="hold">
+                          <p:cTn id="20" fill="hold">
                             <p:stCondLst>
-                              <p:cond delay="0"/>
+                              <p:cond delay="2000"/>
                             </p:stCondLst>
                             <p:childTnLst>
                               <p:par>
-                                <p:cTn id="17" presetID="1" presetClass="entr" presetSubtype="0" fill="hold" grpId="0" nodeType="clickEffect">
+                                <p:cTn id="21" presetID="22" presetClass="entr" presetSubtype="8" fill="hold" grpId="0" nodeType="afterEffect">
                                   <p:stCondLst>
                                     <p:cond delay="0"/>
                                   </p:stCondLst>
                                   <p:childTnLst>
                                     <p:set>
                                       <p:cBhvr>
-                                        <p:cTn id="18" dur="1" fill="hold">
+                                        <p:cTn id="22" dur="1" fill="hold">
                                           <p:stCondLst>
                                             <p:cond delay="0"/>
                                           </p:stCondLst>
@@ -16085,36 +16159,39 @@
                                         <p:strVal val="visible"/>
                                       </p:to>
                                     </p:set>
+                                    <p:animEffect transition="in" filter="wipe(left)">
+                                      <p:cBhvr>
+                                        <p:cTn id="23" dur="500"/>
+                                        <p:tgtEl>
+                                          <p:spTgt spid="13">
+                                            <p:txEl>
+                                              <p:pRg st="3" end="3"/>
+                                            </p:txEl>
+                                          </p:spTgt>
+                                        </p:tgtEl>
+                                      </p:cBhvr>
+                                    </p:animEffect>
                                   </p:childTnLst>
                                 </p:cTn>
                               </p:par>
                             </p:childTnLst>
                           </p:cTn>
                         </p:par>
-                      </p:childTnLst>
-                    </p:cTn>
-                  </p:par>
-                  <p:par>
-                    <p:cTn id="19" fill="hold">
-                      <p:stCondLst>
-                        <p:cond delay="indefinite"/>
-                      </p:stCondLst>
-                      <p:childTnLst>
                         <p:par>
-                          <p:cTn id="20" fill="hold">
+                          <p:cTn id="24" fill="hold">
                             <p:stCondLst>
-                              <p:cond delay="0"/>
+                              <p:cond delay="2500"/>
                             </p:stCondLst>
                             <p:childTnLst>
                               <p:par>
-                                <p:cTn id="21" presetID="10" presetClass="entr" presetSubtype="0" fill="hold" grpId="0" nodeType="clickEffect">
+                                <p:cTn id="25" presetID="22" presetClass="entr" presetSubtype="8" fill="hold" grpId="0" nodeType="afterEffect">
                                   <p:stCondLst>
                                     <p:cond delay="0"/>
                                   </p:stCondLst>
                                   <p:childTnLst>
                                     <p:set>
                                       <p:cBhvr>
-                                        <p:cTn id="22" dur="1" fill="hold">
+                                        <p:cTn id="26" dur="1" fill="hold">
                                           <p:stCondLst>
                                             <p:cond delay="0"/>
                                           </p:stCondLst>
@@ -16134,9 +16211,9 @@
                                         <p:strVal val="visible"/>
                                       </p:to>
                                     </p:set>
-                                    <p:animEffect transition="in" filter="fade">
+                                    <p:animEffect transition="in" filter="wipe(left)">
                                       <p:cBhvr>
-                                        <p:cTn id="23" dur="500"/>
+                                        <p:cTn id="27" dur="500"/>
                                         <p:tgtEl>
                                           <p:spTgt spid="14">
                                             <p:txEl>
@@ -16152,30 +16229,21 @@
                             </p:childTnLst>
                           </p:cTn>
                         </p:par>
-                      </p:childTnLst>
-                    </p:cTn>
-                  </p:par>
-                  <p:par>
-                    <p:cTn id="24" fill="hold">
-                      <p:stCondLst>
-                        <p:cond delay="indefinite"/>
-                      </p:stCondLst>
-                      <p:childTnLst>
                         <p:par>
-                          <p:cTn id="25" fill="hold">
+                          <p:cTn id="28" fill="hold">
                             <p:stCondLst>
-                              <p:cond delay="0"/>
+                              <p:cond delay="3000"/>
                             </p:stCondLst>
                             <p:childTnLst>
                               <p:par>
-                                <p:cTn id="26" presetID="10" presetClass="entr" presetSubtype="0" fill="hold" grpId="0" nodeType="clickEffect">
+                                <p:cTn id="29" presetID="22" presetClass="entr" presetSubtype="8" fill="hold" grpId="0" nodeType="afterEffect">
                                   <p:stCondLst>
                                     <p:cond delay="0"/>
                                   </p:stCondLst>
                                   <p:childTnLst>
                                     <p:set>
                                       <p:cBhvr>
-                                        <p:cTn id="27" dur="1" fill="hold">
+                                        <p:cTn id="30" dur="1" fill="hold">
                                           <p:stCondLst>
                                             <p:cond delay="0"/>
                                           </p:stCondLst>
@@ -16195,9 +16263,9 @@
                                         <p:strVal val="visible"/>
                                       </p:to>
                                     </p:set>
-                                    <p:animEffect transition="in" filter="fade">
+                                    <p:animEffect transition="in" filter="wipe(left)">
                                       <p:cBhvr>
-                                        <p:cTn id="28" dur="500"/>
+                                        <p:cTn id="31" dur="500"/>
                                         <p:tgtEl>
                                           <p:spTgt spid="14">
                                             <p:txEl>
@@ -16213,30 +16281,21 @@
                             </p:childTnLst>
                           </p:cTn>
                         </p:par>
-                      </p:childTnLst>
-                    </p:cTn>
-                  </p:par>
-                  <p:par>
-                    <p:cTn id="29" fill="hold">
-                      <p:stCondLst>
-                        <p:cond delay="indefinite"/>
-                      </p:stCondLst>
-                      <p:childTnLst>
                         <p:par>
-                          <p:cTn id="30" fill="hold">
+                          <p:cTn id="32" fill="hold">
                             <p:stCondLst>
-                              <p:cond delay="0"/>
+                              <p:cond delay="3500"/>
                             </p:stCondLst>
                             <p:childTnLst>
                               <p:par>
-                                <p:cTn id="31" presetID="10" presetClass="entr" presetSubtype="0" fill="hold" grpId="0" nodeType="clickEffect">
+                                <p:cTn id="33" presetID="22" presetClass="entr" presetSubtype="8" fill="hold" grpId="0" nodeType="afterEffect">
                                   <p:stCondLst>
                                     <p:cond delay="0"/>
                                   </p:stCondLst>
                                   <p:childTnLst>
                                     <p:set>
                                       <p:cBhvr>
-                                        <p:cTn id="32" dur="1" fill="hold">
+                                        <p:cTn id="34" dur="1" fill="hold">
                                           <p:stCondLst>
                                             <p:cond delay="0"/>
                                           </p:stCondLst>
@@ -16256,9 +16315,9 @@
                                         <p:strVal val="visible"/>
                                       </p:to>
                                     </p:set>
-                                    <p:animEffect transition="in" filter="fade">
+                                    <p:animEffect transition="in" filter="wipe(left)">
                                       <p:cBhvr>
-                                        <p:cTn id="33" dur="500"/>
+                                        <p:cTn id="35" dur="500"/>
                                         <p:tgtEl>
                                           <p:spTgt spid="14">
                                             <p:txEl>
@@ -16274,30 +16333,21 @@
                             </p:childTnLst>
                           </p:cTn>
                         </p:par>
-                      </p:childTnLst>
-                    </p:cTn>
-                  </p:par>
-                  <p:par>
-                    <p:cTn id="34" fill="hold">
-                      <p:stCondLst>
-                        <p:cond delay="indefinite"/>
-                      </p:stCondLst>
-                      <p:childTnLst>
                         <p:par>
-                          <p:cTn id="35" fill="hold">
+                          <p:cTn id="36" fill="hold">
                             <p:stCondLst>
-                              <p:cond delay="0"/>
+                              <p:cond delay="4000"/>
                             </p:stCondLst>
                             <p:childTnLst>
                               <p:par>
-                                <p:cTn id="36" presetID="10" presetClass="entr" presetSubtype="0" fill="hold" grpId="0" nodeType="clickEffect">
+                                <p:cTn id="37" presetID="22" presetClass="entr" presetSubtype="8" fill="hold" grpId="0" nodeType="afterEffect">
                                   <p:stCondLst>
                                     <p:cond delay="0"/>
                                   </p:stCondLst>
                                   <p:childTnLst>
                                     <p:set>
                                       <p:cBhvr>
-                                        <p:cTn id="37" dur="1" fill="hold">
+                                        <p:cTn id="38" dur="1" fill="hold">
                                           <p:stCondLst>
                                             <p:cond delay="0"/>
                                           </p:stCondLst>
@@ -16317,9 +16367,9 @@
                                         <p:strVal val="visible"/>
                                       </p:to>
                                     </p:set>
-                                    <p:animEffect transition="in" filter="fade">
+                                    <p:animEffect transition="in" filter="wipe(left)">
                                       <p:cBhvr>
-                                        <p:cTn id="38" dur="500"/>
+                                        <p:cTn id="39" dur="500"/>
                                         <p:tgtEl>
                                           <p:spTgt spid="14">
                                             <p:txEl>
@@ -16360,7 +16410,8 @@
       </p:par>
     </p:tnLst>
     <p:bldLst>
-      <p:bldP spid="13" grpId="0" build="p"/>
+      <p:bldP spid="2" grpId="0"/>
+      <p:bldP spid="13" grpId="0" uiExpand="1" build="p"/>
       <p:bldP spid="14" grpId="0" build="p"/>
     </p:bldLst>
   </p:timing>
@@ -16776,7 +16827,7 @@
                             </p:stCondLst>
                             <p:childTnLst>
                               <p:par>
-                                <p:cTn id="5" presetID="53" presetClass="entr" presetSubtype="16" fill="hold" nodeType="clickEffect">
+                                <p:cTn id="5" presetID="10" presetClass="entr" presetSubtype="0" fill="hold" grpId="0" nodeType="clickEffect">
                                   <p:stCondLst>
                                     <p:cond delay="0"/>
                                   </p:stCondLst>
@@ -16784,6 +16835,59 @@
                                     <p:set>
                                       <p:cBhvr>
                                         <p:cTn id="6" dur="1" fill="hold">
+                                          <p:stCondLst>
+                                            <p:cond delay="0"/>
+                                          </p:stCondLst>
+                                        </p:cTn>
+                                        <p:tgtEl>
+                                          <p:spTgt spid="2"/>
+                                        </p:tgtEl>
+                                        <p:attrNameLst>
+                                          <p:attrName>style.visibility</p:attrName>
+                                        </p:attrNameLst>
+                                      </p:cBhvr>
+                                      <p:to>
+                                        <p:strVal val="visible"/>
+                                      </p:to>
+                                    </p:set>
+                                    <p:animEffect transition="in" filter="fade">
+                                      <p:cBhvr>
+                                        <p:cTn id="7" dur="500"/>
+                                        <p:tgtEl>
+                                          <p:spTgt spid="2"/>
+                                        </p:tgtEl>
+                                      </p:cBhvr>
+                                    </p:animEffect>
+                                  </p:childTnLst>
+                                </p:cTn>
+                              </p:par>
+                            </p:childTnLst>
+                          </p:cTn>
+                        </p:par>
+                      </p:childTnLst>
+                    </p:cTn>
+                  </p:par>
+                  <p:par>
+                    <p:cTn id="8" fill="hold">
+                      <p:stCondLst>
+                        <p:cond delay="indefinite"/>
+                      </p:stCondLst>
+                      <p:childTnLst>
+                        <p:par>
+                          <p:cTn id="9" fill="hold">
+                            <p:stCondLst>
+                              <p:cond delay="0"/>
+                            </p:stCondLst>
+                            <p:childTnLst>
+                              <p:par>
+                                <p:cTn id="10" presetID="53" presetClass="entr" presetSubtype="16" fill="hold" nodeType="clickEffect">
+                                  <p:stCondLst>
+                                    <p:cond delay="0"/>
+                                  </p:stCondLst>
+                                  <p:childTnLst>
+                                    <p:set>
+                                      <p:cBhvr>
+                                        <p:cTn id="11" dur="1" fill="hold">
                                           <p:stCondLst>
                                             <p:cond delay="0"/>
                                           </p:stCondLst>
@@ -16801,7 +16905,7 @@
                                     </p:set>
                                     <p:anim calcmode="lin" valueType="num">
                                       <p:cBhvr>
-                                        <p:cTn id="7" dur="500" fill="hold"/>
+                                        <p:cTn id="12" dur="500" fill="hold"/>
                                         <p:tgtEl>
                                           <p:spTgt spid="4"/>
                                         </p:tgtEl>
@@ -16824,7 +16928,7 @@
                                     </p:anim>
                                     <p:anim calcmode="lin" valueType="num">
                                       <p:cBhvr>
-                                        <p:cTn id="8" dur="500" fill="hold"/>
+                                        <p:cTn id="13" dur="500" fill="hold"/>
                                         <p:tgtEl>
                                           <p:spTgt spid="4"/>
                                         </p:tgtEl>
@@ -16847,7 +16951,7 @@
                                     </p:anim>
                                     <p:animEffect transition="in" filter="fade">
                                       <p:cBhvr>
-                                        <p:cTn id="9" dur="500"/>
+                                        <p:cTn id="14" dur="500"/>
                                         <p:tgtEl>
                                           <p:spTgt spid="4"/>
                                         </p:tgtEl>
@@ -16856,15 +16960,33 @@
                                   </p:childTnLst>
                                 </p:cTn>
                               </p:par>
+                            </p:childTnLst>
+                          </p:cTn>
+                        </p:par>
+                      </p:childTnLst>
+                    </p:cTn>
+                  </p:par>
+                  <p:par>
+                    <p:cTn id="15" fill="hold">
+                      <p:stCondLst>
+                        <p:cond delay="indefinite"/>
+                      </p:stCondLst>
+                      <p:childTnLst>
+                        <p:par>
+                          <p:cTn id="16" fill="hold">
+                            <p:stCondLst>
+                              <p:cond delay="0"/>
+                            </p:stCondLst>
+                            <p:childTnLst>
                               <p:par>
-                                <p:cTn id="10" presetID="53" presetClass="entr" presetSubtype="16" fill="hold" nodeType="withEffect">
+                                <p:cTn id="17" presetID="53" presetClass="entr" presetSubtype="16" fill="hold" nodeType="clickEffect">
                                   <p:stCondLst>
                                     <p:cond delay="0"/>
                                   </p:stCondLst>
                                   <p:childTnLst>
                                     <p:set>
                                       <p:cBhvr>
-                                        <p:cTn id="11" dur="1" fill="hold">
+                                        <p:cTn id="18" dur="1" fill="hold">
                                           <p:stCondLst>
                                             <p:cond delay="0"/>
                                           </p:stCondLst>
@@ -16882,7 +17004,7 @@
                                     </p:set>
                                     <p:anim calcmode="lin" valueType="num">
                                       <p:cBhvr>
-                                        <p:cTn id="12" dur="500" fill="hold"/>
+                                        <p:cTn id="19" dur="500" fill="hold"/>
                                         <p:tgtEl>
                                           <p:spTgt spid="6"/>
                                         </p:tgtEl>
@@ -16905,7 +17027,7 @@
                                     </p:anim>
                                     <p:anim calcmode="lin" valueType="num">
                                       <p:cBhvr>
-                                        <p:cTn id="13" dur="500" fill="hold"/>
+                                        <p:cTn id="20" dur="500" fill="hold"/>
                                         <p:tgtEl>
                                           <p:spTgt spid="6"/>
                                         </p:tgtEl>
@@ -16928,7 +17050,7 @@
                                     </p:anim>
                                     <p:animEffect transition="in" filter="fade">
                                       <p:cBhvr>
-                                        <p:cTn id="14" dur="500"/>
+                                        <p:cTn id="21" dur="500"/>
                                         <p:tgtEl>
                                           <p:spTgt spid="6"/>
                                         </p:tgtEl>
@@ -16937,15 +17059,33 @@
                                   </p:childTnLst>
                                 </p:cTn>
                               </p:par>
+                            </p:childTnLst>
+                          </p:cTn>
+                        </p:par>
+                      </p:childTnLst>
+                    </p:cTn>
+                  </p:par>
+                  <p:par>
+                    <p:cTn id="22" fill="hold">
+                      <p:stCondLst>
+                        <p:cond delay="indefinite"/>
+                      </p:stCondLst>
+                      <p:childTnLst>
+                        <p:par>
+                          <p:cTn id="23" fill="hold">
+                            <p:stCondLst>
+                              <p:cond delay="0"/>
+                            </p:stCondLst>
+                            <p:childTnLst>
                               <p:par>
-                                <p:cTn id="15" presetID="53" presetClass="entr" presetSubtype="16" fill="hold" nodeType="withEffect">
+                                <p:cTn id="24" presetID="53" presetClass="entr" presetSubtype="16" fill="hold" nodeType="clickEffect">
                                   <p:stCondLst>
                                     <p:cond delay="0"/>
                                   </p:stCondLst>
                                   <p:childTnLst>
                                     <p:set>
                                       <p:cBhvr>
-                                        <p:cTn id="16" dur="1" fill="hold">
+                                        <p:cTn id="25" dur="1" fill="hold">
                                           <p:stCondLst>
                                             <p:cond delay="0"/>
                                           </p:stCondLst>
@@ -16963,7 +17103,7 @@
                                     </p:set>
                                     <p:anim calcmode="lin" valueType="num">
                                       <p:cBhvr>
-                                        <p:cTn id="17" dur="500" fill="hold"/>
+                                        <p:cTn id="26" dur="500" fill="hold"/>
                                         <p:tgtEl>
                                           <p:spTgt spid="10"/>
                                         </p:tgtEl>
@@ -16986,7 +17126,7 @@
                                     </p:anim>
                                     <p:anim calcmode="lin" valueType="num">
                                       <p:cBhvr>
-                                        <p:cTn id="18" dur="500" fill="hold"/>
+                                        <p:cTn id="27" dur="500" fill="hold"/>
                                         <p:tgtEl>
                                           <p:spTgt spid="10"/>
                                         </p:tgtEl>
@@ -17009,7 +17149,7 @@
                                     </p:anim>
                                     <p:animEffect transition="in" filter="fade">
                                       <p:cBhvr>
-                                        <p:cTn id="19" dur="500"/>
+                                        <p:cTn id="28" dur="500"/>
                                         <p:tgtEl>
                                           <p:spTgt spid="10"/>
                                         </p:tgtEl>
@@ -17025,26 +17165,26 @@
                     </p:cTn>
                   </p:par>
                   <p:par>
-                    <p:cTn id="20" fill="hold">
+                    <p:cTn id="29" fill="hold">
                       <p:stCondLst>
                         <p:cond delay="indefinite"/>
                       </p:stCondLst>
                       <p:childTnLst>
                         <p:par>
-                          <p:cTn id="21" fill="hold">
+                          <p:cTn id="30" fill="hold">
                             <p:stCondLst>
                               <p:cond delay="0"/>
                             </p:stCondLst>
                             <p:childTnLst>
                               <p:par>
-                                <p:cTn id="22" presetID="22" presetClass="entr" presetSubtype="8" fill="hold" grpId="0" nodeType="clickEffect">
+                                <p:cTn id="31" presetID="22" presetClass="entr" presetSubtype="8" fill="hold" grpId="0" nodeType="clickEffect">
                                   <p:stCondLst>
                                     <p:cond delay="0"/>
                                   </p:stCondLst>
                                   <p:childTnLst>
                                     <p:set>
                                       <p:cBhvr>
-                                        <p:cTn id="23" dur="1" fill="hold">
+                                        <p:cTn id="32" dur="1" fill="hold">
                                           <p:stCondLst>
                                             <p:cond delay="0"/>
                                           </p:stCondLst>
@@ -17062,7 +17202,7 @@
                                     </p:set>
                                     <p:animEffect transition="in" filter="wipe(left)">
                                       <p:cBhvr>
-                                        <p:cTn id="24" dur="500"/>
+                                        <p:cTn id="33" dur="500"/>
                                         <p:tgtEl>
                                           <p:spTgt spid="11"/>
                                         </p:tgtEl>
@@ -17099,6 +17239,7 @@
       </p:par>
     </p:tnLst>
     <p:bldLst>
+      <p:bldP spid="2" grpId="0"/>
       <p:bldP spid="11" grpId="0"/>
     </p:bldLst>
   </p:timing>
@@ -17329,7 +17470,7 @@
                                           </p:stCondLst>
                                         </p:cTn>
                                         <p:tgtEl>
-                                          <p:spTgt spid="5"/>
+                                          <p:spTgt spid="2"/>
                                         </p:tgtEl>
                                         <p:attrNameLst>
                                           <p:attrName>style.visibility</p:attrName>
@@ -17343,7 +17484,105 @@
                                       <p:cBhvr>
                                         <p:cTn id="7" dur="500"/>
                                         <p:tgtEl>
+                                          <p:spTgt spid="2"/>
+                                        </p:tgtEl>
+                                      </p:cBhvr>
+                                    </p:animEffect>
+                                  </p:childTnLst>
+                                </p:cTn>
+                              </p:par>
+                            </p:childTnLst>
+                          </p:cTn>
+                        </p:par>
+                      </p:childTnLst>
+                    </p:cTn>
+                  </p:par>
+                  <p:par>
+                    <p:cTn id="8" fill="hold">
+                      <p:stCondLst>
+                        <p:cond delay="indefinite"/>
+                      </p:stCondLst>
+                      <p:childTnLst>
+                        <p:par>
+                          <p:cTn id="9" fill="hold">
+                            <p:stCondLst>
+                              <p:cond delay="0"/>
+                            </p:stCondLst>
+                            <p:childTnLst>
+                              <p:par>
+                                <p:cTn id="10" presetID="1" presetClass="entr" presetSubtype="0" fill="hold" grpId="0" nodeType="clickEffect">
+                                  <p:stCondLst>
+                                    <p:cond delay="0"/>
+                                  </p:stCondLst>
+                                  <p:childTnLst>
+                                    <p:set>
+                                      <p:cBhvr>
+                                        <p:cTn id="11" dur="1" fill="hold">
+                                          <p:stCondLst>
+                                            <p:cond delay="0"/>
+                                          </p:stCondLst>
+                                        </p:cTn>
+                                        <p:tgtEl>
                                           <p:spTgt spid="5"/>
+                                        </p:tgtEl>
+                                        <p:attrNameLst>
+                                          <p:attrName>style.visibility</p:attrName>
+                                        </p:attrNameLst>
+                                      </p:cBhvr>
+                                      <p:to>
+                                        <p:strVal val="visible"/>
+                                      </p:to>
+                                    </p:set>
+                                  </p:childTnLst>
+                                </p:cTn>
+                              </p:par>
+                            </p:childTnLst>
+                          </p:cTn>
+                        </p:par>
+                      </p:childTnLst>
+                    </p:cTn>
+                  </p:par>
+                  <p:par>
+                    <p:cTn id="12" fill="hold">
+                      <p:stCondLst>
+                        <p:cond delay="indefinite"/>
+                      </p:stCondLst>
+                      <p:childTnLst>
+                        <p:par>
+                          <p:cTn id="13" fill="hold">
+                            <p:stCondLst>
+                              <p:cond delay="0"/>
+                            </p:stCondLst>
+                            <p:childTnLst>
+                              <p:par>
+                                <p:cTn id="14" presetID="22" presetClass="entr" presetSubtype="8" fill="hold" grpId="0" nodeType="clickEffect">
+                                  <p:stCondLst>
+                                    <p:cond delay="0"/>
+                                  </p:stCondLst>
+                                  <p:childTnLst>
+                                    <p:set>
+                                      <p:cBhvr>
+                                        <p:cTn id="15" dur="1" fill="hold">
+                                          <p:stCondLst>
+                                            <p:cond delay="0"/>
+                                          </p:stCondLst>
+                                        </p:cTn>
+                                        <p:tgtEl>
+                                          <p:spTgt spid="6"/>
+                                        </p:tgtEl>
+                                        <p:attrNameLst>
+                                          <p:attrName>style.visibility</p:attrName>
+                                        </p:attrNameLst>
+                                      </p:cBhvr>
+                                      <p:to>
+                                        <p:strVal val="visible"/>
+                                      </p:to>
+                                    </p:set>
+                                    <p:animEffect transition="in" filter="wipe(left)">
+                                      <p:cBhvr>
+                                        <p:cTn id="16" dur="500"/>
+                                        <p:tgtEl>
+                                          <p:spTgt spid="6"/>
                                         </p:tgtEl>
                                       </p:cBhvr>
                                     </p:animEffect>
@@ -17378,9 +17617,11 @@
       </p:par>
     </p:tnLst>
     <p:bldLst>
+      <p:bldP spid="2" grpId="0"/>
       <p:bldGraphic spid="5" grpId="0">
         <p:bldAsOne/>
       </p:bldGraphic>
+      <p:bldP spid="6" grpId="0"/>
     </p:bldLst>
   </p:timing>
 </p:sld>
@@ -17887,7 +18128,7 @@
                                           </p:stCondLst>
                                         </p:cTn>
                                         <p:tgtEl>
-                                          <p:spTgt spid="3"/>
+                                          <p:spTgt spid="2"/>
                                         </p:tgtEl>
                                         <p:attrNameLst>
                                           <p:attrName>style.visibility</p:attrName>
@@ -17901,7 +18142,7 @@
                                       <p:cBhvr>
                                         <p:cTn id="7" dur="500"/>
                                         <p:tgtEl>
-                                          <p:spTgt spid="3"/>
+                                          <p:spTgt spid="2"/>
                                         </p:tgtEl>
                                       </p:cBhvr>
                                     </p:animEffect>
@@ -17911,30 +18152,56 @@
                             </p:childTnLst>
                           </p:cTn>
                         </p:par>
-                      </p:childTnLst>
-                    </p:cTn>
-                  </p:par>
-                  <p:par>
-                    <p:cTn id="8" fill="hold">
-                      <p:stCondLst>
-                        <p:cond delay="indefinite"/>
-                      </p:stCondLst>
-                      <p:childTnLst>
                         <p:par>
-                          <p:cTn id="9" fill="hold">
+                          <p:cTn id="8" fill="hold">
                             <p:stCondLst>
-                              <p:cond delay="0"/>
+                              <p:cond delay="500"/>
                             </p:stCondLst>
                             <p:childTnLst>
                               <p:par>
-                                <p:cTn id="10" presetID="10" presetClass="entr" presetSubtype="0" fill="hold" nodeType="clickEffect">
+                                <p:cTn id="9" presetID="22" presetClass="entr" presetSubtype="8" fill="hold" grpId="0" nodeType="afterEffect">
                                   <p:stCondLst>
                                     <p:cond delay="0"/>
                                   </p:stCondLst>
                                   <p:childTnLst>
                                     <p:set>
                                       <p:cBhvr>
-                                        <p:cTn id="11" dur="1" fill="hold">
+                                        <p:cTn id="10" dur="1" fill="hold">
+                                          <p:stCondLst>
+                                            <p:cond delay="0"/>
+                                          </p:stCondLst>
+                                        </p:cTn>
+                                        <p:tgtEl>
+                                          <p:spTgt spid="3"/>
+                                        </p:tgtEl>
+                                        <p:attrNameLst>
+                                          <p:attrName>style.visibility</p:attrName>
+                                        </p:attrNameLst>
+                                      </p:cBhvr>
+                                      <p:to>
+                                        <p:strVal val="visible"/>
+                                      </p:to>
+                                    </p:set>
+                                    <p:animEffect transition="in" filter="wipe(left)">
+                                      <p:cBhvr>
+                                        <p:cTn id="11" dur="500"/>
+                                        <p:tgtEl>
+                                          <p:spTgt spid="3"/>
+                                        </p:tgtEl>
+                                      </p:cBhvr>
+                                    </p:animEffect>
+                                  </p:childTnLst>
+                                </p:cTn>
+                              </p:par>
+                              <p:par>
+                                <p:cTn id="12" presetID="22" presetClass="entr" presetSubtype="4" fill="hold" nodeType="withEffect">
+                                  <p:stCondLst>
+                                    <p:cond delay="0"/>
+                                  </p:stCondLst>
+                                  <p:childTnLst>
+                                    <p:set>
+                                      <p:cBhvr>
+                                        <p:cTn id="13" dur="1" fill="hold">
                                           <p:stCondLst>
                                             <p:cond delay="0"/>
                                           </p:stCondLst>
@@ -17950,9 +18217,9 @@
                                         <p:strVal val="visible"/>
                                       </p:to>
                                     </p:set>
-                                    <p:animEffect transition="in" filter="fade">
+                                    <p:animEffect transition="in" filter="wipe(down)">
                                       <p:cBhvr>
-                                        <p:cTn id="12" dur="500"/>
+                                        <p:cTn id="14" dur="500"/>
                                         <p:tgtEl>
                                           <p:spTgt spid="4"/>
                                         </p:tgtEl>
@@ -17964,30 +18231,21 @@
                             </p:childTnLst>
                           </p:cTn>
                         </p:par>
-                      </p:childTnLst>
-                    </p:cTn>
-                  </p:par>
-                  <p:par>
-                    <p:cTn id="13" fill="hold">
-                      <p:stCondLst>
-                        <p:cond delay="indefinite"/>
-                      </p:stCondLst>
-                      <p:childTnLst>
                         <p:par>
-                          <p:cTn id="14" fill="hold">
+                          <p:cTn id="15" fill="hold">
                             <p:stCondLst>
-                              <p:cond delay="0"/>
+                              <p:cond delay="1000"/>
                             </p:stCondLst>
                             <p:childTnLst>
                               <p:par>
-                                <p:cTn id="15" presetID="10" presetClass="entr" presetSubtype="0" fill="hold" grpId="0" nodeType="clickEffect">
+                                <p:cTn id="16" presetID="22" presetClass="entr" presetSubtype="8" fill="hold" grpId="0" nodeType="afterEffect">
                                   <p:stCondLst>
                                     <p:cond delay="0"/>
                                   </p:stCondLst>
                                   <p:childTnLst>
                                     <p:set>
                                       <p:cBhvr>
-                                        <p:cTn id="16" dur="1" fill="hold">
+                                        <p:cTn id="17" dur="1" fill="hold">
                                           <p:stCondLst>
                                             <p:cond delay="0"/>
                                           </p:stCondLst>
@@ -18003,9 +18261,9 @@
                                         <p:strVal val="visible"/>
                                       </p:to>
                                     </p:set>
-                                    <p:animEffect transition="in" filter="fade">
+                                    <p:animEffect transition="in" filter="wipe(left)">
                                       <p:cBhvr>
-                                        <p:cTn id="17" dur="500"/>
+                                        <p:cTn id="18" dur="500"/>
                                         <p:tgtEl>
                                           <p:spTgt spid="5"/>
                                         </p:tgtEl>
@@ -18014,33 +18272,15 @@
                                   </p:childTnLst>
                                 </p:cTn>
                               </p:par>
-                            </p:childTnLst>
-                          </p:cTn>
-                        </p:par>
-                      </p:childTnLst>
-                    </p:cTn>
-                  </p:par>
-                  <p:par>
-                    <p:cTn id="18" fill="hold">
-                      <p:stCondLst>
-                        <p:cond delay="indefinite"/>
-                      </p:stCondLst>
-                      <p:childTnLst>
-                        <p:par>
-                          <p:cTn id="19" fill="hold">
-                            <p:stCondLst>
-                              <p:cond delay="0"/>
-                            </p:stCondLst>
-                            <p:childTnLst>
                               <p:par>
-                                <p:cTn id="20" presetID="10" presetClass="entr" presetSubtype="0" fill="hold" grpId="0" nodeType="clickEffect">
+                                <p:cTn id="19" presetID="22" presetClass="entr" presetSubtype="4" fill="hold" grpId="0" nodeType="withEffect">
                                   <p:stCondLst>
                                     <p:cond delay="0"/>
                                   </p:stCondLst>
                                   <p:childTnLst>
                                     <p:set>
                                       <p:cBhvr>
-                                        <p:cTn id="21" dur="1" fill="hold">
+                                        <p:cTn id="20" dur="1" fill="hold">
                                           <p:stCondLst>
                                             <p:cond delay="0"/>
                                           </p:stCondLst>
@@ -18056,9 +18296,9 @@
                                         <p:strVal val="visible"/>
                                       </p:to>
                                     </p:set>
-                                    <p:animEffect transition="in" filter="fade">
+                                    <p:animEffect transition="in" filter="wipe(down)">
                                       <p:cBhvr>
-                                        <p:cTn id="22" dur="500"/>
+                                        <p:cTn id="21" dur="500"/>
                                         <p:tgtEl>
                                           <p:spTgt spid="6"/>
                                         </p:tgtEl>
@@ -18095,6 +18335,7 @@
       </p:par>
     </p:tnLst>
     <p:bldLst>
+      <p:bldP spid="2" grpId="0"/>
       <p:bldP spid="3" grpId="0"/>
       <p:bldP spid="5" grpId="0"/>
       <p:bldGraphic spid="6" grpId="0">
@@ -18459,7 +18700,7 @@
                                           </p:stCondLst>
                                         </p:cTn>
                                         <p:tgtEl>
-                                          <p:spTgt spid="7"/>
+                                          <p:spTgt spid="2"/>
                                         </p:tgtEl>
                                         <p:attrNameLst>
                                           <p:attrName>style.visibility</p:attrName>
@@ -18473,7 +18714,86 @@
                                       <p:cBhvr>
                                         <p:cTn id="7" dur="500"/>
                                         <p:tgtEl>
+                                          <p:spTgt spid="2"/>
+                                        </p:tgtEl>
+                                      </p:cBhvr>
+                                    </p:animEffect>
+                                  </p:childTnLst>
+                                </p:cTn>
+                              </p:par>
+                            </p:childTnLst>
+                          </p:cTn>
+                        </p:par>
+                        <p:par>
+                          <p:cTn id="8" fill="hold">
+                            <p:stCondLst>
+                              <p:cond delay="500"/>
+                            </p:stCondLst>
+                            <p:childTnLst>
+                              <p:par>
+                                <p:cTn id="9" presetID="22" presetClass="entr" presetSubtype="8" fill="hold" grpId="0" nodeType="afterEffect">
+                                  <p:stCondLst>
+                                    <p:cond delay="0"/>
+                                  </p:stCondLst>
+                                  <p:childTnLst>
+                                    <p:set>
+                                      <p:cBhvr>
+                                        <p:cTn id="10" dur="1" fill="hold">
+                                          <p:stCondLst>
+                                            <p:cond delay="0"/>
+                                          </p:stCondLst>
+                                        </p:cTn>
+                                        <p:tgtEl>
                                           <p:spTgt spid="7"/>
+                                        </p:tgtEl>
+                                        <p:attrNameLst>
+                                          <p:attrName>style.visibility</p:attrName>
+                                        </p:attrNameLst>
+                                      </p:cBhvr>
+                                      <p:to>
+                                        <p:strVal val="visible"/>
+                                      </p:to>
+                                    </p:set>
+                                    <p:animEffect transition="in" filter="wipe(left)">
+                                      <p:cBhvr>
+                                        <p:cTn id="11" dur="500"/>
+                                        <p:tgtEl>
+                                          <p:spTgt spid="7"/>
+                                        </p:tgtEl>
+                                      </p:cBhvr>
+                                    </p:animEffect>
+                                  </p:childTnLst>
+                                </p:cTn>
+                              </p:par>
+                              <p:par>
+                                <p:cTn id="12" presetID="22" presetClass="entr" presetSubtype="2" fill="hold" nodeType="withEffect">
+                                  <p:stCondLst>
+                                    <p:cond delay="0"/>
+                                  </p:stCondLst>
+                                  <p:childTnLst>
+                                    <p:set>
+                                      <p:cBhvr>
+                                        <p:cTn id="13" dur="1" fill="hold">
+                                          <p:stCondLst>
+                                            <p:cond delay="0"/>
+                                          </p:stCondLst>
+                                        </p:cTn>
+                                        <p:tgtEl>
+                                          <p:spTgt spid="6"/>
+                                        </p:tgtEl>
+                                        <p:attrNameLst>
+                                          <p:attrName>style.visibility</p:attrName>
+                                        </p:attrNameLst>
+                                      </p:cBhvr>
+                                      <p:to>
+                                        <p:strVal val="visible"/>
+                                      </p:to>
+                                    </p:set>
+                                    <p:animEffect transition="in" filter="wipe(right)">
+                                      <p:cBhvr>
+                                        <p:cTn id="14" dur="500"/>
+                                        <p:tgtEl>
+                                          <p:spTgt spid="6"/>
                                         </p:tgtEl>
                                       </p:cBhvr>
                                     </p:animEffect>
@@ -18508,6 +18828,7 @@
       </p:par>
     </p:tnLst>
     <p:bldLst>
+      <p:bldP spid="2" grpId="0"/>
       <p:bldGraphic spid="7" grpId="0">
         <p:bldAsOne/>
       </p:bldGraphic>
@@ -18894,7 +19215,7 @@
                             </p:stCondLst>
                             <p:childTnLst>
                               <p:par>
-                                <p:cTn id="5" presetID="53" presetClass="entr" presetSubtype="16" fill="hold" grpId="0" nodeType="clickEffect">
+                                <p:cTn id="5" presetID="10" presetClass="entr" presetSubtype="0" fill="hold" grpId="0" nodeType="clickEffect">
                                   <p:stCondLst>
                                     <p:cond delay="0"/>
                                   </p:stCondLst>
@@ -18902,6 +19223,59 @@
                                     <p:set>
                                       <p:cBhvr>
                                         <p:cTn id="6" dur="1" fill="hold">
+                                          <p:stCondLst>
+                                            <p:cond delay="0"/>
+                                          </p:stCondLst>
+                                        </p:cTn>
+                                        <p:tgtEl>
+                                          <p:spTgt spid="2"/>
+                                        </p:tgtEl>
+                                        <p:attrNameLst>
+                                          <p:attrName>style.visibility</p:attrName>
+                                        </p:attrNameLst>
+                                      </p:cBhvr>
+                                      <p:to>
+                                        <p:strVal val="visible"/>
+                                      </p:to>
+                                    </p:set>
+                                    <p:animEffect transition="in" filter="fade">
+                                      <p:cBhvr>
+                                        <p:cTn id="7" dur="500"/>
+                                        <p:tgtEl>
+                                          <p:spTgt spid="2"/>
+                                        </p:tgtEl>
+                                      </p:cBhvr>
+                                    </p:animEffect>
+                                  </p:childTnLst>
+                                </p:cTn>
+                              </p:par>
+                            </p:childTnLst>
+                          </p:cTn>
+                        </p:par>
+                      </p:childTnLst>
+                    </p:cTn>
+                  </p:par>
+                  <p:par>
+                    <p:cTn id="8" fill="hold">
+                      <p:stCondLst>
+                        <p:cond delay="indefinite"/>
+                      </p:stCondLst>
+                      <p:childTnLst>
+                        <p:par>
+                          <p:cTn id="9" fill="hold">
+                            <p:stCondLst>
+                              <p:cond delay="0"/>
+                            </p:stCondLst>
+                            <p:childTnLst>
+                              <p:par>
+                                <p:cTn id="10" presetID="53" presetClass="entr" presetSubtype="16" fill="hold" grpId="0" nodeType="clickEffect">
+                                  <p:stCondLst>
+                                    <p:cond delay="0"/>
+                                  </p:stCondLst>
+                                  <p:childTnLst>
+                                    <p:set>
+                                      <p:cBhvr>
+                                        <p:cTn id="11" dur="1" fill="hold">
                                           <p:stCondLst>
                                             <p:cond delay="0"/>
                                           </p:stCondLst>
@@ -18919,7 +19293,7 @@
                                     </p:set>
                                     <p:anim calcmode="lin" valueType="num">
                                       <p:cBhvr>
-                                        <p:cTn id="7" dur="500" fill="hold"/>
+                                        <p:cTn id="12" dur="500" fill="hold"/>
                                         <p:tgtEl>
                                           <p:spTgt spid="3"/>
                                         </p:tgtEl>
@@ -18942,7 +19316,7 @@
                                     </p:anim>
                                     <p:anim calcmode="lin" valueType="num">
                                       <p:cBhvr>
-                                        <p:cTn id="8" dur="500" fill="hold"/>
+                                        <p:cTn id="13" dur="500" fill="hold"/>
                                         <p:tgtEl>
                                           <p:spTgt spid="3"/>
                                         </p:tgtEl>
@@ -18965,62 +19339,9 @@
                                     </p:anim>
                                     <p:animEffect transition="in" filter="fade">
                                       <p:cBhvr>
-                                        <p:cTn id="9" dur="500"/>
+                                        <p:cTn id="14" dur="500"/>
                                         <p:tgtEl>
                                           <p:spTgt spid="3"/>
-                                        </p:tgtEl>
-                                      </p:cBhvr>
-                                    </p:animEffect>
-                                  </p:childTnLst>
-                                </p:cTn>
-                              </p:par>
-                            </p:childTnLst>
-                          </p:cTn>
-                        </p:par>
-                      </p:childTnLst>
-                    </p:cTn>
-                  </p:par>
-                  <p:par>
-                    <p:cTn id="10" fill="hold">
-                      <p:stCondLst>
-                        <p:cond delay="indefinite"/>
-                      </p:stCondLst>
-                      <p:childTnLst>
-                        <p:par>
-                          <p:cTn id="11" fill="hold">
-                            <p:stCondLst>
-                              <p:cond delay="0"/>
-                            </p:stCondLst>
-                            <p:childTnLst>
-                              <p:par>
-                                <p:cTn id="12" presetID="10" presetClass="entr" presetSubtype="0" fill="hold" grpId="0" nodeType="clickEffect">
-                                  <p:stCondLst>
-                                    <p:cond delay="0"/>
-                                  </p:stCondLst>
-                                  <p:childTnLst>
-                                    <p:set>
-                                      <p:cBhvr>
-                                        <p:cTn id="13" dur="1" fill="hold">
-                                          <p:stCondLst>
-                                            <p:cond delay="0"/>
-                                          </p:stCondLst>
-                                        </p:cTn>
-                                        <p:tgtEl>
-                                          <p:spTgt spid="4"/>
-                                        </p:tgtEl>
-                                        <p:attrNameLst>
-                                          <p:attrName>style.visibility</p:attrName>
-                                        </p:attrNameLst>
-                                      </p:cBhvr>
-                                      <p:to>
-                                        <p:strVal val="visible"/>
-                                      </p:to>
-                                    </p:set>
-                                    <p:animEffect transition="in" filter="fade">
-                                      <p:cBhvr>
-                                        <p:cTn id="14" dur="500"/>
-                                        <p:tgtEl>
-                                          <p:spTgt spid="4"/>
                                         </p:tgtEl>
                                       </p:cBhvr>
                                     </p:animEffect>
@@ -19046,7 +19367,7 @@
                             </p:stCondLst>
                             <p:childTnLst>
                               <p:par>
-                                <p:cTn id="17" presetID="42" presetClass="entr" presetSubtype="0" fill="hold" grpId="0" nodeType="clickEffect">
+                                <p:cTn id="17" presetID="10" presetClass="entr" presetSubtype="0" fill="hold" grpId="0" nodeType="clickEffect">
                                   <p:stCondLst>
                                     <p:cond delay="0"/>
                                   </p:stCondLst>
@@ -19054,6 +19375,59 @@
                                     <p:set>
                                       <p:cBhvr>
                                         <p:cTn id="18" dur="1" fill="hold">
+                                          <p:stCondLst>
+                                            <p:cond delay="0"/>
+                                          </p:stCondLst>
+                                        </p:cTn>
+                                        <p:tgtEl>
+                                          <p:spTgt spid="4"/>
+                                        </p:tgtEl>
+                                        <p:attrNameLst>
+                                          <p:attrName>style.visibility</p:attrName>
+                                        </p:attrNameLst>
+                                      </p:cBhvr>
+                                      <p:to>
+                                        <p:strVal val="visible"/>
+                                      </p:to>
+                                    </p:set>
+                                    <p:animEffect transition="in" filter="fade">
+                                      <p:cBhvr>
+                                        <p:cTn id="19" dur="500"/>
+                                        <p:tgtEl>
+                                          <p:spTgt spid="4"/>
+                                        </p:tgtEl>
+                                      </p:cBhvr>
+                                    </p:animEffect>
+                                  </p:childTnLst>
+                                </p:cTn>
+                              </p:par>
+                            </p:childTnLst>
+                          </p:cTn>
+                        </p:par>
+                      </p:childTnLst>
+                    </p:cTn>
+                  </p:par>
+                  <p:par>
+                    <p:cTn id="20" fill="hold">
+                      <p:stCondLst>
+                        <p:cond delay="indefinite"/>
+                      </p:stCondLst>
+                      <p:childTnLst>
+                        <p:par>
+                          <p:cTn id="21" fill="hold">
+                            <p:stCondLst>
+                              <p:cond delay="0"/>
+                            </p:stCondLst>
+                            <p:childTnLst>
+                              <p:par>
+                                <p:cTn id="22" presetID="42" presetClass="entr" presetSubtype="0" fill="hold" grpId="0" nodeType="clickEffect">
+                                  <p:stCondLst>
+                                    <p:cond delay="0"/>
+                                  </p:stCondLst>
+                                  <p:childTnLst>
+                                    <p:set>
+                                      <p:cBhvr>
+                                        <p:cTn id="23" dur="1" fill="hold">
                                           <p:stCondLst>
                                             <p:cond delay="0"/>
                                           </p:stCondLst>
@@ -19071,7 +19445,7 @@
                                     </p:set>
                                     <p:animEffect transition="in" filter="fade">
                                       <p:cBhvr>
-                                        <p:cTn id="19" dur="1000"/>
+                                        <p:cTn id="24" dur="1000"/>
                                         <p:tgtEl>
                                           <p:spTgt spid="5"/>
                                         </p:tgtEl>
@@ -19079,7 +19453,7 @@
                                     </p:animEffect>
                                     <p:anim calcmode="lin" valueType="num">
                                       <p:cBhvr>
-                                        <p:cTn id="20" dur="1000" fill="hold"/>
+                                        <p:cTn id="25" dur="1000" fill="hold"/>
                                         <p:tgtEl>
                                           <p:spTgt spid="5"/>
                                         </p:tgtEl>
@@ -19102,7 +19476,7 @@
                                     </p:anim>
                                     <p:anim calcmode="lin" valueType="num">
                                       <p:cBhvr>
-                                        <p:cTn id="21" dur="1000" fill="hold"/>
+                                        <p:cTn id="26" dur="1000" fill="hold"/>
                                         <p:tgtEl>
                                           <p:spTgt spid="5"/>
                                         </p:tgtEl>
@@ -19154,6 +19528,7 @@
       </p:par>
     </p:tnLst>
     <p:bldLst>
+      <p:bldP spid="2" grpId="0"/>
       <p:bldP spid="3" grpId="0"/>
       <p:bldP spid="4" grpId="0"/>
       <p:bldP spid="5" grpId="0"/>

--- a/assets/files/Business-Pitch-Deck-7-Slide.pptx
+++ b/assets/files/Business-Pitch-Deck-7-Slide.pptx
@@ -2669,8 +2669,8 @@
 <file path=ppt/diagrams/data2.xml><?xml version="1.0" encoding="utf-8"?>
 <dgm:dataModel xmlns:dgm="http://schemas.openxmlformats.org/drawingml/2006/diagram" xmlns:a="http://schemas.openxmlformats.org/drawingml/2006/main">
   <dgm:ptLst>
-    <dgm:pt modelId="{F2CA3D39-084C-406F-9B8F-F47C53AC4086}" type="doc">
-      <dgm:prSet loTypeId="urn:microsoft.com/office/officeart/2005/8/layout/orgChart1" loCatId="hierarchy" qsTypeId="urn:microsoft.com/office/officeart/2005/8/quickstyle/simple1" qsCatId="simple" csTypeId="urn:microsoft.com/office/officeart/2005/8/colors/accent1_2" csCatId="accent1" phldr="1"/>
+    <dgm:pt modelId="{09691B4E-C62A-4FE2-86C7-D66CA99D84A9}" type="doc">
+      <dgm:prSet loTypeId="urn:microsoft.com/office/officeart/2005/8/layout/pictureOrgChart+Icon" loCatId="hierarchy" qsTypeId="urn:microsoft.com/office/officeart/2005/8/quickstyle/simple1" qsCatId="simple" csTypeId="urn:microsoft.com/office/officeart/2005/8/colors/accent1_2" csCatId="accent1" phldr="1"/>
       <dgm:spPr/>
       <dgm:t>
         <a:bodyPr/>
@@ -2680,22 +2680,22 @@
         </a:p>
       </dgm:t>
     </dgm:pt>
-    <dgm:pt modelId="{A6A60EED-52FF-419C-A997-7DAE8B655E42}">
-      <dgm:prSet phldrT="[Text]" phldr="0" custT="1"/>
+    <dgm:pt modelId="{330E9E55-213F-418D-B009-72DFF282A171}">
+      <dgm:prSet phldrT="[Text]" phldr="0"/>
       <dgm:spPr/>
       <dgm:t>
         <a:bodyPr/>
         <a:lstStyle/>
         <a:p>
           <a:r>
-            <a:rPr lang="en-US" sz="2000" dirty="0"/>
+            <a:rPr lang="en-US" dirty="0"/>
             <a:t>CEO</a:t>
           </a:r>
-          <a:endParaRPr lang="id-ID" sz="2000" dirty="0"/>
+          <a:endParaRPr lang="id-ID" dirty="0"/>
         </a:p>
       </dgm:t>
     </dgm:pt>
-    <dgm:pt modelId="{5D8168F4-4564-4421-BE98-722050563BA5}" type="parTrans" cxnId="{3E17E679-E306-4931-8532-57093FDDFFA5}">
+    <dgm:pt modelId="{A7EAD779-4B6D-407B-A6D6-1AF6BF6B71AB}" type="parTrans" cxnId="{809B2D0B-0FC6-4698-BA9F-F61D93CEB85A}">
       <dgm:prSet/>
       <dgm:spPr/>
       <dgm:t>
@@ -2706,7 +2706,7 @@
         </a:p>
       </dgm:t>
     </dgm:pt>
-    <dgm:pt modelId="{5F83AA1B-1D00-4948-90BB-D876FE22DFF4}" type="sibTrans" cxnId="{3E17E679-E306-4931-8532-57093FDDFFA5}">
+    <dgm:pt modelId="{55479A89-46C9-402C-A9E1-3F1200786909}" type="sibTrans" cxnId="{809B2D0B-0FC6-4698-BA9F-F61D93CEB85A}">
       <dgm:prSet/>
       <dgm:spPr/>
       <dgm:t>
@@ -2717,22 +2717,22 @@
         </a:p>
       </dgm:t>
     </dgm:pt>
-    <dgm:pt modelId="{602E89C2-DFF9-4D56-B79C-7F0E04EB0DED}" type="asst">
-      <dgm:prSet phldrT="[Text]" phldr="0" custT="1"/>
+    <dgm:pt modelId="{1C406D5D-28B7-4824-8D0E-F8E576AFE71E}" type="asst">
+      <dgm:prSet phldrT="[Text]" phldr="0"/>
       <dgm:spPr/>
       <dgm:t>
         <a:bodyPr/>
         <a:lstStyle/>
         <a:p>
           <a:r>
-            <a:rPr lang="en-US" sz="2000" dirty="0"/>
+            <a:rPr lang="en-US" dirty="0"/>
             <a:t>CTO</a:t>
           </a:r>
-          <a:endParaRPr lang="id-ID" sz="2000" dirty="0"/>
+          <a:endParaRPr lang="id-ID" dirty="0"/>
         </a:p>
       </dgm:t>
     </dgm:pt>
-    <dgm:pt modelId="{E63D05B8-5432-4F69-A528-19216B1AFC45}" type="parTrans" cxnId="{946FEB98-54EF-4A60-87BD-E69CC5A123BD}">
+    <dgm:pt modelId="{A2484D57-7CF2-4E5F-932C-B53943DC041E}" type="parTrans" cxnId="{649E312D-D4EA-442A-BDC3-826917BFDB32}">
       <dgm:prSet/>
       <dgm:spPr/>
       <dgm:t>
@@ -2743,7 +2743,7 @@
         </a:p>
       </dgm:t>
     </dgm:pt>
-    <dgm:pt modelId="{F55AF576-BCD9-4B37-B2CD-25C6E281C2DF}" type="sibTrans" cxnId="{946FEB98-54EF-4A60-87BD-E69CC5A123BD}">
+    <dgm:pt modelId="{AE07D34C-877B-4638-837A-0B3F00331D66}" type="sibTrans" cxnId="{649E312D-D4EA-442A-BDC3-826917BFDB32}">
       <dgm:prSet/>
       <dgm:spPr/>
       <dgm:t>
@@ -2754,21 +2754,21 @@
         </a:p>
       </dgm:t>
     </dgm:pt>
-    <dgm:pt modelId="{B05787A1-E477-4917-9CDA-F70408EB66F7}">
-      <dgm:prSet phldrT="[Text]" custT="1"/>
+    <dgm:pt modelId="{D0C2ACCA-A0D3-4D86-829E-EF0B8AEAA421}">
+      <dgm:prSet phldrT="[Text]"/>
       <dgm:spPr/>
       <dgm:t>
         <a:bodyPr/>
         <a:lstStyle/>
         <a:p>
           <a:r>
-            <a:rPr lang="id-ID" sz="2000" dirty="0"/>
+            <a:rPr lang="id-ID" dirty="0"/>
             <a:t>Marketing Manager</a:t>
           </a:r>
         </a:p>
       </dgm:t>
     </dgm:pt>
-    <dgm:pt modelId="{5B77F529-2709-446B-91E4-F17F6ADD8109}" type="parTrans" cxnId="{EBAC8CAA-9C93-4B4A-9D71-5807DB158052}">
+    <dgm:pt modelId="{EA4D2194-36B7-4FE6-8CD1-F88261B95E75}" type="parTrans" cxnId="{84D7A164-A11A-4545-82B6-C3CDA2CE4B38}">
       <dgm:prSet/>
       <dgm:spPr/>
       <dgm:t>
@@ -2779,7 +2779,7 @@
         </a:p>
       </dgm:t>
     </dgm:pt>
-    <dgm:pt modelId="{8A47210C-B3A5-4F9B-AB69-1366FF7723D1}" type="sibTrans" cxnId="{EBAC8CAA-9C93-4B4A-9D71-5807DB158052}">
+    <dgm:pt modelId="{E90C9D08-886F-4CAA-9757-98732156836C}" type="sibTrans" cxnId="{84D7A164-A11A-4545-82B6-C3CDA2CE4B38}">
       <dgm:prSet/>
       <dgm:spPr/>
       <dgm:t>
@@ -2790,22 +2790,22 @@
         </a:p>
       </dgm:t>
     </dgm:pt>
-    <dgm:pt modelId="{A766317A-33FC-4631-9D49-3C16338B0DFC}" type="asst">
-      <dgm:prSet phldrT="[Text]" phldr="0" custT="1"/>
+    <dgm:pt modelId="{65330C2D-5673-4B4D-9592-BEFD0D4945E1}" type="asst">
+      <dgm:prSet phldrT="[Text]" phldr="0"/>
       <dgm:spPr/>
       <dgm:t>
         <a:bodyPr/>
         <a:lstStyle/>
         <a:p>
           <a:r>
-            <a:rPr lang="en-US" sz="2000" dirty="0"/>
-            <a:t>COO</a:t>
+            <a:rPr lang="en-US" dirty="0"/>
+            <a:t>Finance</a:t>
           </a:r>
-          <a:endParaRPr lang="id-ID" sz="2000" dirty="0"/>
+          <a:endParaRPr lang="id-ID" dirty="0"/>
         </a:p>
       </dgm:t>
     </dgm:pt>
-    <dgm:pt modelId="{D864772E-EFD3-44AC-8632-6720432395DF}" type="parTrans" cxnId="{5C2FFD0E-5760-4DC7-BFDA-50D198B1F3A7}">
+    <dgm:pt modelId="{4201AA69-B2DE-4FCD-A5EE-15CF97CC2EC4}" type="parTrans" cxnId="{FF5C5F6E-DBCE-4FCF-AC69-844B57C0A62C}">
       <dgm:prSet/>
       <dgm:spPr/>
       <dgm:t>
@@ -2816,7 +2816,7 @@
         </a:p>
       </dgm:t>
     </dgm:pt>
-    <dgm:pt modelId="{32075161-91F5-4401-9B2B-50DC4C6CF521}" type="sibTrans" cxnId="{5C2FFD0E-5760-4DC7-BFDA-50D198B1F3A7}">
+    <dgm:pt modelId="{F252AFA8-51CA-497C-8602-1FD49EFF83F5}" type="sibTrans" cxnId="{FF5C5F6E-DBCE-4FCF-AC69-844B57C0A62C}">
       <dgm:prSet/>
       <dgm:spPr/>
       <dgm:t>
@@ -2827,8 +2827,8 @@
         </a:p>
       </dgm:t>
     </dgm:pt>
-    <dgm:pt modelId="{3E32D366-F8AD-4A35-9711-075902864B3D}" type="pres">
-      <dgm:prSet presAssocID="{F2CA3D39-084C-406F-9B8F-F47C53AC4086}" presName="hierChild1" presStyleCnt="0">
+    <dgm:pt modelId="{7A72294B-ABEA-46DD-8490-233C9E3A8E96}" type="pres">
+      <dgm:prSet presAssocID="{09691B4E-C62A-4FE2-86C7-D66CA99D84A9}" presName="hierChild1" presStyleCnt="0">
         <dgm:presLayoutVars>
           <dgm:orgChart val="1"/>
           <dgm:chPref val="1"/>
@@ -2840,191 +2840,243 @@
       </dgm:prSet>
       <dgm:spPr/>
     </dgm:pt>
-    <dgm:pt modelId="{817BEF7F-B7F1-4CDD-99DE-9505F6DBAA5D}" type="pres">
-      <dgm:prSet presAssocID="{A6A60EED-52FF-419C-A997-7DAE8B655E42}" presName="hierRoot1" presStyleCnt="0">
+    <dgm:pt modelId="{ED1BB6C1-6DDF-4986-8FEB-6CD66EF36018}" type="pres">
+      <dgm:prSet presAssocID="{330E9E55-213F-418D-B009-72DFF282A171}" presName="hierRoot1" presStyleCnt="0">
         <dgm:presLayoutVars>
           <dgm:hierBranch val="init"/>
         </dgm:presLayoutVars>
       </dgm:prSet>
       <dgm:spPr/>
     </dgm:pt>
-    <dgm:pt modelId="{BCC885F7-76FE-480F-871C-54D720AFEEBE}" type="pres">
-      <dgm:prSet presAssocID="{A6A60EED-52FF-419C-A997-7DAE8B655E42}" presName="rootComposite1" presStyleCnt="0"/>
+    <dgm:pt modelId="{8EBF8D61-7541-45E7-8807-B7F68C3CF593}" type="pres">
+      <dgm:prSet presAssocID="{330E9E55-213F-418D-B009-72DFF282A171}" presName="rootComposite1" presStyleCnt="0"/>
       <dgm:spPr/>
     </dgm:pt>
-    <dgm:pt modelId="{40767B9A-0F0B-489A-9C29-04F7647631AF}" type="pres">
-      <dgm:prSet presAssocID="{A6A60EED-52FF-419C-A997-7DAE8B655E42}" presName="rootText1" presStyleLbl="node0" presStyleIdx="0" presStyleCnt="1">
+    <dgm:pt modelId="{65F724A1-5677-4B1D-8450-9FA69AEB0EE7}" type="pres">
+      <dgm:prSet presAssocID="{330E9E55-213F-418D-B009-72DFF282A171}" presName="rootText1" presStyleLbl="node0" presStyleIdx="0" presStyleCnt="1">
         <dgm:presLayoutVars>
           <dgm:chPref val="3"/>
         </dgm:presLayoutVars>
       </dgm:prSet>
       <dgm:spPr/>
     </dgm:pt>
-    <dgm:pt modelId="{4DF6C98C-BA6D-4653-93DF-5C8839FA202F}" type="pres">
-      <dgm:prSet presAssocID="{A6A60EED-52FF-419C-A997-7DAE8B655E42}" presName="rootConnector1" presStyleLbl="node1" presStyleIdx="0" presStyleCnt="0"/>
+    <dgm:pt modelId="{E26C24AF-F31A-4342-A2ED-E0970E0275F7}" type="pres">
+      <dgm:prSet presAssocID="{330E9E55-213F-418D-B009-72DFF282A171}" presName="rootPict1" presStyleLbl="alignImgPlace1" presStyleIdx="0" presStyleCnt="4"/>
+      <dgm:spPr>
+        <a:blipFill>
+          <a:blip xmlns:r="http://schemas.openxmlformats.org/officeDocument/2006/relationships" r:embed="rId1"/>
+          <a:srcRect/>
+          <a:stretch>
+            <a:fillRect l="-17000" r="-17000"/>
+          </a:stretch>
+        </a:blipFill>
+      </dgm:spPr>
+    </dgm:pt>
+    <dgm:pt modelId="{84F1B473-AAEB-4B50-9530-D2C916260B74}" type="pres">
+      <dgm:prSet presAssocID="{330E9E55-213F-418D-B009-72DFF282A171}" presName="rootConnector1" presStyleLbl="node1" presStyleIdx="0" presStyleCnt="0"/>
       <dgm:spPr/>
     </dgm:pt>
-    <dgm:pt modelId="{7D6AE35D-6736-4C71-A9B0-3EB932438E70}" type="pres">
-      <dgm:prSet presAssocID="{A6A60EED-52FF-419C-A997-7DAE8B655E42}" presName="hierChild2" presStyleCnt="0"/>
+    <dgm:pt modelId="{09CC94F6-532C-4DC7-8825-2C79A165AA95}" type="pres">
+      <dgm:prSet presAssocID="{330E9E55-213F-418D-B009-72DFF282A171}" presName="hierChild2" presStyleCnt="0"/>
       <dgm:spPr/>
     </dgm:pt>
-    <dgm:pt modelId="{187B209C-6D88-4C09-8D7B-9CF6B2F34B52}" type="pres">
-      <dgm:prSet presAssocID="{5B77F529-2709-446B-91E4-F17F6ADD8109}" presName="Name37" presStyleLbl="parChTrans1D2" presStyleIdx="0" presStyleCnt="2"/>
+    <dgm:pt modelId="{C32FD7F3-FE3C-45EB-A660-40806D142DEB}" type="pres">
+      <dgm:prSet presAssocID="{EA4D2194-36B7-4FE6-8CD1-F88261B95E75}" presName="Name37" presStyleLbl="parChTrans1D2" presStyleIdx="0" presStyleCnt="2"/>
       <dgm:spPr/>
     </dgm:pt>
-    <dgm:pt modelId="{E04512B1-2930-431C-A49F-6B4FE0FC9BE2}" type="pres">
-      <dgm:prSet presAssocID="{B05787A1-E477-4917-9CDA-F70408EB66F7}" presName="hierRoot2" presStyleCnt="0">
+    <dgm:pt modelId="{CE13542A-EDB4-487C-9DF8-4BB499746A1D}" type="pres">
+      <dgm:prSet presAssocID="{D0C2ACCA-A0D3-4D86-829E-EF0B8AEAA421}" presName="hierRoot2" presStyleCnt="0">
         <dgm:presLayoutVars>
           <dgm:hierBranch val="init"/>
         </dgm:presLayoutVars>
       </dgm:prSet>
       <dgm:spPr/>
     </dgm:pt>
-    <dgm:pt modelId="{2BF460F7-E756-46E5-9510-8D1CDAE4E528}" type="pres">
-      <dgm:prSet presAssocID="{B05787A1-E477-4917-9CDA-F70408EB66F7}" presName="rootComposite" presStyleCnt="0"/>
+    <dgm:pt modelId="{4C06D3C2-BEC1-452F-92AC-A0B73069C8D4}" type="pres">
+      <dgm:prSet presAssocID="{D0C2ACCA-A0D3-4D86-829E-EF0B8AEAA421}" presName="rootComposite" presStyleCnt="0"/>
       <dgm:spPr/>
     </dgm:pt>
-    <dgm:pt modelId="{692E5346-8453-4A40-982B-6946BCA9A9B9}" type="pres">
-      <dgm:prSet presAssocID="{B05787A1-E477-4917-9CDA-F70408EB66F7}" presName="rootText" presStyleLbl="node2" presStyleIdx="0" presStyleCnt="1" custScaleX="130592">
+    <dgm:pt modelId="{E20DD563-4C7F-488B-98F7-449803B5E305}" type="pres">
+      <dgm:prSet presAssocID="{D0C2ACCA-A0D3-4D86-829E-EF0B8AEAA421}" presName="rootText" presStyleLbl="node2" presStyleIdx="0" presStyleCnt="1">
         <dgm:presLayoutVars>
           <dgm:chPref val="3"/>
         </dgm:presLayoutVars>
       </dgm:prSet>
       <dgm:spPr/>
     </dgm:pt>
-    <dgm:pt modelId="{486A8466-DAE8-4DD7-8E8F-C48272664366}" type="pres">
-      <dgm:prSet presAssocID="{B05787A1-E477-4917-9CDA-F70408EB66F7}" presName="rootConnector" presStyleLbl="node2" presStyleIdx="0" presStyleCnt="1"/>
+    <dgm:pt modelId="{CBC7A6BA-DBF4-49B3-A920-D36DAB4BB02C}" type="pres">
+      <dgm:prSet presAssocID="{D0C2ACCA-A0D3-4D86-829E-EF0B8AEAA421}" presName="rootPict" presStyleLbl="alignImgPlace1" presStyleIdx="1" presStyleCnt="4"/>
+      <dgm:spPr>
+        <a:blipFill>
+          <a:blip xmlns:r="http://schemas.openxmlformats.org/officeDocument/2006/relationships" r:embed="rId2"/>
+          <a:srcRect/>
+          <a:stretch>
+            <a:fillRect l="-11000" r="-11000"/>
+          </a:stretch>
+        </a:blipFill>
+      </dgm:spPr>
+    </dgm:pt>
+    <dgm:pt modelId="{F129E062-9CEA-4FF0-8D59-4F5961620445}" type="pres">
+      <dgm:prSet presAssocID="{D0C2ACCA-A0D3-4D86-829E-EF0B8AEAA421}" presName="rootConnector" presStyleLbl="node2" presStyleIdx="0" presStyleCnt="1"/>
       <dgm:spPr/>
     </dgm:pt>
-    <dgm:pt modelId="{554D5ECC-0E4A-46A0-B4DD-B377E64EEF27}" type="pres">
-      <dgm:prSet presAssocID="{B05787A1-E477-4917-9CDA-F70408EB66F7}" presName="hierChild4" presStyleCnt="0"/>
+    <dgm:pt modelId="{C3618338-6DF5-4C0B-A6BA-ADC17EBD1DDF}" type="pres">
+      <dgm:prSet presAssocID="{D0C2ACCA-A0D3-4D86-829E-EF0B8AEAA421}" presName="hierChild4" presStyleCnt="0"/>
       <dgm:spPr/>
     </dgm:pt>
-    <dgm:pt modelId="{79DA3869-1016-4F4D-BE6D-FAF28FF2DB38}" type="pres">
-      <dgm:prSet presAssocID="{B05787A1-E477-4917-9CDA-F70408EB66F7}" presName="hierChild5" presStyleCnt="0"/>
+    <dgm:pt modelId="{D72524BB-5FD2-4467-87F0-BD7816E42F7A}" type="pres">
+      <dgm:prSet presAssocID="{D0C2ACCA-A0D3-4D86-829E-EF0B8AEAA421}" presName="hierChild5" presStyleCnt="0"/>
       <dgm:spPr/>
     </dgm:pt>
-    <dgm:pt modelId="{D1C60AD4-C4E1-49C1-A595-C51E76AE5710}" type="pres">
-      <dgm:prSet presAssocID="{A6A60EED-52FF-419C-A997-7DAE8B655E42}" presName="hierChild3" presStyleCnt="0"/>
+    <dgm:pt modelId="{AF7E8FEA-80E2-4306-BB24-9AF4B3C5DAB0}" type="pres">
+      <dgm:prSet presAssocID="{4201AA69-B2DE-4FCD-A5EE-15CF97CC2EC4}" presName="Name111" presStyleLbl="parChTrans1D3" presStyleIdx="0" presStyleCnt="1"/>
       <dgm:spPr/>
     </dgm:pt>
-    <dgm:pt modelId="{47E5C50F-BF83-4485-9811-71CEDB4C606F}" type="pres">
-      <dgm:prSet presAssocID="{E63D05B8-5432-4F69-A528-19216B1AFC45}" presName="Name111" presStyleLbl="parChTrans1D2" presStyleIdx="1" presStyleCnt="2"/>
-      <dgm:spPr/>
-    </dgm:pt>
-    <dgm:pt modelId="{1BF16E62-C449-460D-9E1C-37603DC5DBD1}" type="pres">
-      <dgm:prSet presAssocID="{602E89C2-DFF9-4D56-B79C-7F0E04EB0DED}" presName="hierRoot3" presStyleCnt="0">
+    <dgm:pt modelId="{E8D35A17-0BE2-4675-9712-154CF221DEC7}" type="pres">
+      <dgm:prSet presAssocID="{65330C2D-5673-4B4D-9592-BEFD0D4945E1}" presName="hierRoot3" presStyleCnt="0">
         <dgm:presLayoutVars>
           <dgm:hierBranch val="init"/>
         </dgm:presLayoutVars>
       </dgm:prSet>
       <dgm:spPr/>
     </dgm:pt>
-    <dgm:pt modelId="{7AC7DAB3-FCF0-4FC0-A29C-9E227039FDB3}" type="pres">
-      <dgm:prSet presAssocID="{602E89C2-DFF9-4D56-B79C-7F0E04EB0DED}" presName="rootComposite3" presStyleCnt="0"/>
+    <dgm:pt modelId="{4D164B9F-1E02-476E-982C-7E573FE563A2}" type="pres">
+      <dgm:prSet presAssocID="{65330C2D-5673-4B4D-9592-BEFD0D4945E1}" presName="rootComposite3" presStyleCnt="0"/>
       <dgm:spPr/>
     </dgm:pt>
-    <dgm:pt modelId="{B12AB84D-AEEA-478C-B3D3-605DE42433D2}" type="pres">
-      <dgm:prSet presAssocID="{602E89C2-DFF9-4D56-B79C-7F0E04EB0DED}" presName="rootText3" presStyleLbl="asst1" presStyleIdx="0" presStyleCnt="2">
+    <dgm:pt modelId="{87B44B90-0C7D-4F22-825A-52F34EFE71E4}" type="pres">
+      <dgm:prSet presAssocID="{65330C2D-5673-4B4D-9592-BEFD0D4945E1}" presName="rootText3" presStyleLbl="asst2" presStyleIdx="0" presStyleCnt="1">
         <dgm:presLayoutVars>
           <dgm:chPref val="3"/>
         </dgm:presLayoutVars>
       </dgm:prSet>
       <dgm:spPr/>
     </dgm:pt>
-    <dgm:pt modelId="{48F4A863-1F90-462F-B183-AB8AEBDBCB6D}" type="pres">
-      <dgm:prSet presAssocID="{602E89C2-DFF9-4D56-B79C-7F0E04EB0DED}" presName="rootConnector3" presStyleLbl="asst1" presStyleIdx="0" presStyleCnt="2"/>
+    <dgm:pt modelId="{4B5B8D77-5B5F-4048-8685-7AB41802E6E5}" type="pres">
+      <dgm:prSet presAssocID="{65330C2D-5673-4B4D-9592-BEFD0D4945E1}" presName="rootPict3" presStyleLbl="alignImgPlace1" presStyleIdx="2" presStyleCnt="4"/>
+      <dgm:spPr>
+        <a:blipFill>
+          <a:blip xmlns:r="http://schemas.openxmlformats.org/officeDocument/2006/relationships" r:embed="rId3"/>
+          <a:srcRect/>
+          <a:stretch>
+            <a:fillRect l="-17000" r="-17000"/>
+          </a:stretch>
+        </a:blipFill>
+      </dgm:spPr>
+    </dgm:pt>
+    <dgm:pt modelId="{E6F381BF-C52E-4653-810C-6E620E0FBF39}" type="pres">
+      <dgm:prSet presAssocID="{65330C2D-5673-4B4D-9592-BEFD0D4945E1}" presName="rootConnector3" presStyleLbl="asst2" presStyleIdx="0" presStyleCnt="1"/>
       <dgm:spPr/>
     </dgm:pt>
-    <dgm:pt modelId="{95342586-E49B-407C-A698-32C1ECB6BEF9}" type="pres">
-      <dgm:prSet presAssocID="{602E89C2-DFF9-4D56-B79C-7F0E04EB0DED}" presName="hierChild6" presStyleCnt="0"/>
+    <dgm:pt modelId="{CF332975-CD7C-4F7B-B048-331E5BBC1627}" type="pres">
+      <dgm:prSet presAssocID="{65330C2D-5673-4B4D-9592-BEFD0D4945E1}" presName="hierChild6" presStyleCnt="0"/>
       <dgm:spPr/>
     </dgm:pt>
-    <dgm:pt modelId="{565187F1-FE6A-423B-9D7E-0435D2BF5DE0}" type="pres">
-      <dgm:prSet presAssocID="{602E89C2-DFF9-4D56-B79C-7F0E04EB0DED}" presName="hierChild7" presStyleCnt="0"/>
+    <dgm:pt modelId="{A8DFF8FE-2759-4CBF-9FC5-7D13BB040DCD}" type="pres">
+      <dgm:prSet presAssocID="{65330C2D-5673-4B4D-9592-BEFD0D4945E1}" presName="hierChild7" presStyleCnt="0"/>
       <dgm:spPr/>
     </dgm:pt>
-    <dgm:pt modelId="{1A1BE734-CBDF-4F25-8412-2843EB5A4893}" type="pres">
-      <dgm:prSet presAssocID="{D864772E-EFD3-44AC-8632-6720432395DF}" presName="Name111" presStyleLbl="parChTrans1D3" presStyleIdx="0" presStyleCnt="1"/>
+    <dgm:pt modelId="{75F7F4B2-FD61-4E05-9511-D9DFA64FE797}" type="pres">
+      <dgm:prSet presAssocID="{330E9E55-213F-418D-B009-72DFF282A171}" presName="hierChild3" presStyleCnt="0"/>
       <dgm:spPr/>
     </dgm:pt>
-    <dgm:pt modelId="{E183D42E-E6AC-4383-BEDC-1151981226CE}" type="pres">
-      <dgm:prSet presAssocID="{A766317A-33FC-4631-9D49-3C16338B0DFC}" presName="hierRoot3" presStyleCnt="0">
+    <dgm:pt modelId="{C3A039F2-3BB1-4F31-A224-92C956D199AB}" type="pres">
+      <dgm:prSet presAssocID="{A2484D57-7CF2-4E5F-932C-B53943DC041E}" presName="Name111" presStyleLbl="parChTrans1D2" presStyleIdx="1" presStyleCnt="2"/>
+      <dgm:spPr/>
+    </dgm:pt>
+    <dgm:pt modelId="{F94B6ED5-D659-4868-9CFF-568F64136B94}" type="pres">
+      <dgm:prSet presAssocID="{1C406D5D-28B7-4824-8D0E-F8E576AFE71E}" presName="hierRoot3" presStyleCnt="0">
         <dgm:presLayoutVars>
           <dgm:hierBranch val="init"/>
         </dgm:presLayoutVars>
       </dgm:prSet>
       <dgm:spPr/>
     </dgm:pt>
-    <dgm:pt modelId="{C0CC9056-06EF-46EA-97A4-8FAB8E7548E1}" type="pres">
-      <dgm:prSet presAssocID="{A766317A-33FC-4631-9D49-3C16338B0DFC}" presName="rootComposite3" presStyleCnt="0"/>
+    <dgm:pt modelId="{C826CB45-08D7-410D-91DC-CC78C3CCB125}" type="pres">
+      <dgm:prSet presAssocID="{1C406D5D-28B7-4824-8D0E-F8E576AFE71E}" presName="rootComposite3" presStyleCnt="0"/>
       <dgm:spPr/>
     </dgm:pt>
-    <dgm:pt modelId="{0B9B6EE7-F245-49B2-BBDE-1D00D7D218E4}" type="pres">
-      <dgm:prSet presAssocID="{A766317A-33FC-4631-9D49-3C16338B0DFC}" presName="rootText3" presStyleLbl="asst1" presStyleIdx="1" presStyleCnt="2">
+    <dgm:pt modelId="{39011096-CF31-4590-87F0-2E6AC5750F06}" type="pres">
+      <dgm:prSet presAssocID="{1C406D5D-28B7-4824-8D0E-F8E576AFE71E}" presName="rootText3" presStyleLbl="asst1" presStyleIdx="0" presStyleCnt="1">
         <dgm:presLayoutVars>
           <dgm:chPref val="3"/>
         </dgm:presLayoutVars>
       </dgm:prSet>
       <dgm:spPr/>
     </dgm:pt>
-    <dgm:pt modelId="{EDE4A489-FBF3-4BD8-B5C7-CEA4B272D929}" type="pres">
-      <dgm:prSet presAssocID="{A766317A-33FC-4631-9D49-3C16338B0DFC}" presName="rootConnector3" presStyleLbl="asst1" presStyleIdx="1" presStyleCnt="2"/>
+    <dgm:pt modelId="{C94BC069-BA8D-4140-88A8-30374D281B6D}" type="pres">
+      <dgm:prSet presAssocID="{1C406D5D-28B7-4824-8D0E-F8E576AFE71E}" presName="rootPict3" presStyleLbl="alignImgPlace1" presStyleIdx="3" presStyleCnt="4"/>
+      <dgm:spPr>
+        <a:blipFill>
+          <a:blip xmlns:r="http://schemas.openxmlformats.org/officeDocument/2006/relationships" r:embed="rId4"/>
+          <a:srcRect/>
+          <a:stretch>
+            <a:fillRect l="-17000" r="-17000"/>
+          </a:stretch>
+        </a:blipFill>
+      </dgm:spPr>
+    </dgm:pt>
+    <dgm:pt modelId="{D142DA1F-2053-4C3E-BAD2-E9210DD0049F}" type="pres">
+      <dgm:prSet presAssocID="{1C406D5D-28B7-4824-8D0E-F8E576AFE71E}" presName="rootConnector3" presStyleLbl="asst1" presStyleIdx="0" presStyleCnt="1"/>
       <dgm:spPr/>
     </dgm:pt>
-    <dgm:pt modelId="{42E7455E-266C-4609-A867-185CC3EBD25D}" type="pres">
-      <dgm:prSet presAssocID="{A766317A-33FC-4631-9D49-3C16338B0DFC}" presName="hierChild6" presStyleCnt="0"/>
+    <dgm:pt modelId="{520FFC4A-97F1-4B36-92D3-4ACD06654E95}" type="pres">
+      <dgm:prSet presAssocID="{1C406D5D-28B7-4824-8D0E-F8E576AFE71E}" presName="hierChild6" presStyleCnt="0"/>
       <dgm:spPr/>
     </dgm:pt>
-    <dgm:pt modelId="{920D4B1A-ED25-4BD1-BA5C-8EBA2E67D113}" type="pres">
-      <dgm:prSet presAssocID="{A766317A-33FC-4631-9D49-3C16338B0DFC}" presName="hierChild7" presStyleCnt="0"/>
+    <dgm:pt modelId="{A6987B65-A777-42F7-A9E5-CBFEC62A4760}" type="pres">
+      <dgm:prSet presAssocID="{1C406D5D-28B7-4824-8D0E-F8E576AFE71E}" presName="hierChild7" presStyleCnt="0"/>
       <dgm:spPr/>
     </dgm:pt>
   </dgm:ptLst>
   <dgm:cxnLst>
-    <dgm:cxn modelId="{87C2EC08-3C31-4F69-9C9C-438A14A9A7D3}" type="presOf" srcId="{602E89C2-DFF9-4D56-B79C-7F0E04EB0DED}" destId="{48F4A863-1F90-462F-B183-AB8AEBDBCB6D}" srcOrd="1" destOrd="0" presId="urn:microsoft.com/office/officeart/2005/8/layout/orgChart1"/>
-    <dgm:cxn modelId="{C073890E-C710-4064-A872-3D84014B7F20}" type="presOf" srcId="{A6A60EED-52FF-419C-A997-7DAE8B655E42}" destId="{40767B9A-0F0B-489A-9C29-04F7647631AF}" srcOrd="0" destOrd="0" presId="urn:microsoft.com/office/officeart/2005/8/layout/orgChart1"/>
-    <dgm:cxn modelId="{5C2FFD0E-5760-4DC7-BFDA-50D198B1F3A7}" srcId="{602E89C2-DFF9-4D56-B79C-7F0E04EB0DED}" destId="{A766317A-33FC-4631-9D49-3C16338B0DFC}" srcOrd="0" destOrd="0" parTransId="{D864772E-EFD3-44AC-8632-6720432395DF}" sibTransId="{32075161-91F5-4401-9B2B-50DC4C6CF521}"/>
-    <dgm:cxn modelId="{80424B61-FF9F-4A54-AFEE-5E84F8AF495F}" type="presOf" srcId="{5B77F529-2709-446B-91E4-F17F6ADD8109}" destId="{187B209C-6D88-4C09-8D7B-9CF6B2F34B52}" srcOrd="0" destOrd="0" presId="urn:microsoft.com/office/officeart/2005/8/layout/orgChart1"/>
-    <dgm:cxn modelId="{EA0FD46A-49D5-4E2E-BB24-E7128BC5730D}" type="presOf" srcId="{A6A60EED-52FF-419C-A997-7DAE8B655E42}" destId="{4DF6C98C-BA6D-4653-93DF-5C8839FA202F}" srcOrd="1" destOrd="0" presId="urn:microsoft.com/office/officeart/2005/8/layout/orgChart1"/>
-    <dgm:cxn modelId="{95236376-CF8B-4EF1-BAB6-5F33B42868EE}" type="presOf" srcId="{A766317A-33FC-4631-9D49-3C16338B0DFC}" destId="{EDE4A489-FBF3-4BD8-B5C7-CEA4B272D929}" srcOrd="1" destOrd="0" presId="urn:microsoft.com/office/officeart/2005/8/layout/orgChart1"/>
-    <dgm:cxn modelId="{3E17E679-E306-4931-8532-57093FDDFFA5}" srcId="{F2CA3D39-084C-406F-9B8F-F47C53AC4086}" destId="{A6A60EED-52FF-419C-A997-7DAE8B655E42}" srcOrd="0" destOrd="0" parTransId="{5D8168F4-4564-4421-BE98-722050563BA5}" sibTransId="{5F83AA1B-1D00-4948-90BB-D876FE22DFF4}"/>
-    <dgm:cxn modelId="{946FEB98-54EF-4A60-87BD-E69CC5A123BD}" srcId="{A6A60EED-52FF-419C-A997-7DAE8B655E42}" destId="{602E89C2-DFF9-4D56-B79C-7F0E04EB0DED}" srcOrd="0" destOrd="0" parTransId="{E63D05B8-5432-4F69-A528-19216B1AFC45}" sibTransId="{F55AF576-BCD9-4B37-B2CD-25C6E281C2DF}"/>
-    <dgm:cxn modelId="{EBAC8CAA-9C93-4B4A-9D71-5807DB158052}" srcId="{A6A60EED-52FF-419C-A997-7DAE8B655E42}" destId="{B05787A1-E477-4917-9CDA-F70408EB66F7}" srcOrd="1" destOrd="0" parTransId="{5B77F529-2709-446B-91E4-F17F6ADD8109}" sibTransId="{8A47210C-B3A5-4F9B-AB69-1366FF7723D1}"/>
-    <dgm:cxn modelId="{7E7172AB-9091-44FD-8E70-E0B6EB2E4884}" type="presOf" srcId="{E63D05B8-5432-4F69-A528-19216B1AFC45}" destId="{47E5C50F-BF83-4485-9811-71CEDB4C606F}" srcOrd="0" destOrd="0" presId="urn:microsoft.com/office/officeart/2005/8/layout/orgChart1"/>
-    <dgm:cxn modelId="{75E6EFCB-BBB2-43FF-81F6-EE2A9575938C}" type="presOf" srcId="{A766317A-33FC-4631-9D49-3C16338B0DFC}" destId="{0B9B6EE7-F245-49B2-BBDE-1D00D7D218E4}" srcOrd="0" destOrd="0" presId="urn:microsoft.com/office/officeart/2005/8/layout/orgChart1"/>
-    <dgm:cxn modelId="{6CAA21CD-CCA7-40D4-97FE-0E004D1A7078}" type="presOf" srcId="{B05787A1-E477-4917-9CDA-F70408EB66F7}" destId="{486A8466-DAE8-4DD7-8E8F-C48272664366}" srcOrd="1" destOrd="0" presId="urn:microsoft.com/office/officeart/2005/8/layout/orgChart1"/>
-    <dgm:cxn modelId="{2C0D98D5-E453-47D7-943E-C37305AA96C4}" type="presOf" srcId="{B05787A1-E477-4917-9CDA-F70408EB66F7}" destId="{692E5346-8453-4A40-982B-6946BCA9A9B9}" srcOrd="0" destOrd="0" presId="urn:microsoft.com/office/officeart/2005/8/layout/orgChart1"/>
-    <dgm:cxn modelId="{50F008DB-B474-4164-84A1-198AEF054028}" type="presOf" srcId="{602E89C2-DFF9-4D56-B79C-7F0E04EB0DED}" destId="{B12AB84D-AEEA-478C-B3D3-605DE42433D2}" srcOrd="0" destOrd="0" presId="urn:microsoft.com/office/officeart/2005/8/layout/orgChart1"/>
-    <dgm:cxn modelId="{B44AE5EA-DB42-4419-AF5E-14995089EE90}" type="presOf" srcId="{F2CA3D39-084C-406F-9B8F-F47C53AC4086}" destId="{3E32D366-F8AD-4A35-9711-075902864B3D}" srcOrd="0" destOrd="0" presId="urn:microsoft.com/office/officeart/2005/8/layout/orgChart1"/>
-    <dgm:cxn modelId="{CF0537F4-E6FC-4D0F-A6E3-EB905EDE7528}" type="presOf" srcId="{D864772E-EFD3-44AC-8632-6720432395DF}" destId="{1A1BE734-CBDF-4F25-8412-2843EB5A4893}" srcOrd="0" destOrd="0" presId="urn:microsoft.com/office/officeart/2005/8/layout/orgChart1"/>
-    <dgm:cxn modelId="{0AEE755D-0361-48EF-B07D-F4218240E18A}" type="presParOf" srcId="{3E32D366-F8AD-4A35-9711-075902864B3D}" destId="{817BEF7F-B7F1-4CDD-99DE-9505F6DBAA5D}" srcOrd="0" destOrd="0" presId="urn:microsoft.com/office/officeart/2005/8/layout/orgChart1"/>
-    <dgm:cxn modelId="{15082A85-B525-4013-A8A4-EF7B0134AE7B}" type="presParOf" srcId="{817BEF7F-B7F1-4CDD-99DE-9505F6DBAA5D}" destId="{BCC885F7-76FE-480F-871C-54D720AFEEBE}" srcOrd="0" destOrd="0" presId="urn:microsoft.com/office/officeart/2005/8/layout/orgChart1"/>
-    <dgm:cxn modelId="{B9E4CA81-A307-47BD-A4AF-BFF6AACF5FA1}" type="presParOf" srcId="{BCC885F7-76FE-480F-871C-54D720AFEEBE}" destId="{40767B9A-0F0B-489A-9C29-04F7647631AF}" srcOrd="0" destOrd="0" presId="urn:microsoft.com/office/officeart/2005/8/layout/orgChart1"/>
-    <dgm:cxn modelId="{6CB3E5B3-FC53-43C8-8CAD-E0F2AE729F60}" type="presParOf" srcId="{BCC885F7-76FE-480F-871C-54D720AFEEBE}" destId="{4DF6C98C-BA6D-4653-93DF-5C8839FA202F}" srcOrd="1" destOrd="0" presId="urn:microsoft.com/office/officeart/2005/8/layout/orgChart1"/>
-    <dgm:cxn modelId="{E6B73107-83CD-4C9F-9431-0C7508DFD41C}" type="presParOf" srcId="{817BEF7F-B7F1-4CDD-99DE-9505F6DBAA5D}" destId="{7D6AE35D-6736-4C71-A9B0-3EB932438E70}" srcOrd="1" destOrd="0" presId="urn:microsoft.com/office/officeart/2005/8/layout/orgChart1"/>
-    <dgm:cxn modelId="{71EA94A2-BE07-4B49-AA40-E60BEEF50511}" type="presParOf" srcId="{7D6AE35D-6736-4C71-A9B0-3EB932438E70}" destId="{187B209C-6D88-4C09-8D7B-9CF6B2F34B52}" srcOrd="0" destOrd="0" presId="urn:microsoft.com/office/officeart/2005/8/layout/orgChart1"/>
-    <dgm:cxn modelId="{C63133EC-FC62-4974-AAF3-DBA9488E2EAC}" type="presParOf" srcId="{7D6AE35D-6736-4C71-A9B0-3EB932438E70}" destId="{E04512B1-2930-431C-A49F-6B4FE0FC9BE2}" srcOrd="1" destOrd="0" presId="urn:microsoft.com/office/officeart/2005/8/layout/orgChart1"/>
-    <dgm:cxn modelId="{CD0FE39E-85A1-4630-9666-A3C459FB8159}" type="presParOf" srcId="{E04512B1-2930-431C-A49F-6B4FE0FC9BE2}" destId="{2BF460F7-E756-46E5-9510-8D1CDAE4E528}" srcOrd="0" destOrd="0" presId="urn:microsoft.com/office/officeart/2005/8/layout/orgChart1"/>
-    <dgm:cxn modelId="{C8E8A90D-F375-47A8-A9AF-91EC954F8F09}" type="presParOf" srcId="{2BF460F7-E756-46E5-9510-8D1CDAE4E528}" destId="{692E5346-8453-4A40-982B-6946BCA9A9B9}" srcOrd="0" destOrd="0" presId="urn:microsoft.com/office/officeart/2005/8/layout/orgChart1"/>
-    <dgm:cxn modelId="{67129642-EE5B-4909-954C-B8B19B7D8190}" type="presParOf" srcId="{2BF460F7-E756-46E5-9510-8D1CDAE4E528}" destId="{486A8466-DAE8-4DD7-8E8F-C48272664366}" srcOrd="1" destOrd="0" presId="urn:microsoft.com/office/officeart/2005/8/layout/orgChart1"/>
-    <dgm:cxn modelId="{83F40428-7813-4223-9E14-2355C9C03B76}" type="presParOf" srcId="{E04512B1-2930-431C-A49F-6B4FE0FC9BE2}" destId="{554D5ECC-0E4A-46A0-B4DD-B377E64EEF27}" srcOrd="1" destOrd="0" presId="urn:microsoft.com/office/officeart/2005/8/layout/orgChart1"/>
-    <dgm:cxn modelId="{D5238FA1-23C9-4F0B-9CFC-B458C4BA57A3}" type="presParOf" srcId="{E04512B1-2930-431C-A49F-6B4FE0FC9BE2}" destId="{79DA3869-1016-4F4D-BE6D-FAF28FF2DB38}" srcOrd="2" destOrd="0" presId="urn:microsoft.com/office/officeart/2005/8/layout/orgChart1"/>
-    <dgm:cxn modelId="{8B366628-9A2F-45F1-8D55-BEB47E9F479B}" type="presParOf" srcId="{817BEF7F-B7F1-4CDD-99DE-9505F6DBAA5D}" destId="{D1C60AD4-C4E1-49C1-A595-C51E76AE5710}" srcOrd="2" destOrd="0" presId="urn:microsoft.com/office/officeart/2005/8/layout/orgChart1"/>
-    <dgm:cxn modelId="{05FC4E95-48E1-411B-99D3-F220AE064A50}" type="presParOf" srcId="{D1C60AD4-C4E1-49C1-A595-C51E76AE5710}" destId="{47E5C50F-BF83-4485-9811-71CEDB4C606F}" srcOrd="0" destOrd="0" presId="urn:microsoft.com/office/officeart/2005/8/layout/orgChart1"/>
-    <dgm:cxn modelId="{781C4F17-84D1-4F7B-A278-8B4D26168038}" type="presParOf" srcId="{D1C60AD4-C4E1-49C1-A595-C51E76AE5710}" destId="{1BF16E62-C449-460D-9E1C-37603DC5DBD1}" srcOrd="1" destOrd="0" presId="urn:microsoft.com/office/officeart/2005/8/layout/orgChart1"/>
-    <dgm:cxn modelId="{25D4A921-E663-4165-AF01-B7B0A10E9C62}" type="presParOf" srcId="{1BF16E62-C449-460D-9E1C-37603DC5DBD1}" destId="{7AC7DAB3-FCF0-4FC0-A29C-9E227039FDB3}" srcOrd="0" destOrd="0" presId="urn:microsoft.com/office/officeart/2005/8/layout/orgChart1"/>
-    <dgm:cxn modelId="{32D7CAB3-2334-467A-8AAA-FC2787AECAEF}" type="presParOf" srcId="{7AC7DAB3-FCF0-4FC0-A29C-9E227039FDB3}" destId="{B12AB84D-AEEA-478C-B3D3-605DE42433D2}" srcOrd="0" destOrd="0" presId="urn:microsoft.com/office/officeart/2005/8/layout/orgChart1"/>
-    <dgm:cxn modelId="{EBF49F13-EE81-4B6F-A336-C2A9C66E7B3D}" type="presParOf" srcId="{7AC7DAB3-FCF0-4FC0-A29C-9E227039FDB3}" destId="{48F4A863-1F90-462F-B183-AB8AEBDBCB6D}" srcOrd="1" destOrd="0" presId="urn:microsoft.com/office/officeart/2005/8/layout/orgChart1"/>
-    <dgm:cxn modelId="{C9748688-EBA7-4F4D-9858-C125CD6805AA}" type="presParOf" srcId="{1BF16E62-C449-460D-9E1C-37603DC5DBD1}" destId="{95342586-E49B-407C-A698-32C1ECB6BEF9}" srcOrd="1" destOrd="0" presId="urn:microsoft.com/office/officeart/2005/8/layout/orgChart1"/>
-    <dgm:cxn modelId="{9D2DD2CE-5E55-4DAE-A795-60B3299B986C}" type="presParOf" srcId="{1BF16E62-C449-460D-9E1C-37603DC5DBD1}" destId="{565187F1-FE6A-423B-9D7E-0435D2BF5DE0}" srcOrd="2" destOrd="0" presId="urn:microsoft.com/office/officeart/2005/8/layout/orgChart1"/>
-    <dgm:cxn modelId="{0572E435-E8E3-43B6-B114-C1F1443B85A4}" type="presParOf" srcId="{565187F1-FE6A-423B-9D7E-0435D2BF5DE0}" destId="{1A1BE734-CBDF-4F25-8412-2843EB5A4893}" srcOrd="0" destOrd="0" presId="urn:microsoft.com/office/officeart/2005/8/layout/orgChart1"/>
-    <dgm:cxn modelId="{042A6BAA-EDD7-47E2-B08B-FBE81DCF7A66}" type="presParOf" srcId="{565187F1-FE6A-423B-9D7E-0435D2BF5DE0}" destId="{E183D42E-E6AC-4383-BEDC-1151981226CE}" srcOrd="1" destOrd="0" presId="urn:microsoft.com/office/officeart/2005/8/layout/orgChart1"/>
-    <dgm:cxn modelId="{0F68AF83-E292-4282-9CAC-70296F250FF1}" type="presParOf" srcId="{E183D42E-E6AC-4383-BEDC-1151981226CE}" destId="{C0CC9056-06EF-46EA-97A4-8FAB8E7548E1}" srcOrd="0" destOrd="0" presId="urn:microsoft.com/office/officeart/2005/8/layout/orgChart1"/>
-    <dgm:cxn modelId="{0E398CF4-143B-4D14-9FBD-71DD840C1DDF}" type="presParOf" srcId="{C0CC9056-06EF-46EA-97A4-8FAB8E7548E1}" destId="{0B9B6EE7-F245-49B2-BBDE-1D00D7D218E4}" srcOrd="0" destOrd="0" presId="urn:microsoft.com/office/officeart/2005/8/layout/orgChart1"/>
-    <dgm:cxn modelId="{844CF0AF-4C78-4B03-97F3-B7FB0F39D9A9}" type="presParOf" srcId="{C0CC9056-06EF-46EA-97A4-8FAB8E7548E1}" destId="{EDE4A489-FBF3-4BD8-B5C7-CEA4B272D929}" srcOrd="1" destOrd="0" presId="urn:microsoft.com/office/officeart/2005/8/layout/orgChart1"/>
-    <dgm:cxn modelId="{773AF105-4120-4BAF-9169-5044379C3EEC}" type="presParOf" srcId="{E183D42E-E6AC-4383-BEDC-1151981226CE}" destId="{42E7455E-266C-4609-A867-185CC3EBD25D}" srcOrd="1" destOrd="0" presId="urn:microsoft.com/office/officeart/2005/8/layout/orgChart1"/>
-    <dgm:cxn modelId="{56582B09-1294-47EE-A611-D5256C2F3CB2}" type="presParOf" srcId="{E183D42E-E6AC-4383-BEDC-1151981226CE}" destId="{920D4B1A-ED25-4BD1-BA5C-8EBA2E67D113}" srcOrd="2" destOrd="0" presId="urn:microsoft.com/office/officeart/2005/8/layout/orgChart1"/>
+    <dgm:cxn modelId="{809B2D0B-0FC6-4698-BA9F-F61D93CEB85A}" srcId="{09691B4E-C62A-4FE2-86C7-D66CA99D84A9}" destId="{330E9E55-213F-418D-B009-72DFF282A171}" srcOrd="0" destOrd="0" parTransId="{A7EAD779-4B6D-407B-A6D6-1AF6BF6B71AB}" sibTransId="{55479A89-46C9-402C-A9E1-3F1200786909}"/>
+    <dgm:cxn modelId="{BD832620-6D7A-40AD-B0DD-B386955BBF2F}" type="presOf" srcId="{D0C2ACCA-A0D3-4D86-829E-EF0B8AEAA421}" destId="{E20DD563-4C7F-488B-98F7-449803B5E305}" srcOrd="0" destOrd="0" presId="urn:microsoft.com/office/officeart/2005/8/layout/pictureOrgChart+Icon"/>
+    <dgm:cxn modelId="{B6BCBA23-6EC4-4607-A5DD-FE216AA4CEA5}" type="presOf" srcId="{EA4D2194-36B7-4FE6-8CD1-F88261B95E75}" destId="{C32FD7F3-FE3C-45EB-A660-40806D142DEB}" srcOrd="0" destOrd="0" presId="urn:microsoft.com/office/officeart/2005/8/layout/pictureOrgChart+Icon"/>
+    <dgm:cxn modelId="{49126F25-C140-4709-AC86-0E488D8A8E63}" type="presOf" srcId="{D0C2ACCA-A0D3-4D86-829E-EF0B8AEAA421}" destId="{F129E062-9CEA-4FF0-8D59-4F5961620445}" srcOrd="1" destOrd="0" presId="urn:microsoft.com/office/officeart/2005/8/layout/pictureOrgChart+Icon"/>
+    <dgm:cxn modelId="{649E312D-D4EA-442A-BDC3-826917BFDB32}" srcId="{330E9E55-213F-418D-B009-72DFF282A171}" destId="{1C406D5D-28B7-4824-8D0E-F8E576AFE71E}" srcOrd="0" destOrd="0" parTransId="{A2484D57-7CF2-4E5F-932C-B53943DC041E}" sibTransId="{AE07D34C-877B-4638-837A-0B3F00331D66}"/>
+    <dgm:cxn modelId="{BC8F6131-603B-4247-9E7D-0F7BF044E4C0}" type="presOf" srcId="{330E9E55-213F-418D-B009-72DFF282A171}" destId="{65F724A1-5677-4B1D-8450-9FA69AEB0EE7}" srcOrd="0" destOrd="0" presId="urn:microsoft.com/office/officeart/2005/8/layout/pictureOrgChart+Icon"/>
+    <dgm:cxn modelId="{84D7A164-A11A-4545-82B6-C3CDA2CE4B38}" srcId="{330E9E55-213F-418D-B009-72DFF282A171}" destId="{D0C2ACCA-A0D3-4D86-829E-EF0B8AEAA421}" srcOrd="1" destOrd="0" parTransId="{EA4D2194-36B7-4FE6-8CD1-F88261B95E75}" sibTransId="{E90C9D08-886F-4CAA-9757-98732156836C}"/>
+    <dgm:cxn modelId="{8E77654D-E7DE-4144-823F-F020B8E1BF6F}" type="presOf" srcId="{A2484D57-7CF2-4E5F-932C-B53943DC041E}" destId="{C3A039F2-3BB1-4F31-A224-92C956D199AB}" srcOrd="0" destOrd="0" presId="urn:microsoft.com/office/officeart/2005/8/layout/pictureOrgChart+Icon"/>
+    <dgm:cxn modelId="{FF5C5F6E-DBCE-4FCF-AC69-844B57C0A62C}" srcId="{D0C2ACCA-A0D3-4D86-829E-EF0B8AEAA421}" destId="{65330C2D-5673-4B4D-9592-BEFD0D4945E1}" srcOrd="0" destOrd="0" parTransId="{4201AA69-B2DE-4FCD-A5EE-15CF97CC2EC4}" sibTransId="{F252AFA8-51CA-497C-8602-1FD49EFF83F5}"/>
+    <dgm:cxn modelId="{E94E827A-54C1-44A4-8192-64CDB6A29B0E}" type="presOf" srcId="{65330C2D-5673-4B4D-9592-BEFD0D4945E1}" destId="{87B44B90-0C7D-4F22-825A-52F34EFE71E4}" srcOrd="0" destOrd="0" presId="urn:microsoft.com/office/officeart/2005/8/layout/pictureOrgChart+Icon"/>
+    <dgm:cxn modelId="{F3499986-FA39-486E-8D2F-876A4FA19779}" type="presOf" srcId="{09691B4E-C62A-4FE2-86C7-D66CA99D84A9}" destId="{7A72294B-ABEA-46DD-8490-233C9E3A8E96}" srcOrd="0" destOrd="0" presId="urn:microsoft.com/office/officeart/2005/8/layout/pictureOrgChart+Icon"/>
+    <dgm:cxn modelId="{D5882E97-8839-4745-9ED7-2301BE3F585F}" type="presOf" srcId="{1C406D5D-28B7-4824-8D0E-F8E576AFE71E}" destId="{39011096-CF31-4590-87F0-2E6AC5750F06}" srcOrd="0" destOrd="0" presId="urn:microsoft.com/office/officeart/2005/8/layout/pictureOrgChart+Icon"/>
+    <dgm:cxn modelId="{8D3D77AB-DFA7-43BB-B292-264D997791CB}" type="presOf" srcId="{65330C2D-5673-4B4D-9592-BEFD0D4945E1}" destId="{E6F381BF-C52E-4653-810C-6E620E0FBF39}" srcOrd="1" destOrd="0" presId="urn:microsoft.com/office/officeart/2005/8/layout/pictureOrgChart+Icon"/>
+    <dgm:cxn modelId="{385B31CE-3229-408B-A089-7ED5B7F60102}" type="presOf" srcId="{1C406D5D-28B7-4824-8D0E-F8E576AFE71E}" destId="{D142DA1F-2053-4C3E-BAD2-E9210DD0049F}" srcOrd="1" destOrd="0" presId="urn:microsoft.com/office/officeart/2005/8/layout/pictureOrgChart+Icon"/>
+    <dgm:cxn modelId="{0097DEFA-2322-43E8-A60C-A126BA516832}" type="presOf" srcId="{330E9E55-213F-418D-B009-72DFF282A171}" destId="{84F1B473-AAEB-4B50-9530-D2C916260B74}" srcOrd="1" destOrd="0" presId="urn:microsoft.com/office/officeart/2005/8/layout/pictureOrgChart+Icon"/>
+    <dgm:cxn modelId="{1A8D15FD-A31E-4AB5-9EB2-CC48BD308D41}" type="presOf" srcId="{4201AA69-B2DE-4FCD-A5EE-15CF97CC2EC4}" destId="{AF7E8FEA-80E2-4306-BB24-9AF4B3C5DAB0}" srcOrd="0" destOrd="0" presId="urn:microsoft.com/office/officeart/2005/8/layout/pictureOrgChart+Icon"/>
+    <dgm:cxn modelId="{E36E8488-6FD8-4654-82AA-684D82EEBF3A}" type="presParOf" srcId="{7A72294B-ABEA-46DD-8490-233C9E3A8E96}" destId="{ED1BB6C1-6DDF-4986-8FEB-6CD66EF36018}" srcOrd="0" destOrd="0" presId="urn:microsoft.com/office/officeart/2005/8/layout/pictureOrgChart+Icon"/>
+    <dgm:cxn modelId="{C87402C9-8D6B-4EC3-8C19-2B6C6693992B}" type="presParOf" srcId="{ED1BB6C1-6DDF-4986-8FEB-6CD66EF36018}" destId="{8EBF8D61-7541-45E7-8807-B7F68C3CF593}" srcOrd="0" destOrd="0" presId="urn:microsoft.com/office/officeart/2005/8/layout/pictureOrgChart+Icon"/>
+    <dgm:cxn modelId="{55F033AD-364F-4E94-9D4D-A360DB635BE6}" type="presParOf" srcId="{8EBF8D61-7541-45E7-8807-B7F68C3CF593}" destId="{65F724A1-5677-4B1D-8450-9FA69AEB0EE7}" srcOrd="0" destOrd="0" presId="urn:microsoft.com/office/officeart/2005/8/layout/pictureOrgChart+Icon"/>
+    <dgm:cxn modelId="{EEF0AA73-D232-4756-A4D1-59095E98831B}" type="presParOf" srcId="{8EBF8D61-7541-45E7-8807-B7F68C3CF593}" destId="{E26C24AF-F31A-4342-A2ED-E0970E0275F7}" srcOrd="1" destOrd="0" presId="urn:microsoft.com/office/officeart/2005/8/layout/pictureOrgChart+Icon"/>
+    <dgm:cxn modelId="{A6B841F9-5382-4DE2-AF55-7A99CEF2E31F}" type="presParOf" srcId="{8EBF8D61-7541-45E7-8807-B7F68C3CF593}" destId="{84F1B473-AAEB-4B50-9530-D2C916260B74}" srcOrd="2" destOrd="0" presId="urn:microsoft.com/office/officeart/2005/8/layout/pictureOrgChart+Icon"/>
+    <dgm:cxn modelId="{5B9268D1-9354-4C59-A84E-D1314F83C92C}" type="presParOf" srcId="{ED1BB6C1-6DDF-4986-8FEB-6CD66EF36018}" destId="{09CC94F6-532C-4DC7-8825-2C79A165AA95}" srcOrd="1" destOrd="0" presId="urn:microsoft.com/office/officeart/2005/8/layout/pictureOrgChart+Icon"/>
+    <dgm:cxn modelId="{0282FF20-68FF-48D8-8103-6DF8F7E989FC}" type="presParOf" srcId="{09CC94F6-532C-4DC7-8825-2C79A165AA95}" destId="{C32FD7F3-FE3C-45EB-A660-40806D142DEB}" srcOrd="0" destOrd="0" presId="urn:microsoft.com/office/officeart/2005/8/layout/pictureOrgChart+Icon"/>
+    <dgm:cxn modelId="{8C7A58A5-710E-4644-9C39-73A64FEED8A8}" type="presParOf" srcId="{09CC94F6-532C-4DC7-8825-2C79A165AA95}" destId="{CE13542A-EDB4-487C-9DF8-4BB499746A1D}" srcOrd="1" destOrd="0" presId="urn:microsoft.com/office/officeart/2005/8/layout/pictureOrgChart+Icon"/>
+    <dgm:cxn modelId="{998AFEF1-34FA-479F-B05E-4A32B4A463B3}" type="presParOf" srcId="{CE13542A-EDB4-487C-9DF8-4BB499746A1D}" destId="{4C06D3C2-BEC1-452F-92AC-A0B73069C8D4}" srcOrd="0" destOrd="0" presId="urn:microsoft.com/office/officeart/2005/8/layout/pictureOrgChart+Icon"/>
+    <dgm:cxn modelId="{C98E7B0F-3C1A-468D-885A-BF17638F3EC0}" type="presParOf" srcId="{4C06D3C2-BEC1-452F-92AC-A0B73069C8D4}" destId="{E20DD563-4C7F-488B-98F7-449803B5E305}" srcOrd="0" destOrd="0" presId="urn:microsoft.com/office/officeart/2005/8/layout/pictureOrgChart+Icon"/>
+    <dgm:cxn modelId="{B6CAAE25-59AA-4747-9DED-E91ECFB5A952}" type="presParOf" srcId="{4C06D3C2-BEC1-452F-92AC-A0B73069C8D4}" destId="{CBC7A6BA-DBF4-49B3-A920-D36DAB4BB02C}" srcOrd="1" destOrd="0" presId="urn:microsoft.com/office/officeart/2005/8/layout/pictureOrgChart+Icon"/>
+    <dgm:cxn modelId="{64CFFA3D-8A07-4E4C-A165-71877BC019C2}" type="presParOf" srcId="{4C06D3C2-BEC1-452F-92AC-A0B73069C8D4}" destId="{F129E062-9CEA-4FF0-8D59-4F5961620445}" srcOrd="2" destOrd="0" presId="urn:microsoft.com/office/officeart/2005/8/layout/pictureOrgChart+Icon"/>
+    <dgm:cxn modelId="{D734E733-E2AA-49B1-8C48-DBF00702BC13}" type="presParOf" srcId="{CE13542A-EDB4-487C-9DF8-4BB499746A1D}" destId="{C3618338-6DF5-4C0B-A6BA-ADC17EBD1DDF}" srcOrd="1" destOrd="0" presId="urn:microsoft.com/office/officeart/2005/8/layout/pictureOrgChart+Icon"/>
+    <dgm:cxn modelId="{6E05E7E7-903B-4399-9DE9-E5A61A6F5A03}" type="presParOf" srcId="{CE13542A-EDB4-487C-9DF8-4BB499746A1D}" destId="{D72524BB-5FD2-4467-87F0-BD7816E42F7A}" srcOrd="2" destOrd="0" presId="urn:microsoft.com/office/officeart/2005/8/layout/pictureOrgChart+Icon"/>
+    <dgm:cxn modelId="{F23FBA4A-298E-45C0-B08A-8A89FB32F379}" type="presParOf" srcId="{D72524BB-5FD2-4467-87F0-BD7816E42F7A}" destId="{AF7E8FEA-80E2-4306-BB24-9AF4B3C5DAB0}" srcOrd="0" destOrd="0" presId="urn:microsoft.com/office/officeart/2005/8/layout/pictureOrgChart+Icon"/>
+    <dgm:cxn modelId="{CD1E019C-1887-432B-8D30-F4191F94CE37}" type="presParOf" srcId="{D72524BB-5FD2-4467-87F0-BD7816E42F7A}" destId="{E8D35A17-0BE2-4675-9712-154CF221DEC7}" srcOrd="1" destOrd="0" presId="urn:microsoft.com/office/officeart/2005/8/layout/pictureOrgChart+Icon"/>
+    <dgm:cxn modelId="{EBB55AC7-5470-4AA7-B653-DDB8EFA86DE2}" type="presParOf" srcId="{E8D35A17-0BE2-4675-9712-154CF221DEC7}" destId="{4D164B9F-1E02-476E-982C-7E573FE563A2}" srcOrd="0" destOrd="0" presId="urn:microsoft.com/office/officeart/2005/8/layout/pictureOrgChart+Icon"/>
+    <dgm:cxn modelId="{26A99958-DC44-450B-BEDB-3059CCC76294}" type="presParOf" srcId="{4D164B9F-1E02-476E-982C-7E573FE563A2}" destId="{87B44B90-0C7D-4F22-825A-52F34EFE71E4}" srcOrd="0" destOrd="0" presId="urn:microsoft.com/office/officeart/2005/8/layout/pictureOrgChart+Icon"/>
+    <dgm:cxn modelId="{87C74119-AC07-40A3-8726-28B60283EBB8}" type="presParOf" srcId="{4D164B9F-1E02-476E-982C-7E573FE563A2}" destId="{4B5B8D77-5B5F-4048-8685-7AB41802E6E5}" srcOrd="1" destOrd="0" presId="urn:microsoft.com/office/officeart/2005/8/layout/pictureOrgChart+Icon"/>
+    <dgm:cxn modelId="{CF3C28B2-D076-456D-80E7-697DFCA65F33}" type="presParOf" srcId="{4D164B9F-1E02-476E-982C-7E573FE563A2}" destId="{E6F381BF-C52E-4653-810C-6E620E0FBF39}" srcOrd="2" destOrd="0" presId="urn:microsoft.com/office/officeart/2005/8/layout/pictureOrgChart+Icon"/>
+    <dgm:cxn modelId="{B2B90CEE-2C3D-415E-804A-84428F09480A}" type="presParOf" srcId="{E8D35A17-0BE2-4675-9712-154CF221DEC7}" destId="{CF332975-CD7C-4F7B-B048-331E5BBC1627}" srcOrd="1" destOrd="0" presId="urn:microsoft.com/office/officeart/2005/8/layout/pictureOrgChart+Icon"/>
+    <dgm:cxn modelId="{7C3BBE38-58C3-4761-A80A-1469D16F9144}" type="presParOf" srcId="{E8D35A17-0BE2-4675-9712-154CF221DEC7}" destId="{A8DFF8FE-2759-4CBF-9FC5-7D13BB040DCD}" srcOrd="2" destOrd="0" presId="urn:microsoft.com/office/officeart/2005/8/layout/pictureOrgChart+Icon"/>
+    <dgm:cxn modelId="{AFA12F91-9B64-454E-B6EB-0B2AE8946192}" type="presParOf" srcId="{ED1BB6C1-6DDF-4986-8FEB-6CD66EF36018}" destId="{75F7F4B2-FD61-4E05-9511-D9DFA64FE797}" srcOrd="2" destOrd="0" presId="urn:microsoft.com/office/officeart/2005/8/layout/pictureOrgChart+Icon"/>
+    <dgm:cxn modelId="{632CCFE7-9D6A-4219-8A3E-D5A8D209588B}" type="presParOf" srcId="{75F7F4B2-FD61-4E05-9511-D9DFA64FE797}" destId="{C3A039F2-3BB1-4F31-A224-92C956D199AB}" srcOrd="0" destOrd="0" presId="urn:microsoft.com/office/officeart/2005/8/layout/pictureOrgChart+Icon"/>
+    <dgm:cxn modelId="{90B8C9BC-2662-4013-BC87-1B65D10BC6C9}" type="presParOf" srcId="{75F7F4B2-FD61-4E05-9511-D9DFA64FE797}" destId="{F94B6ED5-D659-4868-9CFF-568F64136B94}" srcOrd="1" destOrd="0" presId="urn:microsoft.com/office/officeart/2005/8/layout/pictureOrgChart+Icon"/>
+    <dgm:cxn modelId="{16822BC4-7263-40A0-9281-F5532D99F083}" type="presParOf" srcId="{F94B6ED5-D659-4868-9CFF-568F64136B94}" destId="{C826CB45-08D7-410D-91DC-CC78C3CCB125}" srcOrd="0" destOrd="0" presId="urn:microsoft.com/office/officeart/2005/8/layout/pictureOrgChart+Icon"/>
+    <dgm:cxn modelId="{67DFF01C-F9C3-4455-A09E-062407EA5059}" type="presParOf" srcId="{C826CB45-08D7-410D-91DC-CC78C3CCB125}" destId="{39011096-CF31-4590-87F0-2E6AC5750F06}" srcOrd="0" destOrd="0" presId="urn:microsoft.com/office/officeart/2005/8/layout/pictureOrgChart+Icon"/>
+    <dgm:cxn modelId="{A01EA575-15A9-4779-BD9E-1C462C6E1E65}" type="presParOf" srcId="{C826CB45-08D7-410D-91DC-CC78C3CCB125}" destId="{C94BC069-BA8D-4140-88A8-30374D281B6D}" srcOrd="1" destOrd="0" presId="urn:microsoft.com/office/officeart/2005/8/layout/pictureOrgChart+Icon"/>
+    <dgm:cxn modelId="{4C5E227A-078B-4BC8-A52E-FB44ECFC273A}" type="presParOf" srcId="{C826CB45-08D7-410D-91DC-CC78C3CCB125}" destId="{D142DA1F-2053-4C3E-BAD2-E9210DD0049F}" srcOrd="2" destOrd="0" presId="urn:microsoft.com/office/officeart/2005/8/layout/pictureOrgChart+Icon"/>
+    <dgm:cxn modelId="{6463F724-3C5B-40E0-97A2-583406630619}" type="presParOf" srcId="{F94B6ED5-D659-4868-9CFF-568F64136B94}" destId="{520FFC4A-97F1-4B36-92D3-4ACD06654E95}" srcOrd="1" destOrd="0" presId="urn:microsoft.com/office/officeart/2005/8/layout/pictureOrgChart+Icon"/>
+    <dgm:cxn modelId="{4948FED1-D81B-46FA-A3F2-F7F3428FABBF}" type="presParOf" srcId="{F94B6ED5-D659-4868-9CFF-568F64136B94}" destId="{A6987B65-A777-42F7-A9E5-CBFEC62A4760}" srcOrd="2" destOrd="0" presId="urn:microsoft.com/office/officeart/2005/8/layout/pictureOrgChart+Icon"/>
   </dgm:cxnLst>
   <dgm:bg/>
   <dgm:whole/>
@@ -3526,15 +3578,15 @@
       <dsp:cNvGrpSpPr/>
     </dsp:nvGrpSpPr>
     <dsp:grpSpPr/>
-    <dsp:sp modelId="{1A1BE734-CBDF-4F25-8412-2843EB5A4893}">
+    <dsp:sp modelId="{C3A039F2-3BB1-4F31-A224-92C956D199AB}">
       <dsp:nvSpPr>
         <dsp:cNvPr id="0" name=""/>
         <dsp:cNvSpPr/>
       </dsp:nvSpPr>
       <dsp:spPr>
         <a:xfrm>
-          <a:off x="1896237" y="1738474"/>
-          <a:ext cx="150650" cy="659990"/>
+          <a:off x="3013022" y="749120"/>
+          <a:ext cx="157091" cy="688209"/>
         </a:xfrm>
         <a:custGeom>
           <a:avLst/>
@@ -3545,13 +3597,71 @@
           <a:pathLst>
             <a:path>
               <a:moveTo>
-                <a:pt x="150650" y="0"/>
+                <a:pt x="157091" y="0"/>
               </a:moveTo>
               <a:lnTo>
-                <a:pt x="150650" y="659990"/>
+                <a:pt x="157091" y="688209"/>
               </a:lnTo>
               <a:lnTo>
-                <a:pt x="0" y="659990"/>
+                <a:pt x="0" y="688209"/>
+              </a:lnTo>
+            </a:path>
+          </a:pathLst>
+        </a:custGeom>
+        <a:noFill/>
+        <a:ln w="15875" cap="rnd" cmpd="sng" algn="ctr">
+          <a:solidFill>
+            <a:schemeClr val="accent1">
+              <a:shade val="60000"/>
+              <a:hueOff val="0"/>
+              <a:satOff val="0"/>
+              <a:lumOff val="0"/>
+              <a:alphaOff val="0"/>
+            </a:schemeClr>
+          </a:solidFill>
+          <a:prstDash val="solid"/>
+        </a:ln>
+        <a:effectLst/>
+      </dsp:spPr>
+      <dsp:style>
+        <a:lnRef idx="2">
+          <a:scrgbClr r="0" g="0" b="0"/>
+        </a:lnRef>
+        <a:fillRef idx="0">
+          <a:scrgbClr r="0" g="0" b="0"/>
+        </a:fillRef>
+        <a:effectRef idx="0">
+          <a:scrgbClr r="0" g="0" b="0"/>
+        </a:effectRef>
+        <a:fontRef idx="minor"/>
+      </dsp:style>
+    </dsp:sp>
+    <dsp:sp modelId="{AF7E8FEA-80E2-4306-BB24-9AF4B3C5DAB0}">
+      <dsp:nvSpPr>
+        <dsp:cNvPr id="0" name=""/>
+        <dsp:cNvSpPr/>
+      </dsp:nvSpPr>
+      <dsp:spPr>
+        <a:xfrm>
+          <a:off x="3013022" y="2873593"/>
+          <a:ext cx="157091" cy="688209"/>
+        </a:xfrm>
+        <a:custGeom>
+          <a:avLst/>
+          <a:gdLst/>
+          <a:ahLst/>
+          <a:cxnLst/>
+          <a:rect l="0" t="0" r="0" b="0"/>
+          <a:pathLst>
+            <a:path>
+              <a:moveTo>
+                <a:pt x="157091" y="0"/>
+              </a:moveTo>
+              <a:lnTo>
+                <a:pt x="157091" y="688209"/>
+              </a:lnTo>
+              <a:lnTo>
+                <a:pt x="0" y="688209"/>
               </a:lnTo>
             </a:path>
           </a:pathLst>
@@ -3584,15 +3694,15 @@
         <a:fontRef idx="minor"/>
       </dsp:style>
     </dsp:sp>
-    <dsp:sp modelId="{47E5C50F-BF83-4485-9811-71CEDB4C606F}">
+    <dsp:sp modelId="{C32FD7F3-FE3C-45EB-A660-40806D142DEB}">
       <dsp:nvSpPr>
         <dsp:cNvPr id="0" name=""/>
         <dsp:cNvSpPr/>
       </dsp:nvSpPr>
       <dsp:spPr>
         <a:xfrm>
-          <a:off x="2764268" y="719793"/>
-          <a:ext cx="150650" cy="659990"/>
+          <a:off x="3124394" y="749120"/>
+          <a:ext cx="91440" cy="1376418"/>
         </a:xfrm>
         <a:custGeom>
           <a:avLst/>
@@ -3603,13 +3713,10 @@
           <a:pathLst>
             <a:path>
               <a:moveTo>
-                <a:pt x="150650" y="0"/>
+                <a:pt x="45720" y="0"/>
               </a:moveTo>
               <a:lnTo>
-                <a:pt x="150650" y="659990"/>
-              </a:lnTo>
-              <a:lnTo>
-                <a:pt x="0" y="659990"/>
+                <a:pt x="45720" y="1376418"/>
               </a:lnTo>
             </a:path>
           </a:pathLst>
@@ -3642,70 +3749,15 @@
         <a:fontRef idx="minor"/>
       </dsp:style>
     </dsp:sp>
-    <dsp:sp modelId="{187B209C-6D88-4C09-8D7B-9CF6B2F34B52}">
+    <dsp:sp modelId="{65F724A1-5677-4B1D-8450-9FA69AEB0EE7}">
       <dsp:nvSpPr>
         <dsp:cNvPr id="0" name=""/>
         <dsp:cNvSpPr/>
       </dsp:nvSpPr>
       <dsp:spPr>
         <a:xfrm>
-          <a:off x="2869198" y="719793"/>
-          <a:ext cx="91440" cy="2338662"/>
-        </a:xfrm>
-        <a:custGeom>
-          <a:avLst/>
-          <a:gdLst/>
-          <a:ahLst/>
-          <a:cxnLst/>
-          <a:rect l="0" t="0" r="0" b="0"/>
-          <a:pathLst>
-            <a:path>
-              <a:moveTo>
-                <a:pt x="45720" y="0"/>
-              </a:moveTo>
-              <a:lnTo>
-                <a:pt x="45720" y="2338662"/>
-              </a:lnTo>
-            </a:path>
-          </a:pathLst>
-        </a:custGeom>
-        <a:noFill/>
-        <a:ln w="15875" cap="rnd" cmpd="sng" algn="ctr">
-          <a:solidFill>
-            <a:schemeClr val="accent1">
-              <a:shade val="60000"/>
-              <a:hueOff val="0"/>
-              <a:satOff val="0"/>
-              <a:lumOff val="0"/>
-              <a:alphaOff val="0"/>
-            </a:schemeClr>
-          </a:solidFill>
-          <a:prstDash val="solid"/>
-        </a:ln>
-        <a:effectLst/>
-      </dsp:spPr>
-      <dsp:style>
-        <a:lnRef idx="2">
-          <a:scrgbClr r="0" g="0" b="0"/>
-        </a:lnRef>
-        <a:fillRef idx="0">
-          <a:scrgbClr r="0" g="0" b="0"/>
-        </a:fillRef>
-        <a:effectRef idx="0">
-          <a:scrgbClr r="0" g="0" b="0"/>
-        </a:effectRef>
-        <a:fontRef idx="minor"/>
-      </dsp:style>
-    </dsp:sp>
-    <dsp:sp modelId="{40767B9A-0F0B-489A-9C29-04F7647631AF}">
-      <dsp:nvSpPr>
-        <dsp:cNvPr id="0" name=""/>
-        <dsp:cNvSpPr/>
-      </dsp:nvSpPr>
-      <dsp:spPr>
-        <a:xfrm>
-          <a:off x="2197537" y="2412"/>
-          <a:ext cx="1434762" cy="717381"/>
+          <a:off x="2422060" y="1066"/>
+          <a:ext cx="1496107" cy="748053"/>
         </a:xfrm>
         <a:prstGeom prst="rect">
           <a:avLst/>
@@ -3746,12 +3798,12 @@
         </a:fontRef>
       </dsp:style>
       <dsp:txBody>
-        <a:bodyPr spcFirstLastPara="0" vert="horz" wrap="square" lIns="12700" tIns="12700" rIns="12700" bIns="12700" numCol="1" spcCol="1270" anchor="ctr" anchorCtr="0">
+        <a:bodyPr spcFirstLastPara="0" vert="horz" wrap="square" lIns="554183" tIns="9525" rIns="9525" bIns="9525" numCol="1" spcCol="1270" anchor="ctr" anchorCtr="0">
           <a:noAutofit/>
         </a:bodyPr>
         <a:lstStyle/>
         <a:p>
-          <a:pPr marL="0" lvl="0" indent="0" algn="ctr" defTabSz="889000">
+          <a:pPr marL="0" lvl="0" indent="0" algn="ctr" defTabSz="666750">
             <a:lnSpc>
               <a:spcPct val="90000"/>
             </a:lnSpc>
@@ -3764,26 +3816,72 @@
             <a:buNone/>
           </a:pPr>
           <a:r>
-            <a:rPr lang="en-US" sz="2000" kern="1200" dirty="0"/>
+            <a:rPr lang="en-US" sz="1500" kern="1200" dirty="0"/>
             <a:t>CEO</a:t>
           </a:r>
-          <a:endParaRPr lang="id-ID" sz="2000" kern="1200" dirty="0"/>
+          <a:endParaRPr lang="id-ID" sz="1500" kern="1200" dirty="0"/>
         </a:p>
       </dsp:txBody>
       <dsp:txXfrm>
-        <a:off x="2197537" y="2412"/>
-        <a:ext cx="1434762" cy="717381"/>
+        <a:off x="2422060" y="1066"/>
+        <a:ext cx="1496107" cy="748053"/>
       </dsp:txXfrm>
     </dsp:sp>
-    <dsp:sp modelId="{692E5346-8453-4A40-982B-6946BCA9A9B9}">
+    <dsp:sp modelId="{E26C24AF-F31A-4342-A2ED-E0970E0275F7}">
       <dsp:nvSpPr>
         <dsp:cNvPr id="0" name=""/>
         <dsp:cNvSpPr/>
       </dsp:nvSpPr>
       <dsp:spPr>
         <a:xfrm>
-          <a:off x="1978076" y="3058456"/>
-          <a:ext cx="1873684" cy="717381"/>
+          <a:off x="2496865" y="75872"/>
+          <a:ext cx="448832" cy="598442"/>
+        </a:xfrm>
+        <a:prstGeom prst="rect">
+          <a:avLst/>
+        </a:prstGeom>
+        <a:blipFill>
+          <a:blip xmlns:r="http://schemas.openxmlformats.org/officeDocument/2006/relationships" r:embed="rId1"/>
+          <a:srcRect/>
+          <a:stretch>
+            <a:fillRect l="-17000" r="-17000"/>
+          </a:stretch>
+        </a:blipFill>
+        <a:ln w="15875" cap="rnd" cmpd="sng" algn="ctr">
+          <a:solidFill>
+            <a:schemeClr val="lt1">
+              <a:hueOff val="0"/>
+              <a:satOff val="0"/>
+              <a:lumOff val="0"/>
+              <a:alphaOff val="0"/>
+            </a:schemeClr>
+          </a:solidFill>
+          <a:prstDash val="solid"/>
+        </a:ln>
+        <a:effectLst/>
+      </dsp:spPr>
+      <dsp:style>
+        <a:lnRef idx="2">
+          <a:scrgbClr r="0" g="0" b="0"/>
+        </a:lnRef>
+        <a:fillRef idx="1">
+          <a:scrgbClr r="0" g="0" b="0"/>
+        </a:fillRef>
+        <a:effectRef idx="0">
+          <a:scrgbClr r="0" g="0" b="0"/>
+        </a:effectRef>
+        <a:fontRef idx="minor"/>
+      </dsp:style>
+    </dsp:sp>
+    <dsp:sp modelId="{E20DD563-4C7F-488B-98F7-449803B5E305}">
+      <dsp:nvSpPr>
+        <dsp:cNvPr id="0" name=""/>
+        <dsp:cNvSpPr/>
+      </dsp:nvSpPr>
+      <dsp:spPr>
+        <a:xfrm>
+          <a:off x="2422060" y="2125539"/>
+          <a:ext cx="1496107" cy="748053"/>
         </a:xfrm>
         <a:prstGeom prst="rect">
           <a:avLst/>
@@ -3824,12 +3922,12 @@
         </a:fontRef>
       </dsp:style>
       <dsp:txBody>
-        <a:bodyPr spcFirstLastPara="0" vert="horz" wrap="square" lIns="12700" tIns="12700" rIns="12700" bIns="12700" numCol="1" spcCol="1270" anchor="ctr" anchorCtr="0">
+        <a:bodyPr spcFirstLastPara="0" vert="horz" wrap="square" lIns="554183" tIns="9525" rIns="9525" bIns="9525" numCol="1" spcCol="1270" anchor="ctr" anchorCtr="0">
           <a:noAutofit/>
         </a:bodyPr>
         <a:lstStyle/>
         <a:p>
-          <a:pPr marL="0" lvl="0" indent="0" algn="ctr" defTabSz="889000">
+          <a:pPr marL="0" lvl="0" indent="0" algn="ctr" defTabSz="666750">
             <a:lnSpc>
               <a:spcPct val="90000"/>
             </a:lnSpc>
@@ -3842,25 +3940,71 @@
             <a:buNone/>
           </a:pPr>
           <a:r>
-            <a:rPr lang="id-ID" sz="2000" kern="1200" dirty="0"/>
+            <a:rPr lang="id-ID" sz="1500" kern="1200" dirty="0"/>
             <a:t>Marketing Manager</a:t>
           </a:r>
         </a:p>
       </dsp:txBody>
       <dsp:txXfrm>
-        <a:off x="1978076" y="3058456"/>
-        <a:ext cx="1873684" cy="717381"/>
+        <a:off x="2422060" y="2125539"/>
+        <a:ext cx="1496107" cy="748053"/>
       </dsp:txXfrm>
     </dsp:sp>
-    <dsp:sp modelId="{B12AB84D-AEEA-478C-B3D3-605DE42433D2}">
+    <dsp:sp modelId="{CBC7A6BA-DBF4-49B3-A920-D36DAB4BB02C}">
       <dsp:nvSpPr>
         <dsp:cNvPr id="0" name=""/>
         <dsp:cNvSpPr/>
       </dsp:nvSpPr>
       <dsp:spPr>
         <a:xfrm>
-          <a:off x="1329506" y="1021093"/>
-          <a:ext cx="1434762" cy="717381"/>
+          <a:off x="2496865" y="2200344"/>
+          <a:ext cx="448832" cy="598442"/>
+        </a:xfrm>
+        <a:prstGeom prst="rect">
+          <a:avLst/>
+        </a:prstGeom>
+        <a:blipFill>
+          <a:blip xmlns:r="http://schemas.openxmlformats.org/officeDocument/2006/relationships" r:embed="rId2"/>
+          <a:srcRect/>
+          <a:stretch>
+            <a:fillRect l="-11000" r="-11000"/>
+          </a:stretch>
+        </a:blipFill>
+        <a:ln w="15875" cap="rnd" cmpd="sng" algn="ctr">
+          <a:solidFill>
+            <a:schemeClr val="lt1">
+              <a:hueOff val="0"/>
+              <a:satOff val="0"/>
+              <a:lumOff val="0"/>
+              <a:alphaOff val="0"/>
+            </a:schemeClr>
+          </a:solidFill>
+          <a:prstDash val="solid"/>
+        </a:ln>
+        <a:effectLst/>
+      </dsp:spPr>
+      <dsp:style>
+        <a:lnRef idx="2">
+          <a:scrgbClr r="0" g="0" b="0"/>
+        </a:lnRef>
+        <a:fillRef idx="1">
+          <a:scrgbClr r="0" g="0" b="0"/>
+        </a:fillRef>
+        <a:effectRef idx="0">
+          <a:scrgbClr r="0" g="0" b="0"/>
+        </a:effectRef>
+        <a:fontRef idx="minor"/>
+      </dsp:style>
+    </dsp:sp>
+    <dsp:sp modelId="{87B44B90-0C7D-4F22-825A-52F34EFE71E4}">
+      <dsp:nvSpPr>
+        <dsp:cNvPr id="0" name=""/>
+        <dsp:cNvSpPr/>
+      </dsp:nvSpPr>
+      <dsp:spPr>
+        <a:xfrm>
+          <a:off x="1516915" y="3187775"/>
+          <a:ext cx="1496107" cy="748053"/>
         </a:xfrm>
         <a:prstGeom prst="rect">
           <a:avLst/>
@@ -3901,12 +4045,12 @@
         </a:fontRef>
       </dsp:style>
       <dsp:txBody>
-        <a:bodyPr spcFirstLastPara="0" vert="horz" wrap="square" lIns="12700" tIns="12700" rIns="12700" bIns="12700" numCol="1" spcCol="1270" anchor="ctr" anchorCtr="0">
+        <a:bodyPr spcFirstLastPara="0" vert="horz" wrap="square" lIns="554183" tIns="9525" rIns="9525" bIns="9525" numCol="1" spcCol="1270" anchor="ctr" anchorCtr="0">
           <a:noAutofit/>
         </a:bodyPr>
         <a:lstStyle/>
         <a:p>
-          <a:pPr marL="0" lvl="0" indent="0" algn="ctr" defTabSz="889000">
+          <a:pPr marL="0" lvl="0" indent="0" algn="ctr" defTabSz="666750">
             <a:lnSpc>
               <a:spcPct val="90000"/>
             </a:lnSpc>
@@ -3919,26 +4063,72 @@
             <a:buNone/>
           </a:pPr>
           <a:r>
-            <a:rPr lang="en-US" sz="2000" kern="1200" dirty="0"/>
-            <a:t>CTO</a:t>
+            <a:rPr lang="en-US" sz="1500" kern="1200" dirty="0"/>
+            <a:t>Finance</a:t>
           </a:r>
-          <a:endParaRPr lang="id-ID" sz="2000" kern="1200" dirty="0"/>
+          <a:endParaRPr lang="id-ID" sz="1500" kern="1200" dirty="0"/>
         </a:p>
       </dsp:txBody>
       <dsp:txXfrm>
-        <a:off x="1329506" y="1021093"/>
-        <a:ext cx="1434762" cy="717381"/>
+        <a:off x="1516915" y="3187775"/>
+        <a:ext cx="1496107" cy="748053"/>
       </dsp:txXfrm>
     </dsp:sp>
-    <dsp:sp modelId="{0B9B6EE7-F245-49B2-BBDE-1D00D7D218E4}">
+    <dsp:sp modelId="{4B5B8D77-5B5F-4048-8685-7AB41802E6E5}">
       <dsp:nvSpPr>
         <dsp:cNvPr id="0" name=""/>
         <dsp:cNvSpPr/>
       </dsp:nvSpPr>
       <dsp:spPr>
         <a:xfrm>
-          <a:off x="461475" y="2039775"/>
-          <a:ext cx="1434762" cy="717381"/>
+          <a:off x="1591720" y="3262580"/>
+          <a:ext cx="448832" cy="598442"/>
+        </a:xfrm>
+        <a:prstGeom prst="rect">
+          <a:avLst/>
+        </a:prstGeom>
+        <a:blipFill>
+          <a:blip xmlns:r="http://schemas.openxmlformats.org/officeDocument/2006/relationships" r:embed="rId3"/>
+          <a:srcRect/>
+          <a:stretch>
+            <a:fillRect l="-17000" r="-17000"/>
+          </a:stretch>
+        </a:blipFill>
+        <a:ln w="15875" cap="rnd" cmpd="sng" algn="ctr">
+          <a:solidFill>
+            <a:schemeClr val="lt1">
+              <a:hueOff val="0"/>
+              <a:satOff val="0"/>
+              <a:lumOff val="0"/>
+              <a:alphaOff val="0"/>
+            </a:schemeClr>
+          </a:solidFill>
+          <a:prstDash val="solid"/>
+        </a:ln>
+        <a:effectLst/>
+      </dsp:spPr>
+      <dsp:style>
+        <a:lnRef idx="2">
+          <a:scrgbClr r="0" g="0" b="0"/>
+        </a:lnRef>
+        <a:fillRef idx="1">
+          <a:scrgbClr r="0" g="0" b="0"/>
+        </a:fillRef>
+        <a:effectRef idx="0">
+          <a:scrgbClr r="0" g="0" b="0"/>
+        </a:effectRef>
+        <a:fontRef idx="minor"/>
+      </dsp:style>
+    </dsp:sp>
+    <dsp:sp modelId="{39011096-CF31-4590-87F0-2E6AC5750F06}">
+      <dsp:nvSpPr>
+        <dsp:cNvPr id="0" name=""/>
+        <dsp:cNvSpPr/>
+      </dsp:nvSpPr>
+      <dsp:spPr>
+        <a:xfrm>
+          <a:off x="1516915" y="1063302"/>
+          <a:ext cx="1496107" cy="748053"/>
         </a:xfrm>
         <a:prstGeom prst="rect">
           <a:avLst/>
@@ -3979,12 +4169,12 @@
         </a:fontRef>
       </dsp:style>
       <dsp:txBody>
-        <a:bodyPr spcFirstLastPara="0" vert="horz" wrap="square" lIns="12700" tIns="12700" rIns="12700" bIns="12700" numCol="1" spcCol="1270" anchor="ctr" anchorCtr="0">
+        <a:bodyPr spcFirstLastPara="0" vert="horz" wrap="square" lIns="554183" tIns="9525" rIns="9525" bIns="9525" numCol="1" spcCol="1270" anchor="ctr" anchorCtr="0">
           <a:noAutofit/>
         </a:bodyPr>
         <a:lstStyle/>
         <a:p>
-          <a:pPr marL="0" lvl="0" indent="0" algn="ctr" defTabSz="889000">
+          <a:pPr marL="0" lvl="0" indent="0" algn="ctr" defTabSz="666750">
             <a:lnSpc>
               <a:spcPct val="90000"/>
             </a:lnSpc>
@@ -3997,16 +4187,62 @@
             <a:buNone/>
           </a:pPr>
           <a:r>
-            <a:rPr lang="en-US" sz="2000" kern="1200" dirty="0"/>
-            <a:t>COO</a:t>
+            <a:rPr lang="en-US" sz="1500" kern="1200" dirty="0"/>
+            <a:t>CTO</a:t>
           </a:r>
-          <a:endParaRPr lang="id-ID" sz="2000" kern="1200" dirty="0"/>
+          <a:endParaRPr lang="id-ID" sz="1500" kern="1200" dirty="0"/>
         </a:p>
       </dsp:txBody>
       <dsp:txXfrm>
-        <a:off x="461475" y="2039775"/>
-        <a:ext cx="1434762" cy="717381"/>
+        <a:off x="1516915" y="1063302"/>
+        <a:ext cx="1496107" cy="748053"/>
       </dsp:txXfrm>
+    </dsp:sp>
+    <dsp:sp modelId="{C94BC069-BA8D-4140-88A8-30374D281B6D}">
+      <dsp:nvSpPr>
+        <dsp:cNvPr id="0" name=""/>
+        <dsp:cNvSpPr/>
+      </dsp:nvSpPr>
+      <dsp:spPr>
+        <a:xfrm>
+          <a:off x="1591720" y="1138108"/>
+          <a:ext cx="448832" cy="598442"/>
+        </a:xfrm>
+        <a:prstGeom prst="rect">
+          <a:avLst/>
+        </a:prstGeom>
+        <a:blipFill>
+          <a:blip xmlns:r="http://schemas.openxmlformats.org/officeDocument/2006/relationships" r:embed="rId4"/>
+          <a:srcRect/>
+          <a:stretch>
+            <a:fillRect l="-17000" r="-17000"/>
+          </a:stretch>
+        </a:blipFill>
+        <a:ln w="15875" cap="rnd" cmpd="sng" algn="ctr">
+          <a:solidFill>
+            <a:schemeClr val="lt1">
+              <a:hueOff val="0"/>
+              <a:satOff val="0"/>
+              <a:lumOff val="0"/>
+              <a:alphaOff val="0"/>
+            </a:schemeClr>
+          </a:solidFill>
+          <a:prstDash val="solid"/>
+        </a:ln>
+        <a:effectLst/>
+      </dsp:spPr>
+      <dsp:style>
+        <a:lnRef idx="2">
+          <a:scrgbClr r="0" g="0" b="0"/>
+        </a:lnRef>
+        <a:fillRef idx="1">
+          <a:scrgbClr r="0" g="0" b="0"/>
+        </a:fillRef>
+        <a:effectRef idx="0">
+          <a:scrgbClr r="0" g="0" b="0"/>
+        </a:effectRef>
+        <a:fontRef idx="minor"/>
+      </dsp:style>
     </dsp:sp>
   </dsp:spTree>
 </dsp:drawing>
@@ -4159,12 +4395,12 @@
 </file>
 
 <file path=ppt/diagrams/layout2.xml><?xml version="1.0" encoding="utf-8"?>
-<dgm:layoutDef xmlns:dgm="http://schemas.openxmlformats.org/drawingml/2006/diagram" xmlns:a="http://schemas.openxmlformats.org/drawingml/2006/main" uniqueId="urn:microsoft.com/office/officeart/2005/8/layout/orgChart1">
-  <dgm:title val=""/>
-  <dgm:desc val=""/>
+<dgm:layoutDef xmlns:dgm="http://schemas.openxmlformats.org/drawingml/2006/diagram" xmlns:a="http://schemas.openxmlformats.org/drawingml/2006/main" uniqueId="urn:microsoft.com/office/officeart/2005/8/layout/pictureOrgChart+Icon">
+  <dgm:title val="Picture Organization Chart"/>
+  <dgm:desc val="Use to show hierarchical information or reporting relationships in an organization, with corresponding pictures. The assistant shape and the Org Chart hanging layouts are available with this layout."/>
   <dgm:catLst>
-    <dgm:cat type="hierarchy" pri="1000"/>
-    <dgm:cat type="convert" pri="6000"/>
+    <dgm:cat type="hierarchy" pri="1050"/>
+    <dgm:cat type="officeonline" pri="1000"/>
   </dgm:catLst>
   <dgm:sampData>
     <dgm:dataModel>
@@ -4367,6 +4603,11 @@
                   <dgm:constr type="t" for="ch" forName="rootText1"/>
                   <dgm:constr type="w" for="ch" forName="rootText1" refType="w"/>
                   <dgm:constr type="h" for="ch" forName="rootText1" refType="h"/>
+                  <dgm:constr type="lMarg" for="ch" forName="rootText1" refType="w" fact="1.05"/>
+                  <dgm:constr type="l" for="ch" forName="rootPict1" refType="w" refFor="ch" refForName="rootText1" op="equ" fact="0.05"/>
+                  <dgm:constr type="t" for="ch" forName="rootPict1" refType="h" refFor="ch" refForName="rootText1" op="equ" fact="0.1"/>
+                  <dgm:constr type="w" for="ch" forName="rootPict1" refType="w" refFor="ch" refForName="rootText1" op="equ" fact="0.3"/>
+                  <dgm:constr type="h" for="ch" forName="rootPict1" refType="h" refFor="ch" refForName="rootText1" op="equ" fact="0.8"/>
                   <dgm:constr type="l" for="ch" forName="rootConnector1"/>
                   <dgm:constr type="t" for="ch" forName="rootConnector1"/>
                   <dgm:constr type="w" for="ch" forName="rootConnector1" refType="w" refFor="ch" refForName="rootText1" fact="0.2"/>
@@ -4379,6 +4620,11 @@
                   <dgm:constr type="t" for="ch" forName="rootText1"/>
                   <dgm:constr type="w" for="ch" forName="rootText1" refType="w"/>
                   <dgm:constr type="h" for="ch" forName="rootText1" refType="h"/>
+                  <dgm:constr type="lMarg" for="ch" forName="rootText1" refType="w" fact="1.05"/>
+                  <dgm:constr type="l" for="ch" forName="rootPict1" refType="w" refFor="ch" refForName="rootText1" op="equ" fact="0.05"/>
+                  <dgm:constr type="t" for="ch" forName="rootPict1" refType="h" refFor="ch" refForName="rootText1" op="equ" fact="0.1"/>
+                  <dgm:constr type="w" for="ch" forName="rootPict1" refType="w" refFor="ch" refForName="rootText1" op="equ" fact="0.3"/>
+                  <dgm:constr type="h" for="ch" forName="rootPict1" refType="h" refFor="ch" refForName="rootText1" op="equ" fact="0.8"/>
                   <dgm:constr type="r" for="ch" forName="rootConnector1" refType="w"/>
                   <dgm:constr type="t" for="ch" forName="rootConnector1"/>
                   <dgm:constr type="w" for="ch" forName="rootConnector1" refType="w" refFor="ch" refForName="rootText1" fact="0.2"/>
@@ -4391,6 +4637,11 @@
                   <dgm:constr type="t" for="ch" forName="rootText1"/>
                   <dgm:constr type="w" for="ch" forName="rootText1" refType="w"/>
                   <dgm:constr type="h" for="ch" forName="rootText1" refType="h"/>
+                  <dgm:constr type="lMarg" for="ch" forName="rootText1" refType="w" fact="1.05"/>
+                  <dgm:constr type="l" for="ch" forName="rootPict1" refType="w" refFor="ch" refForName="rootText1" op="equ" fact="0.05"/>
+                  <dgm:constr type="t" for="ch" forName="rootPict1" refType="h" refFor="ch" refForName="rootText1" op="equ" fact="0.1"/>
+                  <dgm:constr type="w" for="ch" forName="rootPict1" refType="w" refFor="ch" refForName="rootText1" op="equ" fact="0.3"/>
+                  <dgm:constr type="h" for="ch" forName="rootPict1" refType="h" refFor="ch" refForName="rootText1" op="equ" fact="0.8"/>
                   <dgm:constr type="l" for="ch" forName="rootConnector1"/>
                   <dgm:constr type="t" for="ch" forName="rootConnector1"/>
                   <dgm:constr type="w" for="ch" forName="rootConnector1" refType="w" refFor="ch" refForName="rootText1" fact="0.2"/>
@@ -4403,6 +4654,11 @@
                   <dgm:constr type="t" for="ch" forName="rootText1"/>
                   <dgm:constr type="w" for="ch" forName="rootText1" refType="w"/>
                   <dgm:constr type="h" for="ch" forName="rootText1" refType="h"/>
+                  <dgm:constr type="lMarg" for="ch" forName="rootText1" refType="w" fact="1.05"/>
+                  <dgm:constr type="l" for="ch" forName="rootPict1" refType="w" refFor="ch" refForName="rootText1" op="equ" fact="0.05"/>
+                  <dgm:constr type="t" for="ch" forName="rootPict1" refType="h" refFor="ch" refForName="rootText1" op="equ" fact="0.1"/>
+                  <dgm:constr type="w" for="ch" forName="rootPict1" refType="w" refFor="ch" refForName="rootText1" op="equ" fact="0.3"/>
+                  <dgm:constr type="h" for="ch" forName="rootPict1" refType="h" refFor="ch" refForName="rootText1" op="equ" fact="0.8"/>
                   <dgm:constr type="r" for="ch" forName="rootConnector1" refType="w"/>
                   <dgm:constr type="t" for="ch" forName="rootConnector1"/>
                   <dgm:constr type="w" for="ch" forName="rootConnector1" refType="w" refFor="ch" refForName="rootText1" fact="0.2"/>
@@ -4430,6 +4686,15 @@
               <dgm:ruleLst>
                 <dgm:rule type="primFontSz" val="5" fact="NaN" max="NaN"/>
               </dgm:ruleLst>
+            </dgm:layoutNode>
+            <dgm:layoutNode name="rootPict1" styleLbl="alignImgPlace1">
+              <dgm:alg type="sp"/>
+              <dgm:shape xmlns:r="http://schemas.openxmlformats.org/officeDocument/2006/relationships" type="rect" r:blip="" blipPhldr="1">
+                <dgm:adjLst/>
+              </dgm:shape>
+              <dgm:presOf/>
+              <dgm:constrLst/>
+              <dgm:ruleLst/>
             </dgm:layoutNode>
             <dgm:layoutNode name="rootConnector1" moveWith="rootText1">
               <dgm:alg type="sp"/>
@@ -4803,6 +5068,11 @@
                         <dgm:constr type="t" for="ch" forName="rootText"/>
                         <dgm:constr type="w" for="ch" forName="rootText" refType="w"/>
                         <dgm:constr type="h" for="ch" forName="rootText" refType="h"/>
+                        <dgm:constr type="lMarg" for="ch" forName="rootText" refType="w" fact="1.05"/>
+                        <dgm:constr type="l" for="ch" forName="rootPict" refType="w" fact="0.05"/>
+                        <dgm:constr type="t" for="ch" forName="rootPict" refType="h" refFor="ch" refForName="rootText" fact="0.1"/>
+                        <dgm:constr type="w" for="ch" forName="rootPict" refType="w" fact="0.3"/>
+                        <dgm:constr type="h" for="ch" forName="rootPict" refType="h" refFor="ch" refForName="rootText" fact="0.8"/>
                         <dgm:constr type="l" for="ch" forName="rootConnector"/>
                         <dgm:constr type="t" for="ch" forName="rootConnector"/>
                         <dgm:constr type="w" for="ch" forName="rootConnector" refType="w" refFor="ch" refForName="rootText" fact="0.2"/>
@@ -4815,6 +5085,11 @@
                         <dgm:constr type="t" for="ch" forName="rootText"/>
                         <dgm:constr type="w" for="ch" forName="rootText" refType="w"/>
                         <dgm:constr type="h" for="ch" forName="rootText" refType="h"/>
+                        <dgm:constr type="lMarg" for="ch" forName="rootText" refType="w" fact="1.05"/>
+                        <dgm:constr type="l" for="ch" forName="rootPict" refType="w" fact="0.05"/>
+                        <dgm:constr type="t" for="ch" forName="rootPict" refType="h" refFor="ch" refForName="rootText" fact="0.1"/>
+                        <dgm:constr type="w" for="ch" forName="rootPict" refType="w" fact="0.3"/>
+                        <dgm:constr type="h" for="ch" forName="rootPict" refType="h" refFor="ch" refForName="rootText" fact="0.8"/>
                         <dgm:constr type="r" for="ch" forName="rootConnector" refType="w"/>
                         <dgm:constr type="t" for="ch" forName="rootConnector"/>
                         <dgm:constr type="w" for="ch" forName="rootConnector" refType="w" refFor="ch" refForName="rootText" fact="0.2"/>
@@ -4827,6 +5102,11 @@
                         <dgm:constr type="t" for="ch" forName="rootText"/>
                         <dgm:constr type="w" for="ch" forName="rootText" refType="w"/>
                         <dgm:constr type="h" for="ch" forName="rootText" refType="h"/>
+                        <dgm:constr type="lMarg" for="ch" forName="rootText" refType="w" fact="1.05"/>
+                        <dgm:constr type="l" for="ch" forName="rootPict" refType="w" fact="0.05"/>
+                        <dgm:constr type="t" for="ch" forName="rootPict" refType="h" refFor="ch" refForName="rootText" fact="0.1"/>
+                        <dgm:constr type="w" for="ch" forName="rootPict" refType="w" fact="0.3"/>
+                        <dgm:constr type="h" for="ch" forName="rootPict" refType="h" refFor="ch" refForName="rootText" fact="0.8"/>
                         <dgm:constr type="l" for="ch" forName="rootConnector"/>
                         <dgm:constr type="t" for="ch" forName="rootConnector"/>
                         <dgm:constr type="w" for="ch" forName="rootConnector" refType="w" refFor="ch" refForName="rootText" fact="0.2"/>
@@ -4839,6 +5119,11 @@
                         <dgm:constr type="t" for="ch" forName="rootText"/>
                         <dgm:constr type="w" for="ch" forName="rootText" refType="w"/>
                         <dgm:constr type="h" for="ch" forName="rootText" refType="h"/>
+                        <dgm:constr type="lMarg" for="ch" forName="rootText" refType="w" fact="1.05"/>
+                        <dgm:constr type="l" for="ch" forName="rootPict" refType="w" fact="0.05"/>
+                        <dgm:constr type="t" for="ch" forName="rootPict" refType="h" refFor="ch" refForName="rootText" fact="0.1"/>
+                        <dgm:constr type="w" for="ch" forName="rootPict" refType="w" fact="0.3"/>
+                        <dgm:constr type="h" for="ch" forName="rootPict" refType="h" refFor="ch" refForName="rootText" fact="0.8"/>
                         <dgm:constr type="r" for="ch" forName="rootConnector" refType="w"/>
                         <dgm:constr type="t" for="ch" forName="rootConnector"/>
                         <dgm:constr type="w" for="ch" forName="rootConnector" refType="w" refFor="ch" refForName="rootText" fact="0.2"/>
@@ -4866,6 +5151,15 @@
                     <dgm:ruleLst>
                       <dgm:rule type="primFontSz" val="5" fact="NaN" max="NaN"/>
                     </dgm:ruleLst>
+                  </dgm:layoutNode>
+                  <dgm:layoutNode name="rootPict" styleLbl="alignImgPlace1">
+                    <dgm:alg type="sp"/>
+                    <dgm:shape xmlns:r="http://schemas.openxmlformats.org/officeDocument/2006/relationships" type="rect" r:blip="" blipPhldr="1">
+                      <dgm:adjLst/>
+                    </dgm:shape>
+                    <dgm:presOf/>
+                    <dgm:constrLst/>
+                    <dgm:ruleLst/>
                   </dgm:layoutNode>
                   <dgm:layoutNode name="rootConnector" moveWith="rootText">
                     <dgm:alg type="sp"/>
@@ -5124,6 +5418,11 @@
                         <dgm:constr type="t" for="ch" forName="rootText3"/>
                         <dgm:constr type="w" for="ch" forName="rootText3" refType="w"/>
                         <dgm:constr type="h" for="ch" forName="rootText3" refType="h"/>
+                        <dgm:constr type="lMarg" for="ch" forName="rootText3" refType="w" fact="1.05"/>
+                        <dgm:constr type="l" for="ch" forName="rootPict3" refType="w" fact="0.05"/>
+                        <dgm:constr type="t" for="ch" forName="rootPict3" refType="h" refFor="ch" refForName="rootText3" fact="0.1"/>
+                        <dgm:constr type="w" for="ch" forName="rootPict3" refType="w" fact="0.3"/>
+                        <dgm:constr type="h" for="ch" forName="rootPict3" refType="h" refFor="ch" refForName="rootText3" fact="0.8"/>
                         <dgm:constr type="l" for="ch" forName="rootConnector3"/>
                         <dgm:constr type="t" for="ch" forName="rootConnector3"/>
                         <dgm:constr type="w" for="ch" forName="rootConnector3" refType="w" refFor="ch" refForName="rootText3" fact="0.2"/>
@@ -5136,6 +5435,11 @@
                         <dgm:constr type="t" for="ch" forName="rootText3"/>
                         <dgm:constr type="w" for="ch" forName="rootText3" refType="w"/>
                         <dgm:constr type="h" for="ch" forName="rootText3" refType="h"/>
+                        <dgm:constr type="lMarg" for="ch" forName="rootText3" refType="w" fact="1.05"/>
+                        <dgm:constr type="l" for="ch" forName="rootPict3" refType="w" fact="0.05"/>
+                        <dgm:constr type="t" for="ch" forName="rootPict3" refType="h" refFor="ch" refForName="rootText3" fact="0.1"/>
+                        <dgm:constr type="w" for="ch" forName="rootPict3" refType="w" fact="0.3"/>
+                        <dgm:constr type="h" for="ch" forName="rootPict3" refType="h" refFor="ch" refForName="rootText3" fact="0.8"/>
                         <dgm:constr type="r" for="ch" forName="rootConnector3" refType="w"/>
                         <dgm:constr type="t" for="ch" forName="rootConnector3"/>
                         <dgm:constr type="w" for="ch" forName="rootConnector3" refType="w" refFor="ch" refForName="rootText3" fact="0.2"/>
@@ -5148,6 +5452,11 @@
                         <dgm:constr type="t" for="ch" forName="rootText3"/>
                         <dgm:constr type="w" for="ch" forName="rootText3" refType="w"/>
                         <dgm:constr type="h" for="ch" forName="rootText3" refType="h"/>
+                        <dgm:constr type="lMarg" for="ch" forName="rootText3" refType="w" fact="1.05"/>
+                        <dgm:constr type="l" for="ch" forName="rootPict3" refType="w" fact="0.05"/>
+                        <dgm:constr type="t" for="ch" forName="rootPict3" refType="h" refFor="ch" refForName="rootText3" fact="0.1"/>
+                        <dgm:constr type="w" for="ch" forName="rootPict3" refType="w" fact="0.3"/>
+                        <dgm:constr type="h" for="ch" forName="rootPict3" refType="h" refFor="ch" refForName="rootText3" fact="0.8"/>
                         <dgm:constr type="l" for="ch" forName="rootConnector3"/>
                         <dgm:constr type="t" for="ch" forName="rootConnector3"/>
                         <dgm:constr type="w" for="ch" forName="rootConnector3" refType="w" refFor="ch" refForName="rootText3" fact="0.2"/>
@@ -5160,6 +5469,11 @@
                         <dgm:constr type="t" for="ch" forName="rootText3"/>
                         <dgm:constr type="w" for="ch" forName="rootText3" refType="w"/>
                         <dgm:constr type="h" for="ch" forName="rootText3" refType="h"/>
+                        <dgm:constr type="lMarg" for="ch" forName="rootText3" refType="w" fact="1.05"/>
+                        <dgm:constr type="l" for="ch" forName="rootPict3" refType="w" fact="0.05"/>
+                        <dgm:constr type="t" for="ch" forName="rootPict3" refType="h" refFor="ch" refForName="rootText3" fact="0.1"/>
+                        <dgm:constr type="w" for="ch" forName="rootPict3" refType="w" fact="0.3"/>
+                        <dgm:constr type="h" for="ch" forName="rootPict3" refType="h" refFor="ch" refForName="rootText3" fact="0.8"/>
                         <dgm:constr type="r" for="ch" forName="rootConnector3" refType="w"/>
                         <dgm:constr type="t" for="ch" forName="rootConnector3"/>
                         <dgm:constr type="w" for="ch" forName="rootConnector3" refType="w" refFor="ch" refForName="rootText3" fact="0.2"/>
@@ -5187,6 +5501,15 @@
                     <dgm:ruleLst>
                       <dgm:rule type="primFontSz" val="5" fact="NaN" max="NaN"/>
                     </dgm:ruleLst>
+                  </dgm:layoutNode>
+                  <dgm:layoutNode name="rootPict3" styleLbl="alignImgPlace1">
+                    <dgm:alg type="sp"/>
+                    <dgm:shape xmlns:r="http://schemas.openxmlformats.org/officeDocument/2006/relationships" type="rect" r:blip="" blipPhldr="1">
+                      <dgm:adjLst/>
+                    </dgm:shape>
+                    <dgm:presOf/>
+                    <dgm:constrLst/>
+                    <dgm:ruleLst/>
                   </dgm:layoutNode>
                   <dgm:layoutNode name="rootConnector3" moveWith="rootText1">
                     <dgm:alg type="sp"/>
@@ -7560,7 +7883,7 @@
           <a:p>
             <a:fld id="{BAD00000-CC03-48C5-8C41-BDDBF8D27D19}" type="datetimeFigureOut">
               <a:rPr lang="id-ID" smtClean="0"/>
-              <a:t>28/06/2026</a:t>
+              <a:t>12/07/2026</a:t>
             </a:fld>
             <a:endParaRPr lang="id-ID"/>
           </a:p>
@@ -7898,7 +8221,7 @@
           <a:p>
             <a:fld id="{BAD00000-CC03-48C5-8C41-BDDBF8D27D19}" type="datetimeFigureOut">
               <a:rPr lang="id-ID" smtClean="0"/>
-              <a:t>28/06/2026</a:t>
+              <a:t>12/07/2026</a:t>
             </a:fld>
             <a:endParaRPr lang="id-ID"/>
           </a:p>
@@ -8299,7 +8622,7 @@
           <a:p>
             <a:fld id="{BAD00000-CC03-48C5-8C41-BDDBF8D27D19}" type="datetimeFigureOut">
               <a:rPr lang="id-ID" smtClean="0"/>
-              <a:t>28/06/2026</a:t>
+              <a:t>12/07/2026</a:t>
             </a:fld>
             <a:endParaRPr lang="id-ID"/>
           </a:p>
@@ -8635,7 +8958,7 @@
           <a:p>
             <a:fld id="{BAD00000-CC03-48C5-8C41-BDDBF8D27D19}" type="datetimeFigureOut">
               <a:rPr lang="id-ID" smtClean="0"/>
-              <a:t>28/06/2026</a:t>
+              <a:t>12/07/2026</a:t>
             </a:fld>
             <a:endParaRPr lang="id-ID"/>
           </a:p>
@@ -8955,7 +9278,7 @@
           <a:p>
             <a:fld id="{BAD00000-CC03-48C5-8C41-BDDBF8D27D19}" type="datetimeFigureOut">
               <a:rPr lang="id-ID" smtClean="0"/>
-              <a:t>28/06/2026</a:t>
+              <a:t>12/07/2026</a:t>
             </a:fld>
             <a:endParaRPr lang="id-ID"/>
           </a:p>
@@ -9351,7 +9674,7 @@
           <a:p>
             <a:fld id="{BAD00000-CC03-48C5-8C41-BDDBF8D27D19}" type="datetimeFigureOut">
               <a:rPr lang="id-ID" smtClean="0"/>
-              <a:t>28/06/2026</a:t>
+              <a:t>12/07/2026</a:t>
             </a:fld>
             <a:endParaRPr lang="id-ID"/>
           </a:p>
@@ -9608,7 +9931,7 @@
           <a:p>
             <a:fld id="{BAD00000-CC03-48C5-8C41-BDDBF8D27D19}" type="datetimeFigureOut">
               <a:rPr lang="id-ID" smtClean="0"/>
-              <a:t>28/06/2026</a:t>
+              <a:t>12/07/2026</a:t>
             </a:fld>
             <a:endParaRPr lang="id-ID"/>
           </a:p>
@@ -9870,7 +10193,7 @@
           <a:p>
             <a:fld id="{BAD00000-CC03-48C5-8C41-BDDBF8D27D19}" type="datetimeFigureOut">
               <a:rPr lang="id-ID" smtClean="0"/>
-              <a:t>28/06/2026</a:t>
+              <a:t>12/07/2026</a:t>
             </a:fld>
             <a:endParaRPr lang="id-ID"/>
           </a:p>
@@ -10132,7 +10455,7 @@
           <a:p>
             <a:fld id="{BAD00000-CC03-48C5-8C41-BDDBF8D27D19}" type="datetimeFigureOut">
               <a:rPr lang="id-ID" smtClean="0"/>
-              <a:t>28/06/2026</a:t>
+              <a:t>12/07/2026</a:t>
             </a:fld>
             <a:endParaRPr lang="id-ID"/>
           </a:p>
@@ -10461,7 +10784,7 @@
           <a:p>
             <a:fld id="{BAD00000-CC03-48C5-8C41-BDDBF8D27D19}" type="datetimeFigureOut">
               <a:rPr lang="id-ID" smtClean="0"/>
-              <a:t>28/06/2026</a:t>
+              <a:t>12/07/2026</a:t>
             </a:fld>
             <a:endParaRPr lang="id-ID"/>
           </a:p>
@@ -10784,7 +11107,7 @@
           <a:p>
             <a:fld id="{BAD00000-CC03-48C5-8C41-BDDBF8D27D19}" type="datetimeFigureOut">
               <a:rPr lang="id-ID" smtClean="0"/>
-              <a:t>28/06/2026</a:t>
+              <a:t>12/07/2026</a:t>
             </a:fld>
             <a:endParaRPr lang="id-ID"/>
           </a:p>
@@ -11241,7 +11564,7 @@
           <a:p>
             <a:fld id="{BAD00000-CC03-48C5-8C41-BDDBF8D27D19}" type="datetimeFigureOut">
               <a:rPr lang="id-ID" smtClean="0"/>
-              <a:t>28/06/2026</a:t>
+              <a:t>12/07/2026</a:t>
             </a:fld>
             <a:endParaRPr lang="id-ID"/>
           </a:p>
@@ -11446,7 +11769,7 @@
           <a:p>
             <a:fld id="{BAD00000-CC03-48C5-8C41-BDDBF8D27D19}" type="datetimeFigureOut">
               <a:rPr lang="id-ID" smtClean="0"/>
-              <a:t>28/06/2026</a:t>
+              <a:t>12/07/2026</a:t>
             </a:fld>
             <a:endParaRPr lang="id-ID"/>
           </a:p>
@@ -11623,7 +11946,7 @@
           <a:p>
             <a:fld id="{BAD00000-CC03-48C5-8C41-BDDBF8D27D19}" type="datetimeFigureOut">
               <a:rPr lang="id-ID" smtClean="0"/>
-              <a:t>28/06/2026</a:t>
+              <a:t>12/07/2026</a:t>
             </a:fld>
             <a:endParaRPr lang="id-ID"/>
           </a:p>
@@ -11956,7 +12279,7 @@
           <a:p>
             <a:fld id="{BAD00000-CC03-48C5-8C41-BDDBF8D27D19}" type="datetimeFigureOut">
               <a:rPr lang="id-ID" smtClean="0"/>
-              <a:t>28/06/2026</a:t>
+              <a:t>12/07/2026</a:t>
             </a:fld>
             <a:endParaRPr lang="id-ID"/>
           </a:p>
@@ -12301,7 +12624,7 @@
           <a:p>
             <a:fld id="{BAD00000-CC03-48C5-8C41-BDDBF8D27D19}" type="datetimeFigureOut">
               <a:rPr lang="id-ID" smtClean="0"/>
-              <a:t>28/06/2026</a:t>
+              <a:t>12/07/2026</a:t>
             </a:fld>
             <a:endParaRPr lang="id-ID"/>
           </a:p>
@@ -14418,7 +14741,7 @@
           <a:p>
             <a:fld id="{BAD00000-CC03-48C5-8C41-BDDBF8D27D19}" type="datetimeFigureOut">
               <a:rPr lang="id-ID" smtClean="0"/>
-              <a:t>28/06/2026</a:t>
+              <a:t>12/07/2026</a:t>
             </a:fld>
             <a:endParaRPr lang="id-ID"/>
           </a:p>
@@ -17693,7 +18016,7 @@
         <p:spPr>
           <a:xfrm>
             <a:off x="2698230" y="1738859"/>
-            <a:ext cx="7869836" cy="1477328"/>
+            <a:ext cx="3642609" cy="1477328"/>
           </a:xfrm>
           <a:prstGeom prst="rect">
             <a:avLst/>
@@ -18072,6 +18395,139 @@
           </a:graphicData>
         </a:graphic>
       </p:graphicFrame>
+      <p:sp>
+        <p:nvSpPr>
+          <p:cNvPr id="7" name="TextBox 6">
+            <a:extLst>
+              <a:ext uri="{FF2B5EF4-FFF2-40B4-BE49-F238E27FC236}">
+                <a16:creationId xmlns:a16="http://schemas.microsoft.com/office/drawing/2014/main" id="{CCA8E00C-9A76-0621-6358-011331EB3950}"/>
+              </a:ext>
+            </a:extLst>
+          </p:cNvPr>
+          <p:cNvSpPr txBox="1"/>
+          <p:nvPr/>
+        </p:nvSpPr>
+        <p:spPr>
+          <a:xfrm>
+            <a:off x="7101420" y="1738859"/>
+            <a:ext cx="3642609" cy="1477328"/>
+          </a:xfrm>
+          <a:prstGeom prst="rect">
+            <a:avLst/>
+          </a:prstGeom>
+          <a:noFill/>
+        </p:spPr>
+        <p:txBody>
+          <a:bodyPr wrap="square" rtlCol="0">
+            <a:spAutoFit/>
+          </a:bodyPr>
+          <a:lstStyle/>
+          <a:p>
+            <a:r>
+              <a:rPr lang="id-ID" b="1" dirty="0">
+                <a:solidFill>
+                  <a:schemeClr val="accent5">
+                    <a:lumMod val="50000"/>
+                  </a:schemeClr>
+                </a:solidFill>
+              </a:rPr>
+              <a:t>Biaya Operasional</a:t>
+            </a:r>
+            <a:endParaRPr lang="en-US" b="1" dirty="0">
+              <a:solidFill>
+                <a:schemeClr val="accent5">
+                  <a:lumMod val="50000"/>
+                </a:schemeClr>
+              </a:solidFill>
+            </a:endParaRPr>
+          </a:p>
+          <a:p>
+            <a:pPr marL="285750" indent="-285750">
+              <a:buFont typeface="Wingdings" panose="05000000000000000000" pitchFamily="2" charset="2"/>
+              <a:buChar char="ü"/>
+            </a:pPr>
+            <a:r>
+              <a:rPr lang="id-ID" dirty="0">
+                <a:solidFill>
+                  <a:schemeClr val="accent5">
+                    <a:lumMod val="50000"/>
+                  </a:schemeClr>
+                </a:solidFill>
+              </a:rPr>
+              <a:t>Biaya tenaga kerja</a:t>
+            </a:r>
+            <a:endParaRPr lang="en-US" dirty="0">
+              <a:solidFill>
+                <a:schemeClr val="accent5">
+                  <a:lumMod val="50000"/>
+                </a:schemeClr>
+              </a:solidFill>
+            </a:endParaRPr>
+          </a:p>
+          <a:p>
+            <a:pPr marL="285750" indent="-285750">
+              <a:buFont typeface="Wingdings" panose="05000000000000000000" pitchFamily="2" charset="2"/>
+              <a:buChar char="ü"/>
+            </a:pPr>
+            <a:r>
+              <a:rPr lang="id-ID" dirty="0">
+                <a:solidFill>
+                  <a:schemeClr val="accent5">
+                    <a:lumMod val="50000"/>
+                  </a:schemeClr>
+                </a:solidFill>
+              </a:rPr>
+              <a:t>Biaya alat dan mesin</a:t>
+            </a:r>
+            <a:endParaRPr lang="en-US" dirty="0">
+              <a:solidFill>
+                <a:schemeClr val="accent5">
+                  <a:lumMod val="50000"/>
+                </a:schemeClr>
+              </a:solidFill>
+            </a:endParaRPr>
+          </a:p>
+          <a:p>
+            <a:pPr marL="285750" indent="-285750">
+              <a:buFont typeface="Wingdings" panose="05000000000000000000" pitchFamily="2" charset="2"/>
+              <a:buChar char="ü"/>
+            </a:pPr>
+            <a:r>
+              <a:rPr lang="id-ID" dirty="0">
+                <a:solidFill>
+                  <a:schemeClr val="accent5">
+                    <a:lumMod val="50000"/>
+                  </a:schemeClr>
+                </a:solidFill>
+              </a:rPr>
+              <a:t>Biaya sewa tempat</a:t>
+            </a:r>
+            <a:endParaRPr lang="en-US" dirty="0">
+              <a:solidFill>
+                <a:schemeClr val="accent5">
+                  <a:lumMod val="50000"/>
+                </a:schemeClr>
+              </a:solidFill>
+            </a:endParaRPr>
+          </a:p>
+          <a:p>
+            <a:pPr marL="285750" indent="-285750">
+              <a:buFont typeface="Wingdings" panose="05000000000000000000" pitchFamily="2" charset="2"/>
+              <a:buChar char="ü"/>
+            </a:pPr>
+            <a:r>
+              <a:rPr lang="id-ID" dirty="0">
+                <a:solidFill>
+                  <a:schemeClr val="accent5">
+                    <a:lumMod val="50000"/>
+                  </a:schemeClr>
+                </a:solidFill>
+              </a:rPr>
+              <a:t>Biaya listrik dan air</a:t>
+            </a:r>
+          </a:p>
+        </p:txBody>
+      </p:sp>
     </p:spTree>
     <p:extLst>
       <p:ext uri="{BB962C8B-B14F-4D97-AF65-F5344CB8AC3E}">
@@ -18193,15 +18649,68 @@
                                   </p:childTnLst>
                                 </p:cTn>
                               </p:par>
+                            </p:childTnLst>
+                          </p:cTn>
+                        </p:par>
+                        <p:par>
+                          <p:cTn id="12" fill="hold">
+                            <p:stCondLst>
+                              <p:cond delay="1000"/>
+                            </p:stCondLst>
+                            <p:childTnLst>
                               <p:par>
-                                <p:cTn id="12" presetID="22" presetClass="entr" presetSubtype="4" fill="hold" nodeType="withEffect">
+                                <p:cTn id="13" presetID="22" presetClass="entr" presetSubtype="8" fill="hold" grpId="0" nodeType="afterEffect">
                                   <p:stCondLst>
                                     <p:cond delay="0"/>
                                   </p:stCondLst>
                                   <p:childTnLst>
                                     <p:set>
                                       <p:cBhvr>
-                                        <p:cTn id="13" dur="1" fill="hold">
+                                        <p:cTn id="14" dur="1" fill="hold">
+                                          <p:stCondLst>
+                                            <p:cond delay="0"/>
+                                          </p:stCondLst>
+                                        </p:cTn>
+                                        <p:tgtEl>
+                                          <p:spTgt spid="7"/>
+                                        </p:tgtEl>
+                                        <p:attrNameLst>
+                                          <p:attrName>style.visibility</p:attrName>
+                                        </p:attrNameLst>
+                                      </p:cBhvr>
+                                      <p:to>
+                                        <p:strVal val="visible"/>
+                                      </p:to>
+                                    </p:set>
+                                    <p:animEffect transition="in" filter="wipe(left)">
+                                      <p:cBhvr>
+                                        <p:cTn id="15" dur="500"/>
+                                        <p:tgtEl>
+                                          <p:spTgt spid="7"/>
+                                        </p:tgtEl>
+                                      </p:cBhvr>
+                                    </p:animEffect>
+                                  </p:childTnLst>
+                                </p:cTn>
+                              </p:par>
+                            </p:childTnLst>
+                          </p:cTn>
+                        </p:par>
+                        <p:par>
+                          <p:cTn id="16" fill="hold">
+                            <p:stCondLst>
+                              <p:cond delay="1500"/>
+                            </p:stCondLst>
+                            <p:childTnLst>
+                              <p:par>
+                                <p:cTn id="17" presetID="22" presetClass="entr" presetSubtype="1" fill="hold" nodeType="afterEffect">
+                                  <p:stCondLst>
+                                    <p:cond delay="0"/>
+                                  </p:stCondLst>
+                                  <p:childTnLst>
+                                    <p:set>
+                                      <p:cBhvr>
+                                        <p:cTn id="18" dur="1" fill="hold">
                                           <p:stCondLst>
                                             <p:cond delay="0"/>
                                           </p:stCondLst>
@@ -18217,9 +18726,9 @@
                                         <p:strVal val="visible"/>
                                       </p:to>
                                     </p:set>
-                                    <p:animEffect transition="in" filter="wipe(down)">
+                                    <p:animEffect transition="in" filter="wipe(up)">
                                       <p:cBhvr>
-                                        <p:cTn id="14" dur="500"/>
+                                        <p:cTn id="19" dur="500"/>
                                         <p:tgtEl>
                                           <p:spTgt spid="4"/>
                                         </p:tgtEl>
@@ -18232,20 +18741,20 @@
                           </p:cTn>
                         </p:par>
                         <p:par>
-                          <p:cTn id="15" fill="hold">
+                          <p:cTn id="20" fill="hold">
                             <p:stCondLst>
-                              <p:cond delay="1000"/>
+                              <p:cond delay="2000"/>
                             </p:stCondLst>
                             <p:childTnLst>
                               <p:par>
-                                <p:cTn id="16" presetID="22" presetClass="entr" presetSubtype="8" fill="hold" grpId="0" nodeType="afterEffect">
+                                <p:cTn id="21" presetID="22" presetClass="entr" presetSubtype="8" fill="hold" grpId="0" nodeType="afterEffect">
                                   <p:stCondLst>
                                     <p:cond delay="0"/>
                                   </p:stCondLst>
                                   <p:childTnLst>
                                     <p:set>
                                       <p:cBhvr>
-                                        <p:cTn id="17" dur="1" fill="hold">
+                                        <p:cTn id="22" dur="1" fill="hold">
                                           <p:stCondLst>
                                             <p:cond delay="0"/>
                                           </p:stCondLst>
@@ -18263,7 +18772,7 @@
                                     </p:set>
                                     <p:animEffect transition="in" filter="wipe(left)">
                                       <p:cBhvr>
-                                        <p:cTn id="18" dur="500"/>
+                                        <p:cTn id="23" dur="500"/>
                                         <p:tgtEl>
                                           <p:spTgt spid="5"/>
                                         </p:tgtEl>
@@ -18272,15 +18781,24 @@
                                   </p:childTnLst>
                                 </p:cTn>
                               </p:par>
+                            </p:childTnLst>
+                          </p:cTn>
+                        </p:par>
+                        <p:par>
+                          <p:cTn id="24" fill="hold">
+                            <p:stCondLst>
+                              <p:cond delay="2500"/>
+                            </p:stCondLst>
+                            <p:childTnLst>
                               <p:par>
-                                <p:cTn id="19" presetID="22" presetClass="entr" presetSubtype="4" fill="hold" grpId="0" nodeType="withEffect">
+                                <p:cTn id="25" presetID="22" presetClass="entr" presetSubtype="8" fill="hold" grpId="0" nodeType="afterEffect">
                                   <p:stCondLst>
                                     <p:cond delay="0"/>
                                   </p:stCondLst>
                                   <p:childTnLst>
                                     <p:set>
                                       <p:cBhvr>
-                                        <p:cTn id="20" dur="1" fill="hold">
+                                        <p:cTn id="26" dur="1" fill="hold">
                                           <p:stCondLst>
                                             <p:cond delay="0"/>
                                           </p:stCondLst>
@@ -18296,9 +18814,9 @@
                                         <p:strVal val="visible"/>
                                       </p:to>
                                     </p:set>
-                                    <p:animEffect transition="in" filter="wipe(down)">
+                                    <p:animEffect transition="in" filter="wipe(left)">
                                       <p:cBhvr>
-                                        <p:cTn id="21" dur="500"/>
+                                        <p:cTn id="27" dur="500"/>
                                         <p:tgtEl>
                                           <p:spTgt spid="6"/>
                                         </p:tgtEl>
@@ -18341,6 +18859,7 @@
       <p:bldGraphic spid="6" grpId="0">
         <p:bldAsOne/>
       </p:bldGraphic>
+      <p:bldP spid="7" grpId="0"/>
     </p:bldLst>
   </p:timing>
 </p:sld>
@@ -18399,37 +18918,6 @@
       </p:sp>
       <p:graphicFrame>
         <p:nvGraphicFramePr>
-          <p:cNvPr id="7" name="Content Placeholder 6">
-            <a:extLst>
-              <a:ext uri="{FF2B5EF4-FFF2-40B4-BE49-F238E27FC236}">
-                <a16:creationId xmlns:a16="http://schemas.microsoft.com/office/drawing/2014/main" id="{F749D246-9972-EDE3-A814-B4F654DA804E}"/>
-              </a:ext>
-            </a:extLst>
-          </p:cNvPr>
-          <p:cNvGraphicFramePr>
-            <a:graphicFrameLocks noGrp="1"/>
-          </p:cNvGraphicFramePr>
-          <p:nvPr>
-            <p:ph sz="half" idx="1"/>
-            <p:extLst>
-              <p:ext uri="{D42A27DB-BD31-4B8C-83A1-F6EECF244321}">
-                <p14:modId xmlns:p14="http://schemas.microsoft.com/office/powerpoint/2010/main" val="4133280619"/>
-              </p:ext>
-            </p:extLst>
-          </p:nvPr>
-        </p:nvGraphicFramePr>
-        <p:xfrm>
-          <a:off x="2589213" y="2133600"/>
-          <a:ext cx="4313237" cy="3778250"/>
-        </p:xfrm>
-        <a:graphic>
-          <a:graphicData uri="http://schemas.openxmlformats.org/drawingml/2006/diagram">
-            <dgm:relIds xmlns:dgm="http://schemas.openxmlformats.org/drawingml/2006/diagram" xmlns:r="http://schemas.openxmlformats.org/officeDocument/2006/relationships" r:dm="rId2" r:lo="rId3" r:qs="rId4" r:cs="rId5"/>
-          </a:graphicData>
-        </a:graphic>
-      </p:graphicFrame>
-      <p:graphicFrame>
-        <p:nvGraphicFramePr>
           <p:cNvPr id="6" name="Content Placeholder 5">
             <a:extLst>
               <a:ext uri="{FF2B5EF4-FFF2-40B4-BE49-F238E27FC236}">
@@ -18444,13 +18932,13 @@
             <p:ph sz="half" idx="2"/>
             <p:extLst>
               <p:ext uri="{D42A27DB-BD31-4B8C-83A1-F6EECF244321}">
-                <p14:modId xmlns:p14="http://schemas.microsoft.com/office/powerpoint/2010/main" val="3765430293"/>
+                <p14:modId xmlns:p14="http://schemas.microsoft.com/office/powerpoint/2010/main" val="3429681653"/>
               </p:ext>
             </p:extLst>
           </p:nvPr>
         </p:nvGraphicFramePr>
         <p:xfrm>
-          <a:off x="7191375" y="2125663"/>
+          <a:off x="2592924" y="2867025"/>
           <a:ext cx="4313238" cy="1854200"/>
         </p:xfrm>
         <a:graphic>
@@ -18644,6 +19132,34 @@
           </a:graphicData>
         </a:graphic>
       </p:graphicFrame>
+      <p:graphicFrame>
+        <p:nvGraphicFramePr>
+          <p:cNvPr id="3" name="Diagram 2">
+            <a:extLst>
+              <a:ext uri="{FF2B5EF4-FFF2-40B4-BE49-F238E27FC236}">
+                <a16:creationId xmlns:a16="http://schemas.microsoft.com/office/drawing/2014/main" id="{99EA3973-E869-8517-EFC7-EE97BCC08172}"/>
+              </a:ext>
+            </a:extLst>
+          </p:cNvPr>
+          <p:cNvGraphicFramePr/>
+          <p:nvPr>
+            <p:extLst>
+              <p:ext uri="{D42A27DB-BD31-4B8C-83A1-F6EECF244321}">
+                <p14:modId xmlns:p14="http://schemas.microsoft.com/office/powerpoint/2010/main" val="3087547873"/>
+              </p:ext>
+            </p:extLst>
+          </p:nvPr>
+        </p:nvGraphicFramePr>
+        <p:xfrm>
+          <a:off x="6260635" y="1825677"/>
+          <a:ext cx="5435083" cy="3936896"/>
+        </p:xfrm>
+        <a:graphic>
+          <a:graphicData uri="http://schemas.openxmlformats.org/drawingml/2006/diagram">
+            <dgm:relIds xmlns:dgm="http://schemas.openxmlformats.org/drawingml/2006/diagram" xmlns:r="http://schemas.openxmlformats.org/officeDocument/2006/relationships" r:dm="rId2" r:lo="rId3" r:qs="rId4" r:cs="rId5"/>
+          </a:graphicData>
+        </a:graphic>
+      </p:graphicFrame>
     </p:spTree>
     <p:extLst>
       <p:ext uri="{BB962C8B-B14F-4D97-AF65-F5344CB8AC3E}">
@@ -18731,7 +19247,7 @@
                             </p:stCondLst>
                             <p:childTnLst>
                               <p:par>
-                                <p:cTn id="9" presetID="22" presetClass="entr" presetSubtype="8" fill="hold" grpId="0" nodeType="afterEffect">
+                                <p:cTn id="9" presetID="22" presetClass="entr" presetSubtype="8" fill="hold" nodeType="afterEffect">
                                   <p:stCondLst>
                                     <p:cond delay="0"/>
                                   </p:stCondLst>
@@ -18739,41 +19255,6 @@
                                     <p:set>
                                       <p:cBhvr>
                                         <p:cTn id="10" dur="1" fill="hold">
-                                          <p:stCondLst>
-                                            <p:cond delay="0"/>
-                                          </p:stCondLst>
-                                        </p:cTn>
-                                        <p:tgtEl>
-                                          <p:spTgt spid="7"/>
-                                        </p:tgtEl>
-                                        <p:attrNameLst>
-                                          <p:attrName>style.visibility</p:attrName>
-                                        </p:attrNameLst>
-                                      </p:cBhvr>
-                                      <p:to>
-                                        <p:strVal val="visible"/>
-                                      </p:to>
-                                    </p:set>
-                                    <p:animEffect transition="in" filter="wipe(left)">
-                                      <p:cBhvr>
-                                        <p:cTn id="11" dur="500"/>
-                                        <p:tgtEl>
-                                          <p:spTgt spid="7"/>
-                                        </p:tgtEl>
-                                      </p:cBhvr>
-                                    </p:animEffect>
-                                  </p:childTnLst>
-                                </p:cTn>
-                              </p:par>
-                              <p:par>
-                                <p:cTn id="12" presetID="22" presetClass="entr" presetSubtype="2" fill="hold" nodeType="withEffect">
-                                  <p:stCondLst>
-                                    <p:cond delay="0"/>
-                                  </p:stCondLst>
-                                  <p:childTnLst>
-                                    <p:set>
-                                      <p:cBhvr>
-                                        <p:cTn id="13" dur="1" fill="hold">
                                           <p:stCondLst>
                                             <p:cond delay="0"/>
                                           </p:stCondLst>
@@ -18789,11 +19270,583 @@
                                         <p:strVal val="visible"/>
                                       </p:to>
                                     </p:set>
-                                    <p:animEffect transition="in" filter="wipe(right)">
+                                    <p:animEffect transition="in" filter="wipe(left)">
                                       <p:cBhvr>
-                                        <p:cTn id="14" dur="500"/>
+                                        <p:cTn id="11" dur="500"/>
                                         <p:tgtEl>
                                           <p:spTgt spid="6"/>
+                                        </p:tgtEl>
+                                      </p:cBhvr>
+                                    </p:animEffect>
+                                  </p:childTnLst>
+                                </p:cTn>
+                              </p:par>
+                            </p:childTnLst>
+                          </p:cTn>
+                        </p:par>
+                        <p:par>
+                          <p:cTn id="12" fill="hold">
+                            <p:stCondLst>
+                              <p:cond delay="1000"/>
+                            </p:stCondLst>
+                            <p:childTnLst>
+                              <p:par>
+                                <p:cTn id="13" presetID="22" presetClass="entr" presetSubtype="1" fill="hold" grpId="0" nodeType="afterEffect">
+                                  <p:stCondLst>
+                                    <p:cond delay="0"/>
+                                  </p:stCondLst>
+                                  <p:childTnLst>
+                                    <p:set>
+                                      <p:cBhvr>
+                                        <p:cTn id="14" dur="1" fill="hold">
+                                          <p:stCondLst>
+                                            <p:cond delay="0"/>
+                                          </p:stCondLst>
+                                        </p:cTn>
+                                        <p:tgtEl>
+                                          <p:spTgt spid="3">
+                                            <p:graphicEl>
+                                              <a:dgm id="{E26C24AF-F31A-4342-A2ED-E0970E0275F7}"/>
+                                            </p:graphicEl>
+                                          </p:spTgt>
+                                        </p:tgtEl>
+                                        <p:attrNameLst>
+                                          <p:attrName>style.visibility</p:attrName>
+                                        </p:attrNameLst>
+                                      </p:cBhvr>
+                                      <p:to>
+                                        <p:strVal val="visible"/>
+                                      </p:to>
+                                    </p:set>
+                                    <p:animEffect transition="in" filter="wipe(up)">
+                                      <p:cBhvr>
+                                        <p:cTn id="15" dur="500"/>
+                                        <p:tgtEl>
+                                          <p:spTgt spid="3">
+                                            <p:graphicEl>
+                                              <a:dgm id="{E26C24AF-F31A-4342-A2ED-E0970E0275F7}"/>
+                                            </p:graphicEl>
+                                          </p:spTgt>
+                                        </p:tgtEl>
+                                      </p:cBhvr>
+                                    </p:animEffect>
+                                  </p:childTnLst>
+                                </p:cTn>
+                              </p:par>
+                            </p:childTnLst>
+                          </p:cTn>
+                        </p:par>
+                        <p:par>
+                          <p:cTn id="16" fill="hold">
+                            <p:stCondLst>
+                              <p:cond delay="1500"/>
+                            </p:stCondLst>
+                            <p:childTnLst>
+                              <p:par>
+                                <p:cTn id="17" presetID="22" presetClass="entr" presetSubtype="1" fill="hold" grpId="0" nodeType="afterEffect">
+                                  <p:stCondLst>
+                                    <p:cond delay="0"/>
+                                  </p:stCondLst>
+                                  <p:childTnLst>
+                                    <p:set>
+                                      <p:cBhvr>
+                                        <p:cTn id="18" dur="1" fill="hold">
+                                          <p:stCondLst>
+                                            <p:cond delay="0"/>
+                                          </p:stCondLst>
+                                        </p:cTn>
+                                        <p:tgtEl>
+                                          <p:spTgt spid="3">
+                                            <p:graphicEl>
+                                              <a:dgm id="{65F724A1-5677-4B1D-8450-9FA69AEB0EE7}"/>
+                                            </p:graphicEl>
+                                          </p:spTgt>
+                                        </p:tgtEl>
+                                        <p:attrNameLst>
+                                          <p:attrName>style.visibility</p:attrName>
+                                        </p:attrNameLst>
+                                      </p:cBhvr>
+                                      <p:to>
+                                        <p:strVal val="visible"/>
+                                      </p:to>
+                                    </p:set>
+                                    <p:animEffect transition="in" filter="wipe(up)">
+                                      <p:cBhvr>
+                                        <p:cTn id="19" dur="500"/>
+                                        <p:tgtEl>
+                                          <p:spTgt spid="3">
+                                            <p:graphicEl>
+                                              <a:dgm id="{65F724A1-5677-4B1D-8450-9FA69AEB0EE7}"/>
+                                            </p:graphicEl>
+                                          </p:spTgt>
+                                        </p:tgtEl>
+                                      </p:cBhvr>
+                                    </p:animEffect>
+                                  </p:childTnLst>
+                                </p:cTn>
+                              </p:par>
+                            </p:childTnLst>
+                          </p:cTn>
+                        </p:par>
+                        <p:par>
+                          <p:cTn id="20" fill="hold">
+                            <p:stCondLst>
+                              <p:cond delay="2000"/>
+                            </p:stCondLst>
+                            <p:childTnLst>
+                              <p:par>
+                                <p:cTn id="21" presetID="22" presetClass="entr" presetSubtype="1" fill="hold" grpId="0" nodeType="afterEffect">
+                                  <p:stCondLst>
+                                    <p:cond delay="0"/>
+                                  </p:stCondLst>
+                                  <p:childTnLst>
+                                    <p:set>
+                                      <p:cBhvr>
+                                        <p:cTn id="22" dur="1" fill="hold">
+                                          <p:stCondLst>
+                                            <p:cond delay="0"/>
+                                          </p:stCondLst>
+                                        </p:cTn>
+                                        <p:tgtEl>
+                                          <p:spTgt spid="3">
+                                            <p:graphicEl>
+                                              <a:dgm id="{C3A039F2-3BB1-4F31-A224-92C956D199AB}"/>
+                                            </p:graphicEl>
+                                          </p:spTgt>
+                                        </p:tgtEl>
+                                        <p:attrNameLst>
+                                          <p:attrName>style.visibility</p:attrName>
+                                        </p:attrNameLst>
+                                      </p:cBhvr>
+                                      <p:to>
+                                        <p:strVal val="visible"/>
+                                      </p:to>
+                                    </p:set>
+                                    <p:animEffect transition="in" filter="wipe(up)">
+                                      <p:cBhvr>
+                                        <p:cTn id="23" dur="500"/>
+                                        <p:tgtEl>
+                                          <p:spTgt spid="3">
+                                            <p:graphicEl>
+                                              <a:dgm id="{C3A039F2-3BB1-4F31-A224-92C956D199AB}"/>
+                                            </p:graphicEl>
+                                          </p:spTgt>
+                                        </p:tgtEl>
+                                      </p:cBhvr>
+                                    </p:animEffect>
+                                  </p:childTnLst>
+                                </p:cTn>
+                              </p:par>
+                            </p:childTnLst>
+                          </p:cTn>
+                        </p:par>
+                        <p:par>
+                          <p:cTn id="24" fill="hold">
+                            <p:stCondLst>
+                              <p:cond delay="2500"/>
+                            </p:stCondLst>
+                            <p:childTnLst>
+                              <p:par>
+                                <p:cTn id="25" presetID="22" presetClass="entr" presetSubtype="1" fill="hold" grpId="0" nodeType="afterEffect">
+                                  <p:stCondLst>
+                                    <p:cond delay="0"/>
+                                  </p:stCondLst>
+                                  <p:childTnLst>
+                                    <p:set>
+                                      <p:cBhvr>
+                                        <p:cTn id="26" dur="1" fill="hold">
+                                          <p:stCondLst>
+                                            <p:cond delay="0"/>
+                                          </p:stCondLst>
+                                        </p:cTn>
+                                        <p:tgtEl>
+                                          <p:spTgt spid="3">
+                                            <p:graphicEl>
+                                              <a:dgm id="{C94BC069-BA8D-4140-88A8-30374D281B6D}"/>
+                                            </p:graphicEl>
+                                          </p:spTgt>
+                                        </p:tgtEl>
+                                        <p:attrNameLst>
+                                          <p:attrName>style.visibility</p:attrName>
+                                        </p:attrNameLst>
+                                      </p:cBhvr>
+                                      <p:to>
+                                        <p:strVal val="visible"/>
+                                      </p:to>
+                                    </p:set>
+                                    <p:animEffect transition="in" filter="wipe(up)">
+                                      <p:cBhvr>
+                                        <p:cTn id="27" dur="500"/>
+                                        <p:tgtEl>
+                                          <p:spTgt spid="3">
+                                            <p:graphicEl>
+                                              <a:dgm id="{C94BC069-BA8D-4140-88A8-30374D281B6D}"/>
+                                            </p:graphicEl>
+                                          </p:spTgt>
+                                        </p:tgtEl>
+                                      </p:cBhvr>
+                                    </p:animEffect>
+                                  </p:childTnLst>
+                                </p:cTn>
+                              </p:par>
+                            </p:childTnLst>
+                          </p:cTn>
+                        </p:par>
+                        <p:par>
+                          <p:cTn id="28" fill="hold">
+                            <p:stCondLst>
+                              <p:cond delay="3000"/>
+                            </p:stCondLst>
+                            <p:childTnLst>
+                              <p:par>
+                                <p:cTn id="29" presetID="22" presetClass="entr" presetSubtype="1" fill="hold" grpId="0" nodeType="afterEffect">
+                                  <p:stCondLst>
+                                    <p:cond delay="0"/>
+                                  </p:stCondLst>
+                                  <p:childTnLst>
+                                    <p:set>
+                                      <p:cBhvr>
+                                        <p:cTn id="30" dur="1" fill="hold">
+                                          <p:stCondLst>
+                                            <p:cond delay="0"/>
+                                          </p:stCondLst>
+                                        </p:cTn>
+                                        <p:tgtEl>
+                                          <p:spTgt spid="3">
+                                            <p:graphicEl>
+                                              <a:dgm id="{39011096-CF31-4590-87F0-2E6AC5750F06}"/>
+                                            </p:graphicEl>
+                                          </p:spTgt>
+                                        </p:tgtEl>
+                                        <p:attrNameLst>
+                                          <p:attrName>style.visibility</p:attrName>
+                                        </p:attrNameLst>
+                                      </p:cBhvr>
+                                      <p:to>
+                                        <p:strVal val="visible"/>
+                                      </p:to>
+                                    </p:set>
+                                    <p:animEffect transition="in" filter="wipe(up)">
+                                      <p:cBhvr>
+                                        <p:cTn id="31" dur="500"/>
+                                        <p:tgtEl>
+                                          <p:spTgt spid="3">
+                                            <p:graphicEl>
+                                              <a:dgm id="{39011096-CF31-4590-87F0-2E6AC5750F06}"/>
+                                            </p:graphicEl>
+                                          </p:spTgt>
+                                        </p:tgtEl>
+                                      </p:cBhvr>
+                                    </p:animEffect>
+                                  </p:childTnLst>
+                                </p:cTn>
+                              </p:par>
+                            </p:childTnLst>
+                          </p:cTn>
+                        </p:par>
+                        <p:par>
+                          <p:cTn id="32" fill="hold">
+                            <p:stCondLst>
+                              <p:cond delay="3500"/>
+                            </p:stCondLst>
+                            <p:childTnLst>
+                              <p:par>
+                                <p:cTn id="33" presetID="22" presetClass="entr" presetSubtype="1" fill="hold" grpId="0" nodeType="afterEffect">
+                                  <p:stCondLst>
+                                    <p:cond delay="0"/>
+                                  </p:stCondLst>
+                                  <p:childTnLst>
+                                    <p:set>
+                                      <p:cBhvr>
+                                        <p:cTn id="34" dur="1" fill="hold">
+                                          <p:stCondLst>
+                                            <p:cond delay="0"/>
+                                          </p:stCondLst>
+                                        </p:cTn>
+                                        <p:tgtEl>
+                                          <p:spTgt spid="3">
+                                            <p:graphicEl>
+                                              <a:dgm id="{C32FD7F3-FE3C-45EB-A660-40806D142DEB}"/>
+                                            </p:graphicEl>
+                                          </p:spTgt>
+                                        </p:tgtEl>
+                                        <p:attrNameLst>
+                                          <p:attrName>style.visibility</p:attrName>
+                                        </p:attrNameLst>
+                                      </p:cBhvr>
+                                      <p:to>
+                                        <p:strVal val="visible"/>
+                                      </p:to>
+                                    </p:set>
+                                    <p:animEffect transition="in" filter="wipe(up)">
+                                      <p:cBhvr>
+                                        <p:cTn id="35" dur="500"/>
+                                        <p:tgtEl>
+                                          <p:spTgt spid="3">
+                                            <p:graphicEl>
+                                              <a:dgm id="{C32FD7F3-FE3C-45EB-A660-40806D142DEB}"/>
+                                            </p:graphicEl>
+                                          </p:spTgt>
+                                        </p:tgtEl>
+                                      </p:cBhvr>
+                                    </p:animEffect>
+                                  </p:childTnLst>
+                                </p:cTn>
+                              </p:par>
+                            </p:childTnLst>
+                          </p:cTn>
+                        </p:par>
+                        <p:par>
+                          <p:cTn id="36" fill="hold">
+                            <p:stCondLst>
+                              <p:cond delay="4000"/>
+                            </p:stCondLst>
+                            <p:childTnLst>
+                              <p:par>
+                                <p:cTn id="37" presetID="22" presetClass="entr" presetSubtype="1" fill="hold" grpId="0" nodeType="afterEffect">
+                                  <p:stCondLst>
+                                    <p:cond delay="0"/>
+                                  </p:stCondLst>
+                                  <p:childTnLst>
+                                    <p:set>
+                                      <p:cBhvr>
+                                        <p:cTn id="38" dur="1" fill="hold">
+                                          <p:stCondLst>
+                                            <p:cond delay="0"/>
+                                          </p:stCondLst>
+                                        </p:cTn>
+                                        <p:tgtEl>
+                                          <p:spTgt spid="3">
+                                            <p:graphicEl>
+                                              <a:dgm id="{CBC7A6BA-DBF4-49B3-A920-D36DAB4BB02C}"/>
+                                            </p:graphicEl>
+                                          </p:spTgt>
+                                        </p:tgtEl>
+                                        <p:attrNameLst>
+                                          <p:attrName>style.visibility</p:attrName>
+                                        </p:attrNameLst>
+                                      </p:cBhvr>
+                                      <p:to>
+                                        <p:strVal val="visible"/>
+                                      </p:to>
+                                    </p:set>
+                                    <p:animEffect transition="in" filter="wipe(up)">
+                                      <p:cBhvr>
+                                        <p:cTn id="39" dur="500"/>
+                                        <p:tgtEl>
+                                          <p:spTgt spid="3">
+                                            <p:graphicEl>
+                                              <a:dgm id="{CBC7A6BA-DBF4-49B3-A920-D36DAB4BB02C}"/>
+                                            </p:graphicEl>
+                                          </p:spTgt>
+                                        </p:tgtEl>
+                                      </p:cBhvr>
+                                    </p:animEffect>
+                                  </p:childTnLst>
+                                </p:cTn>
+                              </p:par>
+                            </p:childTnLst>
+                          </p:cTn>
+                        </p:par>
+                        <p:par>
+                          <p:cTn id="40" fill="hold">
+                            <p:stCondLst>
+                              <p:cond delay="4500"/>
+                            </p:stCondLst>
+                            <p:childTnLst>
+                              <p:par>
+                                <p:cTn id="41" presetID="22" presetClass="entr" presetSubtype="1" fill="hold" grpId="0" nodeType="afterEffect">
+                                  <p:stCondLst>
+                                    <p:cond delay="0"/>
+                                  </p:stCondLst>
+                                  <p:childTnLst>
+                                    <p:set>
+                                      <p:cBhvr>
+                                        <p:cTn id="42" dur="1" fill="hold">
+                                          <p:stCondLst>
+                                            <p:cond delay="0"/>
+                                          </p:stCondLst>
+                                        </p:cTn>
+                                        <p:tgtEl>
+                                          <p:spTgt spid="3">
+                                            <p:graphicEl>
+                                              <a:dgm id="{E20DD563-4C7F-488B-98F7-449803B5E305}"/>
+                                            </p:graphicEl>
+                                          </p:spTgt>
+                                        </p:tgtEl>
+                                        <p:attrNameLst>
+                                          <p:attrName>style.visibility</p:attrName>
+                                        </p:attrNameLst>
+                                      </p:cBhvr>
+                                      <p:to>
+                                        <p:strVal val="visible"/>
+                                      </p:to>
+                                    </p:set>
+                                    <p:animEffect transition="in" filter="wipe(up)">
+                                      <p:cBhvr>
+                                        <p:cTn id="43" dur="500"/>
+                                        <p:tgtEl>
+                                          <p:spTgt spid="3">
+                                            <p:graphicEl>
+                                              <a:dgm id="{E20DD563-4C7F-488B-98F7-449803B5E305}"/>
+                                            </p:graphicEl>
+                                          </p:spTgt>
+                                        </p:tgtEl>
+                                      </p:cBhvr>
+                                    </p:animEffect>
+                                  </p:childTnLst>
+                                </p:cTn>
+                              </p:par>
+                            </p:childTnLst>
+                          </p:cTn>
+                        </p:par>
+                        <p:par>
+                          <p:cTn id="44" fill="hold">
+                            <p:stCondLst>
+                              <p:cond delay="5000"/>
+                            </p:stCondLst>
+                            <p:childTnLst>
+                              <p:par>
+                                <p:cTn id="45" presetID="22" presetClass="entr" presetSubtype="1" fill="hold" grpId="0" nodeType="afterEffect">
+                                  <p:stCondLst>
+                                    <p:cond delay="0"/>
+                                  </p:stCondLst>
+                                  <p:childTnLst>
+                                    <p:set>
+                                      <p:cBhvr>
+                                        <p:cTn id="46" dur="1" fill="hold">
+                                          <p:stCondLst>
+                                            <p:cond delay="0"/>
+                                          </p:stCondLst>
+                                        </p:cTn>
+                                        <p:tgtEl>
+                                          <p:spTgt spid="3">
+                                            <p:graphicEl>
+                                              <a:dgm id="{AF7E8FEA-80E2-4306-BB24-9AF4B3C5DAB0}"/>
+                                            </p:graphicEl>
+                                          </p:spTgt>
+                                        </p:tgtEl>
+                                        <p:attrNameLst>
+                                          <p:attrName>style.visibility</p:attrName>
+                                        </p:attrNameLst>
+                                      </p:cBhvr>
+                                      <p:to>
+                                        <p:strVal val="visible"/>
+                                      </p:to>
+                                    </p:set>
+                                    <p:animEffect transition="in" filter="wipe(up)">
+                                      <p:cBhvr>
+                                        <p:cTn id="47" dur="500"/>
+                                        <p:tgtEl>
+                                          <p:spTgt spid="3">
+                                            <p:graphicEl>
+                                              <a:dgm id="{AF7E8FEA-80E2-4306-BB24-9AF4B3C5DAB0}"/>
+                                            </p:graphicEl>
+                                          </p:spTgt>
+                                        </p:tgtEl>
+                                      </p:cBhvr>
+                                    </p:animEffect>
+                                  </p:childTnLst>
+                                </p:cTn>
+                              </p:par>
+                            </p:childTnLst>
+                          </p:cTn>
+                        </p:par>
+                        <p:par>
+                          <p:cTn id="48" fill="hold">
+                            <p:stCondLst>
+                              <p:cond delay="5500"/>
+                            </p:stCondLst>
+                            <p:childTnLst>
+                              <p:par>
+                                <p:cTn id="49" presetID="22" presetClass="entr" presetSubtype="1" fill="hold" grpId="0" nodeType="afterEffect">
+                                  <p:stCondLst>
+                                    <p:cond delay="0"/>
+                                  </p:stCondLst>
+                                  <p:childTnLst>
+                                    <p:set>
+                                      <p:cBhvr>
+                                        <p:cTn id="50" dur="1" fill="hold">
+                                          <p:stCondLst>
+                                            <p:cond delay="0"/>
+                                          </p:stCondLst>
+                                        </p:cTn>
+                                        <p:tgtEl>
+                                          <p:spTgt spid="3">
+                                            <p:graphicEl>
+                                              <a:dgm id="{4B5B8D77-5B5F-4048-8685-7AB41802E6E5}"/>
+                                            </p:graphicEl>
+                                          </p:spTgt>
+                                        </p:tgtEl>
+                                        <p:attrNameLst>
+                                          <p:attrName>style.visibility</p:attrName>
+                                        </p:attrNameLst>
+                                      </p:cBhvr>
+                                      <p:to>
+                                        <p:strVal val="visible"/>
+                                      </p:to>
+                                    </p:set>
+                                    <p:animEffect transition="in" filter="wipe(up)">
+                                      <p:cBhvr>
+                                        <p:cTn id="51" dur="500"/>
+                                        <p:tgtEl>
+                                          <p:spTgt spid="3">
+                                            <p:graphicEl>
+                                              <a:dgm id="{4B5B8D77-5B5F-4048-8685-7AB41802E6E5}"/>
+                                            </p:graphicEl>
+                                          </p:spTgt>
+                                        </p:tgtEl>
+                                      </p:cBhvr>
+                                    </p:animEffect>
+                                  </p:childTnLst>
+                                </p:cTn>
+                              </p:par>
+                            </p:childTnLst>
+                          </p:cTn>
+                        </p:par>
+                        <p:par>
+                          <p:cTn id="52" fill="hold">
+                            <p:stCondLst>
+                              <p:cond delay="6000"/>
+                            </p:stCondLst>
+                            <p:childTnLst>
+                              <p:par>
+                                <p:cTn id="53" presetID="22" presetClass="entr" presetSubtype="1" fill="hold" grpId="0" nodeType="afterEffect">
+                                  <p:stCondLst>
+                                    <p:cond delay="0"/>
+                                  </p:stCondLst>
+                                  <p:childTnLst>
+                                    <p:set>
+                                      <p:cBhvr>
+                                        <p:cTn id="54" dur="1" fill="hold">
+                                          <p:stCondLst>
+                                            <p:cond delay="0"/>
+                                          </p:stCondLst>
+                                        </p:cTn>
+                                        <p:tgtEl>
+                                          <p:spTgt spid="3">
+                                            <p:graphicEl>
+                                              <a:dgm id="{87B44B90-0C7D-4F22-825A-52F34EFE71E4}"/>
+                                            </p:graphicEl>
+                                          </p:spTgt>
+                                        </p:tgtEl>
+                                        <p:attrNameLst>
+                                          <p:attrName>style.visibility</p:attrName>
+                                        </p:attrNameLst>
+                                      </p:cBhvr>
+                                      <p:to>
+                                        <p:strVal val="visible"/>
+                                      </p:to>
+                                    </p:set>
+                                    <p:animEffect transition="in" filter="wipe(up)">
+                                      <p:cBhvr>
+                                        <p:cTn id="55" dur="500"/>
+                                        <p:tgtEl>
+                                          <p:spTgt spid="3">
+                                            <p:graphicEl>
+                                              <a:dgm id="{87B44B90-0C7D-4F22-825A-52F34EFE71E4}"/>
+                                            </p:graphicEl>
+                                          </p:spTgt>
                                         </p:tgtEl>
                                       </p:cBhvr>
                                     </p:animEffect>
@@ -18829,8 +19882,10 @@
     </p:tnLst>
     <p:bldLst>
       <p:bldP spid="2" grpId="0"/>
-      <p:bldGraphic spid="7" grpId="0">
-        <p:bldAsOne/>
+      <p:bldGraphic spid="3" grpId="0">
+        <p:bldSub>
+          <a:bldDgm bld="lvlOne"/>
+        </p:bldSub>
       </p:bldGraphic>
     </p:bldLst>
   </p:timing>
@@ -18902,7 +19957,7 @@
         </p:nvSpPr>
         <p:spPr>
           <a:xfrm>
-            <a:off x="2592924" y="1389939"/>
+            <a:off x="2592924" y="1614791"/>
             <a:ext cx="6670623" cy="1477328"/>
           </a:xfrm>
           <a:prstGeom prst="rect">
@@ -19035,7 +20090,7 @@
         </p:nvSpPr>
         <p:spPr>
           <a:xfrm>
-            <a:off x="2592924" y="3143788"/>
+            <a:off x="2592924" y="3368640"/>
             <a:ext cx="6670623" cy="1200329"/>
           </a:xfrm>
           <a:prstGeom prst="rect">
@@ -19145,7 +20200,7 @@
         </p:nvSpPr>
         <p:spPr>
           <a:xfrm>
-            <a:off x="2698230" y="4841823"/>
+            <a:off x="2698230" y="5066675"/>
             <a:ext cx="8806381" cy="646331"/>
           </a:xfrm>
           <a:prstGeom prst="rect">
@@ -19252,30 +20307,21 @@
                             </p:childTnLst>
                           </p:cTn>
                         </p:par>
-                      </p:childTnLst>
-                    </p:cTn>
-                  </p:par>
-                  <p:par>
-                    <p:cTn id="8" fill="hold">
-                      <p:stCondLst>
-                        <p:cond delay="indefinite"/>
-                      </p:stCondLst>
-                      <p:childTnLst>
                         <p:par>
-                          <p:cTn id="9" fill="hold">
+                          <p:cTn id="8" fill="hold">
                             <p:stCondLst>
-                              <p:cond delay="0"/>
+                              <p:cond delay="500"/>
                             </p:stCondLst>
                             <p:childTnLst>
                               <p:par>
-                                <p:cTn id="10" presetID="53" presetClass="entr" presetSubtype="16" fill="hold" grpId="0" nodeType="clickEffect">
+                                <p:cTn id="9" presetID="22" presetClass="entr" presetSubtype="1" fill="hold" grpId="0" nodeType="afterEffect">
                                   <p:stCondLst>
                                     <p:cond delay="0"/>
                                   </p:stCondLst>
                                   <p:childTnLst>
                                     <p:set>
                                       <p:cBhvr>
-                                        <p:cTn id="11" dur="1" fill="hold">
+                                        <p:cTn id="10" dur="1" fill="hold">
                                           <p:stCondLst>
                                             <p:cond delay="0"/>
                                           </p:stCondLst>
@@ -19291,55 +20337,9 @@
                                         <p:strVal val="visible"/>
                                       </p:to>
                                     </p:set>
-                                    <p:anim calcmode="lin" valueType="num">
+                                    <p:animEffect transition="in" filter="wipe(up)">
                                       <p:cBhvr>
-                                        <p:cTn id="12" dur="500" fill="hold"/>
-                                        <p:tgtEl>
-                                          <p:spTgt spid="3"/>
-                                        </p:tgtEl>
-                                        <p:attrNameLst>
-                                          <p:attrName>ppt_w</p:attrName>
-                                        </p:attrNameLst>
-                                      </p:cBhvr>
-                                      <p:tavLst>
-                                        <p:tav tm="0">
-                                          <p:val>
-                                            <p:fltVal val="0"/>
-                                          </p:val>
-                                        </p:tav>
-                                        <p:tav tm="100000">
-                                          <p:val>
-                                            <p:strVal val="#ppt_w"/>
-                                          </p:val>
-                                        </p:tav>
-                                      </p:tavLst>
-                                    </p:anim>
-                                    <p:anim calcmode="lin" valueType="num">
-                                      <p:cBhvr>
-                                        <p:cTn id="13" dur="500" fill="hold"/>
-                                        <p:tgtEl>
-                                          <p:spTgt spid="3"/>
-                                        </p:tgtEl>
-                                        <p:attrNameLst>
-                                          <p:attrName>ppt_h</p:attrName>
-                                        </p:attrNameLst>
-                                      </p:cBhvr>
-                                      <p:tavLst>
-                                        <p:tav tm="0">
-                                          <p:val>
-                                            <p:fltVal val="0"/>
-                                          </p:val>
-                                        </p:tav>
-                                        <p:tav tm="100000">
-                                          <p:val>
-                                            <p:strVal val="#ppt_h"/>
-                                          </p:val>
-                                        </p:tav>
-                                      </p:tavLst>
-                                    </p:anim>
-                                    <p:animEffect transition="in" filter="fade">
-                                      <p:cBhvr>
-                                        <p:cTn id="14" dur="500"/>
+                                        <p:cTn id="11" dur="1000"/>
                                         <p:tgtEl>
                                           <p:spTgt spid="3"/>
                                         </p:tgtEl>
@@ -19351,30 +20351,21 @@
                             </p:childTnLst>
                           </p:cTn>
                         </p:par>
-                      </p:childTnLst>
-                    </p:cTn>
-                  </p:par>
-                  <p:par>
-                    <p:cTn id="15" fill="hold">
-                      <p:stCondLst>
-                        <p:cond delay="indefinite"/>
-                      </p:stCondLst>
-                      <p:childTnLst>
                         <p:par>
-                          <p:cTn id="16" fill="hold">
+                          <p:cTn id="12" fill="hold">
                             <p:stCondLst>
-                              <p:cond delay="0"/>
+                              <p:cond delay="1500"/>
                             </p:stCondLst>
                             <p:childTnLst>
                               <p:par>
-                                <p:cTn id="17" presetID="10" presetClass="entr" presetSubtype="0" fill="hold" grpId="0" nodeType="clickEffect">
+                                <p:cTn id="13" presetID="22" presetClass="entr" presetSubtype="1" fill="hold" grpId="0" nodeType="afterEffect">
                                   <p:stCondLst>
                                     <p:cond delay="0"/>
                                   </p:stCondLst>
                                   <p:childTnLst>
                                     <p:set>
                                       <p:cBhvr>
-                                        <p:cTn id="18" dur="1" fill="hold">
+                                        <p:cTn id="14" dur="1" fill="hold">
                                           <p:stCondLst>
                                             <p:cond delay="0"/>
                                           </p:stCondLst>
@@ -19390,9 +20381,9 @@
                                         <p:strVal val="visible"/>
                                       </p:to>
                                     </p:set>
-                                    <p:animEffect transition="in" filter="fade">
+                                    <p:animEffect transition="in" filter="wipe(up)">
                                       <p:cBhvr>
-                                        <p:cTn id="19" dur="500"/>
+                                        <p:cTn id="15" dur="1000"/>
                                         <p:tgtEl>
                                           <p:spTgt spid="4"/>
                                         </p:tgtEl>
@@ -19404,36 +20395,31 @@
                             </p:childTnLst>
                           </p:cTn>
                         </p:par>
-                      </p:childTnLst>
-                    </p:cTn>
-                  </p:par>
-                  <p:par>
-                    <p:cTn id="20" fill="hold">
-                      <p:stCondLst>
-                        <p:cond delay="indefinite"/>
-                      </p:stCondLst>
-                      <p:childTnLst>
                         <p:par>
-                          <p:cTn id="21" fill="hold">
+                          <p:cTn id="16" fill="hold">
                             <p:stCondLst>
-                              <p:cond delay="0"/>
+                              <p:cond delay="2500"/>
                             </p:stCondLst>
                             <p:childTnLst>
                               <p:par>
-                                <p:cTn id="22" presetID="42" presetClass="entr" presetSubtype="0" fill="hold" grpId="0" nodeType="clickEffect">
+                                <p:cTn id="17" presetID="22" presetClass="entr" presetSubtype="8" fill="hold" grpId="0" nodeType="afterEffect">
                                   <p:stCondLst>
                                     <p:cond delay="0"/>
                                   </p:stCondLst>
                                   <p:childTnLst>
                                     <p:set>
                                       <p:cBhvr>
-                                        <p:cTn id="23" dur="1" fill="hold">
+                                        <p:cTn id="18" dur="1" fill="hold">
                                           <p:stCondLst>
                                             <p:cond delay="0"/>
                                           </p:stCondLst>
                                         </p:cTn>
                                         <p:tgtEl>
-                                          <p:spTgt spid="5"/>
+                                          <p:spTgt spid="5">
+                                            <p:txEl>
+                                              <p:pRg st="0" end="0"/>
+                                            </p:txEl>
+                                          </p:spTgt>
                                         </p:tgtEl>
                                         <p:attrNameLst>
                                           <p:attrName>style.visibility</p:attrName>
@@ -19443,60 +20429,18 @@
                                         <p:strVal val="visible"/>
                                       </p:to>
                                     </p:set>
-                                    <p:animEffect transition="in" filter="fade">
+                                    <p:animEffect transition="in" filter="wipe(left)">
                                       <p:cBhvr>
-                                        <p:cTn id="24" dur="1000"/>
+                                        <p:cTn id="19" dur="1000"/>
                                         <p:tgtEl>
-                                          <p:spTgt spid="5"/>
+                                          <p:spTgt spid="5">
+                                            <p:txEl>
+                                              <p:pRg st="0" end="0"/>
+                                            </p:txEl>
+                                          </p:spTgt>
                                         </p:tgtEl>
                                       </p:cBhvr>
                                     </p:animEffect>
-                                    <p:anim calcmode="lin" valueType="num">
-                                      <p:cBhvr>
-                                        <p:cTn id="25" dur="1000" fill="hold"/>
-                                        <p:tgtEl>
-                                          <p:spTgt spid="5"/>
-                                        </p:tgtEl>
-                                        <p:attrNameLst>
-                                          <p:attrName>ppt_x</p:attrName>
-                                        </p:attrNameLst>
-                                      </p:cBhvr>
-                                      <p:tavLst>
-                                        <p:tav tm="0">
-                                          <p:val>
-                                            <p:strVal val="#ppt_x"/>
-                                          </p:val>
-                                        </p:tav>
-                                        <p:tav tm="100000">
-                                          <p:val>
-                                            <p:strVal val="#ppt_x"/>
-                                          </p:val>
-                                        </p:tav>
-                                      </p:tavLst>
-                                    </p:anim>
-                                    <p:anim calcmode="lin" valueType="num">
-                                      <p:cBhvr>
-                                        <p:cTn id="26" dur="1000" fill="hold"/>
-                                        <p:tgtEl>
-                                          <p:spTgt spid="5"/>
-                                        </p:tgtEl>
-                                        <p:attrNameLst>
-                                          <p:attrName>ppt_y</p:attrName>
-                                        </p:attrNameLst>
-                                      </p:cBhvr>
-                                      <p:tavLst>
-                                        <p:tav tm="0">
-                                          <p:val>
-                                            <p:strVal val="#ppt_y+.1"/>
-                                          </p:val>
-                                        </p:tav>
-                                        <p:tav tm="100000">
-                                          <p:val>
-                                            <p:strVal val="#ppt_y"/>
-                                          </p:val>
-                                        </p:tav>
-                                      </p:tavLst>
-                                    </p:anim>
                                   </p:childTnLst>
                                 </p:cTn>
                               </p:par>
@@ -19531,7 +20475,7 @@
       <p:bldP spid="2" grpId="0"/>
       <p:bldP spid="3" grpId="0"/>
       <p:bldP spid="4" grpId="0"/>
-      <p:bldP spid="5" grpId="0"/>
+      <p:bldP spid="5" grpId="0" build="allAtOnce"/>
     </p:bldLst>
   </p:timing>
 </p:sld>

--- a/assets/files/Business-Pitch-Deck-7-Slide.pptx
+++ b/assets/files/Business-Pitch-Deck-7-Slide.pptx
@@ -7883,7 +7883,7 @@
           <a:p>
             <a:fld id="{BAD00000-CC03-48C5-8C41-BDDBF8D27D19}" type="datetimeFigureOut">
               <a:rPr lang="id-ID" smtClean="0"/>
-              <a:t>12/07/2026</a:t>
+              <a:t>15/07/2026</a:t>
             </a:fld>
             <a:endParaRPr lang="id-ID"/>
           </a:p>
@@ -8028,6 +8028,18 @@
   <p:clrMapOvr>
     <a:masterClrMapping/>
   </p:clrMapOvr>
+  <mc:AlternateContent xmlns:mc="http://schemas.openxmlformats.org/markup-compatibility/2006">
+    <mc:Choice xmlns:p159="http://schemas.microsoft.com/office/powerpoint/2015/09/main" Requires="p159">
+      <p:transition>
+        <p159:morph option="byObject"/>
+      </p:transition>
+    </mc:Choice>
+    <mc:Fallback>
+      <p:transition>
+        <p:fade/>
+      </p:transition>
+    </mc:Fallback>
+  </mc:AlternateContent>
 </p:sldLayout>
 </file>
 
@@ -8221,7 +8233,7 @@
           <a:p>
             <a:fld id="{BAD00000-CC03-48C5-8C41-BDDBF8D27D19}" type="datetimeFigureOut">
               <a:rPr lang="id-ID" smtClean="0"/>
-              <a:t>12/07/2026</a:t>
+              <a:t>15/07/2026</a:t>
             </a:fld>
             <a:endParaRPr lang="id-ID"/>
           </a:p>
@@ -8366,6 +8378,18 @@
   <p:clrMapOvr>
     <a:masterClrMapping/>
   </p:clrMapOvr>
+  <mc:AlternateContent xmlns:mc="http://schemas.openxmlformats.org/markup-compatibility/2006">
+    <mc:Choice xmlns:p159="http://schemas.microsoft.com/office/powerpoint/2015/09/main" Requires="p159">
+      <p:transition>
+        <p159:morph option="byObject"/>
+      </p:transition>
+    </mc:Choice>
+    <mc:Fallback>
+      <p:transition>
+        <p:fade/>
+      </p:transition>
+    </mc:Fallback>
+  </mc:AlternateContent>
 </p:sldLayout>
 </file>
 
@@ -8622,7 +8646,7 @@
           <a:p>
             <a:fld id="{BAD00000-CC03-48C5-8C41-BDDBF8D27D19}" type="datetimeFigureOut">
               <a:rPr lang="id-ID" smtClean="0"/>
-              <a:t>12/07/2026</a:t>
+              <a:t>15/07/2026</a:t>
             </a:fld>
             <a:endParaRPr lang="id-ID"/>
           </a:p>
@@ -8843,6 +8867,18 @@
   <p:clrMapOvr>
     <a:masterClrMapping/>
   </p:clrMapOvr>
+  <mc:AlternateContent xmlns:mc="http://schemas.openxmlformats.org/markup-compatibility/2006">
+    <mc:Choice xmlns:p159="http://schemas.microsoft.com/office/powerpoint/2015/09/main" Requires="p159">
+      <p:transition>
+        <p159:morph option="byObject"/>
+      </p:transition>
+    </mc:Choice>
+    <mc:Fallback>
+      <p:transition>
+        <p:fade/>
+      </p:transition>
+    </mc:Fallback>
+  </mc:AlternateContent>
 </p:sldLayout>
 </file>
 
@@ -8958,7 +8994,7 @@
           <a:p>
             <a:fld id="{BAD00000-CC03-48C5-8C41-BDDBF8D27D19}" type="datetimeFigureOut">
               <a:rPr lang="id-ID" smtClean="0"/>
-              <a:t>12/07/2026</a:t>
+              <a:t>15/07/2026</a:t>
             </a:fld>
             <a:endParaRPr lang="id-ID"/>
           </a:p>
@@ -9103,6 +9139,18 @@
   <p:clrMapOvr>
     <a:masterClrMapping/>
   </p:clrMapOvr>
+  <mc:AlternateContent xmlns:mc="http://schemas.openxmlformats.org/markup-compatibility/2006">
+    <mc:Choice xmlns:p159="http://schemas.microsoft.com/office/powerpoint/2015/09/main" Requires="p159">
+      <p:transition>
+        <p159:morph option="byObject"/>
+      </p:transition>
+    </mc:Choice>
+    <mc:Fallback>
+      <p:transition>
+        <p:fade/>
+      </p:transition>
+    </mc:Fallback>
+  </mc:AlternateContent>
 </p:sldLayout>
 </file>
 
@@ -9278,7 +9326,7 @@
           <a:p>
             <a:fld id="{BAD00000-CC03-48C5-8C41-BDDBF8D27D19}" type="datetimeFigureOut">
               <a:rPr lang="id-ID" smtClean="0"/>
-              <a:t>12/07/2026</a:t>
+              <a:t>15/07/2026</a:t>
             </a:fld>
             <a:endParaRPr lang="id-ID"/>
           </a:p>
@@ -9499,6 +9547,18 @@
   <p:clrMapOvr>
     <a:masterClrMapping/>
   </p:clrMapOvr>
+  <mc:AlternateContent xmlns:mc="http://schemas.openxmlformats.org/markup-compatibility/2006">
+    <mc:Choice xmlns:p159="http://schemas.microsoft.com/office/powerpoint/2015/09/main" Requires="p159">
+      <p:transition>
+        <p159:morph option="byObject"/>
+      </p:transition>
+    </mc:Choice>
+    <mc:Fallback>
+      <p:transition>
+        <p:fade/>
+      </p:transition>
+    </mc:Fallback>
+  </mc:AlternateContent>
 </p:sldLayout>
 </file>
 
@@ -9674,7 +9734,7 @@
           <a:p>
             <a:fld id="{BAD00000-CC03-48C5-8C41-BDDBF8D27D19}" type="datetimeFigureOut">
               <a:rPr lang="id-ID" smtClean="0"/>
-              <a:t>12/07/2026</a:t>
+              <a:t>15/07/2026</a:t>
             </a:fld>
             <a:endParaRPr lang="id-ID"/>
           </a:p>
@@ -9819,6 +9879,18 @@
   <p:clrMapOvr>
     <a:masterClrMapping/>
   </p:clrMapOvr>
+  <mc:AlternateContent xmlns:mc="http://schemas.openxmlformats.org/markup-compatibility/2006">
+    <mc:Choice xmlns:p159="http://schemas.microsoft.com/office/powerpoint/2015/09/main" Requires="p159">
+      <p:transition>
+        <p159:morph option="byObject"/>
+      </p:transition>
+    </mc:Choice>
+    <mc:Fallback>
+      <p:transition>
+        <p:fade/>
+      </p:transition>
+    </mc:Fallback>
+  </mc:AlternateContent>
 </p:sldLayout>
 </file>
 
@@ -9931,7 +10003,7 @@
           <a:p>
             <a:fld id="{BAD00000-CC03-48C5-8C41-BDDBF8D27D19}" type="datetimeFigureOut">
               <a:rPr lang="id-ID" smtClean="0"/>
-              <a:t>12/07/2026</a:t>
+              <a:t>15/07/2026</a:t>
             </a:fld>
             <a:endParaRPr lang="id-ID"/>
           </a:p>
@@ -10071,6 +10143,18 @@
   <p:clrMapOvr>
     <a:masterClrMapping/>
   </p:clrMapOvr>
+  <mc:AlternateContent xmlns:mc="http://schemas.openxmlformats.org/markup-compatibility/2006">
+    <mc:Choice xmlns:p159="http://schemas.microsoft.com/office/powerpoint/2015/09/main" Requires="p159">
+      <p:transition>
+        <p159:morph option="byObject"/>
+      </p:transition>
+    </mc:Choice>
+    <mc:Fallback>
+      <p:transition>
+        <p:fade/>
+      </p:transition>
+    </mc:Fallback>
+  </mc:AlternateContent>
 </p:sldLayout>
 </file>
 
@@ -10193,7 +10277,7 @@
           <a:p>
             <a:fld id="{BAD00000-CC03-48C5-8C41-BDDBF8D27D19}" type="datetimeFigureOut">
               <a:rPr lang="id-ID" smtClean="0"/>
-              <a:t>12/07/2026</a:t>
+              <a:t>15/07/2026</a:t>
             </a:fld>
             <a:endParaRPr lang="id-ID"/>
           </a:p>
@@ -10333,6 +10417,18 @@
   <p:clrMapOvr>
     <a:masterClrMapping/>
   </p:clrMapOvr>
+  <mc:AlternateContent xmlns:mc="http://schemas.openxmlformats.org/markup-compatibility/2006">
+    <mc:Choice xmlns:p159="http://schemas.microsoft.com/office/powerpoint/2015/09/main" Requires="p159">
+      <p:transition>
+        <p159:morph option="byObject"/>
+      </p:transition>
+    </mc:Choice>
+    <mc:Fallback>
+      <p:transition>
+        <p:fade/>
+      </p:transition>
+    </mc:Fallback>
+  </mc:AlternateContent>
 </p:sldLayout>
 </file>
 
@@ -10455,7 +10551,7 @@
           <a:p>
             <a:fld id="{BAD00000-CC03-48C5-8C41-BDDBF8D27D19}" type="datetimeFigureOut">
               <a:rPr lang="id-ID" smtClean="0"/>
-              <a:t>12/07/2026</a:t>
+              <a:t>15/07/2026</a:t>
             </a:fld>
             <a:endParaRPr lang="id-ID"/>
           </a:p>
@@ -10595,6 +10691,18 @@
   <p:clrMapOvr>
     <a:masterClrMapping/>
   </p:clrMapOvr>
+  <mc:AlternateContent xmlns:mc="http://schemas.openxmlformats.org/markup-compatibility/2006">
+    <mc:Choice xmlns:p159="http://schemas.microsoft.com/office/powerpoint/2015/09/main" Requires="p159">
+      <p:transition>
+        <p159:morph option="byObject"/>
+      </p:transition>
+    </mc:Choice>
+    <mc:Fallback>
+      <p:transition>
+        <p:fade/>
+      </p:transition>
+    </mc:Fallback>
+  </mc:AlternateContent>
 </p:sldLayout>
 </file>
 
@@ -10784,7 +10892,7 @@
           <a:p>
             <a:fld id="{BAD00000-CC03-48C5-8C41-BDDBF8D27D19}" type="datetimeFigureOut">
               <a:rPr lang="id-ID" smtClean="0"/>
-              <a:t>12/07/2026</a:t>
+              <a:t>15/07/2026</a:t>
             </a:fld>
             <a:endParaRPr lang="id-ID"/>
           </a:p>
@@ -10929,6 +11037,18 @@
   <p:clrMapOvr>
     <a:masterClrMapping/>
   </p:clrMapOvr>
+  <mc:AlternateContent xmlns:mc="http://schemas.openxmlformats.org/markup-compatibility/2006">
+    <mc:Choice xmlns:p159="http://schemas.microsoft.com/office/powerpoint/2015/09/main" Requires="p159">
+      <p:transition>
+        <p159:morph option="byObject"/>
+      </p:transition>
+    </mc:Choice>
+    <mc:Fallback>
+      <p:transition>
+        <p:fade/>
+      </p:transition>
+    </mc:Fallback>
+  </mc:AlternateContent>
 </p:sldLayout>
 </file>
 
@@ -11107,7 +11227,7 @@
           <a:p>
             <a:fld id="{BAD00000-CC03-48C5-8C41-BDDBF8D27D19}" type="datetimeFigureOut">
               <a:rPr lang="id-ID" smtClean="0"/>
-              <a:t>12/07/2026</a:t>
+              <a:t>15/07/2026</a:t>
             </a:fld>
             <a:endParaRPr lang="id-ID"/>
           </a:p>
@@ -11252,6 +11372,18 @@
   <p:clrMapOvr>
     <a:masterClrMapping/>
   </p:clrMapOvr>
+  <mc:AlternateContent xmlns:mc="http://schemas.openxmlformats.org/markup-compatibility/2006">
+    <mc:Choice xmlns:p159="http://schemas.microsoft.com/office/powerpoint/2015/09/main" Requires="p159">
+      <p:transition>
+        <p159:morph option="byObject"/>
+      </p:transition>
+    </mc:Choice>
+    <mc:Fallback>
+      <p:transition>
+        <p:fade/>
+      </p:transition>
+    </mc:Fallback>
+  </mc:AlternateContent>
 </p:sldLayout>
 </file>
 
@@ -11564,7 +11696,7 @@
           <a:p>
             <a:fld id="{BAD00000-CC03-48C5-8C41-BDDBF8D27D19}" type="datetimeFigureOut">
               <a:rPr lang="id-ID" smtClean="0"/>
-              <a:t>12/07/2026</a:t>
+              <a:t>15/07/2026</a:t>
             </a:fld>
             <a:endParaRPr lang="id-ID"/>
           </a:p>
@@ -11709,6 +11841,18 @@
   <p:clrMapOvr>
     <a:masterClrMapping/>
   </p:clrMapOvr>
+  <mc:AlternateContent xmlns:mc="http://schemas.openxmlformats.org/markup-compatibility/2006">
+    <mc:Choice xmlns:p159="http://schemas.microsoft.com/office/powerpoint/2015/09/main" Requires="p159">
+      <p:transition>
+        <p159:morph option="byObject"/>
+      </p:transition>
+    </mc:Choice>
+    <mc:Fallback>
+      <p:transition>
+        <p:fade/>
+      </p:transition>
+    </mc:Fallback>
+  </mc:AlternateContent>
 </p:sldLayout>
 </file>
 
@@ -11769,7 +11913,7 @@
           <a:p>
             <a:fld id="{BAD00000-CC03-48C5-8C41-BDDBF8D27D19}" type="datetimeFigureOut">
               <a:rPr lang="id-ID" smtClean="0"/>
-              <a:t>12/07/2026</a:t>
+              <a:t>15/07/2026</a:t>
             </a:fld>
             <a:endParaRPr lang="id-ID"/>
           </a:p>
@@ -11909,6 +12053,18 @@
   <p:clrMapOvr>
     <a:masterClrMapping/>
   </p:clrMapOvr>
+  <mc:AlternateContent xmlns:mc="http://schemas.openxmlformats.org/markup-compatibility/2006">
+    <mc:Choice xmlns:p159="http://schemas.microsoft.com/office/powerpoint/2015/09/main" Requires="p159">
+      <p:transition>
+        <p159:morph option="byObject"/>
+      </p:transition>
+    </mc:Choice>
+    <mc:Fallback>
+      <p:transition>
+        <p:fade/>
+      </p:transition>
+    </mc:Fallback>
+  </mc:AlternateContent>
 </p:sldLayout>
 </file>
 
@@ -11946,7 +12102,7 @@
           <a:p>
             <a:fld id="{BAD00000-CC03-48C5-8C41-BDDBF8D27D19}" type="datetimeFigureOut">
               <a:rPr lang="id-ID" smtClean="0"/>
-              <a:t>12/07/2026</a:t>
+              <a:t>15/07/2026</a:t>
             </a:fld>
             <a:endParaRPr lang="id-ID"/>
           </a:p>
@@ -12086,6 +12242,18 @@
   <p:clrMapOvr>
     <a:masterClrMapping/>
   </p:clrMapOvr>
+  <mc:AlternateContent xmlns:mc="http://schemas.openxmlformats.org/markup-compatibility/2006">
+    <mc:Choice xmlns:p159="http://schemas.microsoft.com/office/powerpoint/2015/09/main" Requires="p159">
+      <p:transition>
+        <p159:morph option="byObject"/>
+      </p:transition>
+    </mc:Choice>
+    <mc:Fallback>
+      <p:transition>
+        <p:fade/>
+      </p:transition>
+    </mc:Fallback>
+  </mc:AlternateContent>
 </p:sldLayout>
 </file>
 
@@ -12279,7 +12447,7 @@
           <a:p>
             <a:fld id="{BAD00000-CC03-48C5-8C41-BDDBF8D27D19}" type="datetimeFigureOut">
               <a:rPr lang="id-ID" smtClean="0"/>
-              <a:t>12/07/2026</a:t>
+              <a:t>15/07/2026</a:t>
             </a:fld>
             <a:endParaRPr lang="id-ID"/>
           </a:p>
@@ -12419,6 +12587,18 @@
   <p:clrMapOvr>
     <a:masterClrMapping/>
   </p:clrMapOvr>
+  <mc:AlternateContent xmlns:mc="http://schemas.openxmlformats.org/markup-compatibility/2006">
+    <mc:Choice xmlns:p159="http://schemas.microsoft.com/office/powerpoint/2015/09/main" Requires="p159">
+      <p:transition>
+        <p159:morph option="byObject"/>
+      </p:transition>
+    </mc:Choice>
+    <mc:Fallback>
+      <p:transition>
+        <p:fade/>
+      </p:transition>
+    </mc:Fallback>
+  </mc:AlternateContent>
 </p:sldLayout>
 </file>
 
@@ -12624,7 +12804,7 @@
           <a:p>
             <a:fld id="{BAD00000-CC03-48C5-8C41-BDDBF8D27D19}" type="datetimeFigureOut">
               <a:rPr lang="id-ID" smtClean="0"/>
-              <a:t>12/07/2026</a:t>
+              <a:t>15/07/2026</a:t>
             </a:fld>
             <a:endParaRPr lang="id-ID"/>
           </a:p>
@@ -12769,6 +12949,18 @@
   <p:clrMapOvr>
     <a:masterClrMapping/>
   </p:clrMapOvr>
+  <mc:AlternateContent xmlns:mc="http://schemas.openxmlformats.org/markup-compatibility/2006">
+    <mc:Choice xmlns:p159="http://schemas.microsoft.com/office/powerpoint/2015/09/main" Requires="p159">
+      <p:transition>
+        <p159:morph option="byObject"/>
+      </p:transition>
+    </mc:Choice>
+    <mc:Fallback>
+      <p:transition>
+        <p:fade/>
+      </p:transition>
+    </mc:Fallback>
+  </mc:AlternateContent>
 </p:sldLayout>
 </file>
 
@@ -14741,7 +14933,7 @@
           <a:p>
             <a:fld id="{BAD00000-CC03-48C5-8C41-BDDBF8D27D19}" type="datetimeFigureOut">
               <a:rPr lang="id-ID" smtClean="0"/>
-              <a:t>12/07/2026</a:t>
+              <a:t>15/07/2026</a:t>
             </a:fld>
             <a:endParaRPr lang="id-ID"/>
           </a:p>
@@ -14849,6 +15041,18 @@
     <p:sldLayoutId id="2147483675" r:id="rId15"/>
     <p:sldLayoutId id="2147483676" r:id="rId16"/>
   </p:sldLayoutIdLst>
+  <mc:AlternateContent xmlns:mc="http://schemas.openxmlformats.org/markup-compatibility/2006">
+    <mc:Choice xmlns:p159="http://schemas.microsoft.com/office/powerpoint/2015/09/main" Requires="p159">
+      <p:transition>
+        <p159:morph option="byObject"/>
+      </p:transition>
+    </mc:Choice>
+    <mc:Fallback>
+      <p:transition>
+        <p:fade/>
+      </p:transition>
+    </mc:Fallback>
+  </mc:AlternateContent>
   <p:txStyles>
     <p:titleStyle>
       <a:lvl1pPr algn="l" defTabSz="457200" rtl="0" eaLnBrk="1" latinLnBrk="0" hangingPunct="1">
@@ -15499,14 +15703,14 @@
   <p:clrMapOvr>
     <a:masterClrMapping/>
   </p:clrMapOvr>
-  <mc:AlternateContent xmlns:mc="http://schemas.openxmlformats.org/markup-compatibility/2006" xmlns:p159="http://schemas.microsoft.com/office/powerpoint/2015/09/main">
-    <mc:Choice Requires="p159">
-      <p:transition xmlns:p14="http://schemas.microsoft.com/office/powerpoint/2010/main" spd="slow" p14:dur="2000">
+  <mc:AlternateContent xmlns:mc="http://schemas.openxmlformats.org/markup-compatibility/2006">
+    <mc:Choice xmlns:p159="http://schemas.microsoft.com/office/powerpoint/2015/09/main" Requires="p159">
+      <p:transition>
         <p159:morph option="byObject"/>
       </p:transition>
     </mc:Choice>
-    <mc:Fallback xmlns="">
-      <p:transition spd="slow">
+    <mc:Fallback>
+      <p:transition>
         <p:fade/>
       </p:transition>
     </mc:Fallback>
@@ -15523,6 +15727,9 @@
                     <p:cTn id="3" fill="hold">
                       <p:stCondLst>
                         <p:cond delay="indefinite"/>
+                        <p:cond evt="onBegin" delay="0">
+                          <p:tn val="2"/>
+                        </p:cond>
                       </p:stCondLst>
                       <p:childTnLst>
                         <p:par>
@@ -15532,7 +15739,7 @@
                             </p:stCondLst>
                             <p:childTnLst>
                               <p:par>
-                                <p:cTn id="5" presetID="10" presetClass="entr" presetSubtype="0" fill="hold" grpId="0" nodeType="clickEffect">
+                                <p:cTn id="5" presetID="10" presetClass="entr" presetSubtype="0" fill="hold" grpId="0" nodeType="afterEffect">
                                   <p:stCondLst>
                                     <p:cond delay="0"/>
                                   </p:stCondLst>
@@ -15602,21 +15809,34 @@
                                   </p:childTnLst>
                                 </p:cTn>
                               </p:par>
+                            </p:childTnLst>
+                          </p:cTn>
+                        </p:par>
+                        <p:par>
+                          <p:cTn id="11" fill="hold">
+                            <p:stCondLst>
+                              <p:cond delay="500"/>
+                            </p:stCondLst>
+                            <p:childTnLst>
                               <p:par>
-                                <p:cTn id="11" presetID="22" presetClass="entr" presetSubtype="8" fill="hold" grpId="0" nodeType="withEffect">
+                                <p:cTn id="12" presetID="22" presetClass="entr" presetSubtype="8" fill="hold" grpId="0" nodeType="afterEffect">
                                   <p:stCondLst>
                                     <p:cond delay="0"/>
                                   </p:stCondLst>
                                   <p:childTnLst>
                                     <p:set>
                                       <p:cBhvr>
-                                        <p:cTn id="12" dur="1" fill="hold">
+                                        <p:cTn id="13" dur="1" fill="hold">
                                           <p:stCondLst>
                                             <p:cond delay="0"/>
                                           </p:stCondLst>
                                         </p:cTn>
                                         <p:tgtEl>
-                                          <p:spTgt spid="6"/>
+                                          <p:spTgt spid="6">
+                                            <p:txEl>
+                                              <p:pRg st="0" end="0"/>
+                                            </p:txEl>
+                                          </p:spTgt>
                                         </p:tgtEl>
                                         <p:attrNameLst>
                                           <p:attrName>style.visibility</p:attrName>
@@ -15628,9 +15848,13 @@
                                     </p:set>
                                     <p:animEffect transition="in" filter="wipe(left)">
                                       <p:cBhvr>
-                                        <p:cTn id="13" dur="500"/>
+                                        <p:cTn id="14" dur="500"/>
                                         <p:tgtEl>
-                                          <p:spTgt spid="6"/>
+                                          <p:spTgt spid="6">
+                                            <p:txEl>
+                                              <p:pRg st="0" end="0"/>
+                                            </p:txEl>
+                                          </p:spTgt>
                                         </p:tgtEl>
                                       </p:cBhvr>
                                     </p:animEffect>
@@ -15641,20 +15865,176 @@
                           </p:cTn>
                         </p:par>
                         <p:par>
-                          <p:cTn id="14" fill="hold">
+                          <p:cTn id="15" fill="hold">
                             <p:stCondLst>
                               <p:cond delay="1000"/>
                             </p:stCondLst>
                             <p:childTnLst>
                               <p:par>
-                                <p:cTn id="15" presetID="53" presetClass="entr" presetSubtype="16" fill="hold" nodeType="afterEffect">
+                                <p:cTn id="16" presetID="22" presetClass="entr" presetSubtype="8" fill="hold" grpId="0" nodeType="afterEffect">
                                   <p:stCondLst>
                                     <p:cond delay="0"/>
                                   </p:stCondLst>
                                   <p:childTnLst>
                                     <p:set>
                                       <p:cBhvr>
-                                        <p:cTn id="16" dur="1" fill="hold">
+                                        <p:cTn id="17" dur="1" fill="hold">
+                                          <p:stCondLst>
+                                            <p:cond delay="0"/>
+                                          </p:stCondLst>
+                                        </p:cTn>
+                                        <p:tgtEl>
+                                          <p:spTgt spid="6">
+                                            <p:txEl>
+                                              <p:pRg st="1" end="1"/>
+                                            </p:txEl>
+                                          </p:spTgt>
+                                        </p:tgtEl>
+                                        <p:attrNameLst>
+                                          <p:attrName>style.visibility</p:attrName>
+                                        </p:attrNameLst>
+                                      </p:cBhvr>
+                                      <p:to>
+                                        <p:strVal val="visible"/>
+                                      </p:to>
+                                    </p:set>
+                                    <p:animEffect transition="in" filter="wipe(left)">
+                                      <p:cBhvr>
+                                        <p:cTn id="18" dur="500"/>
+                                        <p:tgtEl>
+                                          <p:spTgt spid="6">
+                                            <p:txEl>
+                                              <p:pRg st="1" end="1"/>
+                                            </p:txEl>
+                                          </p:spTgt>
+                                        </p:tgtEl>
+                                      </p:cBhvr>
+                                    </p:animEffect>
+                                  </p:childTnLst>
+                                </p:cTn>
+                              </p:par>
+                            </p:childTnLst>
+                          </p:cTn>
+                        </p:par>
+                        <p:par>
+                          <p:cTn id="19" fill="hold">
+                            <p:stCondLst>
+                              <p:cond delay="1500"/>
+                            </p:stCondLst>
+                            <p:childTnLst>
+                              <p:par>
+                                <p:cTn id="20" presetID="22" presetClass="entr" presetSubtype="8" fill="hold" grpId="0" nodeType="afterEffect">
+                                  <p:stCondLst>
+                                    <p:cond delay="0"/>
+                                  </p:stCondLst>
+                                  <p:childTnLst>
+                                    <p:set>
+                                      <p:cBhvr>
+                                        <p:cTn id="21" dur="1" fill="hold">
+                                          <p:stCondLst>
+                                            <p:cond delay="0"/>
+                                          </p:stCondLst>
+                                        </p:cTn>
+                                        <p:tgtEl>
+                                          <p:spTgt spid="6">
+                                            <p:txEl>
+                                              <p:pRg st="2" end="2"/>
+                                            </p:txEl>
+                                          </p:spTgt>
+                                        </p:tgtEl>
+                                        <p:attrNameLst>
+                                          <p:attrName>style.visibility</p:attrName>
+                                        </p:attrNameLst>
+                                      </p:cBhvr>
+                                      <p:to>
+                                        <p:strVal val="visible"/>
+                                      </p:to>
+                                    </p:set>
+                                    <p:animEffect transition="in" filter="wipe(left)">
+                                      <p:cBhvr>
+                                        <p:cTn id="22" dur="500"/>
+                                        <p:tgtEl>
+                                          <p:spTgt spid="6">
+                                            <p:txEl>
+                                              <p:pRg st="2" end="2"/>
+                                            </p:txEl>
+                                          </p:spTgt>
+                                        </p:tgtEl>
+                                      </p:cBhvr>
+                                    </p:animEffect>
+                                  </p:childTnLst>
+                                </p:cTn>
+                              </p:par>
+                            </p:childTnLst>
+                          </p:cTn>
+                        </p:par>
+                        <p:par>
+                          <p:cTn id="23" fill="hold">
+                            <p:stCondLst>
+                              <p:cond delay="2000"/>
+                            </p:stCondLst>
+                            <p:childTnLst>
+                              <p:par>
+                                <p:cTn id="24" presetID="22" presetClass="entr" presetSubtype="8" fill="hold" grpId="0" nodeType="afterEffect">
+                                  <p:stCondLst>
+                                    <p:cond delay="0"/>
+                                  </p:stCondLst>
+                                  <p:childTnLst>
+                                    <p:set>
+                                      <p:cBhvr>
+                                        <p:cTn id="25" dur="1" fill="hold">
+                                          <p:stCondLst>
+                                            <p:cond delay="0"/>
+                                          </p:stCondLst>
+                                        </p:cTn>
+                                        <p:tgtEl>
+                                          <p:spTgt spid="6">
+                                            <p:txEl>
+                                              <p:pRg st="3" end="3"/>
+                                            </p:txEl>
+                                          </p:spTgt>
+                                        </p:tgtEl>
+                                        <p:attrNameLst>
+                                          <p:attrName>style.visibility</p:attrName>
+                                        </p:attrNameLst>
+                                      </p:cBhvr>
+                                      <p:to>
+                                        <p:strVal val="visible"/>
+                                      </p:to>
+                                    </p:set>
+                                    <p:animEffect transition="in" filter="wipe(left)">
+                                      <p:cBhvr>
+                                        <p:cTn id="26" dur="500"/>
+                                        <p:tgtEl>
+                                          <p:spTgt spid="6">
+                                            <p:txEl>
+                                              <p:pRg st="3" end="3"/>
+                                            </p:txEl>
+                                          </p:spTgt>
+                                        </p:tgtEl>
+                                      </p:cBhvr>
+                                    </p:animEffect>
+                                  </p:childTnLst>
+                                </p:cTn>
+                              </p:par>
+                            </p:childTnLst>
+                          </p:cTn>
+                        </p:par>
+                        <p:par>
+                          <p:cTn id="27" fill="hold">
+                            <p:stCondLst>
+                              <p:cond delay="2500"/>
+                            </p:stCondLst>
+                            <p:childTnLst>
+                              <p:par>
+                                <p:cTn id="28" presetID="53" presetClass="entr" presetSubtype="16" fill="hold" nodeType="afterEffect">
+                                  <p:stCondLst>
+                                    <p:cond delay="0"/>
+                                  </p:stCondLst>
+                                  <p:childTnLst>
+                                    <p:set>
+                                      <p:cBhvr>
+                                        <p:cTn id="29" dur="1" fill="hold">
                                           <p:stCondLst>
                                             <p:cond delay="0"/>
                                           </p:stCondLst>
@@ -15672,7 +16052,7 @@
                                     </p:set>
                                     <p:anim calcmode="lin" valueType="num">
                                       <p:cBhvr>
-                                        <p:cTn id="17" dur="500" fill="hold"/>
+                                        <p:cTn id="30" dur="500" fill="hold"/>
                                         <p:tgtEl>
                                           <p:spTgt spid="8"/>
                                         </p:tgtEl>
@@ -15695,7 +16075,7 @@
                                     </p:anim>
                                     <p:anim calcmode="lin" valueType="num">
                                       <p:cBhvr>
-                                        <p:cTn id="18" dur="500" fill="hold"/>
+                                        <p:cTn id="31" dur="500" fill="hold"/>
                                         <p:tgtEl>
                                           <p:spTgt spid="8"/>
                                         </p:tgtEl>
@@ -15718,7 +16098,7 @@
                                     </p:anim>
                                     <p:animEffect transition="in" filter="fade">
                                       <p:cBhvr>
-                                        <p:cTn id="19" dur="500"/>
+                                        <p:cTn id="32" dur="500"/>
                                         <p:tgtEl>
                                           <p:spTgt spid="8"/>
                                         </p:tgtEl>
@@ -15757,7 +16137,7 @@
     <p:bldLst>
       <p:bldP spid="4" grpId="0"/>
       <p:bldP spid="5" grpId="0"/>
-      <p:bldP spid="6" grpId="0"/>
+      <p:bldP spid="6" grpId="0" build="p"/>
     </p:bldLst>
   </p:timing>
 </p:sld>
@@ -15796,7 +16176,12 @@
             <p:ph type="title"/>
           </p:nvPr>
         </p:nvSpPr>
-        <p:spPr/>
+        <p:spPr>
+          <a:xfrm>
+            <a:off x="2023298" y="624110"/>
+            <a:ext cx="8911687" cy="1280890"/>
+          </a:xfrm>
+        </p:spPr>
         <p:txBody>
           <a:bodyPr/>
           <a:lstStyle/>
@@ -15832,7 +16217,7 @@
         </p:nvSpPr>
         <p:spPr>
           <a:xfrm>
-            <a:off x="2589212" y="2133600"/>
+            <a:off x="2019586" y="2133600"/>
             <a:ext cx="4313864" cy="2228538"/>
           </a:xfrm>
         </p:spPr>
@@ -16071,7 +16456,7 @@
         </p:nvSpPr>
         <p:spPr>
           <a:xfrm>
-            <a:off x="7190747" y="2126222"/>
+            <a:off x="6621121" y="2126222"/>
             <a:ext cx="4313864" cy="2228538"/>
           </a:xfrm>
         </p:spPr>
@@ -16219,14 +16604,14 @@
   <p:clrMapOvr>
     <a:masterClrMapping/>
   </p:clrMapOvr>
-  <mc:AlternateContent xmlns:mc="http://schemas.openxmlformats.org/markup-compatibility/2006" xmlns:p159="http://schemas.microsoft.com/office/powerpoint/2015/09/main">
-    <mc:Choice Requires="p159">
-      <p:transition xmlns:p14="http://schemas.microsoft.com/office/powerpoint/2010/main" spd="slow" p14:dur="2000">
+  <mc:AlternateContent xmlns:mc="http://schemas.openxmlformats.org/markup-compatibility/2006">
+    <mc:Choice xmlns:p159="http://schemas.microsoft.com/office/powerpoint/2015/09/main" Requires="p159">
+      <p:transition>
         <p159:morph option="byObject"/>
       </p:transition>
     </mc:Choice>
-    <mc:Fallback xmlns="">
-      <p:transition spd="slow">
+    <mc:Fallback>
+      <p:transition>
         <p:fade/>
       </p:transition>
     </mc:Fallback>
@@ -16255,7 +16640,7 @@
                             </p:stCondLst>
                             <p:childTnLst>
                               <p:par>
-                                <p:cTn id="5" presetID="10" presetClass="entr" presetSubtype="0" fill="hold" grpId="0" nodeType="withEffect">
+                                <p:cTn id="5" presetID="10" presetClass="entr" presetSubtype="0" fill="hold" grpId="0" nodeType="afterEffect">
                                   <p:stCondLst>
                                     <p:cond delay="0"/>
                                   </p:stCondLst>
@@ -16776,7 +17161,7 @@
         </p:nvSpPr>
         <p:spPr>
           <a:xfrm>
-            <a:off x="2592924" y="624110"/>
+            <a:off x="2083258" y="624110"/>
             <a:ext cx="8911687" cy="844926"/>
           </a:xfrm>
         </p:spPr>
@@ -16856,7 +17241,7 @@
         </p:blipFill>
         <p:spPr>
           <a:xfrm>
-            <a:off x="2592924" y="1565141"/>
+            <a:off x="2083258" y="1565141"/>
             <a:ext cx="3238501" cy="2147888"/>
           </a:xfrm>
           <a:prstGeom prst="rect">
@@ -16906,7 +17291,7 @@
         </p:blipFill>
         <p:spPr>
           <a:xfrm>
-            <a:off x="6195302" y="1225253"/>
+            <a:off x="5685636" y="1225253"/>
             <a:ext cx="2530264" cy="2530264"/>
           </a:xfrm>
           <a:prstGeom prst="rect">
@@ -16966,7 +17351,7 @@
         </p:blipFill>
         <p:spPr>
           <a:xfrm>
-            <a:off x="9089444" y="1319873"/>
+            <a:off x="8579778" y="1319873"/>
             <a:ext cx="2530264" cy="2530264"/>
           </a:xfrm>
           <a:prstGeom prst="rect">
@@ -16988,7 +17373,7 @@
         </p:nvSpPr>
         <p:spPr>
           <a:xfrm>
-            <a:off x="2592924" y="4077325"/>
+            <a:off x="2083258" y="4077325"/>
             <a:ext cx="9026784" cy="1477328"/>
           </a:xfrm>
           <a:prstGeom prst="rect">
@@ -17117,14 +17502,14 @@
   <p:clrMapOvr>
     <a:masterClrMapping/>
   </p:clrMapOvr>
-  <mc:AlternateContent xmlns:mc="http://schemas.openxmlformats.org/markup-compatibility/2006" xmlns:p159="http://schemas.microsoft.com/office/powerpoint/2015/09/main">
-    <mc:Choice Requires="p159">
-      <p:transition xmlns:p14="http://schemas.microsoft.com/office/powerpoint/2010/main" spd="slow" p14:dur="2000">
+  <mc:AlternateContent xmlns:mc="http://schemas.openxmlformats.org/markup-compatibility/2006">
+    <mc:Choice xmlns:p159="http://schemas.microsoft.com/office/powerpoint/2015/09/main" Requires="p159">
+      <p:transition>
         <p159:morph option="byObject"/>
       </p:transition>
     </mc:Choice>
-    <mc:Fallback xmlns="">
-      <p:transition spd="slow">
+    <mc:Fallback>
+      <p:transition>
         <p:fade/>
       </p:transition>
     </mc:Fallback>
@@ -17141,6 +17526,9 @@
                     <p:cTn id="3" fill="hold">
                       <p:stCondLst>
                         <p:cond delay="indefinite"/>
+                        <p:cond evt="onBegin" delay="0">
+                          <p:tn val="2"/>
+                        </p:cond>
                       </p:stCondLst>
                       <p:childTnLst>
                         <p:par>
@@ -17150,7 +17538,7 @@
                             </p:stCondLst>
                             <p:childTnLst>
                               <p:par>
-                                <p:cTn id="5" presetID="10" presetClass="entr" presetSubtype="0" fill="hold" grpId="0" nodeType="clickEffect">
+                                <p:cTn id="5" presetID="10" presetClass="entr" presetSubtype="0" fill="hold" grpId="0" nodeType="afterEffect">
                                   <p:stCondLst>
                                     <p:cond delay="0"/>
                                   </p:stCondLst>
@@ -17187,30 +17575,21 @@
                             </p:childTnLst>
                           </p:cTn>
                         </p:par>
-                      </p:childTnLst>
-                    </p:cTn>
-                  </p:par>
-                  <p:par>
-                    <p:cTn id="8" fill="hold">
-                      <p:stCondLst>
-                        <p:cond delay="indefinite"/>
-                      </p:stCondLst>
-                      <p:childTnLst>
                         <p:par>
-                          <p:cTn id="9" fill="hold">
+                          <p:cTn id="8" fill="hold">
                             <p:stCondLst>
-                              <p:cond delay="0"/>
+                              <p:cond delay="500"/>
                             </p:stCondLst>
                             <p:childTnLst>
                               <p:par>
-                                <p:cTn id="10" presetID="53" presetClass="entr" presetSubtype="16" fill="hold" nodeType="clickEffect">
+                                <p:cTn id="9" presetID="53" presetClass="entr" presetSubtype="16" fill="hold" nodeType="afterEffect">
                                   <p:stCondLst>
                                     <p:cond delay="0"/>
                                   </p:stCondLst>
                                   <p:childTnLst>
                                     <p:set>
                                       <p:cBhvr>
-                                        <p:cTn id="11" dur="1" fill="hold">
+                                        <p:cTn id="10" dur="1" fill="hold">
                                           <p:stCondLst>
                                             <p:cond delay="0"/>
                                           </p:stCondLst>
@@ -17228,7 +17607,7 @@
                                     </p:set>
                                     <p:anim calcmode="lin" valueType="num">
                                       <p:cBhvr>
-                                        <p:cTn id="12" dur="500" fill="hold"/>
+                                        <p:cTn id="11" dur="500" fill="hold"/>
                                         <p:tgtEl>
                                           <p:spTgt spid="4"/>
                                         </p:tgtEl>
@@ -17251,7 +17630,7 @@
                                     </p:anim>
                                     <p:anim calcmode="lin" valueType="num">
                                       <p:cBhvr>
-                                        <p:cTn id="13" dur="500" fill="hold"/>
+                                        <p:cTn id="12" dur="500" fill="hold"/>
                                         <p:tgtEl>
                                           <p:spTgt spid="4"/>
                                         </p:tgtEl>
@@ -17274,7 +17653,7 @@
                                     </p:anim>
                                     <p:animEffect transition="in" filter="fade">
                                       <p:cBhvr>
-                                        <p:cTn id="14" dur="500"/>
+                                        <p:cTn id="13" dur="500"/>
                                         <p:tgtEl>
                                           <p:spTgt spid="4"/>
                                         </p:tgtEl>
@@ -17286,30 +17665,21 @@
                             </p:childTnLst>
                           </p:cTn>
                         </p:par>
-                      </p:childTnLst>
-                    </p:cTn>
-                  </p:par>
-                  <p:par>
-                    <p:cTn id="15" fill="hold">
-                      <p:stCondLst>
-                        <p:cond delay="indefinite"/>
-                      </p:stCondLst>
-                      <p:childTnLst>
                         <p:par>
-                          <p:cTn id="16" fill="hold">
+                          <p:cTn id="14" fill="hold">
                             <p:stCondLst>
-                              <p:cond delay="0"/>
+                              <p:cond delay="1000"/>
                             </p:stCondLst>
                             <p:childTnLst>
                               <p:par>
-                                <p:cTn id="17" presetID="53" presetClass="entr" presetSubtype="16" fill="hold" nodeType="clickEffect">
+                                <p:cTn id="15" presetID="53" presetClass="entr" presetSubtype="16" fill="hold" nodeType="afterEffect">
                                   <p:stCondLst>
                                     <p:cond delay="0"/>
                                   </p:stCondLst>
                                   <p:childTnLst>
                                     <p:set>
                                       <p:cBhvr>
-                                        <p:cTn id="18" dur="1" fill="hold">
+                                        <p:cTn id="16" dur="1" fill="hold">
                                           <p:stCondLst>
                                             <p:cond delay="0"/>
                                           </p:stCondLst>
@@ -17327,7 +17697,7 @@
                                     </p:set>
                                     <p:anim calcmode="lin" valueType="num">
                                       <p:cBhvr>
-                                        <p:cTn id="19" dur="500" fill="hold"/>
+                                        <p:cTn id="17" dur="500" fill="hold"/>
                                         <p:tgtEl>
                                           <p:spTgt spid="6"/>
                                         </p:tgtEl>
@@ -17350,7 +17720,7 @@
                                     </p:anim>
                                     <p:anim calcmode="lin" valueType="num">
                                       <p:cBhvr>
-                                        <p:cTn id="20" dur="500" fill="hold"/>
+                                        <p:cTn id="18" dur="500" fill="hold"/>
                                         <p:tgtEl>
                                           <p:spTgt spid="6"/>
                                         </p:tgtEl>
@@ -17373,7 +17743,7 @@
                                     </p:anim>
                                     <p:animEffect transition="in" filter="fade">
                                       <p:cBhvr>
-                                        <p:cTn id="21" dur="500"/>
+                                        <p:cTn id="19" dur="500"/>
                                         <p:tgtEl>
                                           <p:spTgt spid="6"/>
                                         </p:tgtEl>
@@ -17385,30 +17755,21 @@
                             </p:childTnLst>
                           </p:cTn>
                         </p:par>
-                      </p:childTnLst>
-                    </p:cTn>
-                  </p:par>
-                  <p:par>
-                    <p:cTn id="22" fill="hold">
-                      <p:stCondLst>
-                        <p:cond delay="indefinite"/>
-                      </p:stCondLst>
-                      <p:childTnLst>
                         <p:par>
-                          <p:cTn id="23" fill="hold">
+                          <p:cTn id="20" fill="hold">
                             <p:stCondLst>
-                              <p:cond delay="0"/>
+                              <p:cond delay="1500"/>
                             </p:stCondLst>
                             <p:childTnLst>
                               <p:par>
-                                <p:cTn id="24" presetID="53" presetClass="entr" presetSubtype="16" fill="hold" nodeType="clickEffect">
+                                <p:cTn id="21" presetID="53" presetClass="entr" presetSubtype="16" fill="hold" nodeType="afterEffect">
                                   <p:stCondLst>
                                     <p:cond delay="0"/>
                                   </p:stCondLst>
                                   <p:childTnLst>
                                     <p:set>
                                       <p:cBhvr>
-                                        <p:cTn id="25" dur="1" fill="hold">
+                                        <p:cTn id="22" dur="1" fill="hold">
                                           <p:stCondLst>
                                             <p:cond delay="0"/>
                                           </p:stCondLst>
@@ -17426,7 +17787,7 @@
                                     </p:set>
                                     <p:anim calcmode="lin" valueType="num">
                                       <p:cBhvr>
-                                        <p:cTn id="26" dur="500" fill="hold"/>
+                                        <p:cTn id="23" dur="500" fill="hold"/>
                                         <p:tgtEl>
                                           <p:spTgt spid="10"/>
                                         </p:tgtEl>
@@ -17449,7 +17810,7 @@
                                     </p:anim>
                                     <p:anim calcmode="lin" valueType="num">
                                       <p:cBhvr>
-                                        <p:cTn id="27" dur="500" fill="hold"/>
+                                        <p:cTn id="24" dur="500" fill="hold"/>
                                         <p:tgtEl>
                                           <p:spTgt spid="10"/>
                                         </p:tgtEl>
@@ -17472,7 +17833,7 @@
                                     </p:anim>
                                     <p:animEffect transition="in" filter="fade">
                                       <p:cBhvr>
-                                        <p:cTn id="28" dur="500"/>
+                                        <p:cTn id="25" dur="500"/>
                                         <p:tgtEl>
                                           <p:spTgt spid="10"/>
                                         </p:tgtEl>
@@ -17484,23 +17845,66 @@
                             </p:childTnLst>
                           </p:cTn>
                         </p:par>
-                      </p:childTnLst>
-                    </p:cTn>
-                  </p:par>
-                  <p:par>
-                    <p:cTn id="29" fill="hold">
-                      <p:stCondLst>
-                        <p:cond delay="indefinite"/>
-                      </p:stCondLst>
-                      <p:childTnLst>
+                        <p:par>
+                          <p:cTn id="26" fill="hold">
+                            <p:stCondLst>
+                              <p:cond delay="2000"/>
+                            </p:stCondLst>
+                            <p:childTnLst>
+                              <p:par>
+                                <p:cTn id="27" presetID="22" presetClass="entr" presetSubtype="8" fill="hold" grpId="0" nodeType="afterEffect">
+                                  <p:stCondLst>
+                                    <p:cond delay="0"/>
+                                  </p:stCondLst>
+                                  <p:childTnLst>
+                                    <p:set>
+                                      <p:cBhvr>
+                                        <p:cTn id="28" dur="1" fill="hold">
+                                          <p:stCondLst>
+                                            <p:cond delay="0"/>
+                                          </p:stCondLst>
+                                        </p:cTn>
+                                        <p:tgtEl>
+                                          <p:spTgt spid="11">
+                                            <p:txEl>
+                                              <p:pRg st="0" end="0"/>
+                                            </p:txEl>
+                                          </p:spTgt>
+                                        </p:tgtEl>
+                                        <p:attrNameLst>
+                                          <p:attrName>style.visibility</p:attrName>
+                                        </p:attrNameLst>
+                                      </p:cBhvr>
+                                      <p:to>
+                                        <p:strVal val="visible"/>
+                                      </p:to>
+                                    </p:set>
+                                    <p:animEffect transition="in" filter="wipe(left)">
+                                      <p:cBhvr>
+                                        <p:cTn id="29" dur="500"/>
+                                        <p:tgtEl>
+                                          <p:spTgt spid="11">
+                                            <p:txEl>
+                                              <p:pRg st="0" end="0"/>
+                                            </p:txEl>
+                                          </p:spTgt>
+                                        </p:tgtEl>
+                                      </p:cBhvr>
+                                    </p:animEffect>
+                                  </p:childTnLst>
+                                </p:cTn>
+                              </p:par>
+                            </p:childTnLst>
+                          </p:cTn>
+                        </p:par>
                         <p:par>
                           <p:cTn id="30" fill="hold">
                             <p:stCondLst>
-                              <p:cond delay="0"/>
+                              <p:cond delay="2500"/>
                             </p:stCondLst>
                             <p:childTnLst>
                               <p:par>
-                                <p:cTn id="31" presetID="22" presetClass="entr" presetSubtype="8" fill="hold" grpId="0" nodeType="clickEffect">
+                                <p:cTn id="31" presetID="22" presetClass="entr" presetSubtype="8" fill="hold" grpId="0" nodeType="afterEffect">
                                   <p:stCondLst>
                                     <p:cond delay="0"/>
                                   </p:stCondLst>
@@ -17513,7 +17917,11 @@
                                           </p:stCondLst>
                                         </p:cTn>
                                         <p:tgtEl>
-                                          <p:spTgt spid="11"/>
+                                          <p:spTgt spid="11">
+                                            <p:txEl>
+                                              <p:pRg st="1" end="1"/>
+                                            </p:txEl>
+                                          </p:spTgt>
                                         </p:tgtEl>
                                         <p:attrNameLst>
                                           <p:attrName>style.visibility</p:attrName>
@@ -17527,7 +17935,167 @@
                                       <p:cBhvr>
                                         <p:cTn id="33" dur="500"/>
                                         <p:tgtEl>
-                                          <p:spTgt spid="11"/>
+                                          <p:spTgt spid="11">
+                                            <p:txEl>
+                                              <p:pRg st="1" end="1"/>
+                                            </p:txEl>
+                                          </p:spTgt>
+                                        </p:tgtEl>
+                                      </p:cBhvr>
+                                    </p:animEffect>
+                                  </p:childTnLst>
+                                </p:cTn>
+                              </p:par>
+                            </p:childTnLst>
+                          </p:cTn>
+                        </p:par>
+                        <p:par>
+                          <p:cTn id="34" fill="hold">
+                            <p:stCondLst>
+                              <p:cond delay="3000"/>
+                            </p:stCondLst>
+                            <p:childTnLst>
+                              <p:par>
+                                <p:cTn id="35" presetID="22" presetClass="entr" presetSubtype="8" fill="hold" grpId="0" nodeType="afterEffect">
+                                  <p:stCondLst>
+                                    <p:cond delay="0"/>
+                                  </p:stCondLst>
+                                  <p:childTnLst>
+                                    <p:set>
+                                      <p:cBhvr>
+                                        <p:cTn id="36" dur="1" fill="hold">
+                                          <p:stCondLst>
+                                            <p:cond delay="0"/>
+                                          </p:stCondLst>
+                                        </p:cTn>
+                                        <p:tgtEl>
+                                          <p:spTgt spid="11">
+                                            <p:txEl>
+                                              <p:pRg st="2" end="2"/>
+                                            </p:txEl>
+                                          </p:spTgt>
+                                        </p:tgtEl>
+                                        <p:attrNameLst>
+                                          <p:attrName>style.visibility</p:attrName>
+                                        </p:attrNameLst>
+                                      </p:cBhvr>
+                                      <p:to>
+                                        <p:strVal val="visible"/>
+                                      </p:to>
+                                    </p:set>
+                                    <p:animEffect transition="in" filter="wipe(left)">
+                                      <p:cBhvr>
+                                        <p:cTn id="37" dur="500"/>
+                                        <p:tgtEl>
+                                          <p:spTgt spid="11">
+                                            <p:txEl>
+                                              <p:pRg st="2" end="2"/>
+                                            </p:txEl>
+                                          </p:spTgt>
+                                        </p:tgtEl>
+                                      </p:cBhvr>
+                                    </p:animEffect>
+                                  </p:childTnLst>
+                                </p:cTn>
+                              </p:par>
+                            </p:childTnLst>
+                          </p:cTn>
+                        </p:par>
+                        <p:par>
+                          <p:cTn id="38" fill="hold">
+                            <p:stCondLst>
+                              <p:cond delay="3500"/>
+                            </p:stCondLst>
+                            <p:childTnLst>
+                              <p:par>
+                                <p:cTn id="39" presetID="22" presetClass="entr" presetSubtype="8" fill="hold" grpId="0" nodeType="afterEffect">
+                                  <p:stCondLst>
+                                    <p:cond delay="0"/>
+                                  </p:stCondLst>
+                                  <p:childTnLst>
+                                    <p:set>
+                                      <p:cBhvr>
+                                        <p:cTn id="40" dur="1" fill="hold">
+                                          <p:stCondLst>
+                                            <p:cond delay="0"/>
+                                          </p:stCondLst>
+                                        </p:cTn>
+                                        <p:tgtEl>
+                                          <p:spTgt spid="11">
+                                            <p:txEl>
+                                              <p:pRg st="3" end="3"/>
+                                            </p:txEl>
+                                          </p:spTgt>
+                                        </p:tgtEl>
+                                        <p:attrNameLst>
+                                          <p:attrName>style.visibility</p:attrName>
+                                        </p:attrNameLst>
+                                      </p:cBhvr>
+                                      <p:to>
+                                        <p:strVal val="visible"/>
+                                      </p:to>
+                                    </p:set>
+                                    <p:animEffect transition="in" filter="wipe(left)">
+                                      <p:cBhvr>
+                                        <p:cTn id="41" dur="500"/>
+                                        <p:tgtEl>
+                                          <p:spTgt spid="11">
+                                            <p:txEl>
+                                              <p:pRg st="3" end="3"/>
+                                            </p:txEl>
+                                          </p:spTgt>
+                                        </p:tgtEl>
+                                      </p:cBhvr>
+                                    </p:animEffect>
+                                  </p:childTnLst>
+                                </p:cTn>
+                              </p:par>
+                            </p:childTnLst>
+                          </p:cTn>
+                        </p:par>
+                        <p:par>
+                          <p:cTn id="42" fill="hold">
+                            <p:stCondLst>
+                              <p:cond delay="4000"/>
+                            </p:stCondLst>
+                            <p:childTnLst>
+                              <p:par>
+                                <p:cTn id="43" presetID="22" presetClass="entr" presetSubtype="8" fill="hold" grpId="0" nodeType="afterEffect">
+                                  <p:stCondLst>
+                                    <p:cond delay="0"/>
+                                  </p:stCondLst>
+                                  <p:childTnLst>
+                                    <p:set>
+                                      <p:cBhvr>
+                                        <p:cTn id="44" dur="1" fill="hold">
+                                          <p:stCondLst>
+                                            <p:cond delay="0"/>
+                                          </p:stCondLst>
+                                        </p:cTn>
+                                        <p:tgtEl>
+                                          <p:spTgt spid="11">
+                                            <p:txEl>
+                                              <p:pRg st="4" end="4"/>
+                                            </p:txEl>
+                                          </p:spTgt>
+                                        </p:tgtEl>
+                                        <p:attrNameLst>
+                                          <p:attrName>style.visibility</p:attrName>
+                                        </p:attrNameLst>
+                                      </p:cBhvr>
+                                      <p:to>
+                                        <p:strVal val="visible"/>
+                                      </p:to>
+                                    </p:set>
+                                    <p:animEffect transition="in" filter="wipe(left)">
+                                      <p:cBhvr>
+                                        <p:cTn id="45" dur="500"/>
+                                        <p:tgtEl>
+                                          <p:spTgt spid="11">
+                                            <p:txEl>
+                                              <p:pRg st="4" end="4"/>
+                                            </p:txEl>
+                                          </p:spTgt>
                                         </p:tgtEl>
                                       </p:cBhvr>
                                     </p:animEffect>
@@ -17563,7 +18131,7 @@
     </p:tnLst>
     <p:bldLst>
       <p:bldP spid="2" grpId="0"/>
-      <p:bldP spid="11" grpId="0"/>
+      <p:bldP spid="11" grpId="0" build="p"/>
     </p:bldLst>
   </p:timing>
 </p:sld>
@@ -17604,7 +18172,7 @@
         </p:nvSpPr>
         <p:spPr>
           <a:xfrm>
-            <a:off x="2592924" y="624110"/>
+            <a:off x="2068268" y="624110"/>
             <a:ext cx="8911687" cy="829936"/>
           </a:xfrm>
         </p:spPr>
@@ -17638,13 +18206,13 @@
           <p:nvPr>
             <p:extLst>
               <p:ext uri="{D42A27DB-BD31-4B8C-83A1-F6EECF244321}">
-                <p14:modId xmlns:p14="http://schemas.microsoft.com/office/powerpoint/2010/main" val="2398539157"/>
+                <p14:modId xmlns:p14="http://schemas.microsoft.com/office/powerpoint/2010/main" val="3870779862"/>
               </p:ext>
             </p:extLst>
           </p:nvPr>
         </p:nvGraphicFramePr>
         <p:xfrm>
-          <a:off x="2592923" y="1454047"/>
+          <a:off x="2068267" y="1454047"/>
           <a:ext cx="7630369" cy="3807502"/>
         </p:xfrm>
         <a:graphic>
@@ -17667,7 +18235,7 @@
         </p:nvSpPr>
         <p:spPr>
           <a:xfrm>
-            <a:off x="2592923" y="5396459"/>
+            <a:off x="2068267" y="5396459"/>
             <a:ext cx="7360546" cy="923330"/>
           </a:xfrm>
           <a:prstGeom prst="rect">
@@ -17747,14 +18315,14 @@
   <p:clrMapOvr>
     <a:masterClrMapping/>
   </p:clrMapOvr>
-  <mc:AlternateContent xmlns:mc="http://schemas.openxmlformats.org/markup-compatibility/2006" xmlns:p159="http://schemas.microsoft.com/office/powerpoint/2015/09/main">
-    <mc:Choice Requires="p159">
-      <p:transition xmlns:p14="http://schemas.microsoft.com/office/powerpoint/2010/main" spd="slow" p14:dur="2000">
+  <mc:AlternateContent xmlns:mc="http://schemas.openxmlformats.org/markup-compatibility/2006">
+    <mc:Choice xmlns:p159="http://schemas.microsoft.com/office/powerpoint/2015/09/main" Requires="p159">
+      <p:transition>
         <p159:morph option="byObject"/>
       </p:transition>
     </mc:Choice>
-    <mc:Fallback xmlns="">
-      <p:transition spd="slow">
+    <mc:Fallback>
+      <p:transition>
         <p:fade/>
       </p:transition>
     </mc:Fallback>
@@ -17771,6 +18339,9 @@
                     <p:cTn id="3" fill="hold">
                       <p:stCondLst>
                         <p:cond delay="indefinite"/>
+                        <p:cond evt="onBegin" delay="0">
+                          <p:tn val="2"/>
+                        </p:cond>
                       </p:stCondLst>
                       <p:childTnLst>
                         <p:par>
@@ -17780,7 +18351,7 @@
                             </p:stCondLst>
                             <p:childTnLst>
                               <p:par>
-                                <p:cTn id="5" presetID="10" presetClass="entr" presetSubtype="0" fill="hold" grpId="0" nodeType="clickEffect">
+                                <p:cTn id="5" presetID="10" presetClass="entr" presetSubtype="0" fill="hold" grpId="0" nodeType="afterEffect">
                                   <p:stCondLst>
                                     <p:cond delay="0"/>
                                   </p:stCondLst>
@@ -17817,30 +18388,21 @@
                             </p:childTnLst>
                           </p:cTn>
                         </p:par>
-                      </p:childTnLst>
-                    </p:cTn>
-                  </p:par>
-                  <p:par>
-                    <p:cTn id="8" fill="hold">
-                      <p:stCondLst>
-                        <p:cond delay="indefinite"/>
-                      </p:stCondLst>
-                      <p:childTnLst>
                         <p:par>
-                          <p:cTn id="9" fill="hold">
+                          <p:cTn id="8" fill="hold">
                             <p:stCondLst>
-                              <p:cond delay="0"/>
+                              <p:cond delay="500"/>
                             </p:stCondLst>
                             <p:childTnLst>
                               <p:par>
-                                <p:cTn id="10" presetID="1" presetClass="entr" presetSubtype="0" fill="hold" grpId="0" nodeType="clickEffect">
+                                <p:cTn id="9" presetID="22" presetClass="entr" presetSubtype="4" fill="hold" grpId="0" nodeType="afterEffect">
                                   <p:stCondLst>
                                     <p:cond delay="0"/>
                                   </p:stCondLst>
                                   <p:childTnLst>
                                     <p:set>
                                       <p:cBhvr>
-                                        <p:cTn id="11" dur="1" fill="hold">
+                                        <p:cTn id="10" dur="1" fill="hold">
                                           <p:stCondLst>
                                             <p:cond delay="0"/>
                                           </p:stCondLst>
@@ -17856,42 +18418,45 @@
                                         <p:strVal val="visible"/>
                                       </p:to>
                                     </p:set>
+                                    <p:animEffect transition="in" filter="wipe(down)">
+                                      <p:cBhvr>
+                                        <p:cTn id="11" dur="500"/>
+                                        <p:tgtEl>
+                                          <p:spTgt spid="5"/>
+                                        </p:tgtEl>
+                                      </p:cBhvr>
+                                    </p:animEffect>
                                   </p:childTnLst>
                                 </p:cTn>
                               </p:par>
                             </p:childTnLst>
                           </p:cTn>
                         </p:par>
-                      </p:childTnLst>
-                    </p:cTn>
-                  </p:par>
-                  <p:par>
-                    <p:cTn id="12" fill="hold">
-                      <p:stCondLst>
-                        <p:cond delay="indefinite"/>
-                      </p:stCondLst>
-                      <p:childTnLst>
                         <p:par>
-                          <p:cTn id="13" fill="hold">
+                          <p:cTn id="12" fill="hold">
                             <p:stCondLst>
-                              <p:cond delay="0"/>
+                              <p:cond delay="1000"/>
                             </p:stCondLst>
                             <p:childTnLst>
                               <p:par>
-                                <p:cTn id="14" presetID="22" presetClass="entr" presetSubtype="8" fill="hold" grpId="0" nodeType="clickEffect">
+                                <p:cTn id="13" presetID="22" presetClass="entr" presetSubtype="8" fill="hold" grpId="0" nodeType="afterEffect">
                                   <p:stCondLst>
                                     <p:cond delay="0"/>
                                   </p:stCondLst>
                                   <p:childTnLst>
                                     <p:set>
                                       <p:cBhvr>
-                                        <p:cTn id="15" dur="1" fill="hold">
+                                        <p:cTn id="14" dur="1" fill="hold">
                                           <p:stCondLst>
                                             <p:cond delay="0"/>
                                           </p:stCondLst>
                                         </p:cTn>
                                         <p:tgtEl>
-                                          <p:spTgt spid="6"/>
+                                          <p:spTgt spid="6">
+                                            <p:txEl>
+                                              <p:pRg st="0" end="0"/>
+                                            </p:txEl>
+                                          </p:spTgt>
                                         </p:tgtEl>
                                         <p:attrNameLst>
                                           <p:attrName>style.visibility</p:attrName>
@@ -17903,9 +18468,117 @@
                                     </p:set>
                                     <p:animEffect transition="in" filter="wipe(left)">
                                       <p:cBhvr>
-                                        <p:cTn id="16" dur="500"/>
+                                        <p:cTn id="15" dur="500"/>
                                         <p:tgtEl>
-                                          <p:spTgt spid="6"/>
+                                          <p:spTgt spid="6">
+                                            <p:txEl>
+                                              <p:pRg st="0" end="0"/>
+                                            </p:txEl>
+                                          </p:spTgt>
+                                        </p:tgtEl>
+                                      </p:cBhvr>
+                                    </p:animEffect>
+                                  </p:childTnLst>
+                                </p:cTn>
+                              </p:par>
+                            </p:childTnLst>
+                          </p:cTn>
+                        </p:par>
+                        <p:par>
+                          <p:cTn id="16" fill="hold">
+                            <p:stCondLst>
+                              <p:cond delay="1500"/>
+                            </p:stCondLst>
+                            <p:childTnLst>
+                              <p:par>
+                                <p:cTn id="17" presetID="22" presetClass="entr" presetSubtype="8" fill="hold" grpId="0" nodeType="afterEffect">
+                                  <p:stCondLst>
+                                    <p:cond delay="0"/>
+                                  </p:stCondLst>
+                                  <p:childTnLst>
+                                    <p:set>
+                                      <p:cBhvr>
+                                        <p:cTn id="18" dur="1" fill="hold">
+                                          <p:stCondLst>
+                                            <p:cond delay="0"/>
+                                          </p:stCondLst>
+                                        </p:cTn>
+                                        <p:tgtEl>
+                                          <p:spTgt spid="6">
+                                            <p:txEl>
+                                              <p:pRg st="1" end="1"/>
+                                            </p:txEl>
+                                          </p:spTgt>
+                                        </p:tgtEl>
+                                        <p:attrNameLst>
+                                          <p:attrName>style.visibility</p:attrName>
+                                        </p:attrNameLst>
+                                      </p:cBhvr>
+                                      <p:to>
+                                        <p:strVal val="visible"/>
+                                      </p:to>
+                                    </p:set>
+                                    <p:animEffect transition="in" filter="wipe(left)">
+                                      <p:cBhvr>
+                                        <p:cTn id="19" dur="500"/>
+                                        <p:tgtEl>
+                                          <p:spTgt spid="6">
+                                            <p:txEl>
+                                              <p:pRg st="1" end="1"/>
+                                            </p:txEl>
+                                          </p:spTgt>
+                                        </p:tgtEl>
+                                      </p:cBhvr>
+                                    </p:animEffect>
+                                  </p:childTnLst>
+                                </p:cTn>
+                              </p:par>
+                            </p:childTnLst>
+                          </p:cTn>
+                        </p:par>
+                        <p:par>
+                          <p:cTn id="20" fill="hold">
+                            <p:stCondLst>
+                              <p:cond delay="2000"/>
+                            </p:stCondLst>
+                            <p:childTnLst>
+                              <p:par>
+                                <p:cTn id="21" presetID="22" presetClass="entr" presetSubtype="8" fill="hold" grpId="0" nodeType="afterEffect">
+                                  <p:stCondLst>
+                                    <p:cond delay="0"/>
+                                  </p:stCondLst>
+                                  <p:childTnLst>
+                                    <p:set>
+                                      <p:cBhvr>
+                                        <p:cTn id="22" dur="1" fill="hold">
+                                          <p:stCondLst>
+                                            <p:cond delay="0"/>
+                                          </p:stCondLst>
+                                        </p:cTn>
+                                        <p:tgtEl>
+                                          <p:spTgt spid="6">
+                                            <p:txEl>
+                                              <p:pRg st="2" end="2"/>
+                                            </p:txEl>
+                                          </p:spTgt>
+                                        </p:tgtEl>
+                                        <p:attrNameLst>
+                                          <p:attrName>style.visibility</p:attrName>
+                                        </p:attrNameLst>
+                                      </p:cBhvr>
+                                      <p:to>
+                                        <p:strVal val="visible"/>
+                                      </p:to>
+                                    </p:set>
+                                    <p:animEffect transition="in" filter="wipe(left)">
+                                      <p:cBhvr>
+                                        <p:cTn id="23" dur="500"/>
+                                        <p:tgtEl>
+                                          <p:spTgt spid="6">
+                                            <p:txEl>
+                                              <p:pRg st="2" end="2"/>
+                                            </p:txEl>
+                                          </p:spTgt>
                                         </p:tgtEl>
                                       </p:cBhvr>
                                     </p:animEffect>
@@ -17944,7 +18617,7 @@
       <p:bldGraphic spid="5" grpId="0">
         <p:bldAsOne/>
       </p:bldGraphic>
-      <p:bldP spid="6" grpId="0"/>
+      <p:bldP spid="6" grpId="0" uiExpand="1" build="p"/>
     </p:bldLst>
   </p:timing>
 </p:sld>
@@ -17983,7 +18656,12 @@
             <p:ph type="title"/>
           </p:nvPr>
         </p:nvSpPr>
-        <p:spPr/>
+        <p:spPr>
+          <a:xfrm>
+            <a:off x="2038288" y="624110"/>
+            <a:ext cx="8911687" cy="1280890"/>
+          </a:xfrm>
+        </p:spPr>
         <p:txBody>
           <a:bodyPr/>
           <a:lstStyle/>
@@ -18015,7 +18693,7 @@
         </p:nvSpPr>
         <p:spPr>
           <a:xfrm>
-            <a:off x="2698230" y="1738859"/>
+            <a:off x="2143594" y="1738859"/>
             <a:ext cx="3642609" cy="1477328"/>
           </a:xfrm>
           <a:prstGeom prst="rect">
@@ -18149,13 +18827,13 @@
           <p:nvPr>
             <p:extLst>
               <p:ext uri="{D42A27DB-BD31-4B8C-83A1-F6EECF244321}">
-                <p14:modId xmlns:p14="http://schemas.microsoft.com/office/powerpoint/2010/main" val="3013699468"/>
+                <p14:modId xmlns:p14="http://schemas.microsoft.com/office/powerpoint/2010/main" val="2692182793"/>
               </p:ext>
             </p:extLst>
           </p:nvPr>
         </p:nvGraphicFramePr>
         <p:xfrm>
-          <a:off x="2698230" y="3429138"/>
+          <a:off x="2143594" y="3429138"/>
           <a:ext cx="8128000" cy="1112520"/>
         </p:xfrm>
         <a:graphic>
@@ -18313,7 +18991,7 @@
         </p:nvSpPr>
         <p:spPr>
           <a:xfrm>
-            <a:off x="2698230" y="4754609"/>
+            <a:off x="2143594" y="4754609"/>
             <a:ext cx="2529860" cy="369332"/>
           </a:xfrm>
           <a:prstGeom prst="rect">
@@ -18380,13 +19058,13 @@
           <p:nvPr>
             <p:extLst>
               <p:ext uri="{D42A27DB-BD31-4B8C-83A1-F6EECF244321}">
-                <p14:modId xmlns:p14="http://schemas.microsoft.com/office/powerpoint/2010/main" val="2389880020"/>
+                <p14:modId xmlns:p14="http://schemas.microsoft.com/office/powerpoint/2010/main" val="4177709847"/>
               </p:ext>
             </p:extLst>
           </p:nvPr>
         </p:nvGraphicFramePr>
         <p:xfrm>
-          <a:off x="2698230" y="5336892"/>
+          <a:off x="2143594" y="5336892"/>
           <a:ext cx="8128000" cy="728904"/>
         </p:xfrm>
         <a:graphic>
@@ -18409,7 +19087,7 @@
         </p:nvSpPr>
         <p:spPr>
           <a:xfrm>
-            <a:off x="7101420" y="1738859"/>
+            <a:off x="6546784" y="1738859"/>
             <a:ext cx="3642609" cy="1477328"/>
           </a:xfrm>
           <a:prstGeom prst="rect">
@@ -18538,14 +19216,14 @@
   <p:clrMapOvr>
     <a:masterClrMapping/>
   </p:clrMapOvr>
-  <mc:AlternateContent xmlns:mc="http://schemas.openxmlformats.org/markup-compatibility/2006" xmlns:p159="http://schemas.microsoft.com/office/powerpoint/2015/09/main">
-    <mc:Choice Requires="p159">
-      <p:transition xmlns:p14="http://schemas.microsoft.com/office/powerpoint/2010/main" spd="slow" p14:dur="2000">
+  <mc:AlternateContent xmlns:mc="http://schemas.openxmlformats.org/markup-compatibility/2006">
+    <mc:Choice xmlns:p159="http://schemas.microsoft.com/office/powerpoint/2015/09/main" Requires="p159">
+      <p:transition>
         <p159:morph option="byObject"/>
       </p:transition>
     </mc:Choice>
-    <mc:Fallback xmlns="">
-      <p:transition spd="slow">
+    <mc:Fallback>
+      <p:transition>
         <p:fade/>
       </p:transition>
     </mc:Fallback>
@@ -18562,6 +19240,9 @@
                     <p:cTn id="3" fill="hold">
                       <p:stCondLst>
                         <p:cond delay="indefinite"/>
+                        <p:cond evt="onBegin" delay="0">
+                          <p:tn val="2"/>
+                        </p:cond>
                       </p:stCondLst>
                       <p:childTnLst>
                         <p:par>
@@ -18571,7 +19252,7 @@
                             </p:stCondLst>
                             <p:childTnLst>
                               <p:par>
-                                <p:cTn id="5" presetID="10" presetClass="entr" presetSubtype="0" fill="hold" grpId="0" nodeType="clickEffect">
+                                <p:cTn id="5" presetID="10" presetClass="entr" presetSubtype="0" fill="hold" grpId="0" nodeType="afterEffect">
                                   <p:stCondLst>
                                     <p:cond delay="0"/>
                                   </p:stCondLst>
@@ -18628,7 +19309,11 @@
                                           </p:stCondLst>
                                         </p:cTn>
                                         <p:tgtEl>
-                                          <p:spTgt spid="3"/>
+                                          <p:spTgt spid="3">
+                                            <p:txEl>
+                                              <p:pRg st="0" end="0"/>
+                                            </p:txEl>
+                                          </p:spTgt>
                                         </p:tgtEl>
                                         <p:attrNameLst>
                                           <p:attrName>style.visibility</p:attrName>
@@ -18642,7 +19327,11 @@
                                       <p:cBhvr>
                                         <p:cTn id="11" dur="500"/>
                                         <p:tgtEl>
-                                          <p:spTgt spid="3"/>
+                                          <p:spTgt spid="3">
+                                            <p:txEl>
+                                              <p:pRg st="0" end="0"/>
+                                            </p:txEl>
+                                          </p:spTgt>
                                         </p:tgtEl>
                                       </p:cBhvr>
                                     </p:animEffect>
@@ -18672,7 +19361,11 @@
                                           </p:stCondLst>
                                         </p:cTn>
                                         <p:tgtEl>
-                                          <p:spTgt spid="7"/>
+                                          <p:spTgt spid="3">
+                                            <p:txEl>
+                                              <p:pRg st="1" end="1"/>
+                                            </p:txEl>
+                                          </p:spTgt>
                                         </p:tgtEl>
                                         <p:attrNameLst>
                                           <p:attrName>style.visibility</p:attrName>
@@ -18686,7 +19379,11 @@
                                       <p:cBhvr>
                                         <p:cTn id="15" dur="500"/>
                                         <p:tgtEl>
-                                          <p:spTgt spid="7"/>
+                                          <p:spTgt spid="3">
+                                            <p:txEl>
+                                              <p:pRg st="1" end="1"/>
+                                            </p:txEl>
+                                          </p:spTgt>
                                         </p:tgtEl>
                                       </p:cBhvr>
                                     </p:animEffect>
@@ -18703,7 +19400,7 @@
                             </p:stCondLst>
                             <p:childTnLst>
                               <p:par>
-                                <p:cTn id="17" presetID="22" presetClass="entr" presetSubtype="1" fill="hold" nodeType="afterEffect">
+                                <p:cTn id="17" presetID="22" presetClass="entr" presetSubtype="8" fill="hold" grpId="0" nodeType="afterEffect">
                                   <p:stCondLst>
                                     <p:cond delay="0"/>
                                   </p:stCondLst>
@@ -18716,7 +19413,11 @@
                                           </p:stCondLst>
                                         </p:cTn>
                                         <p:tgtEl>
-                                          <p:spTgt spid="4"/>
+                                          <p:spTgt spid="3">
+                                            <p:txEl>
+                                              <p:pRg st="2" end="2"/>
+                                            </p:txEl>
+                                          </p:spTgt>
                                         </p:tgtEl>
                                         <p:attrNameLst>
                                           <p:attrName>style.visibility</p:attrName>
@@ -18726,11 +19427,15 @@
                                         <p:strVal val="visible"/>
                                       </p:to>
                                     </p:set>
-                                    <p:animEffect transition="in" filter="wipe(up)">
+                                    <p:animEffect transition="in" filter="wipe(left)">
                                       <p:cBhvr>
                                         <p:cTn id="19" dur="500"/>
                                         <p:tgtEl>
-                                          <p:spTgt spid="4"/>
+                                          <p:spTgt spid="3">
+                                            <p:txEl>
+                                              <p:pRg st="2" end="2"/>
+                                            </p:txEl>
+                                          </p:spTgt>
                                         </p:tgtEl>
                                       </p:cBhvr>
                                     </p:animEffect>
@@ -18760,7 +19465,11 @@
                                           </p:stCondLst>
                                         </p:cTn>
                                         <p:tgtEl>
-                                          <p:spTgt spid="5"/>
+                                          <p:spTgt spid="3">
+                                            <p:txEl>
+                                              <p:pRg st="3" end="3"/>
+                                            </p:txEl>
+                                          </p:spTgt>
                                         </p:tgtEl>
                                         <p:attrNameLst>
                                           <p:attrName>style.visibility</p:attrName>
@@ -18774,7 +19483,11 @@
                                       <p:cBhvr>
                                         <p:cTn id="23" dur="500"/>
                                         <p:tgtEl>
-                                          <p:spTgt spid="5"/>
+                                          <p:spTgt spid="3">
+                                            <p:txEl>
+                                              <p:pRg st="3" end="3"/>
+                                            </p:txEl>
+                                          </p:spTgt>
                                         </p:tgtEl>
                                       </p:cBhvr>
                                     </p:animEffect>
@@ -18804,6 +19517,406 @@
                                           </p:stCondLst>
                                         </p:cTn>
                                         <p:tgtEl>
+                                          <p:spTgt spid="3">
+                                            <p:txEl>
+                                              <p:pRg st="4" end="4"/>
+                                            </p:txEl>
+                                          </p:spTgt>
+                                        </p:tgtEl>
+                                        <p:attrNameLst>
+                                          <p:attrName>style.visibility</p:attrName>
+                                        </p:attrNameLst>
+                                      </p:cBhvr>
+                                      <p:to>
+                                        <p:strVal val="visible"/>
+                                      </p:to>
+                                    </p:set>
+                                    <p:animEffect transition="in" filter="wipe(left)">
+                                      <p:cBhvr>
+                                        <p:cTn id="27" dur="500"/>
+                                        <p:tgtEl>
+                                          <p:spTgt spid="3">
+                                            <p:txEl>
+                                              <p:pRg st="4" end="4"/>
+                                            </p:txEl>
+                                          </p:spTgt>
+                                        </p:tgtEl>
+                                      </p:cBhvr>
+                                    </p:animEffect>
+                                  </p:childTnLst>
+                                </p:cTn>
+                              </p:par>
+                            </p:childTnLst>
+                          </p:cTn>
+                        </p:par>
+                        <p:par>
+                          <p:cTn id="28" fill="hold">
+                            <p:stCondLst>
+                              <p:cond delay="3000"/>
+                            </p:stCondLst>
+                            <p:childTnLst>
+                              <p:par>
+                                <p:cTn id="29" presetID="22" presetClass="entr" presetSubtype="8" fill="hold" grpId="0" nodeType="afterEffect">
+                                  <p:stCondLst>
+                                    <p:cond delay="0"/>
+                                  </p:stCondLst>
+                                  <p:childTnLst>
+                                    <p:set>
+                                      <p:cBhvr>
+                                        <p:cTn id="30" dur="1" fill="hold">
+                                          <p:stCondLst>
+                                            <p:cond delay="0"/>
+                                          </p:stCondLst>
+                                        </p:cTn>
+                                        <p:tgtEl>
+                                          <p:spTgt spid="7">
+                                            <p:txEl>
+                                              <p:pRg st="0" end="0"/>
+                                            </p:txEl>
+                                          </p:spTgt>
+                                        </p:tgtEl>
+                                        <p:attrNameLst>
+                                          <p:attrName>style.visibility</p:attrName>
+                                        </p:attrNameLst>
+                                      </p:cBhvr>
+                                      <p:to>
+                                        <p:strVal val="visible"/>
+                                      </p:to>
+                                    </p:set>
+                                    <p:animEffect transition="in" filter="wipe(left)">
+                                      <p:cBhvr>
+                                        <p:cTn id="31" dur="500"/>
+                                        <p:tgtEl>
+                                          <p:spTgt spid="7">
+                                            <p:txEl>
+                                              <p:pRg st="0" end="0"/>
+                                            </p:txEl>
+                                          </p:spTgt>
+                                        </p:tgtEl>
+                                      </p:cBhvr>
+                                    </p:animEffect>
+                                  </p:childTnLst>
+                                </p:cTn>
+                              </p:par>
+                            </p:childTnLst>
+                          </p:cTn>
+                        </p:par>
+                        <p:par>
+                          <p:cTn id="32" fill="hold">
+                            <p:stCondLst>
+                              <p:cond delay="3500"/>
+                            </p:stCondLst>
+                            <p:childTnLst>
+                              <p:par>
+                                <p:cTn id="33" presetID="22" presetClass="entr" presetSubtype="8" fill="hold" grpId="0" nodeType="afterEffect">
+                                  <p:stCondLst>
+                                    <p:cond delay="0"/>
+                                  </p:stCondLst>
+                                  <p:childTnLst>
+                                    <p:set>
+                                      <p:cBhvr>
+                                        <p:cTn id="34" dur="1" fill="hold">
+                                          <p:stCondLst>
+                                            <p:cond delay="0"/>
+                                          </p:stCondLst>
+                                        </p:cTn>
+                                        <p:tgtEl>
+                                          <p:spTgt spid="7">
+                                            <p:txEl>
+                                              <p:pRg st="1" end="1"/>
+                                            </p:txEl>
+                                          </p:spTgt>
+                                        </p:tgtEl>
+                                        <p:attrNameLst>
+                                          <p:attrName>style.visibility</p:attrName>
+                                        </p:attrNameLst>
+                                      </p:cBhvr>
+                                      <p:to>
+                                        <p:strVal val="visible"/>
+                                      </p:to>
+                                    </p:set>
+                                    <p:animEffect transition="in" filter="wipe(left)">
+                                      <p:cBhvr>
+                                        <p:cTn id="35" dur="500"/>
+                                        <p:tgtEl>
+                                          <p:spTgt spid="7">
+                                            <p:txEl>
+                                              <p:pRg st="1" end="1"/>
+                                            </p:txEl>
+                                          </p:spTgt>
+                                        </p:tgtEl>
+                                      </p:cBhvr>
+                                    </p:animEffect>
+                                  </p:childTnLst>
+                                </p:cTn>
+                              </p:par>
+                            </p:childTnLst>
+                          </p:cTn>
+                        </p:par>
+                        <p:par>
+                          <p:cTn id="36" fill="hold">
+                            <p:stCondLst>
+                              <p:cond delay="4000"/>
+                            </p:stCondLst>
+                            <p:childTnLst>
+                              <p:par>
+                                <p:cTn id="37" presetID="22" presetClass="entr" presetSubtype="8" fill="hold" grpId="0" nodeType="afterEffect">
+                                  <p:stCondLst>
+                                    <p:cond delay="0"/>
+                                  </p:stCondLst>
+                                  <p:childTnLst>
+                                    <p:set>
+                                      <p:cBhvr>
+                                        <p:cTn id="38" dur="1" fill="hold">
+                                          <p:stCondLst>
+                                            <p:cond delay="0"/>
+                                          </p:stCondLst>
+                                        </p:cTn>
+                                        <p:tgtEl>
+                                          <p:spTgt spid="7">
+                                            <p:txEl>
+                                              <p:pRg st="2" end="2"/>
+                                            </p:txEl>
+                                          </p:spTgt>
+                                        </p:tgtEl>
+                                        <p:attrNameLst>
+                                          <p:attrName>style.visibility</p:attrName>
+                                        </p:attrNameLst>
+                                      </p:cBhvr>
+                                      <p:to>
+                                        <p:strVal val="visible"/>
+                                      </p:to>
+                                    </p:set>
+                                    <p:animEffect transition="in" filter="wipe(left)">
+                                      <p:cBhvr>
+                                        <p:cTn id="39" dur="500"/>
+                                        <p:tgtEl>
+                                          <p:spTgt spid="7">
+                                            <p:txEl>
+                                              <p:pRg st="2" end="2"/>
+                                            </p:txEl>
+                                          </p:spTgt>
+                                        </p:tgtEl>
+                                      </p:cBhvr>
+                                    </p:animEffect>
+                                  </p:childTnLst>
+                                </p:cTn>
+                              </p:par>
+                            </p:childTnLst>
+                          </p:cTn>
+                        </p:par>
+                        <p:par>
+                          <p:cTn id="40" fill="hold">
+                            <p:stCondLst>
+                              <p:cond delay="4500"/>
+                            </p:stCondLst>
+                            <p:childTnLst>
+                              <p:par>
+                                <p:cTn id="41" presetID="22" presetClass="entr" presetSubtype="8" fill="hold" grpId="0" nodeType="afterEffect">
+                                  <p:stCondLst>
+                                    <p:cond delay="0"/>
+                                  </p:stCondLst>
+                                  <p:childTnLst>
+                                    <p:set>
+                                      <p:cBhvr>
+                                        <p:cTn id="42" dur="1" fill="hold">
+                                          <p:stCondLst>
+                                            <p:cond delay="0"/>
+                                          </p:stCondLst>
+                                        </p:cTn>
+                                        <p:tgtEl>
+                                          <p:spTgt spid="7">
+                                            <p:txEl>
+                                              <p:pRg st="3" end="3"/>
+                                            </p:txEl>
+                                          </p:spTgt>
+                                        </p:tgtEl>
+                                        <p:attrNameLst>
+                                          <p:attrName>style.visibility</p:attrName>
+                                        </p:attrNameLst>
+                                      </p:cBhvr>
+                                      <p:to>
+                                        <p:strVal val="visible"/>
+                                      </p:to>
+                                    </p:set>
+                                    <p:animEffect transition="in" filter="wipe(left)">
+                                      <p:cBhvr>
+                                        <p:cTn id="43" dur="500"/>
+                                        <p:tgtEl>
+                                          <p:spTgt spid="7">
+                                            <p:txEl>
+                                              <p:pRg st="3" end="3"/>
+                                            </p:txEl>
+                                          </p:spTgt>
+                                        </p:tgtEl>
+                                      </p:cBhvr>
+                                    </p:animEffect>
+                                  </p:childTnLst>
+                                </p:cTn>
+                              </p:par>
+                            </p:childTnLst>
+                          </p:cTn>
+                        </p:par>
+                        <p:par>
+                          <p:cTn id="44" fill="hold">
+                            <p:stCondLst>
+                              <p:cond delay="5000"/>
+                            </p:stCondLst>
+                            <p:childTnLst>
+                              <p:par>
+                                <p:cTn id="45" presetID="22" presetClass="entr" presetSubtype="8" fill="hold" grpId="0" nodeType="afterEffect">
+                                  <p:stCondLst>
+                                    <p:cond delay="0"/>
+                                  </p:stCondLst>
+                                  <p:childTnLst>
+                                    <p:set>
+                                      <p:cBhvr>
+                                        <p:cTn id="46" dur="1" fill="hold">
+                                          <p:stCondLst>
+                                            <p:cond delay="0"/>
+                                          </p:stCondLst>
+                                        </p:cTn>
+                                        <p:tgtEl>
+                                          <p:spTgt spid="7">
+                                            <p:txEl>
+                                              <p:pRg st="4" end="4"/>
+                                            </p:txEl>
+                                          </p:spTgt>
+                                        </p:tgtEl>
+                                        <p:attrNameLst>
+                                          <p:attrName>style.visibility</p:attrName>
+                                        </p:attrNameLst>
+                                      </p:cBhvr>
+                                      <p:to>
+                                        <p:strVal val="visible"/>
+                                      </p:to>
+                                    </p:set>
+                                    <p:animEffect transition="in" filter="wipe(left)">
+                                      <p:cBhvr>
+                                        <p:cTn id="47" dur="500"/>
+                                        <p:tgtEl>
+                                          <p:spTgt spid="7">
+                                            <p:txEl>
+                                              <p:pRg st="4" end="4"/>
+                                            </p:txEl>
+                                          </p:spTgt>
+                                        </p:tgtEl>
+                                      </p:cBhvr>
+                                    </p:animEffect>
+                                  </p:childTnLst>
+                                </p:cTn>
+                              </p:par>
+                            </p:childTnLst>
+                          </p:cTn>
+                        </p:par>
+                        <p:par>
+                          <p:cTn id="48" fill="hold">
+                            <p:stCondLst>
+                              <p:cond delay="5500"/>
+                            </p:stCondLst>
+                            <p:childTnLst>
+                              <p:par>
+                                <p:cTn id="49" presetID="22" presetClass="entr" presetSubtype="1" fill="hold" nodeType="afterEffect">
+                                  <p:stCondLst>
+                                    <p:cond delay="0"/>
+                                  </p:stCondLst>
+                                  <p:childTnLst>
+                                    <p:set>
+                                      <p:cBhvr>
+                                        <p:cTn id="50" dur="1" fill="hold">
+                                          <p:stCondLst>
+                                            <p:cond delay="0"/>
+                                          </p:stCondLst>
+                                        </p:cTn>
+                                        <p:tgtEl>
+                                          <p:spTgt spid="4"/>
+                                        </p:tgtEl>
+                                        <p:attrNameLst>
+                                          <p:attrName>style.visibility</p:attrName>
+                                        </p:attrNameLst>
+                                      </p:cBhvr>
+                                      <p:to>
+                                        <p:strVal val="visible"/>
+                                      </p:to>
+                                    </p:set>
+                                    <p:animEffect transition="in" filter="wipe(up)">
+                                      <p:cBhvr>
+                                        <p:cTn id="51" dur="500"/>
+                                        <p:tgtEl>
+                                          <p:spTgt spid="4"/>
+                                        </p:tgtEl>
+                                      </p:cBhvr>
+                                    </p:animEffect>
+                                  </p:childTnLst>
+                                </p:cTn>
+                              </p:par>
+                            </p:childTnLst>
+                          </p:cTn>
+                        </p:par>
+                        <p:par>
+                          <p:cTn id="52" fill="hold">
+                            <p:stCondLst>
+                              <p:cond delay="6000"/>
+                            </p:stCondLst>
+                            <p:childTnLst>
+                              <p:par>
+                                <p:cTn id="53" presetID="22" presetClass="entr" presetSubtype="8" fill="hold" grpId="0" nodeType="afterEffect">
+                                  <p:stCondLst>
+                                    <p:cond delay="0"/>
+                                  </p:stCondLst>
+                                  <p:childTnLst>
+                                    <p:set>
+                                      <p:cBhvr>
+                                        <p:cTn id="54" dur="1" fill="hold">
+                                          <p:stCondLst>
+                                            <p:cond delay="0"/>
+                                          </p:stCondLst>
+                                        </p:cTn>
+                                        <p:tgtEl>
+                                          <p:spTgt spid="5"/>
+                                        </p:tgtEl>
+                                        <p:attrNameLst>
+                                          <p:attrName>style.visibility</p:attrName>
+                                        </p:attrNameLst>
+                                      </p:cBhvr>
+                                      <p:to>
+                                        <p:strVal val="visible"/>
+                                      </p:to>
+                                    </p:set>
+                                    <p:animEffect transition="in" filter="wipe(left)">
+                                      <p:cBhvr>
+                                        <p:cTn id="55" dur="500"/>
+                                        <p:tgtEl>
+                                          <p:spTgt spid="5"/>
+                                        </p:tgtEl>
+                                      </p:cBhvr>
+                                    </p:animEffect>
+                                  </p:childTnLst>
+                                </p:cTn>
+                              </p:par>
+                            </p:childTnLst>
+                          </p:cTn>
+                        </p:par>
+                        <p:par>
+                          <p:cTn id="56" fill="hold">
+                            <p:stCondLst>
+                              <p:cond delay="6500"/>
+                            </p:stCondLst>
+                            <p:childTnLst>
+                              <p:par>
+                                <p:cTn id="57" presetID="22" presetClass="entr" presetSubtype="8" fill="hold" grpId="0" nodeType="afterEffect">
+                                  <p:stCondLst>
+                                    <p:cond delay="0"/>
+                                  </p:stCondLst>
+                                  <p:childTnLst>
+                                    <p:set>
+                                      <p:cBhvr>
+                                        <p:cTn id="58" dur="1" fill="hold">
+                                          <p:stCondLst>
+                                            <p:cond delay="0"/>
+                                          </p:stCondLst>
+                                        </p:cTn>
+                                        <p:tgtEl>
                                           <p:spTgt spid="6"/>
                                         </p:tgtEl>
                                         <p:attrNameLst>
@@ -18816,7 +19929,7 @@
                                     </p:set>
                                     <p:animEffect transition="in" filter="wipe(left)">
                                       <p:cBhvr>
-                                        <p:cTn id="27" dur="500"/>
+                                        <p:cTn id="59" dur="500"/>
                                         <p:tgtEl>
                                           <p:spTgt spid="6"/>
                                         </p:tgtEl>
@@ -18854,12 +19967,12 @@
     </p:tnLst>
     <p:bldLst>
       <p:bldP spid="2" grpId="0"/>
-      <p:bldP spid="3" grpId="0"/>
+      <p:bldP spid="3" grpId="0" uiExpand="1" build="p"/>
       <p:bldP spid="5" grpId="0"/>
       <p:bldGraphic spid="6" grpId="0">
         <p:bldAsOne/>
       </p:bldGraphic>
-      <p:bldP spid="7" grpId="0"/>
+      <p:bldP spid="7" grpId="0" uiExpand="1" build="p"/>
     </p:bldLst>
   </p:timing>
 </p:sld>
@@ -18898,7 +20011,12 @@
             <p:ph type="title"/>
           </p:nvPr>
         </p:nvSpPr>
-        <p:spPr/>
+        <p:spPr>
+          <a:xfrm>
+            <a:off x="2008307" y="624110"/>
+            <a:ext cx="8911687" cy="1280890"/>
+          </a:xfrm>
+        </p:spPr>
         <p:txBody>
           <a:bodyPr/>
           <a:lstStyle/>
@@ -18932,13 +20050,13 @@
             <p:ph sz="half" idx="2"/>
             <p:extLst>
               <p:ext uri="{D42A27DB-BD31-4B8C-83A1-F6EECF244321}">
-                <p14:modId xmlns:p14="http://schemas.microsoft.com/office/powerpoint/2010/main" val="3429681653"/>
+                <p14:modId xmlns:p14="http://schemas.microsoft.com/office/powerpoint/2010/main" val="3417568107"/>
               </p:ext>
             </p:extLst>
           </p:nvPr>
         </p:nvGraphicFramePr>
         <p:xfrm>
-          <a:off x="2592924" y="2867025"/>
+          <a:off x="2008307" y="2867025"/>
           <a:ext cx="4313238" cy="1854200"/>
         </p:xfrm>
         <a:graphic>
@@ -19145,13 +20263,13 @@
           <p:nvPr>
             <p:extLst>
               <p:ext uri="{D42A27DB-BD31-4B8C-83A1-F6EECF244321}">
-                <p14:modId xmlns:p14="http://schemas.microsoft.com/office/powerpoint/2010/main" val="3087547873"/>
+                <p14:modId xmlns:p14="http://schemas.microsoft.com/office/powerpoint/2010/main" val="4227876857"/>
               </p:ext>
             </p:extLst>
           </p:nvPr>
         </p:nvGraphicFramePr>
         <p:xfrm>
-          <a:off x="6260635" y="1825677"/>
+          <a:off x="5676018" y="1825677"/>
           <a:ext cx="5435083" cy="3936896"/>
         </p:xfrm>
         <a:graphic>
@@ -19170,14 +20288,14 @@
   <p:clrMapOvr>
     <a:masterClrMapping/>
   </p:clrMapOvr>
-  <mc:AlternateContent xmlns:mc="http://schemas.openxmlformats.org/markup-compatibility/2006" xmlns:p159="http://schemas.microsoft.com/office/powerpoint/2015/09/main">
-    <mc:Choice Requires="p159">
-      <p:transition xmlns:p14="http://schemas.microsoft.com/office/powerpoint/2010/main" spd="slow" p14:dur="2000">
+  <mc:AlternateContent xmlns:mc="http://schemas.openxmlformats.org/markup-compatibility/2006">
+    <mc:Choice xmlns:p159="http://schemas.microsoft.com/office/powerpoint/2015/09/main" Requires="p159">
+      <p:transition>
         <p159:morph option="byObject"/>
       </p:transition>
     </mc:Choice>
-    <mc:Fallback xmlns="">
-      <p:transition spd="slow">
+    <mc:Fallback>
+      <p:transition>
         <p:fade/>
       </p:transition>
     </mc:Fallback>
@@ -19194,6 +20312,9 @@
                     <p:cTn id="3" fill="hold">
                       <p:stCondLst>
                         <p:cond delay="indefinite"/>
+                        <p:cond evt="onBegin" delay="0">
+                          <p:tn val="2"/>
+                        </p:cond>
                       </p:stCondLst>
                       <p:childTnLst>
                         <p:par>
@@ -19203,7 +20324,7 @@
                             </p:stCondLst>
                             <p:childTnLst>
                               <p:par>
-                                <p:cTn id="5" presetID="10" presetClass="entr" presetSubtype="0" fill="hold" grpId="0" nodeType="clickEffect">
+                                <p:cTn id="5" presetID="10" presetClass="entr" presetSubtype="0" fill="hold" grpId="0" nodeType="afterEffect">
                                   <p:stCondLst>
                                     <p:cond delay="0"/>
                                   </p:stCondLst>
@@ -19925,7 +21046,12 @@
             <p:ph type="title"/>
           </p:nvPr>
         </p:nvSpPr>
-        <p:spPr/>
+        <p:spPr>
+          <a:xfrm>
+            <a:off x="2038288" y="624110"/>
+            <a:ext cx="8911687" cy="1280890"/>
+          </a:xfrm>
+        </p:spPr>
         <p:txBody>
           <a:bodyPr/>
           <a:lstStyle/>
@@ -19957,7 +21083,7 @@
         </p:nvSpPr>
         <p:spPr>
           <a:xfrm>
-            <a:off x="2592924" y="1614791"/>
+            <a:off x="2038288" y="1614791"/>
             <a:ext cx="6670623" cy="1477328"/>
           </a:xfrm>
           <a:prstGeom prst="rect">
@@ -20090,7 +21216,7 @@
         </p:nvSpPr>
         <p:spPr>
           <a:xfrm>
-            <a:off x="2592924" y="3368640"/>
+            <a:off x="2038288" y="3368640"/>
             <a:ext cx="6670623" cy="1200329"/>
           </a:xfrm>
           <a:prstGeom prst="rect">
@@ -20200,7 +21326,7 @@
         </p:nvSpPr>
         <p:spPr>
           <a:xfrm>
-            <a:off x="2698230" y="5066675"/>
+            <a:off x="2143594" y="5066675"/>
             <a:ext cx="8806381" cy="646331"/>
           </a:xfrm>
           <a:prstGeom prst="rect">
@@ -20237,14 +21363,14 @@
   <p:clrMapOvr>
     <a:masterClrMapping/>
   </p:clrMapOvr>
-  <mc:AlternateContent xmlns:mc="http://schemas.openxmlformats.org/markup-compatibility/2006" xmlns:p159="http://schemas.microsoft.com/office/powerpoint/2015/09/main">
-    <mc:Choice Requires="p159">
-      <p:transition xmlns:p14="http://schemas.microsoft.com/office/powerpoint/2010/main" spd="slow" p14:dur="2000">
+  <mc:AlternateContent xmlns:mc="http://schemas.openxmlformats.org/markup-compatibility/2006">
+    <mc:Choice xmlns:p159="http://schemas.microsoft.com/office/powerpoint/2015/09/main" Requires="p159">
+      <p:transition>
         <p159:morph option="byObject"/>
       </p:transition>
     </mc:Choice>
-    <mc:Fallback xmlns="">
-      <p:transition spd="slow">
+    <mc:Fallback>
+      <p:transition>
         <p:fade/>
       </p:transition>
     </mc:Fallback>
@@ -20261,6 +21387,9 @@
                     <p:cTn id="3" fill="hold">
                       <p:stCondLst>
                         <p:cond delay="indefinite"/>
+                        <p:cond evt="onBegin" delay="0">
+                          <p:tn val="2"/>
+                        </p:cond>
                       </p:stCondLst>
                       <p:childTnLst>
                         <p:par>
@@ -20270,7 +21399,7 @@
                             </p:stCondLst>
                             <p:childTnLst>
                               <p:par>
-                                <p:cTn id="5" presetID="10" presetClass="entr" presetSubtype="0" fill="hold" grpId="0" nodeType="clickEffect">
+                                <p:cTn id="5" presetID="10" presetClass="entr" presetSubtype="0" fill="hold" grpId="0" nodeType="afterEffect">
                                   <p:stCondLst>
                                     <p:cond delay="0"/>
                                   </p:stCondLst>
@@ -20314,7 +21443,7 @@
                             </p:stCondLst>
                             <p:childTnLst>
                               <p:par>
-                                <p:cTn id="9" presetID="22" presetClass="entr" presetSubtype="1" fill="hold" grpId="0" nodeType="afterEffect">
+                                <p:cTn id="9" presetID="22" presetClass="entr" presetSubtype="8" fill="hold" grpId="0" nodeType="afterEffect">
                                   <p:stCondLst>
                                     <p:cond delay="0"/>
                                   </p:stCondLst>
@@ -20327,7 +21456,11 @@
                                           </p:stCondLst>
                                         </p:cTn>
                                         <p:tgtEl>
-                                          <p:spTgt spid="3"/>
+                                          <p:spTgt spid="3">
+                                            <p:txEl>
+                                              <p:pRg st="0" end="0"/>
+                                            </p:txEl>
+                                          </p:spTgt>
                                         </p:tgtEl>
                                         <p:attrNameLst>
                                           <p:attrName>style.visibility</p:attrName>
@@ -20337,11 +21470,15 @@
                                         <p:strVal val="visible"/>
                                       </p:to>
                                     </p:set>
-                                    <p:animEffect transition="in" filter="wipe(up)">
+                                    <p:animEffect transition="in" filter="wipe(left)">
                                       <p:cBhvr>
-                                        <p:cTn id="11" dur="1000"/>
+                                        <p:cTn id="11" dur="500"/>
                                         <p:tgtEl>
-                                          <p:spTgt spid="3"/>
+                                          <p:spTgt spid="3">
+                                            <p:txEl>
+                                              <p:pRg st="0" end="0"/>
+                                            </p:txEl>
+                                          </p:spTgt>
                                         </p:tgtEl>
                                       </p:cBhvr>
                                     </p:animEffect>
@@ -20354,11 +21491,11 @@
                         <p:par>
                           <p:cTn id="12" fill="hold">
                             <p:stCondLst>
-                              <p:cond delay="1500"/>
+                              <p:cond delay="1000"/>
                             </p:stCondLst>
                             <p:childTnLst>
                               <p:par>
-                                <p:cTn id="13" presetID="22" presetClass="entr" presetSubtype="1" fill="hold" grpId="0" nodeType="afterEffect">
+                                <p:cTn id="13" presetID="22" presetClass="entr" presetSubtype="8" fill="hold" grpId="0" nodeType="afterEffect">
                                   <p:stCondLst>
                                     <p:cond delay="0"/>
                                   </p:stCondLst>
@@ -20371,7 +21508,11 @@
                                           </p:stCondLst>
                                         </p:cTn>
                                         <p:tgtEl>
-                                          <p:spTgt spid="4"/>
+                                          <p:spTgt spid="3">
+                                            <p:txEl>
+                                              <p:pRg st="1" end="1"/>
+                                            </p:txEl>
+                                          </p:spTgt>
                                         </p:tgtEl>
                                         <p:attrNameLst>
                                           <p:attrName>style.visibility</p:attrName>
@@ -20381,11 +21522,15 @@
                                         <p:strVal val="visible"/>
                                       </p:to>
                                     </p:set>
-                                    <p:animEffect transition="in" filter="wipe(up)">
+                                    <p:animEffect transition="in" filter="wipe(left)">
                                       <p:cBhvr>
-                                        <p:cTn id="15" dur="1000"/>
+                                        <p:cTn id="15" dur="500"/>
                                         <p:tgtEl>
-                                          <p:spTgt spid="4"/>
+                                          <p:spTgt spid="3">
+                                            <p:txEl>
+                                              <p:pRg st="1" end="1"/>
+                                            </p:txEl>
+                                          </p:spTgt>
                                         </p:tgtEl>
                                       </p:cBhvr>
                                     </p:animEffect>
@@ -20398,7 +21543,7 @@
                         <p:par>
                           <p:cTn id="16" fill="hold">
                             <p:stCondLst>
-                              <p:cond delay="2500"/>
+                              <p:cond delay="1500"/>
                             </p:stCondLst>
                             <p:childTnLst>
                               <p:par>
@@ -20410,6 +21555,370 @@
                                     <p:set>
                                       <p:cBhvr>
                                         <p:cTn id="18" dur="1" fill="hold">
+                                          <p:stCondLst>
+                                            <p:cond delay="0"/>
+                                          </p:stCondLst>
+                                        </p:cTn>
+                                        <p:tgtEl>
+                                          <p:spTgt spid="3">
+                                            <p:txEl>
+                                              <p:pRg st="2" end="2"/>
+                                            </p:txEl>
+                                          </p:spTgt>
+                                        </p:tgtEl>
+                                        <p:attrNameLst>
+                                          <p:attrName>style.visibility</p:attrName>
+                                        </p:attrNameLst>
+                                      </p:cBhvr>
+                                      <p:to>
+                                        <p:strVal val="visible"/>
+                                      </p:to>
+                                    </p:set>
+                                    <p:animEffect transition="in" filter="wipe(left)">
+                                      <p:cBhvr>
+                                        <p:cTn id="19" dur="500"/>
+                                        <p:tgtEl>
+                                          <p:spTgt spid="3">
+                                            <p:txEl>
+                                              <p:pRg st="2" end="2"/>
+                                            </p:txEl>
+                                          </p:spTgt>
+                                        </p:tgtEl>
+                                      </p:cBhvr>
+                                    </p:animEffect>
+                                  </p:childTnLst>
+                                </p:cTn>
+                              </p:par>
+                            </p:childTnLst>
+                          </p:cTn>
+                        </p:par>
+                        <p:par>
+                          <p:cTn id="20" fill="hold">
+                            <p:stCondLst>
+                              <p:cond delay="2000"/>
+                            </p:stCondLst>
+                            <p:childTnLst>
+                              <p:par>
+                                <p:cTn id="21" presetID="22" presetClass="entr" presetSubtype="8" fill="hold" grpId="0" nodeType="afterEffect">
+                                  <p:stCondLst>
+                                    <p:cond delay="0"/>
+                                  </p:stCondLst>
+                                  <p:childTnLst>
+                                    <p:set>
+                                      <p:cBhvr>
+                                        <p:cTn id="22" dur="1" fill="hold">
+                                          <p:stCondLst>
+                                            <p:cond delay="0"/>
+                                          </p:stCondLst>
+                                        </p:cTn>
+                                        <p:tgtEl>
+                                          <p:spTgt spid="3">
+                                            <p:txEl>
+                                              <p:pRg st="3" end="3"/>
+                                            </p:txEl>
+                                          </p:spTgt>
+                                        </p:tgtEl>
+                                        <p:attrNameLst>
+                                          <p:attrName>style.visibility</p:attrName>
+                                        </p:attrNameLst>
+                                      </p:cBhvr>
+                                      <p:to>
+                                        <p:strVal val="visible"/>
+                                      </p:to>
+                                    </p:set>
+                                    <p:animEffect transition="in" filter="wipe(left)">
+                                      <p:cBhvr>
+                                        <p:cTn id="23" dur="500"/>
+                                        <p:tgtEl>
+                                          <p:spTgt spid="3">
+                                            <p:txEl>
+                                              <p:pRg st="3" end="3"/>
+                                            </p:txEl>
+                                          </p:spTgt>
+                                        </p:tgtEl>
+                                      </p:cBhvr>
+                                    </p:animEffect>
+                                  </p:childTnLst>
+                                </p:cTn>
+                              </p:par>
+                            </p:childTnLst>
+                          </p:cTn>
+                        </p:par>
+                        <p:par>
+                          <p:cTn id="24" fill="hold">
+                            <p:stCondLst>
+                              <p:cond delay="2500"/>
+                            </p:stCondLst>
+                            <p:childTnLst>
+                              <p:par>
+                                <p:cTn id="25" presetID="22" presetClass="entr" presetSubtype="8" fill="hold" grpId="0" nodeType="afterEffect">
+                                  <p:stCondLst>
+                                    <p:cond delay="0"/>
+                                  </p:stCondLst>
+                                  <p:childTnLst>
+                                    <p:set>
+                                      <p:cBhvr>
+                                        <p:cTn id="26" dur="1" fill="hold">
+                                          <p:stCondLst>
+                                            <p:cond delay="0"/>
+                                          </p:stCondLst>
+                                        </p:cTn>
+                                        <p:tgtEl>
+                                          <p:spTgt spid="3">
+                                            <p:txEl>
+                                              <p:pRg st="4" end="4"/>
+                                            </p:txEl>
+                                          </p:spTgt>
+                                        </p:tgtEl>
+                                        <p:attrNameLst>
+                                          <p:attrName>style.visibility</p:attrName>
+                                        </p:attrNameLst>
+                                      </p:cBhvr>
+                                      <p:to>
+                                        <p:strVal val="visible"/>
+                                      </p:to>
+                                    </p:set>
+                                    <p:animEffect transition="in" filter="wipe(left)">
+                                      <p:cBhvr>
+                                        <p:cTn id="27" dur="500"/>
+                                        <p:tgtEl>
+                                          <p:spTgt spid="3">
+                                            <p:txEl>
+                                              <p:pRg st="4" end="4"/>
+                                            </p:txEl>
+                                          </p:spTgt>
+                                        </p:tgtEl>
+                                      </p:cBhvr>
+                                    </p:animEffect>
+                                  </p:childTnLst>
+                                </p:cTn>
+                              </p:par>
+                            </p:childTnLst>
+                          </p:cTn>
+                        </p:par>
+                        <p:par>
+                          <p:cTn id="28" fill="hold">
+                            <p:stCondLst>
+                              <p:cond delay="3000"/>
+                            </p:stCondLst>
+                            <p:childTnLst>
+                              <p:par>
+                                <p:cTn id="29" presetID="22" presetClass="entr" presetSubtype="8" fill="hold" grpId="0" nodeType="afterEffect">
+                                  <p:stCondLst>
+                                    <p:cond delay="0"/>
+                                  </p:stCondLst>
+                                  <p:childTnLst>
+                                    <p:set>
+                                      <p:cBhvr>
+                                        <p:cTn id="30" dur="1" fill="hold">
+                                          <p:stCondLst>
+                                            <p:cond delay="0"/>
+                                          </p:stCondLst>
+                                        </p:cTn>
+                                        <p:tgtEl>
+                                          <p:spTgt spid="4">
+                                            <p:txEl>
+                                              <p:pRg st="0" end="0"/>
+                                            </p:txEl>
+                                          </p:spTgt>
+                                        </p:tgtEl>
+                                        <p:attrNameLst>
+                                          <p:attrName>style.visibility</p:attrName>
+                                        </p:attrNameLst>
+                                      </p:cBhvr>
+                                      <p:to>
+                                        <p:strVal val="visible"/>
+                                      </p:to>
+                                    </p:set>
+                                    <p:animEffect transition="in" filter="wipe(left)">
+                                      <p:cBhvr>
+                                        <p:cTn id="31" dur="500"/>
+                                        <p:tgtEl>
+                                          <p:spTgt spid="4">
+                                            <p:txEl>
+                                              <p:pRg st="0" end="0"/>
+                                            </p:txEl>
+                                          </p:spTgt>
+                                        </p:tgtEl>
+                                      </p:cBhvr>
+                                    </p:animEffect>
+                                  </p:childTnLst>
+                                </p:cTn>
+                              </p:par>
+                            </p:childTnLst>
+                          </p:cTn>
+                        </p:par>
+                        <p:par>
+                          <p:cTn id="32" fill="hold">
+                            <p:stCondLst>
+                              <p:cond delay="3500"/>
+                            </p:stCondLst>
+                            <p:childTnLst>
+                              <p:par>
+                                <p:cTn id="33" presetID="22" presetClass="entr" presetSubtype="8" fill="hold" grpId="0" nodeType="afterEffect">
+                                  <p:stCondLst>
+                                    <p:cond delay="0"/>
+                                  </p:stCondLst>
+                                  <p:childTnLst>
+                                    <p:set>
+                                      <p:cBhvr>
+                                        <p:cTn id="34" dur="1" fill="hold">
+                                          <p:stCondLst>
+                                            <p:cond delay="0"/>
+                                          </p:stCondLst>
+                                        </p:cTn>
+                                        <p:tgtEl>
+                                          <p:spTgt spid="4">
+                                            <p:txEl>
+                                              <p:pRg st="1" end="1"/>
+                                            </p:txEl>
+                                          </p:spTgt>
+                                        </p:tgtEl>
+                                        <p:attrNameLst>
+                                          <p:attrName>style.visibility</p:attrName>
+                                        </p:attrNameLst>
+                                      </p:cBhvr>
+                                      <p:to>
+                                        <p:strVal val="visible"/>
+                                      </p:to>
+                                    </p:set>
+                                    <p:animEffect transition="in" filter="wipe(left)">
+                                      <p:cBhvr>
+                                        <p:cTn id="35" dur="500"/>
+                                        <p:tgtEl>
+                                          <p:spTgt spid="4">
+                                            <p:txEl>
+                                              <p:pRg st="1" end="1"/>
+                                            </p:txEl>
+                                          </p:spTgt>
+                                        </p:tgtEl>
+                                      </p:cBhvr>
+                                    </p:animEffect>
+                                  </p:childTnLst>
+                                </p:cTn>
+                              </p:par>
+                            </p:childTnLst>
+                          </p:cTn>
+                        </p:par>
+                        <p:par>
+                          <p:cTn id="36" fill="hold">
+                            <p:stCondLst>
+                              <p:cond delay="4000"/>
+                            </p:stCondLst>
+                            <p:childTnLst>
+                              <p:par>
+                                <p:cTn id="37" presetID="22" presetClass="entr" presetSubtype="8" fill="hold" grpId="0" nodeType="afterEffect">
+                                  <p:stCondLst>
+                                    <p:cond delay="0"/>
+                                  </p:stCondLst>
+                                  <p:childTnLst>
+                                    <p:set>
+                                      <p:cBhvr>
+                                        <p:cTn id="38" dur="1" fill="hold">
+                                          <p:stCondLst>
+                                            <p:cond delay="0"/>
+                                          </p:stCondLst>
+                                        </p:cTn>
+                                        <p:tgtEl>
+                                          <p:spTgt spid="4">
+                                            <p:txEl>
+                                              <p:pRg st="2" end="2"/>
+                                            </p:txEl>
+                                          </p:spTgt>
+                                        </p:tgtEl>
+                                        <p:attrNameLst>
+                                          <p:attrName>style.visibility</p:attrName>
+                                        </p:attrNameLst>
+                                      </p:cBhvr>
+                                      <p:to>
+                                        <p:strVal val="visible"/>
+                                      </p:to>
+                                    </p:set>
+                                    <p:animEffect transition="in" filter="wipe(left)">
+                                      <p:cBhvr>
+                                        <p:cTn id="39" dur="500"/>
+                                        <p:tgtEl>
+                                          <p:spTgt spid="4">
+                                            <p:txEl>
+                                              <p:pRg st="2" end="2"/>
+                                            </p:txEl>
+                                          </p:spTgt>
+                                        </p:tgtEl>
+                                      </p:cBhvr>
+                                    </p:animEffect>
+                                  </p:childTnLst>
+                                </p:cTn>
+                              </p:par>
+                            </p:childTnLst>
+                          </p:cTn>
+                        </p:par>
+                        <p:par>
+                          <p:cTn id="40" fill="hold">
+                            <p:stCondLst>
+                              <p:cond delay="4500"/>
+                            </p:stCondLst>
+                            <p:childTnLst>
+                              <p:par>
+                                <p:cTn id="41" presetID="22" presetClass="entr" presetSubtype="8" fill="hold" grpId="0" nodeType="afterEffect">
+                                  <p:stCondLst>
+                                    <p:cond delay="0"/>
+                                  </p:stCondLst>
+                                  <p:childTnLst>
+                                    <p:set>
+                                      <p:cBhvr>
+                                        <p:cTn id="42" dur="1" fill="hold">
+                                          <p:stCondLst>
+                                            <p:cond delay="0"/>
+                                          </p:stCondLst>
+                                        </p:cTn>
+                                        <p:tgtEl>
+                                          <p:spTgt spid="4">
+                                            <p:txEl>
+                                              <p:pRg st="3" end="3"/>
+                                            </p:txEl>
+                                          </p:spTgt>
+                                        </p:tgtEl>
+                                        <p:attrNameLst>
+                                          <p:attrName>style.visibility</p:attrName>
+                                        </p:attrNameLst>
+                                      </p:cBhvr>
+                                      <p:to>
+                                        <p:strVal val="visible"/>
+                                      </p:to>
+                                    </p:set>
+                                    <p:animEffect transition="in" filter="wipe(left)">
+                                      <p:cBhvr>
+                                        <p:cTn id="43" dur="500"/>
+                                        <p:tgtEl>
+                                          <p:spTgt spid="4">
+                                            <p:txEl>
+                                              <p:pRg st="3" end="3"/>
+                                            </p:txEl>
+                                          </p:spTgt>
+                                        </p:tgtEl>
+                                      </p:cBhvr>
+                                    </p:animEffect>
+                                  </p:childTnLst>
+                                </p:cTn>
+                              </p:par>
+                            </p:childTnLst>
+                          </p:cTn>
+                        </p:par>
+                        <p:par>
+                          <p:cTn id="44" fill="hold">
+                            <p:stCondLst>
+                              <p:cond delay="5000"/>
+                            </p:stCondLst>
+                            <p:childTnLst>
+                              <p:par>
+                                <p:cTn id="45" presetID="22" presetClass="entr" presetSubtype="8" fill="hold" grpId="0" nodeType="afterEffect">
+                                  <p:stCondLst>
+                                    <p:cond delay="0"/>
+                                  </p:stCondLst>
+                                  <p:childTnLst>
+                                    <p:set>
+                                      <p:cBhvr>
+                                        <p:cTn id="46" dur="1" fill="hold">
                                           <p:stCondLst>
                                             <p:cond delay="0"/>
                                           </p:stCondLst>
@@ -20431,7 +21940,7 @@
                                     </p:set>
                                     <p:animEffect transition="in" filter="wipe(left)">
                                       <p:cBhvr>
-                                        <p:cTn id="19" dur="1000"/>
+                                        <p:cTn id="47" dur="1000"/>
                                         <p:tgtEl>
                                           <p:spTgt spid="5">
                                             <p:txEl>
@@ -20473,8 +21982,8 @@
     </p:tnLst>
     <p:bldLst>
       <p:bldP spid="2" grpId="0"/>
-      <p:bldP spid="3" grpId="0"/>
-      <p:bldP spid="4" grpId="0"/>
+      <p:bldP spid="3" grpId="0" build="p"/>
+      <p:bldP spid="4" grpId="0" build="p"/>
       <p:bldP spid="5" grpId="0" build="allAtOnce"/>
     </p:bldLst>
   </p:timing>

--- a/assets/files/Business-Pitch-Deck-7-Slide.pptx
+++ b/assets/files/Business-Pitch-Deck-7-Slide.pptx
@@ -178,7 +178,7 @@
               <c:strCache>
                 <c:ptCount val="1"/>
                 <c:pt idx="0">
-                  <c:v>Nilai Pasar (Miliar RP)</c:v>
+                  <c:v>Nilai Pasar</c:v>
                 </c:pt>
               </c:strCache>
             </c:strRef>
@@ -237,7 +237,7 @@
           </c:val>
           <c:extLst>
             <c:ext xmlns:c16="http://schemas.microsoft.com/office/drawing/2014/chart" uri="{C3380CC4-5D6E-409C-BE32-E72D297353CC}">
-              <c16:uniqueId val="{00000000-942A-498B-A991-0926B21820D6}"/>
+              <c16:uniqueId val="{00000000-61D9-40B3-B49C-4D5D46FB2718}"/>
             </c:ext>
           </c:extLst>
         </c:ser>
@@ -251,11 +251,11 @@
         </c:dLbls>
         <c:gapWidth val="219"/>
         <c:overlap val="-27"/>
-        <c:axId val="2136749343"/>
-        <c:axId val="2136749823"/>
+        <c:axId val="1293719455"/>
+        <c:axId val="1323853311"/>
       </c:barChart>
       <c:catAx>
-        <c:axId val="2136749343"/>
+        <c:axId val="1293719455"/>
         <c:scaling>
           <c:orientation val="minMax"/>
         </c:scaling>
@@ -298,7 +298,7 @@
             <a:endParaRPr lang="id-ID"/>
           </a:p>
         </c:txPr>
-        <c:crossAx val="2136749823"/>
+        <c:crossAx val="1323853311"/>
         <c:crosses val="autoZero"/>
         <c:auto val="1"/>
         <c:lblAlgn val="ctr"/>
@@ -306,7 +306,7 @@
         <c:noMultiLvlLbl val="0"/>
       </c:catAx>
       <c:valAx>
-        <c:axId val="2136749823"/>
+        <c:axId val="1323853311"/>
         <c:scaling>
           <c:orientation val="minMax"/>
         </c:scaling>
@@ -357,7 +357,7 @@
             <a:endParaRPr lang="id-ID"/>
           </a:p>
         </c:txPr>
-        <c:crossAx val="2136749343"/>
+        <c:crossAx val="1293719455"/>
         <c:crosses val="autoZero"/>
         <c:crossBetween val="between"/>
       </c:valAx>
@@ -1724,949 +1724,7 @@
 </dgm:colorsDef>
 </file>
 
-<file path=ppt/diagrams/colors2.xml><?xml version="1.0" encoding="utf-8"?>
-<dgm:colorsDef xmlns:dgm="http://schemas.openxmlformats.org/drawingml/2006/diagram" xmlns:a="http://schemas.openxmlformats.org/drawingml/2006/main" uniqueId="urn:microsoft.com/office/officeart/2005/8/colors/accent1_2">
-  <dgm:title val=""/>
-  <dgm:desc val=""/>
-  <dgm:catLst>
-    <dgm:cat type="accent1" pri="11200"/>
-  </dgm:catLst>
-  <dgm:styleLbl name="node0">
-    <dgm:fillClrLst meth="repeat">
-      <a:schemeClr val="accent1"/>
-    </dgm:fillClrLst>
-    <dgm:linClrLst meth="repeat">
-      <a:schemeClr val="lt1"/>
-    </dgm:linClrLst>
-    <dgm:effectClrLst/>
-    <dgm:txLinClrLst/>
-    <dgm:txFillClrLst/>
-    <dgm:txEffectClrLst/>
-  </dgm:styleLbl>
-  <dgm:styleLbl name="alignNode1">
-    <dgm:fillClrLst meth="repeat">
-      <a:schemeClr val="accent1"/>
-    </dgm:fillClrLst>
-    <dgm:linClrLst meth="repeat">
-      <a:schemeClr val="accent1"/>
-    </dgm:linClrLst>
-    <dgm:effectClrLst/>
-    <dgm:txLinClrLst/>
-    <dgm:txFillClrLst/>
-    <dgm:txEffectClrLst/>
-  </dgm:styleLbl>
-  <dgm:styleLbl name="node1">
-    <dgm:fillClrLst meth="repeat">
-      <a:schemeClr val="accent1"/>
-    </dgm:fillClrLst>
-    <dgm:linClrLst meth="repeat">
-      <a:schemeClr val="lt1"/>
-    </dgm:linClrLst>
-    <dgm:effectClrLst/>
-    <dgm:txLinClrLst/>
-    <dgm:txFillClrLst/>
-    <dgm:txEffectClrLst/>
-  </dgm:styleLbl>
-  <dgm:styleLbl name="lnNode1">
-    <dgm:fillClrLst meth="repeat">
-      <a:schemeClr val="accent1"/>
-    </dgm:fillClrLst>
-    <dgm:linClrLst meth="repeat">
-      <a:schemeClr val="lt1"/>
-    </dgm:linClrLst>
-    <dgm:effectClrLst/>
-    <dgm:txLinClrLst/>
-    <dgm:txFillClrLst/>
-    <dgm:txEffectClrLst/>
-  </dgm:styleLbl>
-  <dgm:styleLbl name="vennNode1">
-    <dgm:fillClrLst meth="repeat">
-      <a:schemeClr val="accent1">
-        <a:alpha val="50000"/>
-      </a:schemeClr>
-    </dgm:fillClrLst>
-    <dgm:linClrLst meth="repeat">
-      <a:schemeClr val="lt1"/>
-    </dgm:linClrLst>
-    <dgm:effectClrLst/>
-    <dgm:txLinClrLst/>
-    <dgm:txFillClrLst/>
-    <dgm:txEffectClrLst/>
-  </dgm:styleLbl>
-  <dgm:styleLbl name="node2">
-    <dgm:fillClrLst meth="repeat">
-      <a:schemeClr val="accent1"/>
-    </dgm:fillClrLst>
-    <dgm:linClrLst meth="repeat">
-      <a:schemeClr val="lt1"/>
-    </dgm:linClrLst>
-    <dgm:effectClrLst/>
-    <dgm:txLinClrLst/>
-    <dgm:txFillClrLst/>
-    <dgm:txEffectClrLst/>
-  </dgm:styleLbl>
-  <dgm:styleLbl name="node3">
-    <dgm:fillClrLst meth="repeat">
-      <a:schemeClr val="accent1"/>
-    </dgm:fillClrLst>
-    <dgm:linClrLst meth="repeat">
-      <a:schemeClr val="lt1"/>
-    </dgm:linClrLst>
-    <dgm:effectClrLst/>
-    <dgm:txLinClrLst/>
-    <dgm:txFillClrLst/>
-    <dgm:txEffectClrLst/>
-  </dgm:styleLbl>
-  <dgm:styleLbl name="node4">
-    <dgm:fillClrLst meth="repeat">
-      <a:schemeClr val="accent1"/>
-    </dgm:fillClrLst>
-    <dgm:linClrLst meth="repeat">
-      <a:schemeClr val="lt1"/>
-    </dgm:linClrLst>
-    <dgm:effectClrLst/>
-    <dgm:txLinClrLst/>
-    <dgm:txFillClrLst/>
-    <dgm:txEffectClrLst/>
-  </dgm:styleLbl>
-  <dgm:styleLbl name="fgImgPlace1">
-    <dgm:fillClrLst meth="repeat">
-      <a:schemeClr val="accent1">
-        <a:tint val="50000"/>
-      </a:schemeClr>
-    </dgm:fillClrLst>
-    <dgm:linClrLst meth="repeat">
-      <a:schemeClr val="lt1"/>
-    </dgm:linClrLst>
-    <dgm:effectClrLst/>
-    <dgm:txLinClrLst/>
-    <dgm:txFillClrLst meth="repeat">
-      <a:schemeClr val="lt1"/>
-    </dgm:txFillClrLst>
-    <dgm:txEffectClrLst/>
-  </dgm:styleLbl>
-  <dgm:styleLbl name="alignImgPlace1">
-    <dgm:fillClrLst meth="repeat">
-      <a:schemeClr val="accent1">
-        <a:tint val="50000"/>
-      </a:schemeClr>
-    </dgm:fillClrLst>
-    <dgm:linClrLst meth="repeat">
-      <a:schemeClr val="lt1"/>
-    </dgm:linClrLst>
-    <dgm:effectClrLst/>
-    <dgm:txLinClrLst/>
-    <dgm:txFillClrLst meth="repeat">
-      <a:schemeClr val="lt1"/>
-    </dgm:txFillClrLst>
-    <dgm:txEffectClrLst/>
-  </dgm:styleLbl>
-  <dgm:styleLbl name="bgImgPlace1">
-    <dgm:fillClrLst meth="repeat">
-      <a:schemeClr val="accent1">
-        <a:tint val="50000"/>
-      </a:schemeClr>
-    </dgm:fillClrLst>
-    <dgm:linClrLst meth="repeat">
-      <a:schemeClr val="lt1"/>
-    </dgm:linClrLst>
-    <dgm:effectClrLst/>
-    <dgm:txLinClrLst/>
-    <dgm:txFillClrLst meth="repeat">
-      <a:schemeClr val="lt1"/>
-    </dgm:txFillClrLst>
-    <dgm:txEffectClrLst/>
-  </dgm:styleLbl>
-  <dgm:styleLbl name="sibTrans2D1">
-    <dgm:fillClrLst meth="repeat">
-      <a:schemeClr val="accent1">
-        <a:tint val="60000"/>
-      </a:schemeClr>
-    </dgm:fillClrLst>
-    <dgm:linClrLst meth="repeat">
-      <a:schemeClr val="accent1">
-        <a:tint val="60000"/>
-      </a:schemeClr>
-    </dgm:linClrLst>
-    <dgm:effectClrLst/>
-    <dgm:txLinClrLst/>
-    <dgm:txFillClrLst/>
-    <dgm:txEffectClrLst/>
-  </dgm:styleLbl>
-  <dgm:styleLbl name="fgSibTrans2D1">
-    <dgm:fillClrLst meth="repeat">
-      <a:schemeClr val="accent1">
-        <a:tint val="60000"/>
-      </a:schemeClr>
-    </dgm:fillClrLst>
-    <dgm:linClrLst meth="repeat">
-      <a:schemeClr val="accent1">
-        <a:tint val="60000"/>
-      </a:schemeClr>
-    </dgm:linClrLst>
-    <dgm:effectClrLst/>
-    <dgm:txLinClrLst/>
-    <dgm:txFillClrLst/>
-    <dgm:txEffectClrLst/>
-  </dgm:styleLbl>
-  <dgm:styleLbl name="bgSibTrans2D1">
-    <dgm:fillClrLst meth="repeat">
-      <a:schemeClr val="accent1">
-        <a:tint val="60000"/>
-      </a:schemeClr>
-    </dgm:fillClrLst>
-    <dgm:linClrLst meth="repeat">
-      <a:schemeClr val="accent1">
-        <a:tint val="60000"/>
-      </a:schemeClr>
-    </dgm:linClrLst>
-    <dgm:effectClrLst/>
-    <dgm:txLinClrLst/>
-    <dgm:txFillClrLst/>
-    <dgm:txEffectClrLst/>
-  </dgm:styleLbl>
-  <dgm:styleLbl name="sibTrans1D1">
-    <dgm:fillClrLst meth="repeat">
-      <a:schemeClr val="accent1"/>
-    </dgm:fillClrLst>
-    <dgm:linClrLst meth="repeat">
-      <a:schemeClr val="accent1"/>
-    </dgm:linClrLst>
-    <dgm:effectClrLst/>
-    <dgm:txLinClrLst/>
-    <dgm:txFillClrLst meth="repeat">
-      <a:schemeClr val="tx1"/>
-    </dgm:txFillClrLst>
-    <dgm:txEffectClrLst/>
-  </dgm:styleLbl>
-  <dgm:styleLbl name="callout">
-    <dgm:fillClrLst meth="repeat">
-      <a:schemeClr val="accent1"/>
-    </dgm:fillClrLst>
-    <dgm:linClrLst meth="repeat">
-      <a:schemeClr val="accent1">
-        <a:tint val="50000"/>
-      </a:schemeClr>
-    </dgm:linClrLst>
-    <dgm:effectClrLst/>
-    <dgm:txLinClrLst/>
-    <dgm:txFillClrLst meth="repeat">
-      <a:schemeClr val="tx1"/>
-    </dgm:txFillClrLst>
-    <dgm:txEffectClrLst/>
-  </dgm:styleLbl>
-  <dgm:styleLbl name="asst0">
-    <dgm:fillClrLst meth="repeat">
-      <a:schemeClr val="accent1"/>
-    </dgm:fillClrLst>
-    <dgm:linClrLst meth="repeat">
-      <a:schemeClr val="lt1"/>
-    </dgm:linClrLst>
-    <dgm:effectClrLst/>
-    <dgm:txLinClrLst/>
-    <dgm:txFillClrLst/>
-    <dgm:txEffectClrLst/>
-  </dgm:styleLbl>
-  <dgm:styleLbl name="asst1">
-    <dgm:fillClrLst meth="repeat">
-      <a:schemeClr val="accent1"/>
-    </dgm:fillClrLst>
-    <dgm:linClrLst meth="repeat">
-      <a:schemeClr val="lt1"/>
-    </dgm:linClrLst>
-    <dgm:effectClrLst/>
-    <dgm:txLinClrLst/>
-    <dgm:txFillClrLst/>
-    <dgm:txEffectClrLst/>
-  </dgm:styleLbl>
-  <dgm:styleLbl name="asst2">
-    <dgm:fillClrLst meth="repeat">
-      <a:schemeClr val="accent1"/>
-    </dgm:fillClrLst>
-    <dgm:linClrLst meth="repeat">
-      <a:schemeClr val="lt1"/>
-    </dgm:linClrLst>
-    <dgm:effectClrLst/>
-    <dgm:txLinClrLst/>
-    <dgm:txFillClrLst/>
-    <dgm:txEffectClrLst/>
-  </dgm:styleLbl>
-  <dgm:styleLbl name="asst3">
-    <dgm:fillClrLst meth="repeat">
-      <a:schemeClr val="accent1"/>
-    </dgm:fillClrLst>
-    <dgm:linClrLst meth="repeat">
-      <a:schemeClr val="lt1"/>
-    </dgm:linClrLst>
-    <dgm:effectClrLst/>
-    <dgm:txLinClrLst/>
-    <dgm:txFillClrLst/>
-    <dgm:txEffectClrLst/>
-  </dgm:styleLbl>
-  <dgm:styleLbl name="asst4">
-    <dgm:fillClrLst meth="repeat">
-      <a:schemeClr val="accent1"/>
-    </dgm:fillClrLst>
-    <dgm:linClrLst meth="repeat">
-      <a:schemeClr val="lt1"/>
-    </dgm:linClrLst>
-    <dgm:effectClrLst/>
-    <dgm:txLinClrLst/>
-    <dgm:txFillClrLst/>
-    <dgm:txEffectClrLst/>
-  </dgm:styleLbl>
-  <dgm:styleLbl name="parChTrans2D1">
-    <dgm:fillClrLst meth="repeat">
-      <a:schemeClr val="accent1">
-        <a:tint val="60000"/>
-      </a:schemeClr>
-    </dgm:fillClrLst>
-    <dgm:linClrLst meth="repeat">
-      <a:schemeClr val="accent1">
-        <a:tint val="60000"/>
-      </a:schemeClr>
-    </dgm:linClrLst>
-    <dgm:effectClrLst/>
-    <dgm:txLinClrLst/>
-    <dgm:txFillClrLst meth="repeat">
-      <a:schemeClr val="lt1"/>
-    </dgm:txFillClrLst>
-    <dgm:txEffectClrLst/>
-  </dgm:styleLbl>
-  <dgm:styleLbl name="parChTrans2D2">
-    <dgm:fillClrLst meth="repeat">
-      <a:schemeClr val="accent1"/>
-    </dgm:fillClrLst>
-    <dgm:linClrLst meth="repeat">
-      <a:schemeClr val="accent1"/>
-    </dgm:linClrLst>
-    <dgm:effectClrLst/>
-    <dgm:txLinClrLst/>
-    <dgm:txFillClrLst meth="repeat">
-      <a:schemeClr val="lt1"/>
-    </dgm:txFillClrLst>
-    <dgm:txEffectClrLst/>
-  </dgm:styleLbl>
-  <dgm:styleLbl name="parChTrans2D3">
-    <dgm:fillClrLst meth="repeat">
-      <a:schemeClr val="accent1"/>
-    </dgm:fillClrLst>
-    <dgm:linClrLst meth="repeat">
-      <a:schemeClr val="accent1"/>
-    </dgm:linClrLst>
-    <dgm:effectClrLst/>
-    <dgm:txLinClrLst/>
-    <dgm:txFillClrLst meth="repeat">
-      <a:schemeClr val="lt1"/>
-    </dgm:txFillClrLst>
-    <dgm:txEffectClrLst/>
-  </dgm:styleLbl>
-  <dgm:styleLbl name="parChTrans2D4">
-    <dgm:fillClrLst meth="repeat">
-      <a:schemeClr val="accent1"/>
-    </dgm:fillClrLst>
-    <dgm:linClrLst meth="repeat">
-      <a:schemeClr val="accent1"/>
-    </dgm:linClrLst>
-    <dgm:effectClrLst/>
-    <dgm:txLinClrLst/>
-    <dgm:txFillClrLst meth="repeat">
-      <a:schemeClr val="lt1"/>
-    </dgm:txFillClrLst>
-    <dgm:txEffectClrLst/>
-  </dgm:styleLbl>
-  <dgm:styleLbl name="parChTrans1D1">
-    <dgm:fillClrLst meth="repeat">
-      <a:schemeClr val="accent1"/>
-    </dgm:fillClrLst>
-    <dgm:linClrLst meth="repeat">
-      <a:schemeClr val="accent1">
-        <a:shade val="60000"/>
-      </a:schemeClr>
-    </dgm:linClrLst>
-    <dgm:effectClrLst/>
-    <dgm:txLinClrLst/>
-    <dgm:txFillClrLst meth="repeat">
-      <a:schemeClr val="tx1"/>
-    </dgm:txFillClrLst>
-    <dgm:txEffectClrLst/>
-  </dgm:styleLbl>
-  <dgm:styleLbl name="parChTrans1D2">
-    <dgm:fillClrLst meth="repeat">
-      <a:schemeClr val="accent1"/>
-    </dgm:fillClrLst>
-    <dgm:linClrLst meth="repeat">
-      <a:schemeClr val="accent1">
-        <a:shade val="60000"/>
-      </a:schemeClr>
-    </dgm:linClrLst>
-    <dgm:effectClrLst/>
-    <dgm:txLinClrLst/>
-    <dgm:txFillClrLst meth="repeat">
-      <a:schemeClr val="tx1"/>
-    </dgm:txFillClrLst>
-    <dgm:txEffectClrLst/>
-  </dgm:styleLbl>
-  <dgm:styleLbl name="parChTrans1D3">
-    <dgm:fillClrLst meth="repeat">
-      <a:schemeClr val="accent1"/>
-    </dgm:fillClrLst>
-    <dgm:linClrLst meth="repeat">
-      <a:schemeClr val="accent1">
-        <a:shade val="80000"/>
-      </a:schemeClr>
-    </dgm:linClrLst>
-    <dgm:effectClrLst/>
-    <dgm:txLinClrLst/>
-    <dgm:txFillClrLst meth="repeat">
-      <a:schemeClr val="tx1"/>
-    </dgm:txFillClrLst>
-    <dgm:txEffectClrLst/>
-  </dgm:styleLbl>
-  <dgm:styleLbl name="parChTrans1D4">
-    <dgm:fillClrLst meth="repeat">
-      <a:schemeClr val="accent1"/>
-    </dgm:fillClrLst>
-    <dgm:linClrLst meth="repeat">
-      <a:schemeClr val="accent1">
-        <a:shade val="80000"/>
-      </a:schemeClr>
-    </dgm:linClrLst>
-    <dgm:effectClrLst/>
-    <dgm:txLinClrLst/>
-    <dgm:txFillClrLst meth="repeat">
-      <a:schemeClr val="tx1"/>
-    </dgm:txFillClrLst>
-    <dgm:txEffectClrLst/>
-  </dgm:styleLbl>
-  <dgm:styleLbl name="fgAcc1">
-    <dgm:fillClrLst meth="repeat">
-      <a:schemeClr val="lt1">
-        <a:alpha val="90000"/>
-      </a:schemeClr>
-    </dgm:fillClrLst>
-    <dgm:linClrLst meth="repeat">
-      <a:schemeClr val="accent1"/>
-    </dgm:linClrLst>
-    <dgm:effectClrLst/>
-    <dgm:txLinClrLst/>
-    <dgm:txFillClrLst meth="repeat">
-      <a:schemeClr val="dk1"/>
-    </dgm:txFillClrLst>
-    <dgm:txEffectClrLst/>
-  </dgm:styleLbl>
-  <dgm:styleLbl name="conFgAcc1">
-    <dgm:fillClrLst meth="repeat">
-      <a:schemeClr val="lt1">
-        <a:alpha val="90000"/>
-      </a:schemeClr>
-    </dgm:fillClrLst>
-    <dgm:linClrLst meth="repeat">
-      <a:schemeClr val="accent1"/>
-    </dgm:linClrLst>
-    <dgm:effectClrLst/>
-    <dgm:txLinClrLst/>
-    <dgm:txFillClrLst meth="repeat">
-      <a:schemeClr val="dk1"/>
-    </dgm:txFillClrLst>
-    <dgm:txEffectClrLst/>
-  </dgm:styleLbl>
-  <dgm:styleLbl name="alignAcc1">
-    <dgm:fillClrLst meth="repeat">
-      <a:schemeClr val="lt1">
-        <a:alpha val="90000"/>
-      </a:schemeClr>
-    </dgm:fillClrLst>
-    <dgm:linClrLst meth="repeat">
-      <a:schemeClr val="accent1"/>
-    </dgm:linClrLst>
-    <dgm:effectClrLst/>
-    <dgm:txLinClrLst/>
-    <dgm:txFillClrLst meth="repeat">
-      <a:schemeClr val="dk1"/>
-    </dgm:txFillClrLst>
-    <dgm:txEffectClrLst/>
-  </dgm:styleLbl>
-  <dgm:styleLbl name="trAlignAcc1">
-    <dgm:fillClrLst meth="repeat">
-      <a:schemeClr val="lt1">
-        <a:alpha val="40000"/>
-      </a:schemeClr>
-    </dgm:fillClrLst>
-    <dgm:linClrLst meth="repeat">
-      <a:schemeClr val="accent1"/>
-    </dgm:linClrLst>
-    <dgm:effectClrLst/>
-    <dgm:txLinClrLst/>
-    <dgm:txFillClrLst meth="repeat">
-      <a:schemeClr val="dk1"/>
-    </dgm:txFillClrLst>
-    <dgm:txEffectClrLst/>
-  </dgm:styleLbl>
-  <dgm:styleLbl name="bgAcc1">
-    <dgm:fillClrLst meth="repeat">
-      <a:schemeClr val="lt1">
-        <a:alpha val="90000"/>
-      </a:schemeClr>
-    </dgm:fillClrLst>
-    <dgm:linClrLst meth="repeat">
-      <a:schemeClr val="accent1"/>
-    </dgm:linClrLst>
-    <dgm:effectClrLst/>
-    <dgm:txLinClrLst/>
-    <dgm:txFillClrLst meth="repeat">
-      <a:schemeClr val="dk1"/>
-    </dgm:txFillClrLst>
-    <dgm:txEffectClrLst/>
-  </dgm:styleLbl>
-  <dgm:styleLbl name="solidFgAcc1">
-    <dgm:fillClrLst meth="repeat">
-      <a:schemeClr val="lt1"/>
-    </dgm:fillClrLst>
-    <dgm:linClrLst meth="repeat">
-      <a:schemeClr val="accent1"/>
-    </dgm:linClrLst>
-    <dgm:effectClrLst/>
-    <dgm:txLinClrLst/>
-    <dgm:txFillClrLst meth="repeat">
-      <a:schemeClr val="dk1"/>
-    </dgm:txFillClrLst>
-    <dgm:txEffectClrLst/>
-  </dgm:styleLbl>
-  <dgm:styleLbl name="solidAlignAcc1">
-    <dgm:fillClrLst meth="repeat">
-      <a:schemeClr val="lt1"/>
-    </dgm:fillClrLst>
-    <dgm:linClrLst meth="repeat">
-      <a:schemeClr val="accent1"/>
-    </dgm:linClrLst>
-    <dgm:effectClrLst/>
-    <dgm:txLinClrLst/>
-    <dgm:txFillClrLst meth="repeat">
-      <a:schemeClr val="dk1"/>
-    </dgm:txFillClrLst>
-    <dgm:txEffectClrLst/>
-  </dgm:styleLbl>
-  <dgm:styleLbl name="solidBgAcc1">
-    <dgm:fillClrLst meth="repeat">
-      <a:schemeClr val="lt1"/>
-    </dgm:fillClrLst>
-    <dgm:linClrLst meth="repeat">
-      <a:schemeClr val="accent1"/>
-    </dgm:linClrLst>
-    <dgm:effectClrLst/>
-    <dgm:txLinClrLst/>
-    <dgm:txFillClrLst meth="repeat">
-      <a:schemeClr val="dk1"/>
-    </dgm:txFillClrLst>
-    <dgm:txEffectClrLst/>
-  </dgm:styleLbl>
-  <dgm:styleLbl name="fgAccFollowNode1">
-    <dgm:fillClrLst meth="repeat">
-      <a:schemeClr val="accent1">
-        <a:alpha val="90000"/>
-        <a:tint val="40000"/>
-      </a:schemeClr>
-    </dgm:fillClrLst>
-    <dgm:linClrLst meth="repeat">
-      <a:schemeClr val="accent1">
-        <a:alpha val="90000"/>
-        <a:tint val="40000"/>
-      </a:schemeClr>
-    </dgm:linClrLst>
-    <dgm:effectClrLst/>
-    <dgm:txLinClrLst/>
-    <dgm:txFillClrLst meth="repeat">
-      <a:schemeClr val="dk1"/>
-    </dgm:txFillClrLst>
-    <dgm:txEffectClrLst/>
-  </dgm:styleLbl>
-  <dgm:styleLbl name="alignAccFollowNode1">
-    <dgm:fillClrLst meth="repeat">
-      <a:schemeClr val="accent1">
-        <a:alpha val="90000"/>
-        <a:tint val="40000"/>
-      </a:schemeClr>
-    </dgm:fillClrLst>
-    <dgm:linClrLst meth="repeat">
-      <a:schemeClr val="accent1">
-        <a:alpha val="90000"/>
-        <a:tint val="40000"/>
-      </a:schemeClr>
-    </dgm:linClrLst>
-    <dgm:effectClrLst/>
-    <dgm:txLinClrLst/>
-    <dgm:txFillClrLst meth="repeat">
-      <a:schemeClr val="dk1"/>
-    </dgm:txFillClrLst>
-    <dgm:txEffectClrLst/>
-  </dgm:styleLbl>
-  <dgm:styleLbl name="bgAccFollowNode1">
-    <dgm:fillClrLst meth="repeat">
-      <a:schemeClr val="accent1">
-        <a:alpha val="90000"/>
-        <a:tint val="40000"/>
-      </a:schemeClr>
-    </dgm:fillClrLst>
-    <dgm:linClrLst meth="repeat">
-      <a:schemeClr val="accent1">
-        <a:alpha val="90000"/>
-        <a:tint val="40000"/>
-      </a:schemeClr>
-    </dgm:linClrLst>
-    <dgm:effectClrLst/>
-    <dgm:txLinClrLst/>
-    <dgm:txFillClrLst meth="repeat">
-      <a:schemeClr val="dk1"/>
-    </dgm:txFillClrLst>
-    <dgm:txEffectClrLst/>
-  </dgm:styleLbl>
-  <dgm:styleLbl name="fgAcc0">
-    <dgm:fillClrLst meth="repeat">
-      <a:schemeClr val="lt1">
-        <a:alpha val="90000"/>
-      </a:schemeClr>
-    </dgm:fillClrLst>
-    <dgm:linClrLst meth="repeat">
-      <a:schemeClr val="accent1"/>
-    </dgm:linClrLst>
-    <dgm:effectClrLst/>
-    <dgm:txLinClrLst/>
-    <dgm:txFillClrLst meth="repeat">
-      <a:schemeClr val="dk1"/>
-    </dgm:txFillClrLst>
-    <dgm:txEffectClrLst/>
-  </dgm:styleLbl>
-  <dgm:styleLbl name="fgAcc2">
-    <dgm:fillClrLst meth="repeat">
-      <a:schemeClr val="lt1">
-        <a:alpha val="90000"/>
-      </a:schemeClr>
-    </dgm:fillClrLst>
-    <dgm:linClrLst meth="repeat">
-      <a:schemeClr val="accent1"/>
-    </dgm:linClrLst>
-    <dgm:effectClrLst/>
-    <dgm:txLinClrLst/>
-    <dgm:txFillClrLst meth="repeat">
-      <a:schemeClr val="dk1"/>
-    </dgm:txFillClrLst>
-    <dgm:txEffectClrLst/>
-  </dgm:styleLbl>
-  <dgm:styleLbl name="fgAcc3">
-    <dgm:fillClrLst meth="repeat">
-      <a:schemeClr val="lt1">
-        <a:alpha val="90000"/>
-      </a:schemeClr>
-    </dgm:fillClrLst>
-    <dgm:linClrLst meth="repeat">
-      <a:schemeClr val="accent1"/>
-    </dgm:linClrLst>
-    <dgm:effectClrLst/>
-    <dgm:txLinClrLst/>
-    <dgm:txFillClrLst meth="repeat">
-      <a:schemeClr val="dk1"/>
-    </dgm:txFillClrLst>
-    <dgm:txEffectClrLst/>
-  </dgm:styleLbl>
-  <dgm:styleLbl name="fgAcc4">
-    <dgm:fillClrLst meth="repeat">
-      <a:schemeClr val="lt1">
-        <a:alpha val="90000"/>
-      </a:schemeClr>
-    </dgm:fillClrLst>
-    <dgm:linClrLst meth="repeat">
-      <a:schemeClr val="accent1"/>
-    </dgm:linClrLst>
-    <dgm:effectClrLst/>
-    <dgm:txLinClrLst/>
-    <dgm:txFillClrLst meth="repeat">
-      <a:schemeClr val="dk1"/>
-    </dgm:txFillClrLst>
-    <dgm:txEffectClrLst/>
-  </dgm:styleLbl>
-  <dgm:styleLbl name="bgShp">
-    <dgm:fillClrLst meth="repeat">
-      <a:schemeClr val="accent1">
-        <a:tint val="40000"/>
-      </a:schemeClr>
-    </dgm:fillClrLst>
-    <dgm:linClrLst meth="repeat">
-      <a:schemeClr val="accent1"/>
-    </dgm:linClrLst>
-    <dgm:effectClrLst/>
-    <dgm:txLinClrLst/>
-    <dgm:txFillClrLst meth="repeat">
-      <a:schemeClr val="dk1"/>
-    </dgm:txFillClrLst>
-    <dgm:txEffectClrLst/>
-  </dgm:styleLbl>
-  <dgm:styleLbl name="dkBgShp">
-    <dgm:fillClrLst meth="repeat">
-      <a:schemeClr val="accent1">
-        <a:shade val="80000"/>
-      </a:schemeClr>
-    </dgm:fillClrLst>
-    <dgm:linClrLst meth="repeat">
-      <a:schemeClr val="accent1"/>
-    </dgm:linClrLst>
-    <dgm:effectClrLst/>
-    <dgm:txLinClrLst/>
-    <dgm:txFillClrLst meth="repeat">
-      <a:schemeClr val="lt1"/>
-    </dgm:txFillClrLst>
-    <dgm:txEffectClrLst/>
-  </dgm:styleLbl>
-  <dgm:styleLbl name="trBgShp">
-    <dgm:fillClrLst meth="repeat">
-      <a:schemeClr val="accent1">
-        <a:tint val="50000"/>
-        <a:alpha val="40000"/>
-      </a:schemeClr>
-    </dgm:fillClrLst>
-    <dgm:linClrLst meth="repeat">
-      <a:schemeClr val="accent1"/>
-    </dgm:linClrLst>
-    <dgm:effectClrLst/>
-    <dgm:txLinClrLst/>
-    <dgm:txFillClrLst meth="repeat">
-      <a:schemeClr val="lt1"/>
-    </dgm:txFillClrLst>
-    <dgm:txEffectClrLst/>
-  </dgm:styleLbl>
-  <dgm:styleLbl name="fgShp">
-    <dgm:fillClrLst meth="repeat">
-      <a:schemeClr val="accent1">
-        <a:tint val="60000"/>
-      </a:schemeClr>
-    </dgm:fillClrLst>
-    <dgm:linClrLst meth="repeat">
-      <a:schemeClr val="lt1"/>
-    </dgm:linClrLst>
-    <dgm:effectClrLst/>
-    <dgm:txLinClrLst/>
-    <dgm:txFillClrLst meth="repeat">
-      <a:schemeClr val="dk1"/>
-    </dgm:txFillClrLst>
-    <dgm:txEffectClrLst/>
-  </dgm:styleLbl>
-  <dgm:styleLbl name="revTx">
-    <dgm:fillClrLst meth="repeat">
-      <a:schemeClr val="lt1">
-        <a:alpha val="0"/>
-      </a:schemeClr>
-    </dgm:fillClrLst>
-    <dgm:linClrLst meth="repeat">
-      <a:schemeClr val="dk1">
-        <a:alpha val="0"/>
-      </a:schemeClr>
-    </dgm:linClrLst>
-    <dgm:effectClrLst/>
-    <dgm:txLinClrLst/>
-    <dgm:txFillClrLst meth="repeat">
-      <a:schemeClr val="tx1"/>
-    </dgm:txFillClrLst>
-    <dgm:txEffectClrLst/>
-  </dgm:styleLbl>
-</dgm:colorsDef>
-</file>
-
 <file path=ppt/diagrams/data1.xml><?xml version="1.0" encoding="utf-8"?>
-<dgm:dataModel xmlns:dgm="http://schemas.openxmlformats.org/drawingml/2006/diagram" xmlns:a="http://schemas.openxmlformats.org/drawingml/2006/main">
-  <dgm:ptLst>
-    <dgm:pt modelId="{B2A2D3C9-207C-4641-8002-B5F476C0D40E}" type="doc">
-      <dgm:prSet loTypeId="urn:microsoft.com/office/officeart/2005/8/layout/process1" loCatId="process" qsTypeId="urn:microsoft.com/office/officeart/2005/8/quickstyle/simple5" qsCatId="simple" csTypeId="urn:microsoft.com/office/officeart/2005/8/colors/accent1_2" csCatId="accent1" phldr="1"/>
-      <dgm:spPr/>
-    </dgm:pt>
-    <dgm:pt modelId="{8BBFF2B5-42C1-41F8-994D-23F2B0CE9563}">
-      <dgm:prSet phldrT="[Text]"/>
-      <dgm:spPr/>
-      <dgm:t>
-        <a:bodyPr/>
-        <a:lstStyle/>
-        <a:p>
-          <a:r>
-            <a:rPr lang="id-ID" dirty="0"/>
-            <a:t>Supplier</a:t>
-          </a:r>
-        </a:p>
-      </dgm:t>
-    </dgm:pt>
-    <dgm:pt modelId="{FA5B1C48-3C70-484C-8097-E2449598EE3C}" type="parTrans" cxnId="{5421628C-A7FD-40D0-81B3-567089382449}">
-      <dgm:prSet/>
-      <dgm:spPr/>
-      <dgm:t>
-        <a:bodyPr/>
-        <a:lstStyle/>
-        <a:p>
-          <a:endParaRPr lang="id-ID"/>
-        </a:p>
-      </dgm:t>
-    </dgm:pt>
-    <dgm:pt modelId="{4367C4B1-BE12-4900-89B8-26BF13268B3C}" type="sibTrans" cxnId="{5421628C-A7FD-40D0-81B3-567089382449}">
-      <dgm:prSet/>
-      <dgm:spPr/>
-      <dgm:t>
-        <a:bodyPr/>
-        <a:lstStyle/>
-        <a:p>
-          <a:endParaRPr lang="id-ID"/>
-        </a:p>
-      </dgm:t>
-    </dgm:pt>
-    <dgm:pt modelId="{E0020991-CAA7-423A-AA0F-A1E4B2333E73}">
-      <dgm:prSet phldrT="[Text]"/>
-      <dgm:spPr/>
-      <dgm:t>
-        <a:bodyPr/>
-        <a:lstStyle/>
-        <a:p>
-          <a:r>
-            <a:rPr lang="id-ID" dirty="0"/>
-            <a:t>FreshBox</a:t>
-          </a:r>
-        </a:p>
-      </dgm:t>
-    </dgm:pt>
-    <dgm:pt modelId="{93B2D490-E0DA-4A04-B330-7E3273D3583E}" type="parTrans" cxnId="{ECB12A71-A03E-4054-B7A0-20C0D8BE8FCC}">
-      <dgm:prSet/>
-      <dgm:spPr/>
-      <dgm:t>
-        <a:bodyPr/>
-        <a:lstStyle/>
-        <a:p>
-          <a:endParaRPr lang="id-ID"/>
-        </a:p>
-      </dgm:t>
-    </dgm:pt>
-    <dgm:pt modelId="{486C25BE-E739-4790-A160-B312C355D61B}" type="sibTrans" cxnId="{ECB12A71-A03E-4054-B7A0-20C0D8BE8FCC}">
-      <dgm:prSet/>
-      <dgm:spPr/>
-      <dgm:t>
-        <a:bodyPr/>
-        <a:lstStyle/>
-        <a:p>
-          <a:endParaRPr lang="id-ID"/>
-        </a:p>
-      </dgm:t>
-    </dgm:pt>
-    <dgm:pt modelId="{5148FB0F-FDFE-46CB-AF54-1D087A3D3145}">
-      <dgm:prSet phldrT="[Text]"/>
-      <dgm:spPr/>
-      <dgm:t>
-        <a:bodyPr/>
-        <a:lstStyle/>
-        <a:p>
-          <a:r>
-            <a:rPr lang="id-ID" dirty="0"/>
-            <a:t>Customer</a:t>
-          </a:r>
-        </a:p>
-      </dgm:t>
-    </dgm:pt>
-    <dgm:pt modelId="{1EBFEAA3-9893-4EA9-9AC5-227B4C9A1073}" type="parTrans" cxnId="{A9378CEF-3943-4F07-8B59-0F0989517F5D}">
-      <dgm:prSet/>
-      <dgm:spPr/>
-      <dgm:t>
-        <a:bodyPr/>
-        <a:lstStyle/>
-        <a:p>
-          <a:endParaRPr lang="id-ID"/>
-        </a:p>
-      </dgm:t>
-    </dgm:pt>
-    <dgm:pt modelId="{2181A224-3449-4F95-8E8A-62091D7A2D8D}" type="sibTrans" cxnId="{A9378CEF-3943-4F07-8B59-0F0989517F5D}">
-      <dgm:prSet/>
-      <dgm:spPr/>
-      <dgm:t>
-        <a:bodyPr/>
-        <a:lstStyle/>
-        <a:p>
-          <a:endParaRPr lang="id-ID"/>
-        </a:p>
-      </dgm:t>
-    </dgm:pt>
-    <dgm:pt modelId="{BEB204A4-12B5-445A-85E2-D3E28447F9B8}" type="pres">
-      <dgm:prSet presAssocID="{B2A2D3C9-207C-4641-8002-B5F476C0D40E}" presName="Name0" presStyleCnt="0">
-        <dgm:presLayoutVars>
-          <dgm:dir/>
-          <dgm:resizeHandles val="exact"/>
-        </dgm:presLayoutVars>
-      </dgm:prSet>
-      <dgm:spPr/>
-    </dgm:pt>
-    <dgm:pt modelId="{E0CA63EB-3957-426C-8E60-6C2C52E68BCF}" type="pres">
-      <dgm:prSet presAssocID="{8BBFF2B5-42C1-41F8-994D-23F2B0CE9563}" presName="node" presStyleLbl="node1" presStyleIdx="0" presStyleCnt="3">
-        <dgm:presLayoutVars>
-          <dgm:bulletEnabled val="1"/>
-        </dgm:presLayoutVars>
-      </dgm:prSet>
-      <dgm:spPr/>
-    </dgm:pt>
-    <dgm:pt modelId="{26E31169-FDF6-46D8-B57A-95CE5F64E17B}" type="pres">
-      <dgm:prSet presAssocID="{4367C4B1-BE12-4900-89B8-26BF13268B3C}" presName="sibTrans" presStyleLbl="sibTrans2D1" presStyleIdx="0" presStyleCnt="2"/>
-      <dgm:spPr/>
-    </dgm:pt>
-    <dgm:pt modelId="{F9965D54-B3FE-4852-9F56-BF94E27CEAF4}" type="pres">
-      <dgm:prSet presAssocID="{4367C4B1-BE12-4900-89B8-26BF13268B3C}" presName="connectorText" presStyleLbl="sibTrans2D1" presStyleIdx="0" presStyleCnt="2"/>
-      <dgm:spPr/>
-    </dgm:pt>
-    <dgm:pt modelId="{FAE57F19-37EF-45B6-95CB-137DB162D0D0}" type="pres">
-      <dgm:prSet presAssocID="{E0020991-CAA7-423A-AA0F-A1E4B2333E73}" presName="node" presStyleLbl="node1" presStyleIdx="1" presStyleCnt="3">
-        <dgm:presLayoutVars>
-          <dgm:bulletEnabled val="1"/>
-        </dgm:presLayoutVars>
-      </dgm:prSet>
-      <dgm:spPr/>
-    </dgm:pt>
-    <dgm:pt modelId="{BB781B9D-8CFC-48E0-973A-409445EC32D7}" type="pres">
-      <dgm:prSet presAssocID="{486C25BE-E739-4790-A160-B312C355D61B}" presName="sibTrans" presStyleLbl="sibTrans2D1" presStyleIdx="1" presStyleCnt="2"/>
-      <dgm:spPr/>
-    </dgm:pt>
-    <dgm:pt modelId="{B44F5F2A-DD50-40D6-959E-C63F4293A895}" type="pres">
-      <dgm:prSet presAssocID="{486C25BE-E739-4790-A160-B312C355D61B}" presName="connectorText" presStyleLbl="sibTrans2D1" presStyleIdx="1" presStyleCnt="2"/>
-      <dgm:spPr/>
-    </dgm:pt>
-    <dgm:pt modelId="{BE695BEE-B25A-4685-AD98-1B41138250C4}" type="pres">
-      <dgm:prSet presAssocID="{5148FB0F-FDFE-46CB-AF54-1D087A3D3145}" presName="node" presStyleLbl="node1" presStyleIdx="2" presStyleCnt="3">
-        <dgm:presLayoutVars>
-          <dgm:bulletEnabled val="1"/>
-        </dgm:presLayoutVars>
-      </dgm:prSet>
-      <dgm:spPr/>
-    </dgm:pt>
-  </dgm:ptLst>
-  <dgm:cxnLst>
-    <dgm:cxn modelId="{28657A18-EE60-49F3-91B0-29F2D98EB3DF}" type="presOf" srcId="{486C25BE-E739-4790-A160-B312C355D61B}" destId="{B44F5F2A-DD50-40D6-959E-C63F4293A895}" srcOrd="1" destOrd="0" presId="urn:microsoft.com/office/officeart/2005/8/layout/process1"/>
-    <dgm:cxn modelId="{C0620927-6EC1-4E5C-AF23-C90E43000A0C}" type="presOf" srcId="{B2A2D3C9-207C-4641-8002-B5F476C0D40E}" destId="{BEB204A4-12B5-445A-85E2-D3E28447F9B8}" srcOrd="0" destOrd="0" presId="urn:microsoft.com/office/officeart/2005/8/layout/process1"/>
-    <dgm:cxn modelId="{6C7A7F4B-D43A-43CF-92B3-0853586B9F1A}" type="presOf" srcId="{5148FB0F-FDFE-46CB-AF54-1D087A3D3145}" destId="{BE695BEE-B25A-4685-AD98-1B41138250C4}" srcOrd="0" destOrd="0" presId="urn:microsoft.com/office/officeart/2005/8/layout/process1"/>
-    <dgm:cxn modelId="{ECB12A71-A03E-4054-B7A0-20C0D8BE8FCC}" srcId="{B2A2D3C9-207C-4641-8002-B5F476C0D40E}" destId="{E0020991-CAA7-423A-AA0F-A1E4B2333E73}" srcOrd="1" destOrd="0" parTransId="{93B2D490-E0DA-4A04-B330-7E3273D3583E}" sibTransId="{486C25BE-E739-4790-A160-B312C355D61B}"/>
-    <dgm:cxn modelId="{5421628C-A7FD-40D0-81B3-567089382449}" srcId="{B2A2D3C9-207C-4641-8002-B5F476C0D40E}" destId="{8BBFF2B5-42C1-41F8-994D-23F2B0CE9563}" srcOrd="0" destOrd="0" parTransId="{FA5B1C48-3C70-484C-8097-E2449598EE3C}" sibTransId="{4367C4B1-BE12-4900-89B8-26BF13268B3C}"/>
-    <dgm:cxn modelId="{4997B08C-4421-4961-A86C-D764163F6C2C}" type="presOf" srcId="{4367C4B1-BE12-4900-89B8-26BF13268B3C}" destId="{F9965D54-B3FE-4852-9F56-BF94E27CEAF4}" srcOrd="1" destOrd="0" presId="urn:microsoft.com/office/officeart/2005/8/layout/process1"/>
-    <dgm:cxn modelId="{CDC9BC98-E48B-4B49-AE5E-1C191DE3D587}" type="presOf" srcId="{8BBFF2B5-42C1-41F8-994D-23F2B0CE9563}" destId="{E0CA63EB-3957-426C-8E60-6C2C52E68BCF}" srcOrd="0" destOrd="0" presId="urn:microsoft.com/office/officeart/2005/8/layout/process1"/>
-    <dgm:cxn modelId="{084109BE-85FF-4E1E-B200-8D669C214C12}" type="presOf" srcId="{4367C4B1-BE12-4900-89B8-26BF13268B3C}" destId="{26E31169-FDF6-46D8-B57A-95CE5F64E17B}" srcOrd="0" destOrd="0" presId="urn:microsoft.com/office/officeart/2005/8/layout/process1"/>
-    <dgm:cxn modelId="{D229E8E5-0858-484C-89B7-44C9871522D3}" type="presOf" srcId="{486C25BE-E739-4790-A160-B312C355D61B}" destId="{BB781B9D-8CFC-48E0-973A-409445EC32D7}" srcOrd="0" destOrd="0" presId="urn:microsoft.com/office/officeart/2005/8/layout/process1"/>
-    <dgm:cxn modelId="{A9378CEF-3943-4F07-8B59-0F0989517F5D}" srcId="{B2A2D3C9-207C-4641-8002-B5F476C0D40E}" destId="{5148FB0F-FDFE-46CB-AF54-1D087A3D3145}" srcOrd="2" destOrd="0" parTransId="{1EBFEAA3-9893-4EA9-9AC5-227B4C9A1073}" sibTransId="{2181A224-3449-4F95-8E8A-62091D7A2D8D}"/>
-    <dgm:cxn modelId="{2BDDD9F6-0416-46BD-8DF7-E495F37D4088}" type="presOf" srcId="{E0020991-CAA7-423A-AA0F-A1E4B2333E73}" destId="{FAE57F19-37EF-45B6-95CB-137DB162D0D0}" srcOrd="0" destOrd="0" presId="urn:microsoft.com/office/officeart/2005/8/layout/process1"/>
-    <dgm:cxn modelId="{CC09FB81-B7FE-48A0-96C6-976E6D80BD15}" type="presParOf" srcId="{BEB204A4-12B5-445A-85E2-D3E28447F9B8}" destId="{E0CA63EB-3957-426C-8E60-6C2C52E68BCF}" srcOrd="0" destOrd="0" presId="urn:microsoft.com/office/officeart/2005/8/layout/process1"/>
-    <dgm:cxn modelId="{401C15DE-5693-4586-83F1-FC2D67C3139E}" type="presParOf" srcId="{BEB204A4-12B5-445A-85E2-D3E28447F9B8}" destId="{26E31169-FDF6-46D8-B57A-95CE5F64E17B}" srcOrd="1" destOrd="0" presId="urn:microsoft.com/office/officeart/2005/8/layout/process1"/>
-    <dgm:cxn modelId="{7A684385-DEDF-4ACC-A5C7-6827C4024F16}" type="presParOf" srcId="{26E31169-FDF6-46D8-B57A-95CE5F64E17B}" destId="{F9965D54-B3FE-4852-9F56-BF94E27CEAF4}" srcOrd="0" destOrd="0" presId="urn:microsoft.com/office/officeart/2005/8/layout/process1"/>
-    <dgm:cxn modelId="{36ED7673-EFAE-4943-A624-5E55F9041D01}" type="presParOf" srcId="{BEB204A4-12B5-445A-85E2-D3E28447F9B8}" destId="{FAE57F19-37EF-45B6-95CB-137DB162D0D0}" srcOrd="2" destOrd="0" presId="urn:microsoft.com/office/officeart/2005/8/layout/process1"/>
-    <dgm:cxn modelId="{A30CD983-1A4D-48B2-979F-C1EC767851D4}" type="presParOf" srcId="{BEB204A4-12B5-445A-85E2-D3E28447F9B8}" destId="{BB781B9D-8CFC-48E0-973A-409445EC32D7}" srcOrd="3" destOrd="0" presId="urn:microsoft.com/office/officeart/2005/8/layout/process1"/>
-    <dgm:cxn modelId="{34F6E866-7D50-43F5-B85F-0ECC848C3520}" type="presParOf" srcId="{BB781B9D-8CFC-48E0-973A-409445EC32D7}" destId="{B44F5F2A-DD50-40D6-959E-C63F4293A895}" srcOrd="0" destOrd="0" presId="urn:microsoft.com/office/officeart/2005/8/layout/process1"/>
-    <dgm:cxn modelId="{321CEDF1-637F-440E-884D-653F6FCC79A3}" type="presParOf" srcId="{BEB204A4-12B5-445A-85E2-D3E28447F9B8}" destId="{BE695BEE-B25A-4685-AD98-1B41138250C4}" srcOrd="4" destOrd="0" presId="urn:microsoft.com/office/officeart/2005/8/layout/process1"/>
-  </dgm:cxnLst>
-  <dgm:bg/>
-  <dgm:whole/>
-  <dgm:extLst>
-    <a:ext uri="http://schemas.microsoft.com/office/drawing/2008/diagram">
-      <dsp:dataModelExt xmlns:dsp="http://schemas.microsoft.com/office/drawing/2008/diagram" relId="rId6" minVer="http://schemas.openxmlformats.org/drawingml/2006/diagram"/>
-    </a:ext>
-  </dgm:extLst>
-</dgm:dataModel>
-</file>
-
-<file path=ppt/diagrams/data2.xml><?xml version="1.0" encoding="utf-8"?>
 <dgm:dataModel xmlns:dgm="http://schemas.openxmlformats.org/drawingml/2006/diagram" xmlns:a="http://schemas.openxmlformats.org/drawingml/2006/main">
   <dgm:ptLst>
     <dgm:pt modelId="{09691B4E-C62A-4FE2-86C7-D66CA99D84A9}" type="doc">
@@ -3089,488 +2147,6 @@
 </file>
 
 <file path=ppt/diagrams/drawing1.xml><?xml version="1.0" encoding="utf-8"?>
-<dsp:drawing xmlns:dgm="http://schemas.openxmlformats.org/drawingml/2006/diagram" xmlns:dsp="http://schemas.microsoft.com/office/drawing/2008/diagram" xmlns:a="http://schemas.openxmlformats.org/drawingml/2006/main">
-  <dsp:spTree>
-    <dsp:nvGrpSpPr>
-      <dsp:cNvPr id="0" name=""/>
-      <dsp:cNvGrpSpPr/>
-    </dsp:nvGrpSpPr>
-    <dsp:grpSpPr/>
-    <dsp:sp modelId="{E0CA63EB-3957-426C-8E60-6C2C52E68BCF}">
-      <dsp:nvSpPr>
-        <dsp:cNvPr id="0" name=""/>
-        <dsp:cNvSpPr/>
-      </dsp:nvSpPr>
-      <dsp:spPr>
-        <a:xfrm>
-          <a:off x="7143" y="0"/>
-          <a:ext cx="2135187" cy="728904"/>
-        </a:xfrm>
-        <a:prstGeom prst="roundRect">
-          <a:avLst>
-            <a:gd name="adj" fmla="val 10000"/>
-          </a:avLst>
-        </a:prstGeom>
-        <a:gradFill rotWithShape="0">
-          <a:gsLst>
-            <a:gs pos="0">
-              <a:schemeClr val="accent1">
-                <a:hueOff val="0"/>
-                <a:satOff val="0"/>
-                <a:lumOff val="0"/>
-                <a:alphaOff val="0"/>
-                <a:tint val="96000"/>
-                <a:lumMod val="104000"/>
-              </a:schemeClr>
-            </a:gs>
-            <a:gs pos="100000">
-              <a:schemeClr val="accent1">
-                <a:hueOff val="0"/>
-                <a:satOff val="0"/>
-                <a:lumOff val="0"/>
-                <a:alphaOff val="0"/>
-                <a:shade val="98000"/>
-                <a:lumMod val="94000"/>
-              </a:schemeClr>
-            </a:gs>
-          </a:gsLst>
-          <a:lin ang="5400000" scaled="0"/>
-        </a:gradFill>
-        <a:ln>
-          <a:noFill/>
-        </a:ln>
-        <a:effectLst>
-          <a:outerShdw blurRad="50800" dist="38100" dir="5400000" rotWithShape="0">
-            <a:srgbClr val="000000">
-              <a:alpha val="60000"/>
-            </a:srgbClr>
-          </a:outerShdw>
-        </a:effectLst>
-      </dsp:spPr>
-      <dsp:style>
-        <a:lnRef idx="0">
-          <a:scrgbClr r="0" g="0" b="0"/>
-        </a:lnRef>
-        <a:fillRef idx="3">
-          <a:scrgbClr r="0" g="0" b="0"/>
-        </a:fillRef>
-        <a:effectRef idx="3">
-          <a:scrgbClr r="0" g="0" b="0"/>
-        </a:effectRef>
-        <a:fontRef idx="minor">
-          <a:schemeClr val="lt1"/>
-        </a:fontRef>
-      </dsp:style>
-      <dsp:txBody>
-        <a:bodyPr spcFirstLastPara="0" vert="horz" wrap="square" lIns="118110" tIns="118110" rIns="118110" bIns="118110" numCol="1" spcCol="1270" anchor="ctr" anchorCtr="0">
-          <a:noAutofit/>
-        </a:bodyPr>
-        <a:lstStyle/>
-        <a:p>
-          <a:pPr marL="0" lvl="0" indent="0" algn="ctr" defTabSz="1377950">
-            <a:lnSpc>
-              <a:spcPct val="90000"/>
-            </a:lnSpc>
-            <a:spcBef>
-              <a:spcPct val="0"/>
-            </a:spcBef>
-            <a:spcAft>
-              <a:spcPct val="35000"/>
-            </a:spcAft>
-            <a:buNone/>
-          </a:pPr>
-          <a:r>
-            <a:rPr lang="id-ID" sz="3100" kern="1200" dirty="0"/>
-            <a:t>Supplier</a:t>
-          </a:r>
-        </a:p>
-      </dsp:txBody>
-      <dsp:txXfrm>
-        <a:off x="28492" y="21349"/>
-        <a:ext cx="2092489" cy="686206"/>
-      </dsp:txXfrm>
-    </dsp:sp>
-    <dsp:sp modelId="{26E31169-FDF6-46D8-B57A-95CE5F64E17B}">
-      <dsp:nvSpPr>
-        <dsp:cNvPr id="0" name=""/>
-        <dsp:cNvSpPr/>
-      </dsp:nvSpPr>
-      <dsp:spPr>
-        <a:xfrm>
-          <a:off x="2355850" y="99688"/>
-          <a:ext cx="452659" cy="529526"/>
-        </a:xfrm>
-        <a:prstGeom prst="rightArrow">
-          <a:avLst>
-            <a:gd name="adj1" fmla="val 60000"/>
-            <a:gd name="adj2" fmla="val 50000"/>
-          </a:avLst>
-        </a:prstGeom>
-        <a:gradFill rotWithShape="0">
-          <a:gsLst>
-            <a:gs pos="0">
-              <a:schemeClr val="accent1">
-                <a:tint val="60000"/>
-                <a:hueOff val="0"/>
-                <a:satOff val="0"/>
-                <a:lumOff val="0"/>
-                <a:alphaOff val="0"/>
-                <a:tint val="96000"/>
-                <a:lumMod val="104000"/>
-              </a:schemeClr>
-            </a:gs>
-            <a:gs pos="100000">
-              <a:schemeClr val="accent1">
-                <a:tint val="60000"/>
-                <a:hueOff val="0"/>
-                <a:satOff val="0"/>
-                <a:lumOff val="0"/>
-                <a:alphaOff val="0"/>
-                <a:shade val="98000"/>
-                <a:lumMod val="94000"/>
-              </a:schemeClr>
-            </a:gs>
-          </a:gsLst>
-          <a:lin ang="5400000" scaled="0"/>
-        </a:gradFill>
-        <a:ln>
-          <a:noFill/>
-        </a:ln>
-        <a:effectLst>
-          <a:outerShdw blurRad="50800" dist="38100" dir="5400000" rotWithShape="0">
-            <a:srgbClr val="000000">
-              <a:alpha val="60000"/>
-            </a:srgbClr>
-          </a:outerShdw>
-        </a:effectLst>
-      </dsp:spPr>
-      <dsp:style>
-        <a:lnRef idx="0">
-          <a:scrgbClr r="0" g="0" b="0"/>
-        </a:lnRef>
-        <a:fillRef idx="3">
-          <a:scrgbClr r="0" g="0" b="0"/>
-        </a:fillRef>
-        <a:effectRef idx="3">
-          <a:scrgbClr r="0" g="0" b="0"/>
-        </a:effectRef>
-        <a:fontRef idx="minor">
-          <a:schemeClr val="lt1"/>
-        </a:fontRef>
-      </dsp:style>
-      <dsp:txBody>
-        <a:bodyPr spcFirstLastPara="0" vert="horz" wrap="square" lIns="0" tIns="0" rIns="0" bIns="0" numCol="1" spcCol="1270" anchor="ctr" anchorCtr="0">
-          <a:noAutofit/>
-        </a:bodyPr>
-        <a:lstStyle/>
-        <a:p>
-          <a:pPr marL="0" lvl="0" indent="0" algn="ctr" defTabSz="977900">
-            <a:lnSpc>
-              <a:spcPct val="90000"/>
-            </a:lnSpc>
-            <a:spcBef>
-              <a:spcPct val="0"/>
-            </a:spcBef>
-            <a:spcAft>
-              <a:spcPct val="35000"/>
-            </a:spcAft>
-            <a:buNone/>
-          </a:pPr>
-          <a:endParaRPr lang="id-ID" sz="2200" kern="1200"/>
-        </a:p>
-      </dsp:txBody>
-      <dsp:txXfrm>
-        <a:off x="2355850" y="205593"/>
-        <a:ext cx="316861" cy="317716"/>
-      </dsp:txXfrm>
-    </dsp:sp>
-    <dsp:sp modelId="{FAE57F19-37EF-45B6-95CB-137DB162D0D0}">
-      <dsp:nvSpPr>
-        <dsp:cNvPr id="0" name=""/>
-        <dsp:cNvSpPr/>
-      </dsp:nvSpPr>
-      <dsp:spPr>
-        <a:xfrm>
-          <a:off x="2996406" y="0"/>
-          <a:ext cx="2135187" cy="728904"/>
-        </a:xfrm>
-        <a:prstGeom prst="roundRect">
-          <a:avLst>
-            <a:gd name="adj" fmla="val 10000"/>
-          </a:avLst>
-        </a:prstGeom>
-        <a:gradFill rotWithShape="0">
-          <a:gsLst>
-            <a:gs pos="0">
-              <a:schemeClr val="accent1">
-                <a:hueOff val="0"/>
-                <a:satOff val="0"/>
-                <a:lumOff val="0"/>
-                <a:alphaOff val="0"/>
-                <a:tint val="96000"/>
-                <a:lumMod val="104000"/>
-              </a:schemeClr>
-            </a:gs>
-            <a:gs pos="100000">
-              <a:schemeClr val="accent1">
-                <a:hueOff val="0"/>
-                <a:satOff val="0"/>
-                <a:lumOff val="0"/>
-                <a:alphaOff val="0"/>
-                <a:shade val="98000"/>
-                <a:lumMod val="94000"/>
-              </a:schemeClr>
-            </a:gs>
-          </a:gsLst>
-          <a:lin ang="5400000" scaled="0"/>
-        </a:gradFill>
-        <a:ln>
-          <a:noFill/>
-        </a:ln>
-        <a:effectLst>
-          <a:outerShdw blurRad="50800" dist="38100" dir="5400000" rotWithShape="0">
-            <a:srgbClr val="000000">
-              <a:alpha val="60000"/>
-            </a:srgbClr>
-          </a:outerShdw>
-        </a:effectLst>
-      </dsp:spPr>
-      <dsp:style>
-        <a:lnRef idx="0">
-          <a:scrgbClr r="0" g="0" b="0"/>
-        </a:lnRef>
-        <a:fillRef idx="3">
-          <a:scrgbClr r="0" g="0" b="0"/>
-        </a:fillRef>
-        <a:effectRef idx="3">
-          <a:scrgbClr r="0" g="0" b="0"/>
-        </a:effectRef>
-        <a:fontRef idx="minor">
-          <a:schemeClr val="lt1"/>
-        </a:fontRef>
-      </dsp:style>
-      <dsp:txBody>
-        <a:bodyPr spcFirstLastPara="0" vert="horz" wrap="square" lIns="118110" tIns="118110" rIns="118110" bIns="118110" numCol="1" spcCol="1270" anchor="ctr" anchorCtr="0">
-          <a:noAutofit/>
-        </a:bodyPr>
-        <a:lstStyle/>
-        <a:p>
-          <a:pPr marL="0" lvl="0" indent="0" algn="ctr" defTabSz="1377950">
-            <a:lnSpc>
-              <a:spcPct val="90000"/>
-            </a:lnSpc>
-            <a:spcBef>
-              <a:spcPct val="0"/>
-            </a:spcBef>
-            <a:spcAft>
-              <a:spcPct val="35000"/>
-            </a:spcAft>
-            <a:buNone/>
-          </a:pPr>
-          <a:r>
-            <a:rPr lang="id-ID" sz="3100" kern="1200" dirty="0"/>
-            <a:t>FreshBox</a:t>
-          </a:r>
-        </a:p>
-      </dsp:txBody>
-      <dsp:txXfrm>
-        <a:off x="3017755" y="21349"/>
-        <a:ext cx="2092489" cy="686206"/>
-      </dsp:txXfrm>
-    </dsp:sp>
-    <dsp:sp modelId="{BB781B9D-8CFC-48E0-973A-409445EC32D7}">
-      <dsp:nvSpPr>
-        <dsp:cNvPr id="0" name=""/>
-        <dsp:cNvSpPr/>
-      </dsp:nvSpPr>
-      <dsp:spPr>
-        <a:xfrm>
-          <a:off x="5345112" y="99688"/>
-          <a:ext cx="452659" cy="529526"/>
-        </a:xfrm>
-        <a:prstGeom prst="rightArrow">
-          <a:avLst>
-            <a:gd name="adj1" fmla="val 60000"/>
-            <a:gd name="adj2" fmla="val 50000"/>
-          </a:avLst>
-        </a:prstGeom>
-        <a:gradFill rotWithShape="0">
-          <a:gsLst>
-            <a:gs pos="0">
-              <a:schemeClr val="accent1">
-                <a:tint val="60000"/>
-                <a:hueOff val="0"/>
-                <a:satOff val="0"/>
-                <a:lumOff val="0"/>
-                <a:alphaOff val="0"/>
-                <a:tint val="96000"/>
-                <a:lumMod val="104000"/>
-              </a:schemeClr>
-            </a:gs>
-            <a:gs pos="100000">
-              <a:schemeClr val="accent1">
-                <a:tint val="60000"/>
-                <a:hueOff val="0"/>
-                <a:satOff val="0"/>
-                <a:lumOff val="0"/>
-                <a:alphaOff val="0"/>
-                <a:shade val="98000"/>
-                <a:lumMod val="94000"/>
-              </a:schemeClr>
-            </a:gs>
-          </a:gsLst>
-          <a:lin ang="5400000" scaled="0"/>
-        </a:gradFill>
-        <a:ln>
-          <a:noFill/>
-        </a:ln>
-        <a:effectLst>
-          <a:outerShdw blurRad="50800" dist="38100" dir="5400000" rotWithShape="0">
-            <a:srgbClr val="000000">
-              <a:alpha val="60000"/>
-            </a:srgbClr>
-          </a:outerShdw>
-        </a:effectLst>
-      </dsp:spPr>
-      <dsp:style>
-        <a:lnRef idx="0">
-          <a:scrgbClr r="0" g="0" b="0"/>
-        </a:lnRef>
-        <a:fillRef idx="3">
-          <a:scrgbClr r="0" g="0" b="0"/>
-        </a:fillRef>
-        <a:effectRef idx="3">
-          <a:scrgbClr r="0" g="0" b="0"/>
-        </a:effectRef>
-        <a:fontRef idx="minor">
-          <a:schemeClr val="lt1"/>
-        </a:fontRef>
-      </dsp:style>
-      <dsp:txBody>
-        <a:bodyPr spcFirstLastPara="0" vert="horz" wrap="square" lIns="0" tIns="0" rIns="0" bIns="0" numCol="1" spcCol="1270" anchor="ctr" anchorCtr="0">
-          <a:noAutofit/>
-        </a:bodyPr>
-        <a:lstStyle/>
-        <a:p>
-          <a:pPr marL="0" lvl="0" indent="0" algn="ctr" defTabSz="977900">
-            <a:lnSpc>
-              <a:spcPct val="90000"/>
-            </a:lnSpc>
-            <a:spcBef>
-              <a:spcPct val="0"/>
-            </a:spcBef>
-            <a:spcAft>
-              <a:spcPct val="35000"/>
-            </a:spcAft>
-            <a:buNone/>
-          </a:pPr>
-          <a:endParaRPr lang="id-ID" sz="2200" kern="1200"/>
-        </a:p>
-      </dsp:txBody>
-      <dsp:txXfrm>
-        <a:off x="5345112" y="205593"/>
-        <a:ext cx="316861" cy="317716"/>
-      </dsp:txXfrm>
-    </dsp:sp>
-    <dsp:sp modelId="{BE695BEE-B25A-4685-AD98-1B41138250C4}">
-      <dsp:nvSpPr>
-        <dsp:cNvPr id="0" name=""/>
-        <dsp:cNvSpPr/>
-      </dsp:nvSpPr>
-      <dsp:spPr>
-        <a:xfrm>
-          <a:off x="5985668" y="0"/>
-          <a:ext cx="2135187" cy="728904"/>
-        </a:xfrm>
-        <a:prstGeom prst="roundRect">
-          <a:avLst>
-            <a:gd name="adj" fmla="val 10000"/>
-          </a:avLst>
-        </a:prstGeom>
-        <a:gradFill rotWithShape="0">
-          <a:gsLst>
-            <a:gs pos="0">
-              <a:schemeClr val="accent1">
-                <a:hueOff val="0"/>
-                <a:satOff val="0"/>
-                <a:lumOff val="0"/>
-                <a:alphaOff val="0"/>
-                <a:tint val="96000"/>
-                <a:lumMod val="104000"/>
-              </a:schemeClr>
-            </a:gs>
-            <a:gs pos="100000">
-              <a:schemeClr val="accent1">
-                <a:hueOff val="0"/>
-                <a:satOff val="0"/>
-                <a:lumOff val="0"/>
-                <a:alphaOff val="0"/>
-                <a:shade val="98000"/>
-                <a:lumMod val="94000"/>
-              </a:schemeClr>
-            </a:gs>
-          </a:gsLst>
-          <a:lin ang="5400000" scaled="0"/>
-        </a:gradFill>
-        <a:ln>
-          <a:noFill/>
-        </a:ln>
-        <a:effectLst>
-          <a:outerShdw blurRad="50800" dist="38100" dir="5400000" rotWithShape="0">
-            <a:srgbClr val="000000">
-              <a:alpha val="60000"/>
-            </a:srgbClr>
-          </a:outerShdw>
-        </a:effectLst>
-      </dsp:spPr>
-      <dsp:style>
-        <a:lnRef idx="0">
-          <a:scrgbClr r="0" g="0" b="0"/>
-        </a:lnRef>
-        <a:fillRef idx="3">
-          <a:scrgbClr r="0" g="0" b="0"/>
-        </a:fillRef>
-        <a:effectRef idx="3">
-          <a:scrgbClr r="0" g="0" b="0"/>
-        </a:effectRef>
-        <a:fontRef idx="minor">
-          <a:schemeClr val="lt1"/>
-        </a:fontRef>
-      </dsp:style>
-      <dsp:txBody>
-        <a:bodyPr spcFirstLastPara="0" vert="horz" wrap="square" lIns="118110" tIns="118110" rIns="118110" bIns="118110" numCol="1" spcCol="1270" anchor="ctr" anchorCtr="0">
-          <a:noAutofit/>
-        </a:bodyPr>
-        <a:lstStyle/>
-        <a:p>
-          <a:pPr marL="0" lvl="0" indent="0" algn="ctr" defTabSz="1377950">
-            <a:lnSpc>
-              <a:spcPct val="90000"/>
-            </a:lnSpc>
-            <a:spcBef>
-              <a:spcPct val="0"/>
-            </a:spcBef>
-            <a:spcAft>
-              <a:spcPct val="35000"/>
-            </a:spcAft>
-            <a:buNone/>
-          </a:pPr>
-          <a:r>
-            <a:rPr lang="id-ID" sz="3100" kern="1200" dirty="0"/>
-            <a:t>Customer</a:t>
-          </a:r>
-        </a:p>
-      </dsp:txBody>
-      <dsp:txXfrm>
-        <a:off x="6007017" y="21349"/>
-        <a:ext cx="2092489" cy="686206"/>
-      </dsp:txXfrm>
-    </dsp:sp>
-  </dsp:spTree>
-</dsp:drawing>
-</file>
-
-<file path=ppt/diagrams/drawing2.xml><?xml version="1.0" encoding="utf-8"?>
 <dsp:drawing xmlns:dgm="http://schemas.openxmlformats.org/drawingml/2006/diagram" xmlns:dsp="http://schemas.microsoft.com/office/drawing/2008/diagram" xmlns:a="http://schemas.openxmlformats.org/drawingml/2006/main">
   <dsp:spTree>
     <dsp:nvGrpSpPr>
@@ -4249,152 +2825,6 @@
 </file>
 
 <file path=ppt/diagrams/layout1.xml><?xml version="1.0" encoding="utf-8"?>
-<dgm:layoutDef xmlns:dgm="http://schemas.openxmlformats.org/drawingml/2006/diagram" xmlns:a="http://schemas.openxmlformats.org/drawingml/2006/main" uniqueId="urn:microsoft.com/office/officeart/2005/8/layout/process1">
-  <dgm:title val=""/>
-  <dgm:desc val=""/>
-  <dgm:catLst>
-    <dgm:cat type="process" pri="1000"/>
-    <dgm:cat type="convert" pri="15000"/>
-  </dgm:catLst>
-  <dgm:sampData useDef="1">
-    <dgm:dataModel>
-      <dgm:ptLst/>
-      <dgm:bg/>
-      <dgm:whole/>
-    </dgm:dataModel>
-  </dgm:sampData>
-  <dgm:styleData>
-    <dgm:dataModel>
-      <dgm:ptLst>
-        <dgm:pt modelId="0" type="doc"/>
-        <dgm:pt modelId="1"/>
-        <dgm:pt modelId="2"/>
-      </dgm:ptLst>
-      <dgm:cxnLst>
-        <dgm:cxn modelId="3" srcId="0" destId="1" srcOrd="0" destOrd="0"/>
-        <dgm:cxn modelId="4" srcId="0" destId="2" srcOrd="1" destOrd="0"/>
-      </dgm:cxnLst>
-      <dgm:bg/>
-      <dgm:whole/>
-    </dgm:dataModel>
-  </dgm:styleData>
-  <dgm:clrData>
-    <dgm:dataModel>
-      <dgm:ptLst>
-        <dgm:pt modelId="0" type="doc"/>
-        <dgm:pt modelId="1"/>
-        <dgm:pt modelId="2"/>
-        <dgm:pt modelId="3"/>
-        <dgm:pt modelId="4"/>
-      </dgm:ptLst>
-      <dgm:cxnLst>
-        <dgm:cxn modelId="5" srcId="0" destId="1" srcOrd="0" destOrd="0"/>
-        <dgm:cxn modelId="6" srcId="0" destId="2" srcOrd="1" destOrd="0"/>
-        <dgm:cxn modelId="7" srcId="0" destId="3" srcOrd="2" destOrd="0"/>
-        <dgm:cxn modelId="8" srcId="0" destId="4" srcOrd="3" destOrd="0"/>
-      </dgm:cxnLst>
-      <dgm:bg/>
-      <dgm:whole/>
-    </dgm:dataModel>
-  </dgm:clrData>
-  <dgm:layoutNode name="Name0">
-    <dgm:varLst>
-      <dgm:dir/>
-      <dgm:resizeHandles val="exact"/>
-    </dgm:varLst>
-    <dgm:choose name="Name1">
-      <dgm:if name="Name2" func="var" arg="dir" op="equ" val="norm">
-        <dgm:alg type="lin"/>
-      </dgm:if>
-      <dgm:else name="Name3">
-        <dgm:alg type="lin">
-          <dgm:param type="linDir" val="fromR"/>
-        </dgm:alg>
-      </dgm:else>
-    </dgm:choose>
-    <dgm:shape xmlns:r="http://schemas.openxmlformats.org/officeDocument/2006/relationships" r:blip="">
-      <dgm:adjLst/>
-    </dgm:shape>
-    <dgm:presOf/>
-    <dgm:constrLst>
-      <dgm:constr type="w" for="ch" ptType="node" refType="w"/>
-      <dgm:constr type="h" for="ch" ptType="node" op="equ"/>
-      <dgm:constr type="primFontSz" for="ch" ptType="node" op="equ" val="65"/>
-      <dgm:constr type="w" for="ch" ptType="sibTrans" refType="w" refFor="ch" refPtType="node" op="equ" fact="0.4"/>
-      <dgm:constr type="h" for="ch" ptType="sibTrans" op="equ"/>
-      <dgm:constr type="primFontSz" for="des" forName="connectorText" op="equ" val="55"/>
-      <dgm:constr type="primFontSz" for="des" forName="connectorText" refType="primFontSz" refFor="ch" refPtType="node" op="lte" fact="0.8"/>
-    </dgm:constrLst>
-    <dgm:ruleLst/>
-    <dgm:forEach name="nodesForEach" axis="ch" ptType="node">
-      <dgm:layoutNode name="node">
-        <dgm:varLst>
-          <dgm:bulletEnabled val="1"/>
-        </dgm:varLst>
-        <dgm:alg type="tx"/>
-        <dgm:shape xmlns:r="http://schemas.openxmlformats.org/officeDocument/2006/relationships" type="roundRect" r:blip="">
-          <dgm:adjLst>
-            <dgm:adj idx="1" val="0.1"/>
-          </dgm:adjLst>
-        </dgm:shape>
-        <dgm:presOf axis="desOrSelf" ptType="node"/>
-        <dgm:constrLst>
-          <dgm:constr type="h" refType="w" fact="0.6"/>
-          <dgm:constr type="tMarg" refType="primFontSz" fact="0.3"/>
-          <dgm:constr type="bMarg" refType="primFontSz" fact="0.3"/>
-          <dgm:constr type="lMarg" refType="primFontSz" fact="0.3"/>
-          <dgm:constr type="rMarg" refType="primFontSz" fact="0.3"/>
-        </dgm:constrLst>
-        <dgm:ruleLst>
-          <dgm:rule type="primFontSz" val="18" fact="NaN" max="NaN"/>
-          <dgm:rule type="h" val="NaN" fact="1.5" max="NaN"/>
-          <dgm:rule type="primFontSz" val="5" fact="NaN" max="NaN"/>
-          <dgm:rule type="h" val="INF" fact="NaN" max="NaN"/>
-        </dgm:ruleLst>
-      </dgm:layoutNode>
-      <dgm:forEach name="sibTransForEach" axis="followSib" ptType="sibTrans" cnt="1">
-        <dgm:layoutNode name="sibTrans">
-          <dgm:alg type="conn">
-            <dgm:param type="begPts" val="auto"/>
-            <dgm:param type="endPts" val="auto"/>
-          </dgm:alg>
-          <dgm:shape xmlns:r="http://schemas.openxmlformats.org/officeDocument/2006/relationships" type="conn" r:blip="">
-            <dgm:adjLst/>
-          </dgm:shape>
-          <dgm:presOf axis="self"/>
-          <dgm:constrLst>
-            <dgm:constr type="h" refType="w" fact="0.62"/>
-            <dgm:constr type="connDist"/>
-            <dgm:constr type="begPad" refType="connDist" fact="0.25"/>
-            <dgm:constr type="endPad" refType="connDist" fact="0.22"/>
-          </dgm:constrLst>
-          <dgm:ruleLst/>
-          <dgm:layoutNode name="connectorText">
-            <dgm:alg type="tx">
-              <dgm:param type="autoTxRot" val="grav"/>
-            </dgm:alg>
-            <dgm:shape xmlns:r="http://schemas.openxmlformats.org/officeDocument/2006/relationships" type="conn" r:blip="" hideGeom="1">
-              <dgm:adjLst/>
-            </dgm:shape>
-            <dgm:presOf axis="self"/>
-            <dgm:constrLst>
-              <dgm:constr type="lMarg"/>
-              <dgm:constr type="rMarg"/>
-              <dgm:constr type="tMarg"/>
-              <dgm:constr type="bMarg"/>
-            </dgm:constrLst>
-            <dgm:ruleLst>
-              <dgm:rule type="primFontSz" val="5" fact="NaN" max="NaN"/>
-            </dgm:ruleLst>
-          </dgm:layoutNode>
-        </dgm:layoutNode>
-      </dgm:forEach>
-    </dgm:forEach>
-  </dgm:layoutNode>
-</dgm:layoutDef>
-</file>
-
-<file path=ppt/diagrams/layout2.xml><?xml version="1.0" encoding="utf-8"?>
 <dgm:layoutDef xmlns:dgm="http://schemas.openxmlformats.org/drawingml/2006/diagram" xmlns:a="http://schemas.openxmlformats.org/drawingml/2006/main" uniqueId="urn:microsoft.com/office/officeart/2005/8/layout/pictureOrgChart+Icon">
   <dgm:title val="Picture Organization Chart"/>
   <dgm:desc val="Use to show hierarchical information or reporting relationships in an organization, with corresponding pictures. The assistant shape and the Org Chart hanging layouts are available with this layout."/>
@@ -5628,1040 +4058,6 @@
 </file>
 
 <file path=ppt/diagrams/quickStyle1.xml><?xml version="1.0" encoding="utf-8"?>
-<dgm:styleDef xmlns:dgm="http://schemas.openxmlformats.org/drawingml/2006/diagram" xmlns:a="http://schemas.openxmlformats.org/drawingml/2006/main" uniqueId="urn:microsoft.com/office/officeart/2005/8/quickstyle/simple5">
-  <dgm:title val=""/>
-  <dgm:desc val=""/>
-  <dgm:catLst>
-    <dgm:cat type="simple" pri="10500"/>
-  </dgm:catLst>
-  <dgm:scene3d>
-    <a:camera prst="orthographicFront"/>
-    <a:lightRig rig="threePt" dir="t"/>
-  </dgm:scene3d>
-  <dgm:styleLbl name="node0">
-    <dgm:scene3d>
-      <a:camera prst="orthographicFront"/>
-      <a:lightRig rig="threePt" dir="t"/>
-    </dgm:scene3d>
-    <dgm:sp3d/>
-    <dgm:txPr/>
-    <dgm:style>
-      <a:lnRef idx="0">
-        <a:scrgbClr r="0" g="0" b="0"/>
-      </a:lnRef>
-      <a:fillRef idx="3">
-        <a:scrgbClr r="0" g="0" b="0"/>
-      </a:fillRef>
-      <a:effectRef idx="3">
-        <a:scrgbClr r="0" g="0" b="0"/>
-      </a:effectRef>
-      <a:fontRef idx="minor">
-        <a:schemeClr val="lt1"/>
-      </a:fontRef>
-    </dgm:style>
-  </dgm:styleLbl>
-  <dgm:styleLbl name="lnNode1">
-    <dgm:scene3d>
-      <a:camera prst="orthographicFront"/>
-      <a:lightRig rig="threePt" dir="t"/>
-    </dgm:scene3d>
-    <dgm:sp3d/>
-    <dgm:txPr/>
-    <dgm:style>
-      <a:lnRef idx="0">
-        <a:scrgbClr r="0" g="0" b="0"/>
-      </a:lnRef>
-      <a:fillRef idx="3">
-        <a:scrgbClr r="0" g="0" b="0"/>
-      </a:fillRef>
-      <a:effectRef idx="3">
-        <a:scrgbClr r="0" g="0" b="0"/>
-      </a:effectRef>
-      <a:fontRef idx="minor">
-        <a:schemeClr val="lt1"/>
-      </a:fontRef>
-    </dgm:style>
-  </dgm:styleLbl>
-  <dgm:styleLbl name="vennNode1">
-    <dgm:scene3d>
-      <a:camera prst="orthographicFront"/>
-      <a:lightRig rig="threePt" dir="t"/>
-    </dgm:scene3d>
-    <dgm:sp3d/>
-    <dgm:txPr/>
-    <dgm:style>
-      <a:lnRef idx="0">
-        <a:scrgbClr r="0" g="0" b="0"/>
-      </a:lnRef>
-      <a:fillRef idx="3">
-        <a:scrgbClr r="0" g="0" b="0"/>
-      </a:fillRef>
-      <a:effectRef idx="3">
-        <a:scrgbClr r="0" g="0" b="0"/>
-      </a:effectRef>
-      <a:fontRef idx="minor">
-        <a:schemeClr val="tx1"/>
-      </a:fontRef>
-    </dgm:style>
-  </dgm:styleLbl>
-  <dgm:styleLbl name="alignNode1">
-    <dgm:scene3d>
-      <a:camera prst="orthographicFront"/>
-      <a:lightRig rig="threePt" dir="t"/>
-    </dgm:scene3d>
-    <dgm:sp3d/>
-    <dgm:txPr/>
-    <dgm:style>
-      <a:lnRef idx="1">
-        <a:scrgbClr r="0" g="0" b="0"/>
-      </a:lnRef>
-      <a:fillRef idx="3">
-        <a:scrgbClr r="0" g="0" b="0"/>
-      </a:fillRef>
-      <a:effectRef idx="3">
-        <a:scrgbClr r="0" g="0" b="0"/>
-      </a:effectRef>
-      <a:fontRef idx="minor">
-        <a:schemeClr val="lt1"/>
-      </a:fontRef>
-    </dgm:style>
-  </dgm:styleLbl>
-  <dgm:styleLbl name="node1">
-    <dgm:scene3d>
-      <a:camera prst="orthographicFront"/>
-      <a:lightRig rig="threePt" dir="t"/>
-    </dgm:scene3d>
-    <dgm:sp3d/>
-    <dgm:txPr/>
-    <dgm:style>
-      <a:lnRef idx="0">
-        <a:scrgbClr r="0" g="0" b="0"/>
-      </a:lnRef>
-      <a:fillRef idx="3">
-        <a:scrgbClr r="0" g="0" b="0"/>
-      </a:fillRef>
-      <a:effectRef idx="3">
-        <a:scrgbClr r="0" g="0" b="0"/>
-      </a:effectRef>
-      <a:fontRef idx="minor">
-        <a:schemeClr val="lt1"/>
-      </a:fontRef>
-    </dgm:style>
-  </dgm:styleLbl>
-  <dgm:styleLbl name="node2">
-    <dgm:scene3d>
-      <a:camera prst="orthographicFront"/>
-      <a:lightRig rig="threePt" dir="t"/>
-    </dgm:scene3d>
-    <dgm:sp3d/>
-    <dgm:txPr/>
-    <dgm:style>
-      <a:lnRef idx="0">
-        <a:scrgbClr r="0" g="0" b="0"/>
-      </a:lnRef>
-      <a:fillRef idx="3">
-        <a:scrgbClr r="0" g="0" b="0"/>
-      </a:fillRef>
-      <a:effectRef idx="3">
-        <a:scrgbClr r="0" g="0" b="0"/>
-      </a:effectRef>
-      <a:fontRef idx="minor">
-        <a:schemeClr val="lt1"/>
-      </a:fontRef>
-    </dgm:style>
-  </dgm:styleLbl>
-  <dgm:styleLbl name="node3">
-    <dgm:scene3d>
-      <a:camera prst="orthographicFront"/>
-      <a:lightRig rig="threePt" dir="t"/>
-    </dgm:scene3d>
-    <dgm:sp3d/>
-    <dgm:txPr/>
-    <dgm:style>
-      <a:lnRef idx="0">
-        <a:scrgbClr r="0" g="0" b="0"/>
-      </a:lnRef>
-      <a:fillRef idx="3">
-        <a:scrgbClr r="0" g="0" b="0"/>
-      </a:fillRef>
-      <a:effectRef idx="3">
-        <a:scrgbClr r="0" g="0" b="0"/>
-      </a:effectRef>
-      <a:fontRef idx="minor">
-        <a:schemeClr val="lt1"/>
-      </a:fontRef>
-    </dgm:style>
-  </dgm:styleLbl>
-  <dgm:styleLbl name="node4">
-    <dgm:scene3d>
-      <a:camera prst="orthographicFront"/>
-      <a:lightRig rig="threePt" dir="t"/>
-    </dgm:scene3d>
-    <dgm:sp3d/>
-    <dgm:txPr/>
-    <dgm:style>
-      <a:lnRef idx="0">
-        <a:scrgbClr r="0" g="0" b="0"/>
-      </a:lnRef>
-      <a:fillRef idx="3">
-        <a:scrgbClr r="0" g="0" b="0"/>
-      </a:fillRef>
-      <a:effectRef idx="3">
-        <a:scrgbClr r="0" g="0" b="0"/>
-      </a:effectRef>
-      <a:fontRef idx="minor">
-        <a:schemeClr val="lt1"/>
-      </a:fontRef>
-    </dgm:style>
-  </dgm:styleLbl>
-  <dgm:styleLbl name="fgImgPlace1">
-    <dgm:scene3d>
-      <a:camera prst="orthographicFront"/>
-      <a:lightRig rig="threePt" dir="t"/>
-    </dgm:scene3d>
-    <dgm:sp3d/>
-    <dgm:txPr/>
-    <dgm:style>
-      <a:lnRef idx="0">
-        <a:scrgbClr r="0" g="0" b="0"/>
-      </a:lnRef>
-      <a:fillRef idx="1">
-        <a:scrgbClr r="0" g="0" b="0"/>
-      </a:fillRef>
-      <a:effectRef idx="3">
-        <a:scrgbClr r="0" g="0" b="0"/>
-      </a:effectRef>
-      <a:fontRef idx="minor"/>
-    </dgm:style>
-  </dgm:styleLbl>
-  <dgm:styleLbl name="alignImgPlace1">
-    <dgm:scene3d>
-      <a:camera prst="orthographicFront"/>
-      <a:lightRig rig="threePt" dir="t"/>
-    </dgm:scene3d>
-    <dgm:sp3d/>
-    <dgm:txPr/>
-    <dgm:style>
-      <a:lnRef idx="0">
-        <a:scrgbClr r="0" g="0" b="0"/>
-      </a:lnRef>
-      <a:fillRef idx="1">
-        <a:scrgbClr r="0" g="0" b="0"/>
-      </a:fillRef>
-      <a:effectRef idx="3">
-        <a:scrgbClr r="0" g="0" b="0"/>
-      </a:effectRef>
-      <a:fontRef idx="minor"/>
-    </dgm:style>
-  </dgm:styleLbl>
-  <dgm:styleLbl name="bgImgPlace1">
-    <dgm:scene3d>
-      <a:camera prst="orthographicFront"/>
-      <a:lightRig rig="threePt" dir="t"/>
-    </dgm:scene3d>
-    <dgm:sp3d/>
-    <dgm:txPr/>
-    <dgm:style>
-      <a:lnRef idx="0">
-        <a:scrgbClr r="0" g="0" b="0"/>
-      </a:lnRef>
-      <a:fillRef idx="1">
-        <a:scrgbClr r="0" g="0" b="0"/>
-      </a:fillRef>
-      <a:effectRef idx="3">
-        <a:scrgbClr r="0" g="0" b="0"/>
-      </a:effectRef>
-      <a:fontRef idx="minor"/>
-    </dgm:style>
-  </dgm:styleLbl>
-  <dgm:styleLbl name="sibTrans2D1">
-    <dgm:scene3d>
-      <a:camera prst="orthographicFront"/>
-      <a:lightRig rig="threePt" dir="t"/>
-    </dgm:scene3d>
-    <dgm:sp3d/>
-    <dgm:txPr/>
-    <dgm:style>
-      <a:lnRef idx="0">
-        <a:scrgbClr r="0" g="0" b="0"/>
-      </a:lnRef>
-      <a:fillRef idx="3">
-        <a:scrgbClr r="0" g="0" b="0"/>
-      </a:fillRef>
-      <a:effectRef idx="3">
-        <a:scrgbClr r="0" g="0" b="0"/>
-      </a:effectRef>
-      <a:fontRef idx="minor">
-        <a:schemeClr val="lt1"/>
-      </a:fontRef>
-    </dgm:style>
-  </dgm:styleLbl>
-  <dgm:styleLbl name="fgSibTrans2D1">
-    <dgm:scene3d>
-      <a:camera prst="orthographicFront"/>
-      <a:lightRig rig="threePt" dir="t"/>
-    </dgm:scene3d>
-    <dgm:sp3d/>
-    <dgm:txPr/>
-    <dgm:style>
-      <a:lnRef idx="0">
-        <a:scrgbClr r="0" g="0" b="0"/>
-      </a:lnRef>
-      <a:fillRef idx="3">
-        <a:scrgbClr r="0" g="0" b="0"/>
-      </a:fillRef>
-      <a:effectRef idx="3">
-        <a:scrgbClr r="0" g="0" b="0"/>
-      </a:effectRef>
-      <a:fontRef idx="minor">
-        <a:schemeClr val="lt1"/>
-      </a:fontRef>
-    </dgm:style>
-  </dgm:styleLbl>
-  <dgm:styleLbl name="bgSibTrans2D1">
-    <dgm:scene3d>
-      <a:camera prst="orthographicFront"/>
-      <a:lightRig rig="threePt" dir="t"/>
-    </dgm:scene3d>
-    <dgm:sp3d/>
-    <dgm:txPr/>
-    <dgm:style>
-      <a:lnRef idx="0">
-        <a:scrgbClr r="0" g="0" b="0"/>
-      </a:lnRef>
-      <a:fillRef idx="3">
-        <a:scrgbClr r="0" g="0" b="0"/>
-      </a:fillRef>
-      <a:effectRef idx="3">
-        <a:scrgbClr r="0" g="0" b="0"/>
-      </a:effectRef>
-      <a:fontRef idx="minor">
-        <a:schemeClr val="lt1"/>
-      </a:fontRef>
-    </dgm:style>
-  </dgm:styleLbl>
-  <dgm:styleLbl name="sibTrans1D1">
-    <dgm:scene3d>
-      <a:camera prst="orthographicFront"/>
-      <a:lightRig rig="threePt" dir="t"/>
-    </dgm:scene3d>
-    <dgm:sp3d/>
-    <dgm:txPr/>
-    <dgm:style>
-      <a:lnRef idx="1">
-        <a:scrgbClr r="0" g="0" b="0"/>
-      </a:lnRef>
-      <a:fillRef idx="0">
-        <a:scrgbClr r="0" g="0" b="0"/>
-      </a:fillRef>
-      <a:effectRef idx="0">
-        <a:scrgbClr r="0" g="0" b="0"/>
-      </a:effectRef>
-      <a:fontRef idx="minor"/>
-    </dgm:style>
-  </dgm:styleLbl>
-  <dgm:styleLbl name="callout">
-    <dgm:scene3d>
-      <a:camera prst="orthographicFront"/>
-      <a:lightRig rig="threePt" dir="t"/>
-    </dgm:scene3d>
-    <dgm:sp3d/>
-    <dgm:txPr/>
-    <dgm:style>
-      <a:lnRef idx="1">
-        <a:scrgbClr r="0" g="0" b="0"/>
-      </a:lnRef>
-      <a:fillRef idx="0">
-        <a:scrgbClr r="0" g="0" b="0"/>
-      </a:fillRef>
-      <a:effectRef idx="1">
-        <a:scrgbClr r="0" g="0" b="0"/>
-      </a:effectRef>
-      <a:fontRef idx="minor"/>
-    </dgm:style>
-  </dgm:styleLbl>
-  <dgm:styleLbl name="asst0">
-    <dgm:scene3d>
-      <a:camera prst="orthographicFront"/>
-      <a:lightRig rig="threePt" dir="t"/>
-    </dgm:scene3d>
-    <dgm:sp3d/>
-    <dgm:txPr/>
-    <dgm:style>
-      <a:lnRef idx="0">
-        <a:scrgbClr r="0" g="0" b="0"/>
-      </a:lnRef>
-      <a:fillRef idx="3">
-        <a:scrgbClr r="0" g="0" b="0"/>
-      </a:fillRef>
-      <a:effectRef idx="3">
-        <a:scrgbClr r="0" g="0" b="0"/>
-      </a:effectRef>
-      <a:fontRef idx="minor">
-        <a:schemeClr val="lt1"/>
-      </a:fontRef>
-    </dgm:style>
-  </dgm:styleLbl>
-  <dgm:styleLbl name="asst1">
-    <dgm:scene3d>
-      <a:camera prst="orthographicFront"/>
-      <a:lightRig rig="threePt" dir="t"/>
-    </dgm:scene3d>
-    <dgm:sp3d/>
-    <dgm:txPr/>
-    <dgm:style>
-      <a:lnRef idx="0">
-        <a:scrgbClr r="0" g="0" b="0"/>
-      </a:lnRef>
-      <a:fillRef idx="3">
-        <a:scrgbClr r="0" g="0" b="0"/>
-      </a:fillRef>
-      <a:effectRef idx="3">
-        <a:scrgbClr r="0" g="0" b="0"/>
-      </a:effectRef>
-      <a:fontRef idx="minor">
-        <a:schemeClr val="lt1"/>
-      </a:fontRef>
-    </dgm:style>
-  </dgm:styleLbl>
-  <dgm:styleLbl name="asst2">
-    <dgm:scene3d>
-      <a:camera prst="orthographicFront"/>
-      <a:lightRig rig="threePt" dir="t"/>
-    </dgm:scene3d>
-    <dgm:sp3d/>
-    <dgm:txPr/>
-    <dgm:style>
-      <a:lnRef idx="0">
-        <a:scrgbClr r="0" g="0" b="0"/>
-      </a:lnRef>
-      <a:fillRef idx="3">
-        <a:scrgbClr r="0" g="0" b="0"/>
-      </a:fillRef>
-      <a:effectRef idx="3">
-        <a:scrgbClr r="0" g="0" b="0"/>
-      </a:effectRef>
-      <a:fontRef idx="minor">
-        <a:schemeClr val="lt1"/>
-      </a:fontRef>
-    </dgm:style>
-  </dgm:styleLbl>
-  <dgm:styleLbl name="asst3">
-    <dgm:scene3d>
-      <a:camera prst="orthographicFront"/>
-      <a:lightRig rig="threePt" dir="t"/>
-    </dgm:scene3d>
-    <dgm:sp3d/>
-    <dgm:txPr/>
-    <dgm:style>
-      <a:lnRef idx="0">
-        <a:scrgbClr r="0" g="0" b="0"/>
-      </a:lnRef>
-      <a:fillRef idx="3">
-        <a:scrgbClr r="0" g="0" b="0"/>
-      </a:fillRef>
-      <a:effectRef idx="3">
-        <a:scrgbClr r="0" g="0" b="0"/>
-      </a:effectRef>
-      <a:fontRef idx="minor">
-        <a:schemeClr val="lt1"/>
-      </a:fontRef>
-    </dgm:style>
-  </dgm:styleLbl>
-  <dgm:styleLbl name="asst4">
-    <dgm:scene3d>
-      <a:camera prst="orthographicFront"/>
-      <a:lightRig rig="threePt" dir="t"/>
-    </dgm:scene3d>
-    <dgm:sp3d/>
-    <dgm:txPr/>
-    <dgm:style>
-      <a:lnRef idx="0">
-        <a:scrgbClr r="0" g="0" b="0"/>
-      </a:lnRef>
-      <a:fillRef idx="3">
-        <a:scrgbClr r="0" g="0" b="0"/>
-      </a:fillRef>
-      <a:effectRef idx="3">
-        <a:scrgbClr r="0" g="0" b="0"/>
-      </a:effectRef>
-      <a:fontRef idx="minor">
-        <a:schemeClr val="lt1"/>
-      </a:fontRef>
-    </dgm:style>
-  </dgm:styleLbl>
-  <dgm:styleLbl name="parChTrans2D1">
-    <dgm:scene3d>
-      <a:camera prst="orthographicFront"/>
-      <a:lightRig rig="threePt" dir="t"/>
-    </dgm:scene3d>
-    <dgm:sp3d/>
-    <dgm:txPr/>
-    <dgm:style>
-      <a:lnRef idx="0">
-        <a:scrgbClr r="0" g="0" b="0"/>
-      </a:lnRef>
-      <a:fillRef idx="3">
-        <a:scrgbClr r="0" g="0" b="0"/>
-      </a:fillRef>
-      <a:effectRef idx="3">
-        <a:scrgbClr r="0" g="0" b="0"/>
-      </a:effectRef>
-      <a:fontRef idx="minor">
-        <a:schemeClr val="lt1"/>
-      </a:fontRef>
-    </dgm:style>
-  </dgm:styleLbl>
-  <dgm:styleLbl name="parChTrans2D2">
-    <dgm:scene3d>
-      <a:camera prst="orthographicFront"/>
-      <a:lightRig rig="threePt" dir="t"/>
-    </dgm:scene3d>
-    <dgm:sp3d/>
-    <dgm:txPr/>
-    <dgm:style>
-      <a:lnRef idx="0">
-        <a:scrgbClr r="0" g="0" b="0"/>
-      </a:lnRef>
-      <a:fillRef idx="3">
-        <a:scrgbClr r="0" g="0" b="0"/>
-      </a:fillRef>
-      <a:effectRef idx="3">
-        <a:scrgbClr r="0" g="0" b="0"/>
-      </a:effectRef>
-      <a:fontRef idx="minor">
-        <a:schemeClr val="lt1"/>
-      </a:fontRef>
-    </dgm:style>
-  </dgm:styleLbl>
-  <dgm:styleLbl name="parChTrans2D3">
-    <dgm:scene3d>
-      <a:camera prst="orthographicFront"/>
-      <a:lightRig rig="threePt" dir="t"/>
-    </dgm:scene3d>
-    <dgm:sp3d/>
-    <dgm:txPr/>
-    <dgm:style>
-      <a:lnRef idx="0">
-        <a:scrgbClr r="0" g="0" b="0"/>
-      </a:lnRef>
-      <a:fillRef idx="3">
-        <a:scrgbClr r="0" g="0" b="0"/>
-      </a:fillRef>
-      <a:effectRef idx="3">
-        <a:scrgbClr r="0" g="0" b="0"/>
-      </a:effectRef>
-      <a:fontRef idx="minor">
-        <a:schemeClr val="lt1"/>
-      </a:fontRef>
-    </dgm:style>
-  </dgm:styleLbl>
-  <dgm:styleLbl name="parChTrans2D4">
-    <dgm:scene3d>
-      <a:camera prst="orthographicFront"/>
-      <a:lightRig rig="threePt" dir="t"/>
-    </dgm:scene3d>
-    <dgm:sp3d/>
-    <dgm:txPr/>
-    <dgm:style>
-      <a:lnRef idx="0">
-        <a:scrgbClr r="0" g="0" b="0"/>
-      </a:lnRef>
-      <a:fillRef idx="3">
-        <a:scrgbClr r="0" g="0" b="0"/>
-      </a:fillRef>
-      <a:effectRef idx="3">
-        <a:scrgbClr r="0" g="0" b="0"/>
-      </a:effectRef>
-      <a:fontRef idx="minor">
-        <a:schemeClr val="lt1"/>
-      </a:fontRef>
-    </dgm:style>
-  </dgm:styleLbl>
-  <dgm:styleLbl name="parChTrans1D1">
-    <dgm:scene3d>
-      <a:camera prst="orthographicFront"/>
-      <a:lightRig rig="threePt" dir="t"/>
-    </dgm:scene3d>
-    <dgm:sp3d/>
-    <dgm:txPr/>
-    <dgm:style>
-      <a:lnRef idx="2">
-        <a:scrgbClr r="0" g="0" b="0"/>
-      </a:lnRef>
-      <a:fillRef idx="0">
-        <a:scrgbClr r="0" g="0" b="0"/>
-      </a:fillRef>
-      <a:effectRef idx="0">
-        <a:scrgbClr r="0" g="0" b="0"/>
-      </a:effectRef>
-      <a:fontRef idx="minor"/>
-    </dgm:style>
-  </dgm:styleLbl>
-  <dgm:styleLbl name="parChTrans1D2">
-    <dgm:scene3d>
-      <a:camera prst="orthographicFront"/>
-      <a:lightRig rig="threePt" dir="t"/>
-    </dgm:scene3d>
-    <dgm:sp3d/>
-    <dgm:txPr/>
-    <dgm:style>
-      <a:lnRef idx="2">
-        <a:scrgbClr r="0" g="0" b="0"/>
-      </a:lnRef>
-      <a:fillRef idx="0">
-        <a:scrgbClr r="0" g="0" b="0"/>
-      </a:fillRef>
-      <a:effectRef idx="0">
-        <a:scrgbClr r="0" g="0" b="0"/>
-      </a:effectRef>
-      <a:fontRef idx="minor"/>
-    </dgm:style>
-  </dgm:styleLbl>
-  <dgm:styleLbl name="parChTrans1D3">
-    <dgm:scene3d>
-      <a:camera prst="orthographicFront"/>
-      <a:lightRig rig="threePt" dir="t"/>
-    </dgm:scene3d>
-    <dgm:sp3d/>
-    <dgm:txPr/>
-    <dgm:style>
-      <a:lnRef idx="2">
-        <a:scrgbClr r="0" g="0" b="0"/>
-      </a:lnRef>
-      <a:fillRef idx="0">
-        <a:scrgbClr r="0" g="0" b="0"/>
-      </a:fillRef>
-      <a:effectRef idx="0">
-        <a:scrgbClr r="0" g="0" b="0"/>
-      </a:effectRef>
-      <a:fontRef idx="minor"/>
-    </dgm:style>
-  </dgm:styleLbl>
-  <dgm:styleLbl name="parChTrans1D4">
-    <dgm:scene3d>
-      <a:camera prst="orthographicFront"/>
-      <a:lightRig rig="threePt" dir="t"/>
-    </dgm:scene3d>
-    <dgm:sp3d/>
-    <dgm:txPr/>
-    <dgm:style>
-      <a:lnRef idx="2">
-        <a:scrgbClr r="0" g="0" b="0"/>
-      </a:lnRef>
-      <a:fillRef idx="0">
-        <a:scrgbClr r="0" g="0" b="0"/>
-      </a:fillRef>
-      <a:effectRef idx="0">
-        <a:scrgbClr r="0" g="0" b="0"/>
-      </a:effectRef>
-      <a:fontRef idx="minor"/>
-    </dgm:style>
-  </dgm:styleLbl>
-  <dgm:styleLbl name="fgAcc1">
-    <dgm:scene3d>
-      <a:camera prst="orthographicFront"/>
-      <a:lightRig rig="threePt" dir="t"/>
-    </dgm:scene3d>
-    <dgm:sp3d/>
-    <dgm:txPr/>
-    <dgm:style>
-      <a:lnRef idx="1">
-        <a:scrgbClr r="0" g="0" b="0"/>
-      </a:lnRef>
-      <a:fillRef idx="1">
-        <a:scrgbClr r="0" g="0" b="0"/>
-      </a:fillRef>
-      <a:effectRef idx="2">
-        <a:scrgbClr r="0" g="0" b="0"/>
-      </a:effectRef>
-      <a:fontRef idx="minor"/>
-    </dgm:style>
-  </dgm:styleLbl>
-  <dgm:styleLbl name="conFgAcc1">
-    <dgm:scene3d>
-      <a:camera prst="orthographicFront"/>
-      <a:lightRig rig="threePt" dir="t"/>
-    </dgm:scene3d>
-    <dgm:sp3d/>
-    <dgm:txPr/>
-    <dgm:style>
-      <a:lnRef idx="1">
-        <a:scrgbClr r="0" g="0" b="0"/>
-      </a:lnRef>
-      <a:fillRef idx="1">
-        <a:scrgbClr r="0" g="0" b="0"/>
-      </a:fillRef>
-      <a:effectRef idx="2">
-        <a:scrgbClr r="0" g="0" b="0"/>
-      </a:effectRef>
-      <a:fontRef idx="minor"/>
-    </dgm:style>
-  </dgm:styleLbl>
-  <dgm:styleLbl name="alignAcc1">
-    <dgm:scene3d>
-      <a:camera prst="orthographicFront"/>
-      <a:lightRig rig="threePt" dir="t"/>
-    </dgm:scene3d>
-    <dgm:sp3d/>
-    <dgm:txPr/>
-    <dgm:style>
-      <a:lnRef idx="1">
-        <a:scrgbClr r="0" g="0" b="0"/>
-      </a:lnRef>
-      <a:fillRef idx="1">
-        <a:scrgbClr r="0" g="0" b="0"/>
-      </a:fillRef>
-      <a:effectRef idx="2">
-        <a:scrgbClr r="0" g="0" b="0"/>
-      </a:effectRef>
-      <a:fontRef idx="minor"/>
-    </dgm:style>
-  </dgm:styleLbl>
-  <dgm:styleLbl name="trAlignAcc1">
-    <dgm:scene3d>
-      <a:camera prst="orthographicFront"/>
-      <a:lightRig rig="threePt" dir="t"/>
-    </dgm:scene3d>
-    <dgm:sp3d/>
-    <dgm:txPr/>
-    <dgm:style>
-      <a:lnRef idx="1">
-        <a:scrgbClr r="0" g="0" b="0"/>
-      </a:lnRef>
-      <a:fillRef idx="1">
-        <a:scrgbClr r="0" g="0" b="0"/>
-      </a:fillRef>
-      <a:effectRef idx="0">
-        <a:scrgbClr r="0" g="0" b="0"/>
-      </a:effectRef>
-      <a:fontRef idx="minor"/>
-    </dgm:style>
-  </dgm:styleLbl>
-  <dgm:styleLbl name="bgAcc1">
-    <dgm:scene3d>
-      <a:camera prst="orthographicFront"/>
-      <a:lightRig rig="threePt" dir="t"/>
-    </dgm:scene3d>
-    <dgm:sp3d/>
-    <dgm:txPr/>
-    <dgm:style>
-      <a:lnRef idx="1">
-        <a:scrgbClr r="0" g="0" b="0"/>
-      </a:lnRef>
-      <a:fillRef idx="1">
-        <a:scrgbClr r="0" g="0" b="0"/>
-      </a:fillRef>
-      <a:effectRef idx="2">
-        <a:scrgbClr r="0" g="0" b="0"/>
-      </a:effectRef>
-      <a:fontRef idx="minor"/>
-    </dgm:style>
-  </dgm:styleLbl>
-  <dgm:styleLbl name="solidFgAcc1">
-    <dgm:scene3d>
-      <a:camera prst="orthographicFront"/>
-      <a:lightRig rig="threePt" dir="t"/>
-    </dgm:scene3d>
-    <dgm:sp3d/>
-    <dgm:txPr/>
-    <dgm:style>
-      <a:lnRef idx="1">
-        <a:scrgbClr r="0" g="0" b="0"/>
-      </a:lnRef>
-      <a:fillRef idx="1">
-        <a:scrgbClr r="0" g="0" b="0"/>
-      </a:fillRef>
-      <a:effectRef idx="2">
-        <a:scrgbClr r="0" g="0" b="0"/>
-      </a:effectRef>
-      <a:fontRef idx="minor"/>
-    </dgm:style>
-  </dgm:styleLbl>
-  <dgm:styleLbl name="solidAlignAcc1">
-    <dgm:scene3d>
-      <a:camera prst="orthographicFront"/>
-      <a:lightRig rig="threePt" dir="t"/>
-    </dgm:scene3d>
-    <dgm:sp3d/>
-    <dgm:txPr/>
-    <dgm:style>
-      <a:lnRef idx="1">
-        <a:scrgbClr r="0" g="0" b="0"/>
-      </a:lnRef>
-      <a:fillRef idx="1">
-        <a:scrgbClr r="0" g="0" b="0"/>
-      </a:fillRef>
-      <a:effectRef idx="3">
-        <a:scrgbClr r="0" g="0" b="0"/>
-      </a:effectRef>
-      <a:fontRef idx="minor"/>
-    </dgm:style>
-  </dgm:styleLbl>
-  <dgm:styleLbl name="solidBgAcc1">
-    <dgm:scene3d>
-      <a:camera prst="orthographicFront"/>
-      <a:lightRig rig="threePt" dir="t"/>
-    </dgm:scene3d>
-    <dgm:sp3d/>
-    <dgm:txPr/>
-    <dgm:style>
-      <a:lnRef idx="1">
-        <a:scrgbClr r="0" g="0" b="0"/>
-      </a:lnRef>
-      <a:fillRef idx="1">
-        <a:scrgbClr r="0" g="0" b="0"/>
-      </a:fillRef>
-      <a:effectRef idx="3">
-        <a:scrgbClr r="0" g="0" b="0"/>
-      </a:effectRef>
-      <a:fontRef idx="minor"/>
-    </dgm:style>
-  </dgm:styleLbl>
-  <dgm:styleLbl name="fgAccFollowNode1">
-    <dgm:scene3d>
-      <a:camera prst="orthographicFront"/>
-      <a:lightRig rig="threePt" dir="t"/>
-    </dgm:scene3d>
-    <dgm:sp3d/>
-    <dgm:txPr/>
-    <dgm:style>
-      <a:lnRef idx="1">
-        <a:scrgbClr r="0" g="0" b="0"/>
-      </a:lnRef>
-      <a:fillRef idx="1">
-        <a:scrgbClr r="0" g="0" b="0"/>
-      </a:fillRef>
-      <a:effectRef idx="2">
-        <a:scrgbClr r="0" g="0" b="0"/>
-      </a:effectRef>
-      <a:fontRef idx="minor"/>
-    </dgm:style>
-  </dgm:styleLbl>
-  <dgm:styleLbl name="alignAccFollowNode1">
-    <dgm:scene3d>
-      <a:camera prst="orthographicFront"/>
-      <a:lightRig rig="threePt" dir="t"/>
-    </dgm:scene3d>
-    <dgm:sp3d/>
-    <dgm:txPr/>
-    <dgm:style>
-      <a:lnRef idx="1">
-        <a:scrgbClr r="0" g="0" b="0"/>
-      </a:lnRef>
-      <a:fillRef idx="1">
-        <a:scrgbClr r="0" g="0" b="0"/>
-      </a:fillRef>
-      <a:effectRef idx="2">
-        <a:scrgbClr r="0" g="0" b="0"/>
-      </a:effectRef>
-      <a:fontRef idx="minor"/>
-    </dgm:style>
-  </dgm:styleLbl>
-  <dgm:styleLbl name="bgAccFollowNode1">
-    <dgm:scene3d>
-      <a:camera prst="orthographicFront"/>
-      <a:lightRig rig="threePt" dir="t"/>
-    </dgm:scene3d>
-    <dgm:sp3d/>
-    <dgm:txPr/>
-    <dgm:style>
-      <a:lnRef idx="1">
-        <a:scrgbClr r="0" g="0" b="0"/>
-      </a:lnRef>
-      <a:fillRef idx="1">
-        <a:scrgbClr r="0" g="0" b="0"/>
-      </a:fillRef>
-      <a:effectRef idx="2">
-        <a:scrgbClr r="0" g="0" b="0"/>
-      </a:effectRef>
-      <a:fontRef idx="minor"/>
-    </dgm:style>
-  </dgm:styleLbl>
-  <dgm:styleLbl name="fgAcc0">
-    <dgm:scene3d>
-      <a:camera prst="orthographicFront"/>
-      <a:lightRig rig="threePt" dir="t"/>
-    </dgm:scene3d>
-    <dgm:sp3d/>
-    <dgm:txPr/>
-    <dgm:style>
-      <a:lnRef idx="1">
-        <a:scrgbClr r="0" g="0" b="0"/>
-      </a:lnRef>
-      <a:fillRef idx="1">
-        <a:scrgbClr r="0" g="0" b="0"/>
-      </a:fillRef>
-      <a:effectRef idx="2">
-        <a:scrgbClr r="0" g="0" b="0"/>
-      </a:effectRef>
-      <a:fontRef idx="minor"/>
-    </dgm:style>
-  </dgm:styleLbl>
-  <dgm:styleLbl name="fgAcc2">
-    <dgm:scene3d>
-      <a:camera prst="orthographicFront"/>
-      <a:lightRig rig="threePt" dir="t"/>
-    </dgm:scene3d>
-    <dgm:sp3d/>
-    <dgm:txPr/>
-    <dgm:style>
-      <a:lnRef idx="1">
-        <a:scrgbClr r="0" g="0" b="0"/>
-      </a:lnRef>
-      <a:fillRef idx="1">
-        <a:scrgbClr r="0" g="0" b="0"/>
-      </a:fillRef>
-      <a:effectRef idx="2">
-        <a:scrgbClr r="0" g="0" b="0"/>
-      </a:effectRef>
-      <a:fontRef idx="minor"/>
-    </dgm:style>
-  </dgm:styleLbl>
-  <dgm:styleLbl name="fgAcc3">
-    <dgm:scene3d>
-      <a:camera prst="orthographicFront"/>
-      <a:lightRig rig="threePt" dir="t"/>
-    </dgm:scene3d>
-    <dgm:sp3d/>
-    <dgm:txPr/>
-    <dgm:style>
-      <a:lnRef idx="1">
-        <a:scrgbClr r="0" g="0" b="0"/>
-      </a:lnRef>
-      <a:fillRef idx="1">
-        <a:scrgbClr r="0" g="0" b="0"/>
-      </a:fillRef>
-      <a:effectRef idx="2">
-        <a:scrgbClr r="0" g="0" b="0"/>
-      </a:effectRef>
-      <a:fontRef idx="minor"/>
-    </dgm:style>
-  </dgm:styleLbl>
-  <dgm:styleLbl name="fgAcc4">
-    <dgm:scene3d>
-      <a:camera prst="orthographicFront"/>
-      <a:lightRig rig="threePt" dir="t"/>
-    </dgm:scene3d>
-    <dgm:sp3d/>
-    <dgm:txPr/>
-    <dgm:style>
-      <a:lnRef idx="1">
-        <a:scrgbClr r="0" g="0" b="0"/>
-      </a:lnRef>
-      <a:fillRef idx="1">
-        <a:scrgbClr r="0" g="0" b="0"/>
-      </a:fillRef>
-      <a:effectRef idx="2">
-        <a:scrgbClr r="0" g="0" b="0"/>
-      </a:effectRef>
-      <a:fontRef idx="minor"/>
-    </dgm:style>
-  </dgm:styleLbl>
-  <dgm:styleLbl name="bgShp">
-    <dgm:scene3d>
-      <a:camera prst="orthographicFront"/>
-      <a:lightRig rig="threePt" dir="t"/>
-    </dgm:scene3d>
-    <dgm:sp3d/>
-    <dgm:txPr/>
-    <dgm:style>
-      <a:lnRef idx="0">
-        <a:scrgbClr r="0" g="0" b="0"/>
-      </a:lnRef>
-      <a:fillRef idx="1">
-        <a:scrgbClr r="0" g="0" b="0"/>
-      </a:fillRef>
-      <a:effectRef idx="2">
-        <a:scrgbClr r="0" g="0" b="0"/>
-      </a:effectRef>
-      <a:fontRef idx="minor"/>
-    </dgm:style>
-  </dgm:styleLbl>
-  <dgm:styleLbl name="dkBgShp">
-    <dgm:scene3d>
-      <a:camera prst="orthographicFront"/>
-      <a:lightRig rig="threePt" dir="t"/>
-    </dgm:scene3d>
-    <dgm:sp3d/>
-    <dgm:txPr/>
-    <dgm:style>
-      <a:lnRef idx="0">
-        <a:scrgbClr r="0" g="0" b="0"/>
-      </a:lnRef>
-      <a:fillRef idx="1">
-        <a:scrgbClr r="0" g="0" b="0"/>
-      </a:fillRef>
-      <a:effectRef idx="3">
-        <a:scrgbClr r="0" g="0" b="0"/>
-      </a:effectRef>
-      <a:fontRef idx="minor"/>
-    </dgm:style>
-  </dgm:styleLbl>
-  <dgm:styleLbl name="trBgShp">
-    <dgm:scene3d>
-      <a:camera prst="orthographicFront"/>
-      <a:lightRig rig="threePt" dir="t"/>
-    </dgm:scene3d>
-    <dgm:sp3d/>
-    <dgm:txPr/>
-    <dgm:style>
-      <a:lnRef idx="0">
-        <a:scrgbClr r="0" g="0" b="0"/>
-      </a:lnRef>
-      <a:fillRef idx="1">
-        <a:scrgbClr r="0" g="0" b="0"/>
-      </a:fillRef>
-      <a:effectRef idx="0">
-        <a:scrgbClr r="0" g="0" b="0"/>
-      </a:effectRef>
-      <a:fontRef idx="minor"/>
-    </dgm:style>
-  </dgm:styleLbl>
-  <dgm:styleLbl name="fgShp">
-    <dgm:scene3d>
-      <a:camera prst="orthographicFront"/>
-      <a:lightRig rig="threePt" dir="t"/>
-    </dgm:scene3d>
-    <dgm:sp3d/>
-    <dgm:txPr/>
-    <dgm:style>
-      <a:lnRef idx="0">
-        <a:scrgbClr r="0" g="0" b="0"/>
-      </a:lnRef>
-      <a:fillRef idx="3">
-        <a:scrgbClr r="0" g="0" b="0"/>
-      </a:fillRef>
-      <a:effectRef idx="3">
-        <a:scrgbClr r="0" g="0" b="0"/>
-      </a:effectRef>
-      <a:fontRef idx="minor"/>
-    </dgm:style>
-  </dgm:styleLbl>
-  <dgm:styleLbl name="revTx">
-    <dgm:scene3d>
-      <a:camera prst="orthographicFront"/>
-      <a:lightRig rig="threePt" dir="t"/>
-    </dgm:scene3d>
-    <dgm:sp3d/>
-    <dgm:txPr/>
-    <dgm:style>
-      <a:lnRef idx="0">
-        <a:scrgbClr r="0" g="0" b="0"/>
-      </a:lnRef>
-      <a:fillRef idx="0">
-        <a:scrgbClr r="0" g="0" b="0"/>
-      </a:fillRef>
-      <a:effectRef idx="0">
-        <a:scrgbClr r="0" g="0" b="0"/>
-      </a:effectRef>
-      <a:fontRef idx="minor"/>
-    </dgm:style>
-  </dgm:styleLbl>
-</dgm:styleDef>
-</file>
-
-<file path=ppt/diagrams/quickStyle2.xml><?xml version="1.0" encoding="utf-8"?>
 <dgm:styleDef xmlns:dgm="http://schemas.openxmlformats.org/drawingml/2006/diagram" xmlns:a="http://schemas.openxmlformats.org/drawingml/2006/main" uniqueId="urn:microsoft.com/office/officeart/2005/8/quickstyle/simple1">
   <dgm:title val=""/>
   <dgm:desc val=""/>
@@ -7881,9 +5277,9 @@
           <a:bodyPr/>
           <a:lstStyle/>
           <a:p>
-            <a:fld id="{BAD00000-CC03-48C5-8C41-BDDBF8D27D19}" type="datetimeFigureOut">
+            <a:fld id="{B7B1A7B3-9184-487D-8853-119DD9BF06ED}" type="datetimeFigureOut">
               <a:rPr lang="id-ID" smtClean="0"/>
-              <a:t>15/07/2026</a:t>
+              <a:t>16/07/2026</a:t>
             </a:fld>
             <a:endParaRPr lang="id-ID"/>
           </a:p>
@@ -8010,7 +5406,7 @@
           <a:bodyPr/>
           <a:lstStyle/>
           <a:p>
-            <a:fld id="{90441BF9-5382-49E7-9D87-56825830A9CE}" type="slidenum">
+            <a:fld id="{D1087BB6-99EE-4B3F-8A93-6AEFDF54077A}" type="slidenum">
               <a:rPr lang="id-ID" smtClean="0"/>
               <a:t>‹#›</a:t>
             </a:fld>
@@ -8021,25 +5417,13 @@
     </p:spTree>
     <p:extLst>
       <p:ext uri="{BB962C8B-B14F-4D97-AF65-F5344CB8AC3E}">
-        <p14:creationId xmlns:p14="http://schemas.microsoft.com/office/powerpoint/2010/main" val="831166136"/>
+        <p14:creationId xmlns:p14="http://schemas.microsoft.com/office/powerpoint/2010/main" val="2933079261"/>
       </p:ext>
     </p:extLst>
   </p:cSld>
   <p:clrMapOvr>
     <a:masterClrMapping/>
   </p:clrMapOvr>
-  <mc:AlternateContent xmlns:mc="http://schemas.openxmlformats.org/markup-compatibility/2006">
-    <mc:Choice xmlns:p159="http://schemas.microsoft.com/office/powerpoint/2015/09/main" Requires="p159">
-      <p:transition>
-        <p159:morph option="byObject"/>
-      </p:transition>
-    </mc:Choice>
-    <mc:Fallback>
-      <p:transition>
-        <p:fade/>
-      </p:transition>
-    </mc:Fallback>
-  </mc:AlternateContent>
 </p:sldLayout>
 </file>
 
@@ -8231,9 +5615,9 @@
           <a:bodyPr/>
           <a:lstStyle/>
           <a:p>
-            <a:fld id="{BAD00000-CC03-48C5-8C41-BDDBF8D27D19}" type="datetimeFigureOut">
+            <a:fld id="{B7B1A7B3-9184-487D-8853-119DD9BF06ED}" type="datetimeFigureOut">
               <a:rPr lang="id-ID" smtClean="0"/>
-              <a:t>15/07/2026</a:t>
+              <a:t>16/07/2026</a:t>
             </a:fld>
             <a:endParaRPr lang="id-ID"/>
           </a:p>
@@ -8360,7 +5744,7 @@
           <a:bodyPr/>
           <a:lstStyle/>
           <a:p>
-            <a:fld id="{90441BF9-5382-49E7-9D87-56825830A9CE}" type="slidenum">
+            <a:fld id="{D1087BB6-99EE-4B3F-8A93-6AEFDF54077A}" type="slidenum">
               <a:rPr lang="id-ID" smtClean="0"/>
               <a:t>‹#›</a:t>
             </a:fld>
@@ -8371,25 +5755,13 @@
     </p:spTree>
     <p:extLst>
       <p:ext uri="{BB962C8B-B14F-4D97-AF65-F5344CB8AC3E}">
-        <p14:creationId xmlns:p14="http://schemas.microsoft.com/office/powerpoint/2010/main" val="1436190438"/>
+        <p14:creationId xmlns:p14="http://schemas.microsoft.com/office/powerpoint/2010/main" val="4136073999"/>
       </p:ext>
     </p:extLst>
   </p:cSld>
   <p:clrMapOvr>
     <a:masterClrMapping/>
   </p:clrMapOvr>
-  <mc:AlternateContent xmlns:mc="http://schemas.openxmlformats.org/markup-compatibility/2006">
-    <mc:Choice xmlns:p159="http://schemas.microsoft.com/office/powerpoint/2015/09/main" Requires="p159">
-      <p:transition>
-        <p159:morph option="byObject"/>
-      </p:transition>
-    </mc:Choice>
-    <mc:Fallback>
-      <p:transition>
-        <p:fade/>
-      </p:transition>
-    </mc:Fallback>
-  </mc:AlternateContent>
 </p:sldLayout>
 </file>
 
@@ -8644,9 +6016,9 @@
           <a:bodyPr/>
           <a:lstStyle/>
           <a:p>
-            <a:fld id="{BAD00000-CC03-48C5-8C41-BDDBF8D27D19}" type="datetimeFigureOut">
+            <a:fld id="{B7B1A7B3-9184-487D-8853-119DD9BF06ED}" type="datetimeFigureOut">
               <a:rPr lang="id-ID" smtClean="0"/>
-              <a:t>15/07/2026</a:t>
+              <a:t>16/07/2026</a:t>
             </a:fld>
             <a:endParaRPr lang="id-ID"/>
           </a:p>
@@ -8773,7 +6145,7 @@
           <a:bodyPr/>
           <a:lstStyle/>
           <a:p>
-            <a:fld id="{90441BF9-5382-49E7-9D87-56825830A9CE}" type="slidenum">
+            <a:fld id="{D1087BB6-99EE-4B3F-8A93-6AEFDF54077A}" type="slidenum">
               <a:rPr lang="id-ID" smtClean="0"/>
               <a:t>‹#›</a:t>
             </a:fld>
@@ -8860,25 +6232,13 @@
     </p:spTree>
     <p:extLst>
       <p:ext uri="{BB962C8B-B14F-4D97-AF65-F5344CB8AC3E}">
-        <p14:creationId xmlns:p14="http://schemas.microsoft.com/office/powerpoint/2010/main" val="2415234051"/>
+        <p14:creationId xmlns:p14="http://schemas.microsoft.com/office/powerpoint/2010/main" val="2713029591"/>
       </p:ext>
     </p:extLst>
   </p:cSld>
   <p:clrMapOvr>
     <a:masterClrMapping/>
   </p:clrMapOvr>
-  <mc:AlternateContent xmlns:mc="http://schemas.openxmlformats.org/markup-compatibility/2006">
-    <mc:Choice xmlns:p159="http://schemas.microsoft.com/office/powerpoint/2015/09/main" Requires="p159">
-      <p:transition>
-        <p159:morph option="byObject"/>
-      </p:transition>
-    </mc:Choice>
-    <mc:Fallback>
-      <p:transition>
-        <p:fade/>
-      </p:transition>
-    </mc:Fallback>
-  </mc:AlternateContent>
 </p:sldLayout>
 </file>
 
@@ -8992,9 +6352,9 @@
           <a:bodyPr/>
           <a:lstStyle/>
           <a:p>
-            <a:fld id="{BAD00000-CC03-48C5-8C41-BDDBF8D27D19}" type="datetimeFigureOut">
+            <a:fld id="{B7B1A7B3-9184-487D-8853-119DD9BF06ED}" type="datetimeFigureOut">
               <a:rPr lang="id-ID" smtClean="0"/>
-              <a:t>15/07/2026</a:t>
+              <a:t>16/07/2026</a:t>
             </a:fld>
             <a:endParaRPr lang="id-ID"/>
           </a:p>
@@ -9121,7 +6481,7 @@
           <a:bodyPr/>
           <a:lstStyle/>
           <a:p>
-            <a:fld id="{90441BF9-5382-49E7-9D87-56825830A9CE}" type="slidenum">
+            <a:fld id="{D1087BB6-99EE-4B3F-8A93-6AEFDF54077A}" type="slidenum">
               <a:rPr lang="id-ID" smtClean="0"/>
               <a:t>‹#›</a:t>
             </a:fld>
@@ -9132,25 +6492,13 @@
     </p:spTree>
     <p:extLst>
       <p:ext uri="{BB962C8B-B14F-4D97-AF65-F5344CB8AC3E}">
-        <p14:creationId xmlns:p14="http://schemas.microsoft.com/office/powerpoint/2010/main" val="250506455"/>
+        <p14:creationId xmlns:p14="http://schemas.microsoft.com/office/powerpoint/2010/main" val="2238422429"/>
       </p:ext>
     </p:extLst>
   </p:cSld>
   <p:clrMapOvr>
     <a:masterClrMapping/>
   </p:clrMapOvr>
-  <mc:AlternateContent xmlns:mc="http://schemas.openxmlformats.org/markup-compatibility/2006">
-    <mc:Choice xmlns:p159="http://schemas.microsoft.com/office/powerpoint/2015/09/main" Requires="p159">
-      <p:transition>
-        <p159:morph option="byObject"/>
-      </p:transition>
-    </mc:Choice>
-    <mc:Fallback>
-      <p:transition>
-        <p:fade/>
-      </p:transition>
-    </mc:Fallback>
-  </mc:AlternateContent>
 </p:sldLayout>
 </file>
 
@@ -9324,9 +6672,9 @@
           <a:bodyPr/>
           <a:lstStyle/>
           <a:p>
-            <a:fld id="{BAD00000-CC03-48C5-8C41-BDDBF8D27D19}" type="datetimeFigureOut">
+            <a:fld id="{B7B1A7B3-9184-487D-8853-119DD9BF06ED}" type="datetimeFigureOut">
               <a:rPr lang="id-ID" smtClean="0"/>
-              <a:t>15/07/2026</a:t>
+              <a:t>16/07/2026</a:t>
             </a:fld>
             <a:endParaRPr lang="id-ID"/>
           </a:p>
@@ -9453,7 +6801,7 @@
           <a:bodyPr/>
           <a:lstStyle/>
           <a:p>
-            <a:fld id="{90441BF9-5382-49E7-9D87-56825830A9CE}" type="slidenum">
+            <a:fld id="{D1087BB6-99EE-4B3F-8A93-6AEFDF54077A}" type="slidenum">
               <a:rPr lang="id-ID" smtClean="0"/>
               <a:t>‹#›</a:t>
             </a:fld>
@@ -9540,25 +6888,13 @@
     </p:spTree>
     <p:extLst>
       <p:ext uri="{BB962C8B-B14F-4D97-AF65-F5344CB8AC3E}">
-        <p14:creationId xmlns:p14="http://schemas.microsoft.com/office/powerpoint/2010/main" val="1966789723"/>
+        <p14:creationId xmlns:p14="http://schemas.microsoft.com/office/powerpoint/2010/main" val="2669991820"/>
       </p:ext>
     </p:extLst>
   </p:cSld>
   <p:clrMapOvr>
     <a:masterClrMapping/>
   </p:clrMapOvr>
-  <mc:AlternateContent xmlns:mc="http://schemas.openxmlformats.org/markup-compatibility/2006">
-    <mc:Choice xmlns:p159="http://schemas.microsoft.com/office/powerpoint/2015/09/main" Requires="p159">
-      <p:transition>
-        <p159:morph option="byObject"/>
-      </p:transition>
-    </mc:Choice>
-    <mc:Fallback>
-      <p:transition>
-        <p:fade/>
-      </p:transition>
-    </mc:Fallback>
-  </mc:AlternateContent>
 </p:sldLayout>
 </file>
 
@@ -9732,9 +7068,9 @@
           <a:bodyPr/>
           <a:lstStyle/>
           <a:p>
-            <a:fld id="{BAD00000-CC03-48C5-8C41-BDDBF8D27D19}" type="datetimeFigureOut">
+            <a:fld id="{B7B1A7B3-9184-487D-8853-119DD9BF06ED}" type="datetimeFigureOut">
               <a:rPr lang="id-ID" smtClean="0"/>
-              <a:t>15/07/2026</a:t>
+              <a:t>16/07/2026</a:t>
             </a:fld>
             <a:endParaRPr lang="id-ID"/>
           </a:p>
@@ -9861,7 +7197,7 @@
           <a:bodyPr/>
           <a:lstStyle/>
           <a:p>
-            <a:fld id="{90441BF9-5382-49E7-9D87-56825830A9CE}" type="slidenum">
+            <a:fld id="{D1087BB6-99EE-4B3F-8A93-6AEFDF54077A}" type="slidenum">
               <a:rPr lang="id-ID" smtClean="0"/>
               <a:t>‹#›</a:t>
             </a:fld>
@@ -9872,25 +7208,13 @@
     </p:spTree>
     <p:extLst>
       <p:ext uri="{BB962C8B-B14F-4D97-AF65-F5344CB8AC3E}">
-        <p14:creationId xmlns:p14="http://schemas.microsoft.com/office/powerpoint/2010/main" val="3455825693"/>
+        <p14:creationId xmlns:p14="http://schemas.microsoft.com/office/powerpoint/2010/main" val="2433039902"/>
       </p:ext>
     </p:extLst>
   </p:cSld>
   <p:clrMapOvr>
     <a:masterClrMapping/>
   </p:clrMapOvr>
-  <mc:AlternateContent xmlns:mc="http://schemas.openxmlformats.org/markup-compatibility/2006">
-    <mc:Choice xmlns:p159="http://schemas.microsoft.com/office/powerpoint/2015/09/main" Requires="p159">
-      <p:transition>
-        <p159:morph option="byObject"/>
-      </p:transition>
-    </mc:Choice>
-    <mc:Fallback>
-      <p:transition>
-        <p:fade/>
-      </p:transition>
-    </mc:Fallback>
-  </mc:AlternateContent>
 </p:sldLayout>
 </file>
 
@@ -10001,9 +7325,9 @@
           <a:bodyPr/>
           <a:lstStyle/>
           <a:p>
-            <a:fld id="{BAD00000-CC03-48C5-8C41-BDDBF8D27D19}" type="datetimeFigureOut">
+            <a:fld id="{B7B1A7B3-9184-487D-8853-119DD9BF06ED}" type="datetimeFigureOut">
               <a:rPr lang="id-ID" smtClean="0"/>
-              <a:t>15/07/2026</a:t>
+              <a:t>16/07/2026</a:t>
             </a:fld>
             <a:endParaRPr lang="id-ID"/>
           </a:p>
@@ -10125,7 +7449,7 @@
           <a:bodyPr/>
           <a:lstStyle/>
           <a:p>
-            <a:fld id="{90441BF9-5382-49E7-9D87-56825830A9CE}" type="slidenum">
+            <a:fld id="{D1087BB6-99EE-4B3F-8A93-6AEFDF54077A}" type="slidenum">
               <a:rPr lang="id-ID" smtClean="0"/>
               <a:t>‹#›</a:t>
             </a:fld>
@@ -10136,25 +7460,13 @@
     </p:spTree>
     <p:extLst>
       <p:ext uri="{BB962C8B-B14F-4D97-AF65-F5344CB8AC3E}">
-        <p14:creationId xmlns:p14="http://schemas.microsoft.com/office/powerpoint/2010/main" val="3436970495"/>
+        <p14:creationId xmlns:p14="http://schemas.microsoft.com/office/powerpoint/2010/main" val="1025988813"/>
       </p:ext>
     </p:extLst>
   </p:cSld>
   <p:clrMapOvr>
     <a:masterClrMapping/>
   </p:clrMapOvr>
-  <mc:AlternateContent xmlns:mc="http://schemas.openxmlformats.org/markup-compatibility/2006">
-    <mc:Choice xmlns:p159="http://schemas.microsoft.com/office/powerpoint/2015/09/main" Requires="p159">
-      <p:transition>
-        <p159:morph option="byObject"/>
-      </p:transition>
-    </mc:Choice>
-    <mc:Fallback>
-      <p:transition>
-        <p:fade/>
-      </p:transition>
-    </mc:Fallback>
-  </mc:AlternateContent>
 </p:sldLayout>
 </file>
 
@@ -10275,9 +7587,9 @@
           <a:bodyPr/>
           <a:lstStyle/>
           <a:p>
-            <a:fld id="{BAD00000-CC03-48C5-8C41-BDDBF8D27D19}" type="datetimeFigureOut">
+            <a:fld id="{B7B1A7B3-9184-487D-8853-119DD9BF06ED}" type="datetimeFigureOut">
               <a:rPr lang="id-ID" smtClean="0"/>
-              <a:t>15/07/2026</a:t>
+              <a:t>16/07/2026</a:t>
             </a:fld>
             <a:endParaRPr lang="id-ID"/>
           </a:p>
@@ -10399,7 +7711,7 @@
           <a:bodyPr/>
           <a:lstStyle/>
           <a:p>
-            <a:fld id="{90441BF9-5382-49E7-9D87-56825830A9CE}" type="slidenum">
+            <a:fld id="{D1087BB6-99EE-4B3F-8A93-6AEFDF54077A}" type="slidenum">
               <a:rPr lang="id-ID" smtClean="0"/>
               <a:t>‹#›</a:t>
             </a:fld>
@@ -10410,25 +7722,13 @@
     </p:spTree>
     <p:extLst>
       <p:ext uri="{BB962C8B-B14F-4D97-AF65-F5344CB8AC3E}">
-        <p14:creationId xmlns:p14="http://schemas.microsoft.com/office/powerpoint/2010/main" val="3680150461"/>
+        <p14:creationId xmlns:p14="http://schemas.microsoft.com/office/powerpoint/2010/main" val="2920177138"/>
       </p:ext>
     </p:extLst>
   </p:cSld>
   <p:clrMapOvr>
     <a:masterClrMapping/>
   </p:clrMapOvr>
-  <mc:AlternateContent xmlns:mc="http://schemas.openxmlformats.org/markup-compatibility/2006">
-    <mc:Choice xmlns:p159="http://schemas.microsoft.com/office/powerpoint/2015/09/main" Requires="p159">
-      <p:transition>
-        <p159:morph option="byObject"/>
-      </p:transition>
-    </mc:Choice>
-    <mc:Fallback>
-      <p:transition>
-        <p:fade/>
-      </p:transition>
-    </mc:Fallback>
-  </mc:AlternateContent>
 </p:sldLayout>
 </file>
 
@@ -10549,9 +7849,9 @@
           <a:bodyPr/>
           <a:lstStyle/>
           <a:p>
-            <a:fld id="{BAD00000-CC03-48C5-8C41-BDDBF8D27D19}" type="datetimeFigureOut">
+            <a:fld id="{B7B1A7B3-9184-487D-8853-119DD9BF06ED}" type="datetimeFigureOut">
               <a:rPr lang="id-ID" smtClean="0"/>
-              <a:t>15/07/2026</a:t>
+              <a:t>16/07/2026</a:t>
             </a:fld>
             <a:endParaRPr lang="id-ID"/>
           </a:p>
@@ -10673,7 +7973,7 @@
           <a:bodyPr/>
           <a:lstStyle/>
           <a:p>
-            <a:fld id="{90441BF9-5382-49E7-9D87-56825830A9CE}" type="slidenum">
+            <a:fld id="{D1087BB6-99EE-4B3F-8A93-6AEFDF54077A}" type="slidenum">
               <a:rPr lang="id-ID" smtClean="0"/>
               <a:t>‹#›</a:t>
             </a:fld>
@@ -10684,25 +7984,13 @@
     </p:spTree>
     <p:extLst>
       <p:ext uri="{BB962C8B-B14F-4D97-AF65-F5344CB8AC3E}">
-        <p14:creationId xmlns:p14="http://schemas.microsoft.com/office/powerpoint/2010/main" val="302871524"/>
+        <p14:creationId xmlns:p14="http://schemas.microsoft.com/office/powerpoint/2010/main" val="4168508455"/>
       </p:ext>
     </p:extLst>
   </p:cSld>
   <p:clrMapOvr>
     <a:masterClrMapping/>
   </p:clrMapOvr>
-  <mc:AlternateContent xmlns:mc="http://schemas.openxmlformats.org/markup-compatibility/2006">
-    <mc:Choice xmlns:p159="http://schemas.microsoft.com/office/powerpoint/2015/09/main" Requires="p159">
-      <p:transition>
-        <p159:morph option="byObject"/>
-      </p:transition>
-    </mc:Choice>
-    <mc:Fallback>
-      <p:transition>
-        <p:fade/>
-      </p:transition>
-    </mc:Fallback>
-  </mc:AlternateContent>
 </p:sldLayout>
 </file>
 
@@ -10890,9 +8178,9 @@
           <a:bodyPr/>
           <a:lstStyle/>
           <a:p>
-            <a:fld id="{BAD00000-CC03-48C5-8C41-BDDBF8D27D19}" type="datetimeFigureOut">
+            <a:fld id="{B7B1A7B3-9184-487D-8853-119DD9BF06ED}" type="datetimeFigureOut">
               <a:rPr lang="id-ID" smtClean="0"/>
-              <a:t>15/07/2026</a:t>
+              <a:t>16/07/2026</a:t>
             </a:fld>
             <a:endParaRPr lang="id-ID"/>
           </a:p>
@@ -11019,7 +8307,7 @@
           <a:bodyPr/>
           <a:lstStyle/>
           <a:p>
-            <a:fld id="{90441BF9-5382-49E7-9D87-56825830A9CE}" type="slidenum">
+            <a:fld id="{D1087BB6-99EE-4B3F-8A93-6AEFDF54077A}" type="slidenum">
               <a:rPr lang="id-ID" smtClean="0"/>
               <a:t>‹#›</a:t>
             </a:fld>
@@ -11030,25 +8318,13 @@
     </p:spTree>
     <p:extLst>
       <p:ext uri="{BB962C8B-B14F-4D97-AF65-F5344CB8AC3E}">
-        <p14:creationId xmlns:p14="http://schemas.microsoft.com/office/powerpoint/2010/main" val="1437390590"/>
+        <p14:creationId xmlns:p14="http://schemas.microsoft.com/office/powerpoint/2010/main" val="2457913468"/>
       </p:ext>
     </p:extLst>
   </p:cSld>
   <p:clrMapOvr>
     <a:masterClrMapping/>
   </p:clrMapOvr>
-  <mc:AlternateContent xmlns:mc="http://schemas.openxmlformats.org/markup-compatibility/2006">
-    <mc:Choice xmlns:p159="http://schemas.microsoft.com/office/powerpoint/2015/09/main" Requires="p159">
-      <p:transition>
-        <p159:morph option="byObject"/>
-      </p:transition>
-    </mc:Choice>
-    <mc:Fallback>
-      <p:transition>
-        <p:fade/>
-      </p:transition>
-    </mc:Fallback>
-  </mc:AlternateContent>
 </p:sldLayout>
 </file>
 
@@ -11225,9 +8501,9 @@
           <a:bodyPr/>
           <a:lstStyle/>
           <a:p>
-            <a:fld id="{BAD00000-CC03-48C5-8C41-BDDBF8D27D19}" type="datetimeFigureOut">
+            <a:fld id="{B7B1A7B3-9184-487D-8853-119DD9BF06ED}" type="datetimeFigureOut">
               <a:rPr lang="id-ID" smtClean="0"/>
-              <a:t>15/07/2026</a:t>
+              <a:t>16/07/2026</a:t>
             </a:fld>
             <a:endParaRPr lang="id-ID"/>
           </a:p>
@@ -11354,7 +8630,7 @@
           <a:bodyPr/>
           <a:lstStyle/>
           <a:p>
-            <a:fld id="{90441BF9-5382-49E7-9D87-56825830A9CE}" type="slidenum">
+            <a:fld id="{D1087BB6-99EE-4B3F-8A93-6AEFDF54077A}" type="slidenum">
               <a:rPr lang="id-ID" smtClean="0"/>
               <a:t>‹#›</a:t>
             </a:fld>
@@ -11365,25 +8641,13 @@
     </p:spTree>
     <p:extLst>
       <p:ext uri="{BB962C8B-B14F-4D97-AF65-F5344CB8AC3E}">
-        <p14:creationId xmlns:p14="http://schemas.microsoft.com/office/powerpoint/2010/main" val="705189037"/>
+        <p14:creationId xmlns:p14="http://schemas.microsoft.com/office/powerpoint/2010/main" val="60831719"/>
       </p:ext>
     </p:extLst>
   </p:cSld>
   <p:clrMapOvr>
     <a:masterClrMapping/>
   </p:clrMapOvr>
-  <mc:AlternateContent xmlns:mc="http://schemas.openxmlformats.org/markup-compatibility/2006">
-    <mc:Choice xmlns:p159="http://schemas.microsoft.com/office/powerpoint/2015/09/main" Requires="p159">
-      <p:transition>
-        <p159:morph option="byObject"/>
-      </p:transition>
-    </mc:Choice>
-    <mc:Fallback>
-      <p:transition>
-        <p:fade/>
-      </p:transition>
-    </mc:Fallback>
-  </mc:AlternateContent>
 </p:sldLayout>
 </file>
 
@@ -11694,9 +8958,9 @@
           <a:bodyPr/>
           <a:lstStyle/>
           <a:p>
-            <a:fld id="{BAD00000-CC03-48C5-8C41-BDDBF8D27D19}" type="datetimeFigureOut">
+            <a:fld id="{B7B1A7B3-9184-487D-8853-119DD9BF06ED}" type="datetimeFigureOut">
               <a:rPr lang="id-ID" smtClean="0"/>
-              <a:t>15/07/2026</a:t>
+              <a:t>16/07/2026</a:t>
             </a:fld>
             <a:endParaRPr lang="id-ID"/>
           </a:p>
@@ -11823,7 +9087,7 @@
           <a:bodyPr/>
           <a:lstStyle/>
           <a:p>
-            <a:fld id="{90441BF9-5382-49E7-9D87-56825830A9CE}" type="slidenum">
+            <a:fld id="{D1087BB6-99EE-4B3F-8A93-6AEFDF54077A}" type="slidenum">
               <a:rPr lang="id-ID" smtClean="0"/>
               <a:t>‹#›</a:t>
             </a:fld>
@@ -11834,25 +9098,13 @@
     </p:spTree>
     <p:extLst>
       <p:ext uri="{BB962C8B-B14F-4D97-AF65-F5344CB8AC3E}">
-        <p14:creationId xmlns:p14="http://schemas.microsoft.com/office/powerpoint/2010/main" val="2629715765"/>
+        <p14:creationId xmlns:p14="http://schemas.microsoft.com/office/powerpoint/2010/main" val="12558166"/>
       </p:ext>
     </p:extLst>
   </p:cSld>
   <p:clrMapOvr>
     <a:masterClrMapping/>
   </p:clrMapOvr>
-  <mc:AlternateContent xmlns:mc="http://schemas.openxmlformats.org/markup-compatibility/2006">
-    <mc:Choice xmlns:p159="http://schemas.microsoft.com/office/powerpoint/2015/09/main" Requires="p159">
-      <p:transition>
-        <p159:morph option="byObject"/>
-      </p:transition>
-    </mc:Choice>
-    <mc:Fallback>
-      <p:transition>
-        <p:fade/>
-      </p:transition>
-    </mc:Fallback>
-  </mc:AlternateContent>
 </p:sldLayout>
 </file>
 
@@ -11911,9 +9163,9 @@
           <a:bodyPr/>
           <a:lstStyle/>
           <a:p>
-            <a:fld id="{BAD00000-CC03-48C5-8C41-BDDBF8D27D19}" type="datetimeFigureOut">
+            <a:fld id="{B7B1A7B3-9184-487D-8853-119DD9BF06ED}" type="datetimeFigureOut">
               <a:rPr lang="id-ID" smtClean="0"/>
-              <a:t>15/07/2026</a:t>
+              <a:t>16/07/2026</a:t>
             </a:fld>
             <a:endParaRPr lang="id-ID"/>
           </a:p>
@@ -12035,7 +9287,7 @@
           <a:bodyPr/>
           <a:lstStyle/>
           <a:p>
-            <a:fld id="{90441BF9-5382-49E7-9D87-56825830A9CE}" type="slidenum">
+            <a:fld id="{D1087BB6-99EE-4B3F-8A93-6AEFDF54077A}" type="slidenum">
               <a:rPr lang="id-ID" smtClean="0"/>
               <a:t>‹#›</a:t>
             </a:fld>
@@ -12046,25 +9298,13 @@
     </p:spTree>
     <p:extLst>
       <p:ext uri="{BB962C8B-B14F-4D97-AF65-F5344CB8AC3E}">
-        <p14:creationId xmlns:p14="http://schemas.microsoft.com/office/powerpoint/2010/main" val="3260996335"/>
+        <p14:creationId xmlns:p14="http://schemas.microsoft.com/office/powerpoint/2010/main" val="654565390"/>
       </p:ext>
     </p:extLst>
   </p:cSld>
   <p:clrMapOvr>
     <a:masterClrMapping/>
   </p:clrMapOvr>
-  <mc:AlternateContent xmlns:mc="http://schemas.openxmlformats.org/markup-compatibility/2006">
-    <mc:Choice xmlns:p159="http://schemas.microsoft.com/office/powerpoint/2015/09/main" Requires="p159">
-      <p:transition>
-        <p159:morph option="byObject"/>
-      </p:transition>
-    </mc:Choice>
-    <mc:Fallback>
-      <p:transition>
-        <p:fade/>
-      </p:transition>
-    </mc:Fallback>
-  </mc:AlternateContent>
 </p:sldLayout>
 </file>
 
@@ -12100,9 +9340,9 @@
           <a:bodyPr/>
           <a:lstStyle/>
           <a:p>
-            <a:fld id="{BAD00000-CC03-48C5-8C41-BDDBF8D27D19}" type="datetimeFigureOut">
+            <a:fld id="{B7B1A7B3-9184-487D-8853-119DD9BF06ED}" type="datetimeFigureOut">
               <a:rPr lang="id-ID" smtClean="0"/>
-              <a:t>15/07/2026</a:t>
+              <a:t>16/07/2026</a:t>
             </a:fld>
             <a:endParaRPr lang="id-ID"/>
           </a:p>
@@ -12224,7 +9464,7 @@
           <a:bodyPr/>
           <a:lstStyle/>
           <a:p>
-            <a:fld id="{90441BF9-5382-49E7-9D87-56825830A9CE}" type="slidenum">
+            <a:fld id="{D1087BB6-99EE-4B3F-8A93-6AEFDF54077A}" type="slidenum">
               <a:rPr lang="id-ID" smtClean="0"/>
               <a:t>‹#›</a:t>
             </a:fld>
@@ -12235,25 +9475,13 @@
     </p:spTree>
     <p:extLst>
       <p:ext uri="{BB962C8B-B14F-4D97-AF65-F5344CB8AC3E}">
-        <p14:creationId xmlns:p14="http://schemas.microsoft.com/office/powerpoint/2010/main" val="4291148194"/>
+        <p14:creationId xmlns:p14="http://schemas.microsoft.com/office/powerpoint/2010/main" val="2609604632"/>
       </p:ext>
     </p:extLst>
   </p:cSld>
   <p:clrMapOvr>
     <a:masterClrMapping/>
   </p:clrMapOvr>
-  <mc:AlternateContent xmlns:mc="http://schemas.openxmlformats.org/markup-compatibility/2006">
-    <mc:Choice xmlns:p159="http://schemas.microsoft.com/office/powerpoint/2015/09/main" Requires="p159">
-      <p:transition>
-        <p159:morph option="byObject"/>
-      </p:transition>
-    </mc:Choice>
-    <mc:Fallback>
-      <p:transition>
-        <p:fade/>
-      </p:transition>
-    </mc:Fallback>
-  </mc:AlternateContent>
 </p:sldLayout>
 </file>
 
@@ -12445,9 +9673,9 @@
           <a:bodyPr/>
           <a:lstStyle/>
           <a:p>
-            <a:fld id="{BAD00000-CC03-48C5-8C41-BDDBF8D27D19}" type="datetimeFigureOut">
+            <a:fld id="{B7B1A7B3-9184-487D-8853-119DD9BF06ED}" type="datetimeFigureOut">
               <a:rPr lang="id-ID" smtClean="0"/>
-              <a:t>15/07/2026</a:t>
+              <a:t>16/07/2026</a:t>
             </a:fld>
             <a:endParaRPr lang="id-ID"/>
           </a:p>
@@ -12569,7 +9797,7 @@
           <a:bodyPr/>
           <a:lstStyle/>
           <a:p>
-            <a:fld id="{90441BF9-5382-49E7-9D87-56825830A9CE}" type="slidenum">
+            <a:fld id="{D1087BB6-99EE-4B3F-8A93-6AEFDF54077A}" type="slidenum">
               <a:rPr lang="id-ID" smtClean="0"/>
               <a:t>‹#›</a:t>
             </a:fld>
@@ -12580,25 +9808,13 @@
     </p:spTree>
     <p:extLst>
       <p:ext uri="{BB962C8B-B14F-4D97-AF65-F5344CB8AC3E}">
-        <p14:creationId xmlns:p14="http://schemas.microsoft.com/office/powerpoint/2010/main" val="3826955192"/>
+        <p14:creationId xmlns:p14="http://schemas.microsoft.com/office/powerpoint/2010/main" val="299002046"/>
       </p:ext>
     </p:extLst>
   </p:cSld>
   <p:clrMapOvr>
     <a:masterClrMapping/>
   </p:clrMapOvr>
-  <mc:AlternateContent xmlns:mc="http://schemas.openxmlformats.org/markup-compatibility/2006">
-    <mc:Choice xmlns:p159="http://schemas.microsoft.com/office/powerpoint/2015/09/main" Requires="p159">
-      <p:transition>
-        <p159:morph option="byObject"/>
-      </p:transition>
-    </mc:Choice>
-    <mc:Fallback>
-      <p:transition>
-        <p:fade/>
-      </p:transition>
-    </mc:Fallback>
-  </mc:AlternateContent>
 </p:sldLayout>
 </file>
 
@@ -12802,9 +10018,9 @@
           <a:bodyPr/>
           <a:lstStyle/>
           <a:p>
-            <a:fld id="{BAD00000-CC03-48C5-8C41-BDDBF8D27D19}" type="datetimeFigureOut">
+            <a:fld id="{B7B1A7B3-9184-487D-8853-119DD9BF06ED}" type="datetimeFigureOut">
               <a:rPr lang="id-ID" smtClean="0"/>
-              <a:t>15/07/2026</a:t>
+              <a:t>16/07/2026</a:t>
             </a:fld>
             <a:endParaRPr lang="id-ID"/>
           </a:p>
@@ -12931,7 +10147,7 @@
           <a:bodyPr/>
           <a:lstStyle/>
           <a:p>
-            <a:fld id="{90441BF9-5382-49E7-9D87-56825830A9CE}" type="slidenum">
+            <a:fld id="{D1087BB6-99EE-4B3F-8A93-6AEFDF54077A}" type="slidenum">
               <a:rPr lang="id-ID" smtClean="0"/>
               <a:t>‹#›</a:t>
             </a:fld>
@@ -12942,25 +10158,13 @@
     </p:spTree>
     <p:extLst>
       <p:ext uri="{BB962C8B-B14F-4D97-AF65-F5344CB8AC3E}">
-        <p14:creationId xmlns:p14="http://schemas.microsoft.com/office/powerpoint/2010/main" val="1638472332"/>
+        <p14:creationId xmlns:p14="http://schemas.microsoft.com/office/powerpoint/2010/main" val="1405750711"/>
       </p:ext>
     </p:extLst>
   </p:cSld>
   <p:clrMapOvr>
     <a:masterClrMapping/>
   </p:clrMapOvr>
-  <mc:AlternateContent xmlns:mc="http://schemas.openxmlformats.org/markup-compatibility/2006">
-    <mc:Choice xmlns:p159="http://schemas.microsoft.com/office/powerpoint/2015/09/main" Requires="p159">
-      <p:transition>
-        <p159:morph option="byObject"/>
-      </p:transition>
-    </mc:Choice>
-    <mc:Fallback>
-      <p:transition>
-        <p:fade/>
-      </p:transition>
-    </mc:Fallback>
-  </mc:AlternateContent>
 </p:sldLayout>
 </file>
 
@@ -14931,9 +12135,9 @@
             </a:lvl1pPr>
           </a:lstStyle>
           <a:p>
-            <a:fld id="{BAD00000-CC03-48C5-8C41-BDDBF8D27D19}" type="datetimeFigureOut">
+            <a:fld id="{B7B1A7B3-9184-487D-8853-119DD9BF06ED}" type="datetimeFigureOut">
               <a:rPr lang="id-ID" smtClean="0"/>
-              <a:t>15/07/2026</a:t>
+              <a:t>16/07/2026</a:t>
             </a:fld>
             <a:endParaRPr lang="id-ID"/>
           </a:p>
@@ -14986,7 +12190,7 @@
             <p:ph type="sldNum" sz="quarter" idx="4"/>
           </p:nvPr>
         </p:nvSpPr>
-        <p:spPr bwMode="gray">
+        <p:spPr>
           <a:xfrm>
             <a:off x="531812" y="787782"/>
             <a:ext cx="779767" cy="365125"/>
@@ -15007,7 +12211,7 @@
             </a:lvl1pPr>
           </a:lstStyle>
           <a:p>
-            <a:fld id="{90441BF9-5382-49E7-9D87-56825830A9CE}" type="slidenum">
+            <a:fld id="{D1087BB6-99EE-4B3F-8A93-6AEFDF54077A}" type="slidenum">
               <a:rPr lang="id-ID" smtClean="0"/>
               <a:t>‹#›</a:t>
             </a:fld>
@@ -15018,7 +12222,7 @@
     </p:spTree>
     <p:extLst>
       <p:ext uri="{BB962C8B-B14F-4D97-AF65-F5344CB8AC3E}">
-        <p14:creationId xmlns:p14="http://schemas.microsoft.com/office/powerpoint/2010/main" val="956041722"/>
+        <p14:creationId xmlns:p14="http://schemas.microsoft.com/office/powerpoint/2010/main" val="1039613705"/>
       </p:ext>
     </p:extLst>
   </p:cSld>
@@ -15041,18 +12245,6 @@
     <p:sldLayoutId id="2147483675" r:id="rId15"/>
     <p:sldLayoutId id="2147483676" r:id="rId16"/>
   </p:sldLayoutIdLst>
-  <mc:AlternateContent xmlns:mc="http://schemas.openxmlformats.org/markup-compatibility/2006">
-    <mc:Choice xmlns:p159="http://schemas.microsoft.com/office/powerpoint/2015/09/main" Requires="p159">
-      <p:transition>
-        <p159:morph option="byObject"/>
-      </p:transition>
-    </mc:Choice>
-    <mc:Fallback>
-      <p:transition>
-        <p:fade/>
-      </p:transition>
-    </mc:Fallback>
-  </mc:AlternateContent>
   <p:txStyles>
     <p:titleStyle>
       <a:lvl1pPr algn="l" defTabSz="457200" rtl="0" eaLnBrk="1" latinLnBrk="0" hangingPunct="1">
@@ -15468,7 +12660,7 @@
           <p:cNvPr id="4" name="Title 3">
             <a:extLst>
               <a:ext uri="{FF2B5EF4-FFF2-40B4-BE49-F238E27FC236}">
-                <a16:creationId xmlns:a16="http://schemas.microsoft.com/office/drawing/2014/main" id="{C6C07E7D-EE1F-C7BD-C07E-DCFA94B3A232}"/>
+                <a16:creationId xmlns:a16="http://schemas.microsoft.com/office/drawing/2014/main" id="{6690D22B-8465-C861-68F9-79CFCB85E499}"/>
               </a:ext>
             </a:extLst>
           </p:cNvPr>
@@ -15479,26 +12671,30 @@
             <p:ph type="title"/>
           </p:nvPr>
         </p:nvSpPr>
-        <p:spPr>
-          <a:xfrm>
-            <a:off x="1813810" y="624110"/>
-            <a:ext cx="9690801" cy="674612"/>
-          </a:xfrm>
-        </p:spPr>
+        <p:spPr/>
         <p:txBody>
-          <a:bodyPr/>
+          <a:bodyPr>
+            <a:normAutofit/>
+          </a:bodyPr>
           <a:lstStyle/>
           <a:p>
             <a:r>
-              <a:rPr lang="id-ID" b="1" dirty="0">
+              <a:rPr lang="id-ID" sz="4000" b="1" dirty="0">
                 <a:solidFill>
                   <a:schemeClr val="accent5">
                     <a:lumMod val="50000"/>
                   </a:schemeClr>
                 </a:solidFill>
               </a:rPr>
-              <a:t>FreshBox</a:t>
+              <a:t>FRESHBOX</a:t>
             </a:r>
+            <a:endParaRPr lang="id-ID" sz="4000" dirty="0">
+              <a:solidFill>
+                <a:schemeClr val="accent5">
+                  <a:lumMod val="50000"/>
+                </a:schemeClr>
+              </a:solidFill>
+            </a:endParaRPr>
           </a:p>
         </p:txBody>
       </p:sp>
@@ -15507,7 +12703,7 @@
           <p:cNvPr id="5" name="TextBox 4">
             <a:extLst>
               <a:ext uri="{FF2B5EF4-FFF2-40B4-BE49-F238E27FC236}">
-                <a16:creationId xmlns:a16="http://schemas.microsoft.com/office/drawing/2014/main" id="{33FE0C19-06C7-8EE8-C1C5-9AD531BAC169}"/>
+                <a16:creationId xmlns:a16="http://schemas.microsoft.com/office/drawing/2014/main" id="{4072D609-9EA6-1F60-B2B5-3C5BE2F43ED2}"/>
               </a:ext>
             </a:extLst>
           </p:cNvPr>
@@ -15516,8 +12712,8 @@
         </p:nvSpPr>
         <p:spPr>
           <a:xfrm>
-            <a:off x="959370" y="1813810"/>
-            <a:ext cx="5331909" cy="369332"/>
+            <a:off x="2592924" y="1379095"/>
+            <a:ext cx="5396029" cy="369332"/>
           </a:xfrm>
           <a:prstGeom prst="rect">
             <a:avLst/>
@@ -15531,9 +12727,9 @@
           <a:lstStyle/>
           <a:p>
             <a:r>
-              <a:rPr lang="id-ID" dirty="0">
+              <a:rPr lang="id-ID" i="1" dirty="0">
                 <a:solidFill>
-                  <a:schemeClr val="accent5">
+                  <a:schemeClr val="accent6">
                     <a:lumMod val="50000"/>
                   </a:schemeClr>
                 </a:solidFill>
@@ -15548,7 +12744,7 @@
           <p:cNvPr id="6" name="TextBox 5">
             <a:extLst>
               <a:ext uri="{FF2B5EF4-FFF2-40B4-BE49-F238E27FC236}">
-                <a16:creationId xmlns:a16="http://schemas.microsoft.com/office/drawing/2014/main" id="{9F2A5E2C-4DE0-75D5-47EF-DDBF3E338D24}"/>
+                <a16:creationId xmlns:a16="http://schemas.microsoft.com/office/drawing/2014/main" id="{A0D47744-DA59-8146-D7B5-9FEB1E962D38}"/>
               </a:ext>
             </a:extLst>
           </p:cNvPr>
@@ -15557,8 +12753,8 @@
         </p:nvSpPr>
         <p:spPr>
           <a:xfrm>
-            <a:off x="1184223" y="2698230"/>
-            <a:ext cx="3957403" cy="1569660"/>
+            <a:off x="2698230" y="2158584"/>
+            <a:ext cx="4107304" cy="2221057"/>
           </a:xfrm>
           <a:prstGeom prst="rect">
             <a:avLst/>
@@ -15572,82 +12768,73 @@
           <a:lstStyle/>
           <a:p>
             <a:pPr marL="285750" indent="-285750">
-              <a:buFont typeface="Arial" panose="020B0604020202020204" pitchFamily="34" charset="0"/>
-              <a:buChar char="•"/>
+              <a:lnSpc>
+                <a:spcPct val="200000"/>
+              </a:lnSpc>
+              <a:buFont typeface="Wingdings" panose="05000000000000000000" pitchFamily="2" charset="2"/>
+              <a:buChar char="ü"/>
             </a:pPr>
             <a:r>
-              <a:rPr lang="id-ID" sz="2400" dirty="0">
+              <a:rPr lang="id-ID" b="1" dirty="0">
                 <a:solidFill>
-                  <a:schemeClr val="accent5">
+                  <a:schemeClr val="accent6">
                     <a:lumMod val="50000"/>
                   </a:schemeClr>
                 </a:solidFill>
               </a:rPr>
               <a:t>Business Pitch</a:t>
             </a:r>
-            <a:endParaRPr lang="en-US" sz="2400" dirty="0">
-              <a:solidFill>
-                <a:schemeClr val="accent5">
-                  <a:lumMod val="50000"/>
-                </a:schemeClr>
-              </a:solidFill>
-            </a:endParaRPr>
           </a:p>
           <a:p>
             <a:pPr marL="285750" indent="-285750">
-              <a:buFont typeface="Arial" panose="020B0604020202020204" pitchFamily="34" charset="0"/>
-              <a:buChar char="•"/>
+              <a:lnSpc>
+                <a:spcPct val="200000"/>
+              </a:lnSpc>
+              <a:buFont typeface="Wingdings" panose="05000000000000000000" pitchFamily="2" charset="2"/>
+              <a:buChar char="ü"/>
             </a:pPr>
             <a:r>
-              <a:rPr lang="id-ID" sz="2400" dirty="0">
+              <a:rPr lang="id-ID" b="1" dirty="0">
                 <a:solidFill>
-                  <a:schemeClr val="accent5">
+                  <a:schemeClr val="accent6">
                     <a:lumMod val="50000"/>
                   </a:schemeClr>
                 </a:solidFill>
               </a:rPr>
               <a:t>Nama Presenter</a:t>
             </a:r>
-            <a:endParaRPr lang="en-US" sz="2400" dirty="0">
-              <a:solidFill>
-                <a:schemeClr val="accent5">
-                  <a:lumMod val="50000"/>
-                </a:schemeClr>
-              </a:solidFill>
-            </a:endParaRPr>
           </a:p>
           <a:p>
             <a:pPr marL="285750" indent="-285750">
-              <a:buFont typeface="Arial" panose="020B0604020202020204" pitchFamily="34" charset="0"/>
-              <a:buChar char="•"/>
+              <a:lnSpc>
+                <a:spcPct val="200000"/>
+              </a:lnSpc>
+              <a:buFont typeface="Wingdings" panose="05000000000000000000" pitchFamily="2" charset="2"/>
+              <a:buChar char="ü"/>
             </a:pPr>
             <a:r>
-              <a:rPr lang="id-ID" sz="2400" dirty="0">
+              <a:rPr lang="id-ID" b="1" dirty="0">
                 <a:solidFill>
-                  <a:schemeClr val="accent5">
+                  <a:schemeClr val="accent6">
                     <a:lumMod val="50000"/>
                   </a:schemeClr>
                 </a:solidFill>
               </a:rPr>
               <a:t>Nama Perusahaan</a:t>
             </a:r>
-            <a:endParaRPr lang="en-US" sz="2400" dirty="0">
-              <a:solidFill>
-                <a:schemeClr val="accent5">
-                  <a:lumMod val="50000"/>
-                </a:schemeClr>
-              </a:solidFill>
-            </a:endParaRPr>
           </a:p>
           <a:p>
             <a:pPr marL="285750" indent="-285750">
-              <a:buFont typeface="Arial" panose="020B0604020202020204" pitchFamily="34" charset="0"/>
-              <a:buChar char="•"/>
+              <a:lnSpc>
+                <a:spcPct val="200000"/>
+              </a:lnSpc>
+              <a:buFont typeface="Wingdings" panose="05000000000000000000" pitchFamily="2" charset="2"/>
+              <a:buChar char="ü"/>
             </a:pPr>
             <a:r>
-              <a:rPr lang="id-ID" sz="2400" dirty="0">
+              <a:rPr lang="id-ID" b="1" dirty="0">
                 <a:solidFill>
-                  <a:schemeClr val="accent5">
+                  <a:schemeClr val="accent6">
                     <a:lumMod val="50000"/>
                   </a:schemeClr>
                 </a:solidFill>
@@ -15662,7 +12849,7 @@
           <p:cNvPr id="8" name="Picture 7">
             <a:extLst>
               <a:ext uri="{FF2B5EF4-FFF2-40B4-BE49-F238E27FC236}">
-                <a16:creationId xmlns:a16="http://schemas.microsoft.com/office/drawing/2014/main" id="{C2240FEC-9B55-8C13-CD3B-A115B0393897}"/>
+                <a16:creationId xmlns:a16="http://schemas.microsoft.com/office/drawing/2014/main" id="{A452EAE6-C4DE-EB0C-DBA1-9E02D6886522}"/>
               </a:ext>
             </a:extLst>
           </p:cNvPr>
@@ -15685,8 +12872,8 @@
         </p:blipFill>
         <p:spPr>
           <a:xfrm>
-            <a:off x="5818072" y="788716"/>
-            <a:ext cx="6120256" cy="5938678"/>
+            <a:off x="6460677" y="1339602"/>
+            <a:ext cx="5043934" cy="4894288"/>
           </a:xfrm>
           <a:prstGeom prst="rect">
             <a:avLst/>
@@ -15696,20 +12883,20 @@
     </p:spTree>
     <p:extLst>
       <p:ext uri="{BB962C8B-B14F-4D97-AF65-F5344CB8AC3E}">
-        <p14:creationId xmlns:p14="http://schemas.microsoft.com/office/powerpoint/2010/main" val="4130576768"/>
+        <p14:creationId xmlns:p14="http://schemas.microsoft.com/office/powerpoint/2010/main" val="294207936"/>
       </p:ext>
     </p:extLst>
   </p:cSld>
   <p:clrMapOvr>
     <a:masterClrMapping/>
   </p:clrMapOvr>
-  <mc:AlternateContent xmlns:mc="http://schemas.openxmlformats.org/markup-compatibility/2006">
-    <mc:Choice xmlns:p159="http://schemas.microsoft.com/office/powerpoint/2015/09/main" Requires="p159">
+  <mc:AlternateContent xmlns:mc="http://schemas.openxmlformats.org/markup-compatibility/2006" xmlns:p159="http://schemas.microsoft.com/office/powerpoint/2015/09/main">
+    <mc:Choice Requires="p159">
       <p:transition>
         <p159:morph option="byObject"/>
       </p:transition>
     </mc:Choice>
-    <mc:Fallback>
+    <mc:Fallback xmlns="">
       <p:transition>
         <p:fade/>
       </p:transition>
@@ -15783,7 +12970,7 @@
                             </p:stCondLst>
                             <p:childTnLst>
                               <p:par>
-                                <p:cTn id="9" presetID="1" presetClass="entr" presetSubtype="0" fill="hold" grpId="0" nodeType="afterEffect">
+                                <p:cTn id="9" presetID="22" presetClass="entr" presetSubtype="8" fill="hold" grpId="0" nodeType="afterEffect">
                                   <p:stCondLst>
                                     <p:cond delay="0"/>
                                   </p:stCondLst>
@@ -15806,6 +12993,14 @@
                                         <p:strVal val="visible"/>
                                       </p:to>
                                     </p:set>
+                                    <p:animEffect transition="in" filter="wipe(left)">
+                                      <p:cBhvr>
+                                        <p:cTn id="11" dur="500"/>
+                                        <p:tgtEl>
+                                          <p:spTgt spid="5"/>
+                                        </p:tgtEl>
+                                      </p:cBhvr>
+                                    </p:animEffect>
                                   </p:childTnLst>
                                 </p:cTn>
                               </p:par>
@@ -15813,20 +13008,20 @@
                           </p:cTn>
                         </p:par>
                         <p:par>
-                          <p:cTn id="11" fill="hold">
+                          <p:cTn id="12" fill="hold">
                             <p:stCondLst>
-                              <p:cond delay="500"/>
+                              <p:cond delay="1000"/>
                             </p:stCondLst>
                             <p:childTnLst>
                               <p:par>
-                                <p:cTn id="12" presetID="22" presetClass="entr" presetSubtype="8" fill="hold" grpId="0" nodeType="afterEffect">
+                                <p:cTn id="13" presetID="22" presetClass="entr" presetSubtype="8" fill="hold" grpId="0" nodeType="afterEffect">
                                   <p:stCondLst>
                                     <p:cond delay="0"/>
                                   </p:stCondLst>
                                   <p:childTnLst>
                                     <p:set>
                                       <p:cBhvr>
-                                        <p:cTn id="13" dur="1" fill="hold">
+                                        <p:cTn id="14" dur="1" fill="hold">
                                           <p:stCondLst>
                                             <p:cond delay="0"/>
                                           </p:stCondLst>
@@ -15848,7 +13043,7 @@
                                     </p:set>
                                     <p:animEffect transition="in" filter="wipe(left)">
                                       <p:cBhvr>
-                                        <p:cTn id="14" dur="500"/>
+                                        <p:cTn id="15" dur="500"/>
                                         <p:tgtEl>
                                           <p:spTgt spid="6">
                                             <p:txEl>
@@ -15865,20 +13060,20 @@
                           </p:cTn>
                         </p:par>
                         <p:par>
-                          <p:cTn id="15" fill="hold">
+                          <p:cTn id="16" fill="hold">
                             <p:stCondLst>
-                              <p:cond delay="1000"/>
+                              <p:cond delay="1500"/>
                             </p:stCondLst>
                             <p:childTnLst>
                               <p:par>
-                                <p:cTn id="16" presetID="22" presetClass="entr" presetSubtype="8" fill="hold" grpId="0" nodeType="afterEffect">
+                                <p:cTn id="17" presetID="22" presetClass="entr" presetSubtype="8" fill="hold" grpId="0" nodeType="afterEffect">
                                   <p:stCondLst>
                                     <p:cond delay="0"/>
                                   </p:stCondLst>
                                   <p:childTnLst>
                                     <p:set>
                                       <p:cBhvr>
-                                        <p:cTn id="17" dur="1" fill="hold">
+                                        <p:cTn id="18" dur="1" fill="hold">
                                           <p:stCondLst>
                                             <p:cond delay="0"/>
                                           </p:stCondLst>
@@ -15900,7 +13095,7 @@
                                     </p:set>
                                     <p:animEffect transition="in" filter="wipe(left)">
                                       <p:cBhvr>
-                                        <p:cTn id="18" dur="500"/>
+                                        <p:cTn id="19" dur="500"/>
                                         <p:tgtEl>
                                           <p:spTgt spid="6">
                                             <p:txEl>
@@ -15917,20 +13112,20 @@
                           </p:cTn>
                         </p:par>
                         <p:par>
-                          <p:cTn id="19" fill="hold">
+                          <p:cTn id="20" fill="hold">
                             <p:stCondLst>
-                              <p:cond delay="1500"/>
+                              <p:cond delay="2000"/>
                             </p:stCondLst>
                             <p:childTnLst>
                               <p:par>
-                                <p:cTn id="20" presetID="22" presetClass="entr" presetSubtype="8" fill="hold" grpId="0" nodeType="afterEffect">
+                                <p:cTn id="21" presetID="22" presetClass="entr" presetSubtype="8" fill="hold" grpId="0" nodeType="afterEffect">
                                   <p:stCondLst>
                                     <p:cond delay="0"/>
                                   </p:stCondLst>
                                   <p:childTnLst>
                                     <p:set>
                                       <p:cBhvr>
-                                        <p:cTn id="21" dur="1" fill="hold">
+                                        <p:cTn id="22" dur="1" fill="hold">
                                           <p:stCondLst>
                                             <p:cond delay="0"/>
                                           </p:stCondLst>
@@ -15952,7 +13147,7 @@
                                     </p:set>
                                     <p:animEffect transition="in" filter="wipe(left)">
                                       <p:cBhvr>
-                                        <p:cTn id="22" dur="500"/>
+                                        <p:cTn id="23" dur="500"/>
                                         <p:tgtEl>
                                           <p:spTgt spid="6">
                                             <p:txEl>
@@ -15969,20 +13164,20 @@
                           </p:cTn>
                         </p:par>
                         <p:par>
-                          <p:cTn id="23" fill="hold">
+                          <p:cTn id="24" fill="hold">
                             <p:stCondLst>
-                              <p:cond delay="2000"/>
+                              <p:cond delay="2500"/>
                             </p:stCondLst>
                             <p:childTnLst>
                               <p:par>
-                                <p:cTn id="24" presetID="22" presetClass="entr" presetSubtype="8" fill="hold" grpId="0" nodeType="afterEffect">
+                                <p:cTn id="25" presetID="22" presetClass="entr" presetSubtype="8" fill="hold" grpId="0" nodeType="afterEffect">
                                   <p:stCondLst>
                                     <p:cond delay="0"/>
                                   </p:stCondLst>
                                   <p:childTnLst>
                                     <p:set>
                                       <p:cBhvr>
-                                        <p:cTn id="25" dur="1" fill="hold">
+                                        <p:cTn id="26" dur="1" fill="hold">
                                           <p:stCondLst>
                                             <p:cond delay="0"/>
                                           </p:stCondLst>
@@ -16004,7 +13199,7 @@
                                     </p:set>
                                     <p:animEffect transition="in" filter="wipe(left)">
                                       <p:cBhvr>
-                                        <p:cTn id="26" dur="500"/>
+                                        <p:cTn id="27" dur="500"/>
                                         <p:tgtEl>
                                           <p:spTgt spid="6">
                                             <p:txEl>
@@ -16021,20 +13216,20 @@
                           </p:cTn>
                         </p:par>
                         <p:par>
-                          <p:cTn id="27" fill="hold">
+                          <p:cTn id="28" fill="hold">
                             <p:stCondLst>
-                              <p:cond delay="2500"/>
+                              <p:cond delay="3000"/>
                             </p:stCondLst>
                             <p:childTnLst>
                               <p:par>
-                                <p:cTn id="28" presetID="53" presetClass="entr" presetSubtype="16" fill="hold" nodeType="afterEffect">
+                                <p:cTn id="29" presetID="53" presetClass="entr" presetSubtype="16" fill="hold" nodeType="afterEffect">
                                   <p:stCondLst>
                                     <p:cond delay="0"/>
                                   </p:stCondLst>
                                   <p:childTnLst>
                                     <p:set>
                                       <p:cBhvr>
-                                        <p:cTn id="29" dur="1" fill="hold">
+                                        <p:cTn id="30" dur="1" fill="hold">
                                           <p:stCondLst>
                                             <p:cond delay="0"/>
                                           </p:stCondLst>
@@ -16052,7 +13247,7 @@
                                     </p:set>
                                     <p:anim calcmode="lin" valueType="num">
                                       <p:cBhvr>
-                                        <p:cTn id="30" dur="500" fill="hold"/>
+                                        <p:cTn id="31" dur="500" fill="hold"/>
                                         <p:tgtEl>
                                           <p:spTgt spid="8"/>
                                         </p:tgtEl>
@@ -16075,7 +13270,7 @@
                                     </p:anim>
                                     <p:anim calcmode="lin" valueType="num">
                                       <p:cBhvr>
-                                        <p:cTn id="31" dur="500" fill="hold"/>
+                                        <p:cTn id="32" dur="500" fill="hold"/>
                                         <p:tgtEl>
                                           <p:spTgt spid="8"/>
                                         </p:tgtEl>
@@ -16098,7 +13293,7 @@
                                     </p:anim>
                                     <p:animEffect transition="in" filter="fade">
                                       <p:cBhvr>
-                                        <p:cTn id="32" dur="500"/>
+                                        <p:cTn id="33" dur="500"/>
                                         <p:tgtEl>
                                           <p:spTgt spid="8"/>
                                         </p:tgtEl>
@@ -16137,7 +13332,7 @@
     <p:bldLst>
       <p:bldP spid="4" grpId="0"/>
       <p:bldP spid="5" grpId="0"/>
-      <p:bldP spid="6" grpId="0" build="p"/>
+      <p:bldP spid="6" grpId="0" uiExpand="1" build="p"/>
     </p:bldLst>
   </p:timing>
 </p:sld>
@@ -16165,7 +13360,7 @@
           <p:cNvPr id="2" name="Title 1">
             <a:extLst>
               <a:ext uri="{FF2B5EF4-FFF2-40B4-BE49-F238E27FC236}">
-                <a16:creationId xmlns:a16="http://schemas.microsoft.com/office/drawing/2014/main" id="{D7B7EEAA-EA78-5B3D-3786-E3205A3EEE15}"/>
+                <a16:creationId xmlns:a16="http://schemas.microsoft.com/office/drawing/2014/main" id="{4A07B5F5-E096-1335-0913-15DDEFCB68CD}"/>
               </a:ext>
             </a:extLst>
           </p:cNvPr>
@@ -16176,18 +13371,15 @@
             <p:ph type="title"/>
           </p:nvPr>
         </p:nvSpPr>
-        <p:spPr>
-          <a:xfrm>
-            <a:off x="2023298" y="624110"/>
-            <a:ext cx="8911687" cy="1280890"/>
-          </a:xfrm>
-        </p:spPr>
+        <p:spPr/>
         <p:txBody>
-          <a:bodyPr/>
+          <a:bodyPr>
+            <a:normAutofit/>
+          </a:bodyPr>
           <a:lstStyle/>
           <a:p>
             <a:r>
-              <a:rPr lang="id-ID" b="1" dirty="0">
+              <a:rPr lang="id-ID" sz="4000" b="1" dirty="0">
                 <a:solidFill>
                   <a:schemeClr val="accent5">
                     <a:lumMod val="50000"/>
@@ -16196,15 +13388,22 @@
               </a:rPr>
               <a:t>MASALAH &amp; SOLUSI</a:t>
             </a:r>
+            <a:endParaRPr lang="id-ID" sz="4000" dirty="0">
+              <a:solidFill>
+                <a:schemeClr val="accent5">
+                  <a:lumMod val="50000"/>
+                </a:schemeClr>
+              </a:solidFill>
+            </a:endParaRPr>
           </a:p>
         </p:txBody>
       </p:sp>
       <p:sp>
         <p:nvSpPr>
-          <p:cNvPr id="13" name="Content Placeholder 12">
+          <p:cNvPr id="3" name="Content Placeholder 2">
             <a:extLst>
               <a:ext uri="{FF2B5EF4-FFF2-40B4-BE49-F238E27FC236}">
-                <a16:creationId xmlns:a16="http://schemas.microsoft.com/office/drawing/2014/main" id="{5DF4BD53-08CB-A0FA-B066-9676D52274D1}"/>
+                <a16:creationId xmlns:a16="http://schemas.microsoft.com/office/drawing/2014/main" id="{F84E73FA-A302-1224-3760-878C37396BD5}"/>
               </a:ext>
             </a:extLst>
           </p:cNvPr>
@@ -16217,148 +13416,26 @@
         </p:nvSpPr>
         <p:spPr>
           <a:xfrm>
-            <a:off x="2019586" y="2133600"/>
-            <a:ext cx="4313864" cy="2228538"/>
+            <a:off x="2592924" y="2123841"/>
+            <a:ext cx="4313864" cy="3777622"/>
           </a:xfrm>
         </p:spPr>
         <p:txBody>
-          <a:bodyPr>
-            <a:normAutofit/>
-          </a:bodyPr>
+          <a:bodyPr/>
           <a:lstStyle/>
           <a:p>
+            <a:pPr marL="0" indent="0">
+              <a:buNone/>
+            </a:pPr>
             <a:r>
               <a:rPr lang="id-ID" b="1" dirty="0">
                 <a:solidFill>
-                  <a:schemeClr val="accent5">
+                  <a:schemeClr val="accent6">
                     <a:lumMod val="50000"/>
                   </a:schemeClr>
                 </a:solidFill>
               </a:rPr>
               <a:t>Masalah</a:t>
-            </a:r>
-            <a:endParaRPr lang="en-US" b="1" dirty="0">
-              <a:solidFill>
-                <a:schemeClr val="accent5">
-                  <a:lumMod val="50000"/>
-                </a:schemeClr>
-              </a:solidFill>
-            </a:endParaRPr>
-          </a:p>
-          <a:p>
-            <a:pPr>
-              <a:buFont typeface="Wingdings" panose="05000000000000000000" pitchFamily="2" charset="2"/>
-              <a:buChar char="ü"/>
-            </a:pPr>
-            <a:r>
-              <a:rPr lang="en-US" dirty="0">
-                <a:solidFill>
-                  <a:schemeClr val="accent5">
-                    <a:lumMod val="50000"/>
-                  </a:schemeClr>
-                </a:solidFill>
-              </a:rPr>
-              <a:t>Banyak orang </a:t>
-            </a:r>
-            <a:r>
-              <a:rPr lang="en-US" dirty="0" err="1">
-                <a:solidFill>
-                  <a:schemeClr val="accent5">
-                    <a:lumMod val="50000"/>
-                  </a:schemeClr>
-                </a:solidFill>
-              </a:rPr>
-              <a:t>sibuk</a:t>
-            </a:r>
-            <a:r>
-              <a:rPr lang="en-US" dirty="0">
-                <a:solidFill>
-                  <a:schemeClr val="accent5">
-                    <a:lumMod val="50000"/>
-                  </a:schemeClr>
-                </a:solidFill>
-              </a:rPr>
-              <a:t> </a:t>
-            </a:r>
-            <a:r>
-              <a:rPr lang="en-US" dirty="0" err="1">
-                <a:solidFill>
-                  <a:schemeClr val="accent5">
-                    <a:lumMod val="50000"/>
-                  </a:schemeClr>
-                </a:solidFill>
-              </a:rPr>
-              <a:t>sehingga</a:t>
-            </a:r>
-            <a:r>
-              <a:rPr lang="en-US" dirty="0">
-                <a:solidFill>
-                  <a:schemeClr val="accent5">
-                    <a:lumMod val="50000"/>
-                  </a:schemeClr>
-                </a:solidFill>
-              </a:rPr>
-              <a:t> </a:t>
-            </a:r>
-            <a:r>
-              <a:rPr lang="en-US" dirty="0" err="1">
-                <a:solidFill>
-                  <a:schemeClr val="accent5">
-                    <a:lumMod val="50000"/>
-                  </a:schemeClr>
-                </a:solidFill>
-              </a:rPr>
-              <a:t>tidak</a:t>
-            </a:r>
-            <a:r>
-              <a:rPr lang="en-US" dirty="0">
-                <a:solidFill>
-                  <a:schemeClr val="accent5">
-                    <a:lumMod val="50000"/>
-                  </a:schemeClr>
-                </a:solidFill>
-              </a:rPr>
-              <a:t> </a:t>
-            </a:r>
-            <a:r>
-              <a:rPr lang="en-US" dirty="0" err="1">
-                <a:solidFill>
-                  <a:schemeClr val="accent5">
-                    <a:lumMod val="50000"/>
-                  </a:schemeClr>
-                </a:solidFill>
-              </a:rPr>
-              <a:t>sempat</a:t>
-            </a:r>
-            <a:r>
-              <a:rPr lang="en-US" dirty="0">
-                <a:solidFill>
-                  <a:schemeClr val="accent5">
-                    <a:lumMod val="50000"/>
-                  </a:schemeClr>
-                </a:solidFill>
-              </a:rPr>
-              <a:t> </a:t>
-            </a:r>
-            <a:r>
-              <a:rPr lang="en-US" dirty="0" err="1">
-                <a:solidFill>
-                  <a:schemeClr val="accent5">
-                    <a:lumMod val="50000"/>
-                  </a:schemeClr>
-                </a:solidFill>
-              </a:rPr>
-              <a:t>belanja</a:t>
-            </a:r>
-            <a:r>
-              <a:rPr lang="en-US" dirty="0">
-                <a:solidFill>
-                  <a:schemeClr val="accent5">
-                    <a:lumMod val="50000"/>
-                  </a:schemeClr>
-                </a:solidFill>
-              </a:rPr>
-              <a:t>.</a:t>
             </a:r>
           </a:p>
           <a:p>
@@ -16367,9 +13444,25 @@
               <a:buChar char="ü"/>
             </a:pPr>
             <a:r>
-              <a:rPr lang="nn-NO" dirty="0">
+              <a:rPr lang="id-ID" dirty="0">
                 <a:solidFill>
-                  <a:schemeClr val="accent5">
+                  <a:schemeClr val="accent6">
+                    <a:lumMod val="50000"/>
+                  </a:schemeClr>
+                </a:solidFill>
+              </a:rPr>
+              <a:t>Banyak orang sibuk sehingga tidak sempat belanja.</a:t>
+            </a:r>
+          </a:p>
+          <a:p>
+            <a:pPr>
+              <a:buFont typeface="Wingdings" panose="05000000000000000000" pitchFamily="2" charset="2"/>
+              <a:buChar char="ü"/>
+            </a:pPr>
+            <a:r>
+              <a:rPr lang="id-ID" dirty="0">
+                <a:solidFill>
+                  <a:schemeClr val="accent6">
                     <a:lumMod val="50000"/>
                   </a:schemeClr>
                 </a:solidFill>
@@ -16383,67 +13476,24 @@
               <a:buChar char="ü"/>
             </a:pPr>
             <a:r>
-              <a:rPr lang="en-US" dirty="0">
+              <a:rPr lang="id-ID" dirty="0">
                 <a:solidFill>
-                  <a:schemeClr val="accent5">
+                  <a:schemeClr val="accent6">
                     <a:lumMod val="50000"/>
                   </a:schemeClr>
                 </a:solidFill>
               </a:rPr>
-              <a:t>Harus antre dan </a:t>
+              <a:t>Harus antre dan menghabiskan waktu.</a:t>
             </a:r>
-            <a:r>
-              <a:rPr lang="en-US" dirty="0" err="1">
-                <a:solidFill>
-                  <a:schemeClr val="accent5">
-                    <a:lumMod val="50000"/>
-                  </a:schemeClr>
-                </a:solidFill>
-              </a:rPr>
-              <a:t>menghabiskan</a:t>
-            </a:r>
-            <a:r>
-              <a:rPr lang="en-US" dirty="0">
-                <a:solidFill>
-                  <a:schemeClr val="accent5">
-                    <a:lumMod val="50000"/>
-                  </a:schemeClr>
-                </a:solidFill>
-              </a:rPr>
-              <a:t> </a:t>
-            </a:r>
-            <a:r>
-              <a:rPr lang="en-US" dirty="0" err="1">
-                <a:solidFill>
-                  <a:schemeClr val="accent5">
-                    <a:lumMod val="50000"/>
-                  </a:schemeClr>
-                </a:solidFill>
-              </a:rPr>
-              <a:t>waktu</a:t>
-            </a:r>
-            <a:r>
-              <a:rPr lang="en-US" b="1" dirty="0">
-                <a:solidFill>
-                  <a:schemeClr val="accent5">
-                    <a:lumMod val="50000"/>
-                  </a:schemeClr>
-                </a:solidFill>
-              </a:rPr>
-              <a:t>.</a:t>
-            </a:r>
-          </a:p>
-          <a:p>
-            <a:endParaRPr lang="id-ID" dirty="0"/>
           </a:p>
         </p:txBody>
       </p:sp>
       <p:sp>
         <p:nvSpPr>
-          <p:cNvPr id="14" name="Content Placeholder 13">
+          <p:cNvPr id="4" name="Content Placeholder 3">
             <a:extLst>
               <a:ext uri="{FF2B5EF4-FFF2-40B4-BE49-F238E27FC236}">
-                <a16:creationId xmlns:a16="http://schemas.microsoft.com/office/drawing/2014/main" id="{E9BBE2A9-5AA4-DDD9-0BD4-9F45C5C9E25C}"/>
+                <a16:creationId xmlns:a16="http://schemas.microsoft.com/office/drawing/2014/main" id="{839962DC-DA73-D050-7339-7A6A187E99C7}"/>
               </a:ext>
             </a:extLst>
           </p:cNvPr>
@@ -16454,100 +13504,23 @@
             <p:ph sz="half" idx="2"/>
           </p:nvPr>
         </p:nvSpPr>
-        <p:spPr>
-          <a:xfrm>
-            <a:off x="6621121" y="2126222"/>
-            <a:ext cx="4313864" cy="2228538"/>
-          </a:xfrm>
-        </p:spPr>
+        <p:spPr/>
         <p:txBody>
-          <a:bodyPr>
-            <a:normAutofit/>
-          </a:bodyPr>
+          <a:bodyPr/>
           <a:lstStyle/>
           <a:p>
+            <a:pPr marL="0" indent="0">
+              <a:buNone/>
+            </a:pPr>
             <a:r>
               <a:rPr lang="id-ID" b="1" dirty="0">
                 <a:solidFill>
-                  <a:schemeClr val="accent5">
+                  <a:schemeClr val="accent6">
                     <a:lumMod val="50000"/>
                   </a:schemeClr>
                 </a:solidFill>
               </a:rPr>
               <a:t>Solusi FreshBox</a:t>
-            </a:r>
-            <a:endParaRPr lang="en-US" b="1" dirty="0">
-              <a:solidFill>
-                <a:schemeClr val="accent5">
-                  <a:lumMod val="50000"/>
-                </a:schemeClr>
-              </a:solidFill>
-            </a:endParaRPr>
-          </a:p>
-          <a:p>
-            <a:pPr>
-              <a:buFont typeface="Wingdings" panose="05000000000000000000" pitchFamily="2" charset="2"/>
-              <a:buChar char="ü"/>
-            </a:pPr>
-            <a:r>
-              <a:rPr lang="en-US" dirty="0" err="1">
-                <a:solidFill>
-                  <a:schemeClr val="accent5">
-                    <a:lumMod val="50000"/>
-                  </a:schemeClr>
-                </a:solidFill>
-              </a:rPr>
-              <a:t>Pesan</a:t>
-            </a:r>
-            <a:r>
-              <a:rPr lang="en-US" dirty="0">
-                <a:solidFill>
-                  <a:schemeClr val="accent5">
-                    <a:lumMod val="50000"/>
-                  </a:schemeClr>
-                </a:solidFill>
-              </a:rPr>
-              <a:t> </a:t>
-            </a:r>
-            <a:r>
-              <a:rPr lang="en-US" dirty="0" err="1">
-                <a:solidFill>
-                  <a:schemeClr val="accent5">
-                    <a:lumMod val="50000"/>
-                  </a:schemeClr>
-                </a:solidFill>
-              </a:rPr>
-              <a:t>lewat</a:t>
-            </a:r>
-            <a:r>
-              <a:rPr lang="en-US" dirty="0">
-                <a:solidFill>
-                  <a:schemeClr val="accent5">
-                    <a:lumMod val="50000"/>
-                  </a:schemeClr>
-                </a:solidFill>
-              </a:rPr>
-              <a:t> </a:t>
-            </a:r>
-            <a:r>
-              <a:rPr lang="en-US" dirty="0" err="1">
-                <a:solidFill>
-                  <a:schemeClr val="accent5">
-                    <a:lumMod val="50000"/>
-                  </a:schemeClr>
-                </a:solidFill>
-              </a:rPr>
-              <a:t>aplikasi</a:t>
-            </a:r>
-            <a:r>
-              <a:rPr lang="en-US" dirty="0">
-                <a:solidFill>
-                  <a:schemeClr val="accent5">
-                    <a:lumMod val="50000"/>
-                  </a:schemeClr>
-                </a:solidFill>
-              </a:rPr>
-              <a:t>.</a:t>
             </a:r>
           </a:p>
           <a:p>
@@ -16556,9 +13529,25 @@
               <a:buChar char="ü"/>
             </a:pPr>
             <a:r>
-              <a:rPr lang="nn-NO" dirty="0">
+              <a:rPr lang="id-ID" dirty="0">
                 <a:solidFill>
-                  <a:schemeClr val="accent5">
+                  <a:schemeClr val="accent6">
+                    <a:lumMod val="50000"/>
+                  </a:schemeClr>
+                </a:solidFill>
+              </a:rPr>
+              <a:t>Pesan lewat aplikasi.</a:t>
+            </a:r>
+          </a:p>
+          <a:p>
+            <a:pPr>
+              <a:buFont typeface="Wingdings" panose="05000000000000000000" pitchFamily="2" charset="2"/>
+              <a:buChar char="ü"/>
+            </a:pPr>
+            <a:r>
+              <a:rPr lang="id-ID" dirty="0">
+                <a:solidFill>
+                  <a:schemeClr val="accent6">
                     <a:lumMod val="50000"/>
                   </a:schemeClr>
                 </a:solidFill>
@@ -16572,45 +13561,35 @@
               <a:buChar char="ü"/>
             </a:pPr>
             <a:r>
-              <a:rPr lang="sv-SE" dirty="0">
+              <a:rPr lang="id-ID" dirty="0">
                 <a:solidFill>
-                  <a:schemeClr val="accent5">
+                  <a:schemeClr val="accent6">
                     <a:lumMod val="50000"/>
                   </a:schemeClr>
                 </a:solidFill>
               </a:rPr>
               <a:t>Diantar dalam waktu kurang dari 2 jam.</a:t>
             </a:r>
-            <a:endParaRPr lang="en-US" b="1" dirty="0">
-              <a:solidFill>
-                <a:schemeClr val="accent5">
-                  <a:lumMod val="50000"/>
-                </a:schemeClr>
-              </a:solidFill>
-            </a:endParaRPr>
-          </a:p>
-          <a:p>
-            <a:endParaRPr lang="id-ID" dirty="0"/>
           </a:p>
         </p:txBody>
       </p:sp>
     </p:spTree>
     <p:extLst>
       <p:ext uri="{BB962C8B-B14F-4D97-AF65-F5344CB8AC3E}">
-        <p14:creationId xmlns:p14="http://schemas.microsoft.com/office/powerpoint/2010/main" val="2790200910"/>
+        <p14:creationId xmlns:p14="http://schemas.microsoft.com/office/powerpoint/2010/main" val="70667620"/>
       </p:ext>
     </p:extLst>
   </p:cSld>
   <p:clrMapOvr>
     <a:masterClrMapping/>
   </p:clrMapOvr>
-  <mc:AlternateContent xmlns:mc="http://schemas.openxmlformats.org/markup-compatibility/2006">
-    <mc:Choice xmlns:p159="http://schemas.microsoft.com/office/powerpoint/2015/09/main" Requires="p159">
+  <mc:AlternateContent xmlns:mc="http://schemas.openxmlformats.org/markup-compatibility/2006" xmlns:p159="http://schemas.microsoft.com/office/powerpoint/2015/09/main">
+    <mc:Choice Requires="p159">
       <p:transition>
         <p159:morph option="byObject"/>
       </p:transition>
     </mc:Choice>
-    <mc:Fallback>
+    <mc:Fallback xmlns="">
       <p:transition>
         <p:fade/>
       </p:transition>
@@ -16697,7 +13676,7 @@
                                           </p:stCondLst>
                                         </p:cTn>
                                         <p:tgtEl>
-                                          <p:spTgt spid="13">
+                                          <p:spTgt spid="3">
                                             <p:txEl>
                                               <p:pRg st="0" end="0"/>
                                             </p:txEl>
@@ -16715,7 +13694,7 @@
                                       <p:cBhvr>
                                         <p:cTn id="11" dur="500"/>
                                         <p:tgtEl>
-                                          <p:spTgt spid="13">
+                                          <p:spTgt spid="3">
                                             <p:txEl>
                                               <p:pRg st="0" end="0"/>
                                             </p:txEl>
@@ -16749,7 +13728,7 @@
                                           </p:stCondLst>
                                         </p:cTn>
                                         <p:tgtEl>
-                                          <p:spTgt spid="13">
+                                          <p:spTgt spid="3">
                                             <p:txEl>
                                               <p:pRg st="1" end="1"/>
                                             </p:txEl>
@@ -16767,7 +13746,7 @@
                                       <p:cBhvr>
                                         <p:cTn id="15" dur="500"/>
                                         <p:tgtEl>
-                                          <p:spTgt spid="13">
+                                          <p:spTgt spid="3">
                                             <p:txEl>
                                               <p:pRg st="1" end="1"/>
                                             </p:txEl>
@@ -16801,7 +13780,7 @@
                                           </p:stCondLst>
                                         </p:cTn>
                                         <p:tgtEl>
-                                          <p:spTgt spid="13">
+                                          <p:spTgt spid="3">
                                             <p:txEl>
                                               <p:pRg st="2" end="2"/>
                                             </p:txEl>
@@ -16819,7 +13798,7 @@
                                       <p:cBhvr>
                                         <p:cTn id="19" dur="500"/>
                                         <p:tgtEl>
-                                          <p:spTgt spid="13">
+                                          <p:spTgt spid="3">
                                             <p:txEl>
                                               <p:pRg st="2" end="2"/>
                                             </p:txEl>
@@ -16853,7 +13832,7 @@
                                           </p:stCondLst>
                                         </p:cTn>
                                         <p:tgtEl>
-                                          <p:spTgt spid="13">
+                                          <p:spTgt spid="3">
                                             <p:txEl>
                                               <p:pRg st="3" end="3"/>
                                             </p:txEl>
@@ -16871,7 +13850,7 @@
                                       <p:cBhvr>
                                         <p:cTn id="23" dur="500"/>
                                         <p:tgtEl>
-                                          <p:spTgt spid="13">
+                                          <p:spTgt spid="3">
                                             <p:txEl>
                                               <p:pRg st="3" end="3"/>
                                             </p:txEl>
@@ -16905,7 +13884,7 @@
                                           </p:stCondLst>
                                         </p:cTn>
                                         <p:tgtEl>
-                                          <p:spTgt spid="14">
+                                          <p:spTgt spid="4">
                                             <p:txEl>
                                               <p:pRg st="0" end="0"/>
                                             </p:txEl>
@@ -16923,7 +13902,7 @@
                                       <p:cBhvr>
                                         <p:cTn id="27" dur="500"/>
                                         <p:tgtEl>
-                                          <p:spTgt spid="14">
+                                          <p:spTgt spid="4">
                                             <p:txEl>
                                               <p:pRg st="0" end="0"/>
                                             </p:txEl>
@@ -16957,7 +13936,7 @@
                                           </p:stCondLst>
                                         </p:cTn>
                                         <p:tgtEl>
-                                          <p:spTgt spid="14">
+                                          <p:spTgt spid="4">
                                             <p:txEl>
                                               <p:pRg st="1" end="1"/>
                                             </p:txEl>
@@ -16975,7 +13954,7 @@
                                       <p:cBhvr>
                                         <p:cTn id="31" dur="500"/>
                                         <p:tgtEl>
-                                          <p:spTgt spid="14">
+                                          <p:spTgt spid="4">
                                             <p:txEl>
                                               <p:pRg st="1" end="1"/>
                                             </p:txEl>
@@ -17009,7 +13988,7 @@
                                           </p:stCondLst>
                                         </p:cTn>
                                         <p:tgtEl>
-                                          <p:spTgt spid="14">
+                                          <p:spTgt spid="4">
                                             <p:txEl>
                                               <p:pRg st="2" end="2"/>
                                             </p:txEl>
@@ -17027,7 +14006,7 @@
                                       <p:cBhvr>
                                         <p:cTn id="35" dur="500"/>
                                         <p:tgtEl>
-                                          <p:spTgt spid="14">
+                                          <p:spTgt spid="4">
                                             <p:txEl>
                                               <p:pRg st="2" end="2"/>
                                             </p:txEl>
@@ -17061,7 +14040,7 @@
                                           </p:stCondLst>
                                         </p:cTn>
                                         <p:tgtEl>
-                                          <p:spTgt spid="14">
+                                          <p:spTgt spid="4">
                                             <p:txEl>
                                               <p:pRg st="3" end="3"/>
                                             </p:txEl>
@@ -17079,7 +14058,7 @@
                                       <p:cBhvr>
                                         <p:cTn id="39" dur="500"/>
                                         <p:tgtEl>
-                                          <p:spTgt spid="14">
+                                          <p:spTgt spid="4">
                                             <p:txEl>
                                               <p:pRg st="3" end="3"/>
                                             </p:txEl>
@@ -17119,8 +14098,8 @@
     </p:tnLst>
     <p:bldLst>
       <p:bldP spid="2" grpId="0"/>
-      <p:bldP spid="13" grpId="0" uiExpand="1" build="p"/>
-      <p:bldP spid="14" grpId="0" build="p"/>
+      <p:bldP spid="3" grpId="0" uiExpand="1" build="p"/>
+      <p:bldP spid="4" grpId="0" uiExpand="1" build="p"/>
     </p:bldLst>
   </p:timing>
 </p:sld>
@@ -17148,7 +14127,7 @@
           <p:cNvPr id="2" name="Title 1">
             <a:extLst>
               <a:ext uri="{FF2B5EF4-FFF2-40B4-BE49-F238E27FC236}">
-                <a16:creationId xmlns:a16="http://schemas.microsoft.com/office/drawing/2014/main" id="{583048EB-22BC-419B-6FD2-5D5AA9604514}"/>
+                <a16:creationId xmlns:a16="http://schemas.microsoft.com/office/drawing/2014/main" id="{CC6E1E62-9BB7-7D3A-954A-5BE9EBF7DE82}"/>
               </a:ext>
             </a:extLst>
           </p:cNvPr>
@@ -17159,12 +14138,7 @@
             <p:ph type="title"/>
           </p:nvPr>
         </p:nvSpPr>
-        <p:spPr>
-          <a:xfrm>
-            <a:off x="2083258" y="624110"/>
-            <a:ext cx="8911687" cy="844926"/>
-          </a:xfrm>
-        </p:spPr>
+        <p:spPr/>
         <p:txBody>
           <a:bodyPr>
             <a:normAutofit/>
@@ -17172,15 +14146,22 @@
           <a:lstStyle/>
           <a:p>
             <a:r>
-              <a:rPr lang="id-ID" b="1" dirty="0">
+              <a:rPr lang="id-ID" sz="4000" b="1" dirty="0">
                 <a:solidFill>
                   <a:schemeClr val="accent5">
                     <a:lumMod val="50000"/>
                   </a:schemeClr>
                 </a:solidFill>
               </a:rPr>
-              <a:t>Produk Kami</a:t>
+              <a:t>PRODUK KAMI</a:t>
             </a:r>
+            <a:endParaRPr lang="id-ID" sz="4000" dirty="0">
+              <a:solidFill>
+                <a:schemeClr val="accent5">
+                  <a:lumMod val="50000"/>
+                </a:schemeClr>
+              </a:solidFill>
+            </a:endParaRPr>
           </a:p>
         </p:txBody>
       </p:sp>
@@ -17189,7 +14170,7 @@
           <p:cNvPr id="4" name="Picture 3">
             <a:extLst>
               <a:ext uri="{FF2B5EF4-FFF2-40B4-BE49-F238E27FC236}">
-                <a16:creationId xmlns:a16="http://schemas.microsoft.com/office/drawing/2014/main" id="{C9731507-7907-E821-8179-F7CD3E98437B}"/>
+                <a16:creationId xmlns:a16="http://schemas.microsoft.com/office/drawing/2014/main" id="{B39811BB-7BC7-9B20-E0EB-F9CB0043BB7C}"/>
               </a:ext>
             </a:extLst>
           </p:cNvPr>
@@ -17205,26 +14186,23 @@
                 <a14:imgProps xmlns:a14="http://schemas.microsoft.com/office/drawing/2010/main">
                   <a14:imgLayer r:embed="rId3">
                     <a14:imgEffect>
-                      <a14:backgroundRemoval t="9313" b="96896" l="10000" r="94412">
-                        <a14:foregroundMark x1="49118" y1="64967" x2="49118" y2="64967"/>
-                        <a14:foregroundMark x1="61176" y1="55876" x2="61176" y2="55876"/>
-                        <a14:foregroundMark x1="37500" y1="55211" x2="37500" y2="55211"/>
-                        <a14:foregroundMark x1="67647" y1="66297" x2="67647" y2="66297"/>
-                        <a14:foregroundMark x1="56471" y1="73171" x2="68088" y2="39024"/>
-                        <a14:foregroundMark x1="40294" y1="80266" x2="49118" y2="32816"/>
-                        <a14:foregroundMark x1="34706" y1="75388" x2="34706" y2="40355"/>
-                        <a14:foregroundMark x1="31029" y1="19512" x2="49559" y2="19512"/>
-                        <a14:foregroundMark x1="30588" y1="17517" x2="48676" y2="18847"/>
-                        <a14:foregroundMark x1="48676" y1="18847" x2="49118" y2="18182"/>
-                        <a14:foregroundMark x1="59265" y1="11086" x2="76471" y2="15521"/>
-                        <a14:foregroundMark x1="76471" y1="15521" x2="76912" y2="16630"/>
-                        <a14:foregroundMark x1="65294" y1="9756" x2="73088" y2="9756"/>
-                        <a14:foregroundMark x1="37500" y1="15299" x2="42647" y2="15965"/>
-                        <a14:foregroundMark x1="88382" y1="48780" x2="94412" y2="46120"/>
-                        <a14:foregroundMark x1="85588" y1="96896" x2="86618" y2="94235"/>
-                        <a14:foregroundMark x1="55147" y1="66297" x2="62059" y2="43902"/>
-                        <a14:foregroundMark x1="68971" y1="76718" x2="74412" y2="53437"/>
-                        <a14:foregroundMark x1="74412" y1="53437" x2="73088" y2="32816"/>
+                      <a14:backgroundRemoval t="8426" b="94457" l="10000" r="94265">
+                        <a14:foregroundMark x1="40441" y1="76497" x2="45147" y2="26829"/>
+                        <a14:foregroundMark x1="60147" y1="69401" x2="71471" y2="25499"/>
+                        <a14:foregroundMark x1="71471" y1="25499" x2="71176" y2="11973"/>
+                        <a14:foregroundMark x1="82794" y1="94678" x2="84412" y2="77384"/>
+                        <a14:foregroundMark x1="92647" y1="52106" x2="94265" y2="43237"/>
+                        <a14:foregroundMark x1="35294" y1="38137" x2="34559" y2="67627"/>
+                        <a14:foregroundMark x1="34559" y1="67627" x2="37059" y2="82483"/>
+                        <a14:foregroundMark x1="64853" y1="28381" x2="56765" y2="62749"/>
+                        <a14:foregroundMark x1="56765" y1="62749" x2="70441" y2="39024"/>
+                        <a14:foregroundMark x1="70441" y1="39024" x2="71765" y2="27494"/>
+                        <a14:foregroundMark x1="53824" y1="72949" x2="68824" y2="62528"/>
+                        <a14:foregroundMark x1="34118" y1="16186" x2="46912" y2="17960"/>
+                        <a14:foregroundMark x1="60735" y1="8426" x2="72941" y2="12860"/>
+                        <a14:foregroundMark x1="79265" y1="80044" x2="80441" y2="75610"/>
+                        <a14:foregroundMark x1="60147" y1="8426" x2="74118" y2="12860"/>
+                        <a14:foregroundMark x1="30147" y1="21508" x2="46912" y2="16186"/>
                       </a14:backgroundRemoval>
                     </a14:imgEffect>
                   </a14:imgLayer>
@@ -17241,8 +14219,8 @@
         </p:blipFill>
         <p:spPr>
           <a:xfrm>
-            <a:off x="2083258" y="1565141"/>
-            <a:ext cx="3238501" cy="2147888"/>
+            <a:off x="2982668" y="1594337"/>
+            <a:ext cx="2591069" cy="1718488"/>
           </a:xfrm>
           <a:prstGeom prst="rect">
             <a:avLst/>
@@ -17254,7 +14232,7 @@
           <p:cNvPr id="6" name="Picture 5">
             <a:extLst>
               <a:ext uri="{FF2B5EF4-FFF2-40B4-BE49-F238E27FC236}">
-                <a16:creationId xmlns:a16="http://schemas.microsoft.com/office/drawing/2014/main" id="{7608EEBF-5184-EBE4-048E-93857FABD6A7}"/>
+                <a16:creationId xmlns:a16="http://schemas.microsoft.com/office/drawing/2014/main" id="{A9EA3D2C-CC81-5117-EDE5-EB3B184BF544}"/>
               </a:ext>
             </a:extLst>
           </p:cNvPr>
@@ -17270,11 +14248,18 @@
                 <a14:imgProps xmlns:a14="http://schemas.microsoft.com/office/drawing/2010/main">
                   <a14:imgLayer r:embed="rId5">
                     <a14:imgEffect>
-                      <a14:backgroundRemoval t="9924" b="92621" l="7379" r="92875">
-                        <a14:foregroundMark x1="68575" y1="92748" x2="68575" y2="92748"/>
-                        <a14:foregroundMark x1="7506" y1="46565" x2="7506" y2="46565"/>
-                        <a14:foregroundMark x1="92875" y1="44784" x2="92875" y2="44784"/>
-                        <a14:foregroundMark x1="44275" y1="60814" x2="44275" y2="60814"/>
+                      <a14:backgroundRemoval t="9924" b="93130" l="8779" r="95547">
+                        <a14:foregroundMark x1="8779" y1="47201" x2="9160" y2="45038"/>
+                        <a14:foregroundMark x1="52672" y1="91985" x2="64758" y2="93639"/>
+                        <a14:foregroundMark x1="64758" y1="93639" x2="73155" y2="93130"/>
+                        <a14:foregroundMark x1="73155" y1="93130" x2="63359" y2="92239"/>
+                        <a14:foregroundMark x1="43511" y1="62977" x2="45674" y2="57761"/>
+                        <a14:foregroundMark x1="92494" y1="43257" x2="90712" y2="50891"/>
+                        <a14:foregroundMark x1="95547" y1="45420" x2="95547" y2="45420"/>
+                        <a14:foregroundMark x1="20992" y1="86387" x2="20992" y2="86387"/>
+                        <a14:foregroundMark x1="33461" y1="88550" x2="33461" y2="88550"/>
+                        <a14:foregroundMark x1="54198" y1="92621" x2="54198" y2="92621"/>
+                        <a14:foregroundMark x1="54198" y1="92875" x2="54198" y2="92875"/>
                       </a14:backgroundRemoval>
                     </a14:imgEffect>
                   </a14:imgLayer>
@@ -17291,8 +14276,8 @@
         </p:blipFill>
         <p:spPr>
           <a:xfrm>
-            <a:off x="5685636" y="1225253"/>
-            <a:ext cx="2530264" cy="2530264"/>
+            <a:off x="6272268" y="1594337"/>
+            <a:ext cx="1718488" cy="1718488"/>
           </a:xfrm>
           <a:prstGeom prst="rect">
             <a:avLst/>
@@ -17301,10 +14286,10 @@
       </p:pic>
       <p:pic>
         <p:nvPicPr>
-          <p:cNvPr id="10" name="Picture 9">
+          <p:cNvPr id="8" name="Picture 7">
             <a:extLst>
               <a:ext uri="{FF2B5EF4-FFF2-40B4-BE49-F238E27FC236}">
-                <a16:creationId xmlns:a16="http://schemas.microsoft.com/office/drawing/2014/main" id="{164CF8CC-6812-8FDB-7CA3-F6984293BB88}"/>
+                <a16:creationId xmlns:a16="http://schemas.microsoft.com/office/drawing/2014/main" id="{5A52944F-A3A0-205C-EB4E-43A1170877D9}"/>
               </a:ext>
             </a:extLst>
           </p:cNvPr>
@@ -17320,21 +14305,16 @@
                 <a14:imgProps xmlns:a14="http://schemas.microsoft.com/office/drawing/2010/main">
                   <a14:imgLayer r:embed="rId7">
                     <a14:imgEffect>
-                      <a14:backgroundRemoval t="8845" b="92599" l="9928" r="89892">
-                        <a14:foregroundMark x1="46029" y1="9025" x2="46029" y2="9025"/>
-                        <a14:foregroundMark x1="26715" y1="91155" x2="26715" y2="91155"/>
-                        <a14:foregroundMark x1="54152" y1="88989" x2="54152" y2="88989"/>
-                        <a14:foregroundMark x1="43321" y1="90794" x2="58845" y2="90433"/>
-                        <a14:foregroundMark x1="16606" y1="90975" x2="24549" y2="90975"/>
-                        <a14:foregroundMark x1="64621" y1="89531" x2="80686" y2="86101"/>
-                        <a14:foregroundMark x1="75993" y1="83394" x2="81769" y2="82130"/>
-                        <a14:foregroundMark x1="70217" y1="90072" x2="83574" y2="88628"/>
-                        <a14:foregroundMark x1="32310" y1="90433" x2="44043" y2="90433"/>
-                        <a14:foregroundMark x1="18773" y1="91155" x2="35740" y2="90975"/>
-                        <a14:foregroundMark x1="33213" y1="92238" x2="16606" y2="91697"/>
-                        <a14:foregroundMark x1="14621" y1="90794" x2="16787" y2="90794"/>
-                        <a14:foregroundMark x1="12816" y1="90614" x2="18953" y2="92599"/>
-                        <a14:foregroundMark x1="81588" y1="88809" x2="86823" y2="89170"/>
+                      <a14:backgroundRemoval t="9386" b="92058" l="9928" r="89892">
+                        <a14:foregroundMark x1="16245" y1="90614" x2="56859" y2="89350"/>
+                        <a14:foregroundMark x1="56859" y1="89350" x2="68953" y2="89350"/>
+                        <a14:foregroundMark x1="68953" y1="89350" x2="81949" y2="87726"/>
+                        <a14:foregroundMark x1="81949" y1="87726" x2="74729" y2="87004"/>
+                        <a14:foregroundMark x1="85560" y1="88989" x2="68592" y2="87365"/>
+                        <a14:foregroundMark x1="37004" y1="91516" x2="18051" y2="91336"/>
+                        <a14:foregroundMark x1="28700" y1="91516" x2="25632" y2="92058"/>
+                        <a14:foregroundMark x1="31047" y1="50722" x2="33032" y2="46931"/>
+                        <a14:foregroundMark x1="47834" y1="9386" x2="51805" y2="10289"/>
                       </a14:backgroundRemoval>
                     </a14:imgEffect>
                   </a14:imgLayer>
@@ -17351,8 +14331,8 @@
         </p:blipFill>
         <p:spPr>
           <a:xfrm>
-            <a:off x="8579778" y="1319873"/>
-            <a:ext cx="2530264" cy="2530264"/>
+            <a:off x="8689287" y="1210810"/>
+            <a:ext cx="2485541" cy="2485541"/>
           </a:xfrm>
           <a:prstGeom prst="rect">
             <a:avLst/>
@@ -17361,10 +14341,10 @@
       </p:pic>
       <p:sp>
         <p:nvSpPr>
-          <p:cNvPr id="11" name="TextBox 10">
+          <p:cNvPr id="9" name="TextBox 8">
             <a:extLst>
               <a:ext uri="{FF2B5EF4-FFF2-40B4-BE49-F238E27FC236}">
-                <a16:creationId xmlns:a16="http://schemas.microsoft.com/office/drawing/2014/main" id="{3BEBCC5D-3404-40CC-E715-423B9CA173E3}"/>
+                <a16:creationId xmlns:a16="http://schemas.microsoft.com/office/drawing/2014/main" id="{EC8572EF-CA07-8E56-C59A-1312C32F9D92}"/>
               </a:ext>
             </a:extLst>
           </p:cNvPr>
@@ -17373,8 +14353,8 @@
         </p:nvSpPr>
         <p:spPr>
           <a:xfrm>
-            <a:off x="2083258" y="4077325"/>
-            <a:ext cx="9026784" cy="1477328"/>
+            <a:off x="3087974" y="4062334"/>
+            <a:ext cx="3897442" cy="2117183"/>
           </a:xfrm>
           <a:prstGeom prst="rect">
             <a:avLst/>
@@ -17387,102 +14367,91 @@
           </a:bodyPr>
           <a:lstStyle/>
           <a:p>
+            <a:pPr>
+              <a:lnSpc>
+                <a:spcPct val="150000"/>
+              </a:lnSpc>
+            </a:pPr>
             <a:r>
               <a:rPr lang="id-ID" b="1" dirty="0">
                 <a:solidFill>
-                  <a:schemeClr val="accent5">
+                  <a:schemeClr val="accent4">
                     <a:lumMod val="50000"/>
                   </a:schemeClr>
                 </a:solidFill>
               </a:rPr>
               <a:t>Fitur Utama</a:t>
             </a:r>
-            <a:endParaRPr lang="en-US" b="1" dirty="0">
-              <a:solidFill>
-                <a:schemeClr val="accent5">
-                  <a:lumMod val="50000"/>
-                </a:schemeClr>
-              </a:solidFill>
-            </a:endParaRPr>
           </a:p>
           <a:p>
             <a:pPr marL="285750" indent="-285750">
+              <a:lnSpc>
+                <a:spcPct val="150000"/>
+              </a:lnSpc>
               <a:buFont typeface="Wingdings" panose="05000000000000000000" pitchFamily="2" charset="2"/>
               <a:buChar char="ü"/>
             </a:pPr>
             <a:r>
               <a:rPr lang="id-ID" dirty="0">
                 <a:solidFill>
-                  <a:schemeClr val="accent5">
+                  <a:schemeClr val="accent4">
                     <a:lumMod val="50000"/>
                   </a:schemeClr>
                 </a:solidFill>
               </a:rPr>
               <a:t>Order online</a:t>
             </a:r>
-            <a:endParaRPr lang="en-US" dirty="0">
-              <a:solidFill>
-                <a:schemeClr val="accent5">
-                  <a:lumMod val="50000"/>
-                </a:schemeClr>
-              </a:solidFill>
-            </a:endParaRPr>
           </a:p>
           <a:p>
             <a:pPr marL="285750" indent="-285750">
+              <a:lnSpc>
+                <a:spcPct val="150000"/>
+              </a:lnSpc>
               <a:buFont typeface="Wingdings" panose="05000000000000000000" pitchFamily="2" charset="2"/>
               <a:buChar char="ü"/>
             </a:pPr>
             <a:r>
               <a:rPr lang="id-ID" dirty="0">
                 <a:solidFill>
-                  <a:schemeClr val="accent5">
+                  <a:schemeClr val="accent4">
                     <a:lumMod val="50000"/>
                   </a:schemeClr>
                 </a:solidFill>
               </a:rPr>
               <a:t>Tracking pengiriman</a:t>
             </a:r>
-            <a:endParaRPr lang="en-US" dirty="0">
-              <a:solidFill>
-                <a:schemeClr val="accent5">
-                  <a:lumMod val="50000"/>
-                </a:schemeClr>
-              </a:solidFill>
-            </a:endParaRPr>
           </a:p>
           <a:p>
             <a:pPr marL="285750" indent="-285750">
+              <a:lnSpc>
+                <a:spcPct val="150000"/>
+              </a:lnSpc>
               <a:buFont typeface="Wingdings" panose="05000000000000000000" pitchFamily="2" charset="2"/>
               <a:buChar char="ü"/>
             </a:pPr>
             <a:r>
               <a:rPr lang="id-ID" dirty="0">
                 <a:solidFill>
-                  <a:schemeClr val="accent5">
+                  <a:schemeClr val="accent4">
                     <a:lumMod val="50000"/>
                   </a:schemeClr>
                 </a:solidFill>
               </a:rPr>
               <a:t>Pembayaran digital</a:t>
             </a:r>
-            <a:endParaRPr lang="en-US" dirty="0">
-              <a:solidFill>
-                <a:schemeClr val="accent5">
-                  <a:lumMod val="50000"/>
-                </a:schemeClr>
-              </a:solidFill>
-            </a:endParaRPr>
           </a:p>
           <a:p>
             <a:pPr marL="285750" indent="-285750">
+              <a:lnSpc>
+                <a:spcPct val="150000"/>
+              </a:lnSpc>
               <a:buFont typeface="Wingdings" panose="05000000000000000000" pitchFamily="2" charset="2"/>
               <a:buChar char="ü"/>
             </a:pPr>
             <a:r>
               <a:rPr lang="id-ID" dirty="0">
                 <a:solidFill>
-                  <a:schemeClr val="accent5">
+                  <a:schemeClr val="accent4">
                     <a:lumMod val="50000"/>
                   </a:schemeClr>
                 </a:solidFill>
@@ -17495,20 +14464,20 @@
     </p:spTree>
     <p:extLst>
       <p:ext uri="{BB962C8B-B14F-4D97-AF65-F5344CB8AC3E}">
-        <p14:creationId xmlns:p14="http://schemas.microsoft.com/office/powerpoint/2010/main" val="2936241996"/>
+        <p14:creationId xmlns:p14="http://schemas.microsoft.com/office/powerpoint/2010/main" val="442032095"/>
       </p:ext>
     </p:extLst>
   </p:cSld>
   <p:clrMapOvr>
     <a:masterClrMapping/>
   </p:clrMapOvr>
-  <mc:AlternateContent xmlns:mc="http://schemas.openxmlformats.org/markup-compatibility/2006">
-    <mc:Choice xmlns:p159="http://schemas.microsoft.com/office/powerpoint/2015/09/main" Requires="p159">
+  <mc:AlternateContent xmlns:mc="http://schemas.openxmlformats.org/markup-compatibility/2006" xmlns:p159="http://schemas.microsoft.com/office/powerpoint/2015/09/main">
+    <mc:Choice Requires="p159">
       <p:transition>
         <p159:morph option="byObject"/>
       </p:transition>
     </mc:Choice>
-    <mc:Fallback>
+    <mc:Fallback xmlns="">
       <p:transition>
         <p:fade/>
       </p:transition>
@@ -17775,7 +14744,7 @@
                                           </p:stCondLst>
                                         </p:cTn>
                                         <p:tgtEl>
-                                          <p:spTgt spid="10"/>
+                                          <p:spTgt spid="8"/>
                                         </p:tgtEl>
                                         <p:attrNameLst>
                                           <p:attrName>style.visibility</p:attrName>
@@ -17789,7 +14758,7 @@
                                       <p:cBhvr>
                                         <p:cTn id="23" dur="500" fill="hold"/>
                                         <p:tgtEl>
-                                          <p:spTgt spid="10"/>
+                                          <p:spTgt spid="8"/>
                                         </p:tgtEl>
                                         <p:attrNameLst>
                                           <p:attrName>ppt_w</p:attrName>
@@ -17812,7 +14781,7 @@
                                       <p:cBhvr>
                                         <p:cTn id="24" dur="500" fill="hold"/>
                                         <p:tgtEl>
-                                          <p:spTgt spid="10"/>
+                                          <p:spTgt spid="8"/>
                                         </p:tgtEl>
                                         <p:attrNameLst>
                                           <p:attrName>ppt_h</p:attrName>
@@ -17835,7 +14804,7 @@
                                       <p:cBhvr>
                                         <p:cTn id="25" dur="500"/>
                                         <p:tgtEl>
-                                          <p:spTgt spid="10"/>
+                                          <p:spTgt spid="8"/>
                                         </p:tgtEl>
                                       </p:cBhvr>
                                     </p:animEffect>
@@ -17865,7 +14834,7 @@
                                           </p:stCondLst>
                                         </p:cTn>
                                         <p:tgtEl>
-                                          <p:spTgt spid="11">
+                                          <p:spTgt spid="9">
                                             <p:txEl>
                                               <p:pRg st="0" end="0"/>
                                             </p:txEl>
@@ -17883,7 +14852,7 @@
                                       <p:cBhvr>
                                         <p:cTn id="29" dur="500"/>
                                         <p:tgtEl>
-                                          <p:spTgt spid="11">
+                                          <p:spTgt spid="9">
                                             <p:txEl>
                                               <p:pRg st="0" end="0"/>
                                             </p:txEl>
@@ -17917,7 +14886,7 @@
                                           </p:stCondLst>
                                         </p:cTn>
                                         <p:tgtEl>
-                                          <p:spTgt spid="11">
+                                          <p:spTgt spid="9">
                                             <p:txEl>
                                               <p:pRg st="1" end="1"/>
                                             </p:txEl>
@@ -17935,7 +14904,7 @@
                                       <p:cBhvr>
                                         <p:cTn id="33" dur="500"/>
                                         <p:tgtEl>
-                                          <p:spTgt spid="11">
+                                          <p:spTgt spid="9">
                                             <p:txEl>
                                               <p:pRg st="1" end="1"/>
                                             </p:txEl>
@@ -17969,7 +14938,7 @@
                                           </p:stCondLst>
                                         </p:cTn>
                                         <p:tgtEl>
-                                          <p:spTgt spid="11">
+                                          <p:spTgt spid="9">
                                             <p:txEl>
                                               <p:pRg st="2" end="2"/>
                                             </p:txEl>
@@ -17987,7 +14956,7 @@
                                       <p:cBhvr>
                                         <p:cTn id="37" dur="500"/>
                                         <p:tgtEl>
-                                          <p:spTgt spid="11">
+                                          <p:spTgt spid="9">
                                             <p:txEl>
                                               <p:pRg st="2" end="2"/>
                                             </p:txEl>
@@ -18021,7 +14990,7 @@
                                           </p:stCondLst>
                                         </p:cTn>
                                         <p:tgtEl>
-                                          <p:spTgt spid="11">
+                                          <p:spTgt spid="9">
                                             <p:txEl>
                                               <p:pRg st="3" end="3"/>
                                             </p:txEl>
@@ -18039,7 +15008,7 @@
                                       <p:cBhvr>
                                         <p:cTn id="41" dur="500"/>
                                         <p:tgtEl>
-                                          <p:spTgt spid="11">
+                                          <p:spTgt spid="9">
                                             <p:txEl>
                                               <p:pRg st="3" end="3"/>
                                             </p:txEl>
@@ -18073,7 +15042,7 @@
                                           </p:stCondLst>
                                         </p:cTn>
                                         <p:tgtEl>
-                                          <p:spTgt spid="11">
+                                          <p:spTgt spid="9">
                                             <p:txEl>
                                               <p:pRg st="4" end="4"/>
                                             </p:txEl>
@@ -18091,7 +15060,7 @@
                                       <p:cBhvr>
                                         <p:cTn id="45" dur="500"/>
                                         <p:tgtEl>
-                                          <p:spTgt spid="11">
+                                          <p:spTgt spid="9">
                                             <p:txEl>
                                               <p:pRg st="4" end="4"/>
                                             </p:txEl>
@@ -18131,7 +15100,7 @@
     </p:tnLst>
     <p:bldLst>
       <p:bldP spid="2" grpId="0"/>
-      <p:bldP spid="11" grpId="0" build="p"/>
+      <p:bldP spid="9" grpId="0" uiExpand="1" build="p"/>
     </p:bldLst>
   </p:timing>
 </p:sld>
@@ -18159,7 +15128,7 @@
           <p:cNvPr id="2" name="Title 1">
             <a:extLst>
               <a:ext uri="{FF2B5EF4-FFF2-40B4-BE49-F238E27FC236}">
-                <a16:creationId xmlns:a16="http://schemas.microsoft.com/office/drawing/2014/main" id="{5938FBEF-0AE4-4615-2FAA-B774383CC879}"/>
+                <a16:creationId xmlns:a16="http://schemas.microsoft.com/office/drawing/2014/main" id="{455AF748-AC5E-1E6E-480A-EE925D508CF6}"/>
               </a:ext>
             </a:extLst>
           </p:cNvPr>
@@ -18170,12 +15139,7 @@
             <p:ph type="title"/>
           </p:nvPr>
         </p:nvSpPr>
-        <p:spPr>
-          <a:xfrm>
-            <a:off x="2068268" y="624110"/>
-            <a:ext cx="8911687" cy="829936"/>
-          </a:xfrm>
-        </p:spPr>
+        <p:spPr/>
         <p:txBody>
           <a:bodyPr/>
           <a:lstStyle/>
@@ -18188,17 +15152,17 @@
                   </a:schemeClr>
                 </a:solidFill>
               </a:rPr>
-              <a:t>Potensi Pasar</a:t>
+              <a:t>POTENSI PASAR</a:t>
             </a:r>
           </a:p>
         </p:txBody>
       </p:sp>
       <p:graphicFrame>
         <p:nvGraphicFramePr>
-          <p:cNvPr id="5" name="Chart 4">
+          <p:cNvPr id="9" name="Chart 8">
             <a:extLst>
               <a:ext uri="{FF2B5EF4-FFF2-40B4-BE49-F238E27FC236}">
-                <a16:creationId xmlns:a16="http://schemas.microsoft.com/office/drawing/2014/main" id="{50AA4956-B8C4-7095-7794-F04C31393D71}"/>
+                <a16:creationId xmlns:a16="http://schemas.microsoft.com/office/drawing/2014/main" id="{99FFC9B5-A226-4603-F40C-4496D6806266}"/>
               </a:ext>
             </a:extLst>
           </p:cNvPr>
@@ -18206,14 +15170,14 @@
           <p:nvPr>
             <p:extLst>
               <p:ext uri="{D42A27DB-BD31-4B8C-83A1-F6EECF244321}">
-                <p14:modId xmlns:p14="http://schemas.microsoft.com/office/powerpoint/2010/main" val="3870779862"/>
+                <p14:modId xmlns:p14="http://schemas.microsoft.com/office/powerpoint/2010/main" val="3638151071"/>
               </p:ext>
             </p:extLst>
           </p:nvPr>
         </p:nvGraphicFramePr>
         <p:xfrm>
-          <a:off x="2068267" y="1454047"/>
-          <a:ext cx="7630369" cy="3807502"/>
+          <a:off x="2032000" y="1528997"/>
+          <a:ext cx="9472611" cy="3597639"/>
         </p:xfrm>
         <a:graphic>
           <a:graphicData uri="http://schemas.openxmlformats.org/drawingml/2006/chart">
@@ -18223,10 +15187,10 @@
       </p:graphicFrame>
       <p:sp>
         <p:nvSpPr>
-          <p:cNvPr id="6" name="TextBox 5">
+          <p:cNvPr id="10" name="TextBox 9">
             <a:extLst>
               <a:ext uri="{FF2B5EF4-FFF2-40B4-BE49-F238E27FC236}">
-                <a16:creationId xmlns:a16="http://schemas.microsoft.com/office/drawing/2014/main" id="{842C80B4-82AD-C9EC-C96B-BBD3CB091098}"/>
+                <a16:creationId xmlns:a16="http://schemas.microsoft.com/office/drawing/2014/main" id="{3CE0AC63-FCFF-0127-4C92-569248988FCF}"/>
               </a:ext>
             </a:extLst>
           </p:cNvPr>
@@ -18235,8 +15199,8 @@
         </p:nvSpPr>
         <p:spPr>
           <a:xfrm>
-            <a:off x="2068267" y="5396459"/>
-            <a:ext cx="7360546" cy="923330"/>
+            <a:off x="2032000" y="5231567"/>
+            <a:ext cx="9472611" cy="923330"/>
           </a:xfrm>
           <a:prstGeom prst="rect">
             <a:avLst/>
@@ -18263,13 +15227,6 @@
               </a:rPr>
               <a:t>Pasar grocery online terus meningkat.</a:t>
             </a:r>
-            <a:endParaRPr lang="en-US" dirty="0">
-              <a:solidFill>
-                <a:schemeClr val="accent5">
-                  <a:lumMod val="50000"/>
-                </a:schemeClr>
-              </a:solidFill>
-            </a:endParaRPr>
           </a:p>
           <a:p>
             <a:pPr marL="285750" indent="-285750">
@@ -18277,7 +15234,7 @@
               <a:buChar char="ü"/>
             </a:pPr>
             <a:r>
-              <a:rPr lang="sv-SE" dirty="0">
+              <a:rPr lang="id-ID" dirty="0">
                 <a:solidFill>
                   <a:schemeClr val="accent5">
                     <a:lumMod val="50000"/>
@@ -18308,20 +15265,20 @@
     </p:spTree>
     <p:extLst>
       <p:ext uri="{BB962C8B-B14F-4D97-AF65-F5344CB8AC3E}">
-        <p14:creationId xmlns:p14="http://schemas.microsoft.com/office/powerpoint/2010/main" val="1536975876"/>
+        <p14:creationId xmlns:p14="http://schemas.microsoft.com/office/powerpoint/2010/main" val="365864113"/>
       </p:ext>
     </p:extLst>
   </p:cSld>
   <p:clrMapOvr>
     <a:masterClrMapping/>
   </p:clrMapOvr>
-  <mc:AlternateContent xmlns:mc="http://schemas.openxmlformats.org/markup-compatibility/2006">
-    <mc:Choice xmlns:p159="http://schemas.microsoft.com/office/powerpoint/2015/09/main" Requires="p159">
+  <mc:AlternateContent xmlns:mc="http://schemas.openxmlformats.org/markup-compatibility/2006" xmlns:p159="http://schemas.microsoft.com/office/powerpoint/2015/09/main">
+    <mc:Choice Requires="p159">
       <p:transition>
         <p159:morph option="byObject"/>
       </p:transition>
     </mc:Choice>
-    <mc:Fallback>
+    <mc:Fallback xmlns="">
       <p:transition>
         <p:fade/>
       </p:transition>
@@ -18408,7 +15365,11 @@
                                           </p:stCondLst>
                                         </p:cTn>
                                         <p:tgtEl>
-                                          <p:spTgt spid="5"/>
+                                          <p:spTgt spid="9">
+                                            <p:graphicEl>
+                                              <a:chart seriesIdx="-3" categoryIdx="-3" bldStep="gridLegend"/>
+                                            </p:graphicEl>
+                                          </p:spTgt>
                                         </p:tgtEl>
                                         <p:attrNameLst>
                                           <p:attrName>style.visibility</p:attrName>
@@ -18422,7 +15383,11 @@
                                       <p:cBhvr>
                                         <p:cTn id="11" dur="500"/>
                                         <p:tgtEl>
-                                          <p:spTgt spid="5"/>
+                                          <p:spTgt spid="9">
+                                            <p:graphicEl>
+                                              <a:chart seriesIdx="-3" categoryIdx="-3" bldStep="gridLegend"/>
+                                            </p:graphicEl>
+                                          </p:spTgt>
                                         </p:tgtEl>
                                       </p:cBhvr>
                                     </p:animEffect>
@@ -18439,7 +15404,7 @@
                             </p:stCondLst>
                             <p:childTnLst>
                               <p:par>
-                                <p:cTn id="13" presetID="22" presetClass="entr" presetSubtype="8" fill="hold" grpId="0" nodeType="afterEffect">
+                                <p:cTn id="13" presetID="22" presetClass="entr" presetSubtype="4" fill="hold" grpId="0" nodeType="afterEffect">
                                   <p:stCondLst>
                                     <p:cond delay="0"/>
                                   </p:stCondLst>
@@ -18452,10 +15417,10 @@
                                           </p:stCondLst>
                                         </p:cTn>
                                         <p:tgtEl>
-                                          <p:spTgt spid="6">
-                                            <p:txEl>
-                                              <p:pRg st="0" end="0"/>
-                                            </p:txEl>
+                                          <p:spTgt spid="9">
+                                            <p:graphicEl>
+                                              <a:chart seriesIdx="-4" categoryIdx="0" bldStep="category"/>
+                                            </p:graphicEl>
                                           </p:spTgt>
                                         </p:tgtEl>
                                         <p:attrNameLst>
@@ -18466,14 +15431,14 @@
                                         <p:strVal val="visible"/>
                                       </p:to>
                                     </p:set>
-                                    <p:animEffect transition="in" filter="wipe(left)">
+                                    <p:animEffect transition="in" filter="wipe(down)">
                                       <p:cBhvr>
                                         <p:cTn id="15" dur="500"/>
                                         <p:tgtEl>
-                                          <p:spTgt spid="6">
-                                            <p:txEl>
-                                              <p:pRg st="0" end="0"/>
-                                            </p:txEl>
+                                          <p:spTgt spid="9">
+                                            <p:graphicEl>
+                                              <a:chart seriesIdx="-4" categoryIdx="0" bldStep="category"/>
+                                            </p:graphicEl>
                                           </p:spTgt>
                                         </p:tgtEl>
                                       </p:cBhvr>
@@ -18491,7 +15456,7 @@
                             </p:stCondLst>
                             <p:childTnLst>
                               <p:par>
-                                <p:cTn id="17" presetID="22" presetClass="entr" presetSubtype="8" fill="hold" grpId="0" nodeType="afterEffect">
+                                <p:cTn id="17" presetID="22" presetClass="entr" presetSubtype="4" fill="hold" grpId="0" nodeType="afterEffect">
                                   <p:stCondLst>
                                     <p:cond delay="0"/>
                                   </p:stCondLst>
@@ -18504,10 +15469,10 @@
                                           </p:stCondLst>
                                         </p:cTn>
                                         <p:tgtEl>
-                                          <p:spTgt spid="6">
-                                            <p:txEl>
-                                              <p:pRg st="1" end="1"/>
-                                            </p:txEl>
+                                          <p:spTgt spid="9">
+                                            <p:graphicEl>
+                                              <a:chart seriesIdx="-4" categoryIdx="1" bldStep="category"/>
+                                            </p:graphicEl>
                                           </p:spTgt>
                                         </p:tgtEl>
                                         <p:attrNameLst>
@@ -18518,14 +15483,14 @@
                                         <p:strVal val="visible"/>
                                       </p:to>
                                     </p:set>
-                                    <p:animEffect transition="in" filter="wipe(left)">
+                                    <p:animEffect transition="in" filter="wipe(down)">
                                       <p:cBhvr>
                                         <p:cTn id="19" dur="500"/>
                                         <p:tgtEl>
-                                          <p:spTgt spid="6">
-                                            <p:txEl>
-                                              <p:pRg st="1" end="1"/>
-                                            </p:txEl>
+                                          <p:spTgt spid="9">
+                                            <p:graphicEl>
+                                              <a:chart seriesIdx="-4" categoryIdx="1" bldStep="category"/>
+                                            </p:graphicEl>
                                           </p:spTgt>
                                         </p:tgtEl>
                                       </p:cBhvr>
@@ -18543,7 +15508,7 @@
                             </p:stCondLst>
                             <p:childTnLst>
                               <p:par>
-                                <p:cTn id="21" presetID="22" presetClass="entr" presetSubtype="8" fill="hold" grpId="0" nodeType="afterEffect">
+                                <p:cTn id="21" presetID="22" presetClass="entr" presetSubtype="4" fill="hold" grpId="0" nodeType="afterEffect">
                                   <p:stCondLst>
                                     <p:cond delay="0"/>
                                   </p:stCondLst>
@@ -18556,7 +15521,215 @@
                                           </p:stCondLst>
                                         </p:cTn>
                                         <p:tgtEl>
-                                          <p:spTgt spid="6">
+                                          <p:spTgt spid="9">
+                                            <p:graphicEl>
+                                              <a:chart seriesIdx="-4" categoryIdx="2" bldStep="category"/>
+                                            </p:graphicEl>
+                                          </p:spTgt>
+                                        </p:tgtEl>
+                                        <p:attrNameLst>
+                                          <p:attrName>style.visibility</p:attrName>
+                                        </p:attrNameLst>
+                                      </p:cBhvr>
+                                      <p:to>
+                                        <p:strVal val="visible"/>
+                                      </p:to>
+                                    </p:set>
+                                    <p:animEffect transition="in" filter="wipe(down)">
+                                      <p:cBhvr>
+                                        <p:cTn id="23" dur="500"/>
+                                        <p:tgtEl>
+                                          <p:spTgt spid="9">
+                                            <p:graphicEl>
+                                              <a:chart seriesIdx="-4" categoryIdx="2" bldStep="category"/>
+                                            </p:graphicEl>
+                                          </p:spTgt>
+                                        </p:tgtEl>
+                                      </p:cBhvr>
+                                    </p:animEffect>
+                                  </p:childTnLst>
+                                </p:cTn>
+                              </p:par>
+                            </p:childTnLst>
+                          </p:cTn>
+                        </p:par>
+                        <p:par>
+                          <p:cTn id="24" fill="hold">
+                            <p:stCondLst>
+                              <p:cond delay="2500"/>
+                            </p:stCondLst>
+                            <p:childTnLst>
+                              <p:par>
+                                <p:cTn id="25" presetID="22" presetClass="entr" presetSubtype="4" fill="hold" grpId="0" nodeType="afterEffect">
+                                  <p:stCondLst>
+                                    <p:cond delay="0"/>
+                                  </p:stCondLst>
+                                  <p:childTnLst>
+                                    <p:set>
+                                      <p:cBhvr>
+                                        <p:cTn id="26" dur="1" fill="hold">
+                                          <p:stCondLst>
+                                            <p:cond delay="0"/>
+                                          </p:stCondLst>
+                                        </p:cTn>
+                                        <p:tgtEl>
+                                          <p:spTgt spid="9">
+                                            <p:graphicEl>
+                                              <a:chart seriesIdx="-4" categoryIdx="3" bldStep="category"/>
+                                            </p:graphicEl>
+                                          </p:spTgt>
+                                        </p:tgtEl>
+                                        <p:attrNameLst>
+                                          <p:attrName>style.visibility</p:attrName>
+                                        </p:attrNameLst>
+                                      </p:cBhvr>
+                                      <p:to>
+                                        <p:strVal val="visible"/>
+                                      </p:to>
+                                    </p:set>
+                                    <p:animEffect transition="in" filter="wipe(down)">
+                                      <p:cBhvr>
+                                        <p:cTn id="27" dur="500"/>
+                                        <p:tgtEl>
+                                          <p:spTgt spid="9">
+                                            <p:graphicEl>
+                                              <a:chart seriesIdx="-4" categoryIdx="3" bldStep="category"/>
+                                            </p:graphicEl>
+                                          </p:spTgt>
+                                        </p:tgtEl>
+                                      </p:cBhvr>
+                                    </p:animEffect>
+                                  </p:childTnLst>
+                                </p:cTn>
+                              </p:par>
+                            </p:childTnLst>
+                          </p:cTn>
+                        </p:par>
+                        <p:par>
+                          <p:cTn id="28" fill="hold">
+                            <p:stCondLst>
+                              <p:cond delay="3000"/>
+                            </p:stCondLst>
+                            <p:childTnLst>
+                              <p:par>
+                                <p:cTn id="29" presetID="22" presetClass="entr" presetSubtype="8" fill="hold" grpId="0" nodeType="afterEffect">
+                                  <p:stCondLst>
+                                    <p:cond delay="0"/>
+                                  </p:stCondLst>
+                                  <p:childTnLst>
+                                    <p:set>
+                                      <p:cBhvr>
+                                        <p:cTn id="30" dur="1" fill="hold">
+                                          <p:stCondLst>
+                                            <p:cond delay="0"/>
+                                          </p:stCondLst>
+                                        </p:cTn>
+                                        <p:tgtEl>
+                                          <p:spTgt spid="10">
+                                            <p:txEl>
+                                              <p:pRg st="0" end="0"/>
+                                            </p:txEl>
+                                          </p:spTgt>
+                                        </p:tgtEl>
+                                        <p:attrNameLst>
+                                          <p:attrName>style.visibility</p:attrName>
+                                        </p:attrNameLst>
+                                      </p:cBhvr>
+                                      <p:to>
+                                        <p:strVal val="visible"/>
+                                      </p:to>
+                                    </p:set>
+                                    <p:animEffect transition="in" filter="wipe(left)">
+                                      <p:cBhvr>
+                                        <p:cTn id="31" dur="750"/>
+                                        <p:tgtEl>
+                                          <p:spTgt spid="10">
+                                            <p:txEl>
+                                              <p:pRg st="0" end="0"/>
+                                            </p:txEl>
+                                          </p:spTgt>
+                                        </p:tgtEl>
+                                      </p:cBhvr>
+                                    </p:animEffect>
+                                  </p:childTnLst>
+                                </p:cTn>
+                              </p:par>
+                            </p:childTnLst>
+                          </p:cTn>
+                        </p:par>
+                        <p:par>
+                          <p:cTn id="32" fill="hold">
+                            <p:stCondLst>
+                              <p:cond delay="3750"/>
+                            </p:stCondLst>
+                            <p:childTnLst>
+                              <p:par>
+                                <p:cTn id="33" presetID="22" presetClass="entr" presetSubtype="8" fill="hold" grpId="0" nodeType="afterEffect">
+                                  <p:stCondLst>
+                                    <p:cond delay="0"/>
+                                  </p:stCondLst>
+                                  <p:childTnLst>
+                                    <p:set>
+                                      <p:cBhvr>
+                                        <p:cTn id="34" dur="1" fill="hold">
+                                          <p:stCondLst>
+                                            <p:cond delay="0"/>
+                                          </p:stCondLst>
+                                        </p:cTn>
+                                        <p:tgtEl>
+                                          <p:spTgt spid="10">
+                                            <p:txEl>
+                                              <p:pRg st="1" end="1"/>
+                                            </p:txEl>
+                                          </p:spTgt>
+                                        </p:tgtEl>
+                                        <p:attrNameLst>
+                                          <p:attrName>style.visibility</p:attrName>
+                                        </p:attrNameLst>
+                                      </p:cBhvr>
+                                      <p:to>
+                                        <p:strVal val="visible"/>
+                                      </p:to>
+                                    </p:set>
+                                    <p:animEffect transition="in" filter="wipe(left)">
+                                      <p:cBhvr>
+                                        <p:cTn id="35" dur="750"/>
+                                        <p:tgtEl>
+                                          <p:spTgt spid="10">
+                                            <p:txEl>
+                                              <p:pRg st="1" end="1"/>
+                                            </p:txEl>
+                                          </p:spTgt>
+                                        </p:tgtEl>
+                                      </p:cBhvr>
+                                    </p:animEffect>
+                                  </p:childTnLst>
+                                </p:cTn>
+                              </p:par>
+                            </p:childTnLst>
+                          </p:cTn>
+                        </p:par>
+                        <p:par>
+                          <p:cTn id="36" fill="hold">
+                            <p:stCondLst>
+                              <p:cond delay="4500"/>
+                            </p:stCondLst>
+                            <p:childTnLst>
+                              <p:par>
+                                <p:cTn id="37" presetID="22" presetClass="entr" presetSubtype="8" fill="hold" grpId="0" nodeType="afterEffect">
+                                  <p:stCondLst>
+                                    <p:cond delay="0"/>
+                                  </p:stCondLst>
+                                  <p:childTnLst>
+                                    <p:set>
+                                      <p:cBhvr>
+                                        <p:cTn id="38" dur="1" fill="hold">
+                                          <p:stCondLst>
+                                            <p:cond delay="0"/>
+                                          </p:stCondLst>
+                                        </p:cTn>
+                                        <p:tgtEl>
+                                          <p:spTgt spid="10">
                                             <p:txEl>
                                               <p:pRg st="2" end="2"/>
                                             </p:txEl>
@@ -18572,9 +15745,9 @@
                                     </p:set>
                                     <p:animEffect transition="in" filter="wipe(left)">
                                       <p:cBhvr>
-                                        <p:cTn id="23" dur="500"/>
+                                        <p:cTn id="39" dur="750"/>
                                         <p:tgtEl>
-                                          <p:spTgt spid="6">
+                                          <p:spTgt spid="10">
                                             <p:txEl>
                                               <p:pRg st="2" end="2"/>
                                             </p:txEl>
@@ -18614,10 +15787,12 @@
     </p:tnLst>
     <p:bldLst>
       <p:bldP spid="2" grpId="0"/>
-      <p:bldGraphic spid="5" grpId="0">
-        <p:bldAsOne/>
+      <p:bldGraphic spid="9" grpId="0" uiExpand="1">
+        <p:bldSub>
+          <a:bldChart bld="category"/>
+        </p:bldSub>
       </p:bldGraphic>
-      <p:bldP spid="6" grpId="0" uiExpand="1" build="p"/>
+      <p:bldP spid="10" grpId="0" uiExpand="1" build="p"/>
     </p:bldLst>
   </p:timing>
 </p:sld>
@@ -18645,7 +15820,7 @@
           <p:cNvPr id="2" name="Title 1">
             <a:extLst>
               <a:ext uri="{FF2B5EF4-FFF2-40B4-BE49-F238E27FC236}">
-                <a16:creationId xmlns:a16="http://schemas.microsoft.com/office/drawing/2014/main" id="{639490CC-FE26-B15B-3258-189765163EDA}"/>
+                <a16:creationId xmlns:a16="http://schemas.microsoft.com/office/drawing/2014/main" id="{EABD3122-40DB-50EA-626E-3C2997C71AFC}"/>
               </a:ext>
             </a:extLst>
           </p:cNvPr>
@@ -18656,57 +15831,57 @@
             <p:ph type="title"/>
           </p:nvPr>
         </p:nvSpPr>
-        <p:spPr>
-          <a:xfrm>
-            <a:off x="2038288" y="624110"/>
-            <a:ext cx="8911687" cy="1280890"/>
-          </a:xfrm>
-        </p:spPr>
+        <p:spPr/>
         <p:txBody>
-          <a:bodyPr/>
+          <a:bodyPr>
+            <a:normAutofit/>
+          </a:bodyPr>
           <a:lstStyle/>
           <a:p>
             <a:r>
-              <a:rPr lang="id-ID" b="1" dirty="0">
+              <a:rPr lang="id-ID" sz="4000" b="1" dirty="0">
                 <a:solidFill>
                   <a:schemeClr val="accent5">
                     <a:lumMod val="50000"/>
                   </a:schemeClr>
                 </a:solidFill>
               </a:rPr>
-              <a:t>Business Model</a:t>
+              <a:t>BUSINESS MODEL</a:t>
             </a:r>
           </a:p>
         </p:txBody>
       </p:sp>
       <p:sp>
         <p:nvSpPr>
-          <p:cNvPr id="3" name="TextBox 2">
+          <p:cNvPr id="3" name="Content Placeholder 2">
             <a:extLst>
               <a:ext uri="{FF2B5EF4-FFF2-40B4-BE49-F238E27FC236}">
-                <a16:creationId xmlns:a16="http://schemas.microsoft.com/office/drawing/2014/main" id="{FB5A04B1-A74F-AB66-3FA3-E170AEF8D4A8}"/>
+                <a16:creationId xmlns:a16="http://schemas.microsoft.com/office/drawing/2014/main" id="{4C7F1C0B-F345-6692-D815-139FDF7D70DC}"/>
               </a:ext>
             </a:extLst>
           </p:cNvPr>
-          <p:cNvSpPr txBox="1"/>
-          <p:nvPr/>
+          <p:cNvSpPr>
+            <a:spLocks noGrp="1"/>
+          </p:cNvSpPr>
+          <p:nvPr>
+            <p:ph sz="half" idx="1"/>
+          </p:nvPr>
         </p:nvSpPr>
         <p:spPr>
           <a:xfrm>
-            <a:off x="2143594" y="1738859"/>
-            <a:ext cx="3642609" cy="1477328"/>
+            <a:off x="2589212" y="1548984"/>
+            <a:ext cx="4313864" cy="2101004"/>
           </a:xfrm>
-          <a:prstGeom prst="rect">
-            <a:avLst/>
-          </a:prstGeom>
-          <a:noFill/>
         </p:spPr>
         <p:txBody>
-          <a:bodyPr wrap="square" rtlCol="0">
-            <a:spAutoFit/>
+          <a:bodyPr>
+            <a:normAutofit/>
           </a:bodyPr>
           <a:lstStyle/>
           <a:p>
+            <a:pPr marL="0" indent="0">
+              <a:buNone/>
+            </a:pPr>
             <a:r>
               <a:rPr lang="id-ID" b="1" dirty="0">
                 <a:solidFill>
@@ -18717,19 +15892,8 @@
               </a:rPr>
               <a:t>Sumber Pendapatan</a:t>
             </a:r>
-            <a:endParaRPr lang="en-US" b="1" dirty="0">
-              <a:solidFill>
-                <a:schemeClr val="accent5">
-                  <a:lumMod val="50000"/>
-                </a:schemeClr>
-              </a:solidFill>
-            </a:endParaRPr>
           </a:p>
           <a:p>
-            <a:pPr marL="285750" indent="-285750">
-              <a:buFont typeface="Wingdings" panose="05000000000000000000" pitchFamily="2" charset="2"/>
-              <a:buChar char="ü"/>
-            </a:pPr>
             <a:r>
               <a:rPr lang="id-ID" dirty="0">
                 <a:solidFill>
@@ -18740,19 +15904,8 @@
               </a:rPr>
               <a:t>Margin penjualan produk</a:t>
             </a:r>
-            <a:endParaRPr lang="en-US" dirty="0">
-              <a:solidFill>
-                <a:schemeClr val="accent5">
-                  <a:lumMod val="50000"/>
-                </a:schemeClr>
-              </a:solidFill>
-            </a:endParaRPr>
           </a:p>
           <a:p>
-            <a:pPr marL="285750" indent="-285750">
-              <a:buFont typeface="Wingdings" panose="05000000000000000000" pitchFamily="2" charset="2"/>
-              <a:buChar char="ü"/>
-            </a:pPr>
             <a:r>
               <a:rPr lang="id-ID" dirty="0">
                 <a:solidFill>
@@ -18763,19 +15916,8 @@
               </a:rPr>
               <a:t>Biaya pengiriman</a:t>
             </a:r>
-            <a:endParaRPr lang="en-US" dirty="0">
-              <a:solidFill>
-                <a:schemeClr val="accent5">
-                  <a:lumMod val="50000"/>
-                </a:schemeClr>
-              </a:solidFill>
-            </a:endParaRPr>
           </a:p>
           <a:p>
-            <a:pPr marL="285750" indent="-285750">
-              <a:buFont typeface="Wingdings" panose="05000000000000000000" pitchFamily="2" charset="2"/>
-              <a:buChar char="ü"/>
-            </a:pPr>
             <a:r>
               <a:rPr lang="id-ID" dirty="0">
                 <a:solidFill>
@@ -18786,19 +15928,8 @@
               </a:rPr>
               <a:t>Membership Premium</a:t>
             </a:r>
-            <a:endParaRPr lang="en-US" dirty="0">
-              <a:solidFill>
-                <a:schemeClr val="accent5">
-                  <a:lumMod val="50000"/>
-                </a:schemeClr>
-              </a:solidFill>
-            </a:endParaRPr>
           </a:p>
           <a:p>
-            <a:pPr marL="285750" indent="-285750">
-              <a:buFont typeface="Wingdings" panose="05000000000000000000" pitchFamily="2" charset="2"/>
-              <a:buChar char="ü"/>
-            </a:pPr>
             <a:r>
               <a:rPr lang="id-ID" dirty="0">
                 <a:solidFill>
@@ -18812,12 +15943,74 @@
           </a:p>
         </p:txBody>
       </p:sp>
+      <p:sp>
+        <p:nvSpPr>
+          <p:cNvPr id="4" name="Content Placeholder 3">
+            <a:extLst>
+              <a:ext uri="{FF2B5EF4-FFF2-40B4-BE49-F238E27FC236}">
+                <a16:creationId xmlns:a16="http://schemas.microsoft.com/office/drawing/2014/main" id="{5E5447D9-58ED-5431-C545-47A2BF93BE2C}"/>
+              </a:ext>
+            </a:extLst>
+          </p:cNvPr>
+          <p:cNvSpPr>
+            <a:spLocks noGrp="1"/>
+          </p:cNvSpPr>
+          <p:nvPr>
+            <p:ph sz="half" idx="2"/>
+          </p:nvPr>
+        </p:nvSpPr>
+        <p:spPr>
+          <a:xfrm>
+            <a:off x="7190747" y="1541606"/>
+            <a:ext cx="4313864" cy="2088000"/>
+          </a:xfrm>
+        </p:spPr>
+        <p:txBody>
+          <a:bodyPr>
+            <a:normAutofit/>
+          </a:bodyPr>
+          <a:lstStyle/>
+          <a:p>
+            <a:pPr marL="0" indent="0">
+              <a:buNone/>
+            </a:pPr>
+            <a:r>
+              <a:rPr lang="id-ID" b="1" dirty="0"/>
+              <a:t>Biaya Operasional</a:t>
+            </a:r>
+          </a:p>
+          <a:p>
+            <a:r>
+              <a:rPr lang="id-ID" dirty="0"/>
+              <a:t>Biaya tenaga kerja</a:t>
+            </a:r>
+          </a:p>
+          <a:p>
+            <a:r>
+              <a:rPr lang="id-ID" dirty="0"/>
+              <a:t>Biaya alat dan mesin</a:t>
+            </a:r>
+          </a:p>
+          <a:p>
+            <a:r>
+              <a:rPr lang="id-ID" dirty="0"/>
+              <a:t>Biaya sewa tempat</a:t>
+            </a:r>
+          </a:p>
+          <a:p>
+            <a:r>
+              <a:rPr lang="id-ID" dirty="0"/>
+              <a:t>Biaya listrik dan air</a:t>
+            </a:r>
+          </a:p>
+        </p:txBody>
+      </p:sp>
       <p:graphicFrame>
         <p:nvGraphicFramePr>
-          <p:cNvPr id="4" name="Table 3">
+          <p:cNvPr id="6" name="Table 5">
             <a:extLst>
               <a:ext uri="{FF2B5EF4-FFF2-40B4-BE49-F238E27FC236}">
-                <a16:creationId xmlns:a16="http://schemas.microsoft.com/office/drawing/2014/main" id="{5406A3A5-8ABF-EB7A-BADE-F220425AFA76}"/>
+                <a16:creationId xmlns:a16="http://schemas.microsoft.com/office/drawing/2014/main" id="{5F440AA2-45C7-2D48-1384-52B05E36A128}"/>
               </a:ext>
             </a:extLst>
           </p:cNvPr>
@@ -18827,13 +16020,13 @@
           <p:nvPr>
             <p:extLst>
               <p:ext uri="{D42A27DB-BD31-4B8C-83A1-F6EECF244321}">
-                <p14:modId xmlns:p14="http://schemas.microsoft.com/office/powerpoint/2010/main" val="2692182793"/>
+                <p14:modId xmlns:p14="http://schemas.microsoft.com/office/powerpoint/2010/main" val="1613064824"/>
               </p:ext>
             </p:extLst>
           </p:nvPr>
         </p:nvGraphicFramePr>
         <p:xfrm>
-          <a:off x="2143594" y="3429138"/>
+          <a:off x="2589212" y="3780521"/>
           <a:ext cx="8128000" cy="1112520"/>
         </p:xfrm>
         <a:graphic>
@@ -18846,14 +16039,14 @@
                 <a:gridCol w="4064000">
                   <a:extLst>
                     <a:ext uri="{9D8B030D-6E8A-4147-A177-3AD203B41FA5}">
-                      <a16:colId xmlns:a16="http://schemas.microsoft.com/office/drawing/2014/main" val="3850869833"/>
+                      <a16:colId xmlns:a16="http://schemas.microsoft.com/office/drawing/2014/main" val="2382014171"/>
                     </a:ext>
                   </a:extLst>
                 </a:gridCol>
                 <a:gridCol w="4064000">
                   <a:extLst>
                     <a:ext uri="{9D8B030D-6E8A-4147-A177-3AD203B41FA5}">
-                      <a16:colId xmlns:a16="http://schemas.microsoft.com/office/drawing/2014/main" val="3007704477"/>
+                      <a16:colId xmlns:a16="http://schemas.microsoft.com/office/drawing/2014/main" val="3076478727"/>
                     </a:ext>
                   </a:extLst>
                 </a:gridCol>
@@ -18865,9 +16058,10 @@
                     <a:lstStyle/>
                     <a:p>
                       <a:r>
-                        <a:rPr lang="id-ID" dirty="0"/>
-                        <a:t>Produk</a:t>
+                        <a:rPr lang="en-US" dirty="0"/>
+                        <a:t>PRODUK</a:t>
                       </a:r>
+                      <a:endParaRPr lang="id-ID" dirty="0"/>
                     </a:p>
                   </a:txBody>
                   <a:tcPr/>
@@ -18878,16 +16072,17 @@
                     <a:lstStyle/>
                     <a:p>
                       <a:r>
-                        <a:rPr lang="id-ID" dirty="0"/>
-                        <a:t>Harga</a:t>
+                        <a:rPr lang="en-US" dirty="0"/>
+                        <a:t>HARGA</a:t>
                       </a:r>
+                      <a:endParaRPr lang="id-ID" dirty="0"/>
                     </a:p>
                   </a:txBody>
                   <a:tcPr/>
                 </a:tc>
                 <a:extLst>
                   <a:ext uri="{0D108BD9-81ED-4DB2-BD59-A6C34878D82A}">
-                    <a16:rowId xmlns:a16="http://schemas.microsoft.com/office/drawing/2014/main" val="305569244"/>
+                    <a16:rowId xmlns:a16="http://schemas.microsoft.com/office/drawing/2014/main" val="1451513244"/>
                   </a:ext>
                 </a:extLst>
               </a:tr>
@@ -18898,9 +16093,10 @@
                     <a:lstStyle/>
                     <a:p>
                       <a:r>
-                        <a:rPr lang="id-ID" dirty="0"/>
+                        <a:rPr lang="en-US" dirty="0"/>
                         <a:t>Paket Sayur</a:t>
                       </a:r>
+                      <a:endParaRPr lang="id-ID" dirty="0"/>
                     </a:p>
                   </a:txBody>
                   <a:tcPr/>
@@ -18911,24 +16107,17 @@
                     <a:lstStyle/>
                     <a:p>
                       <a:r>
-                        <a:rPr lang="id-ID" dirty="0"/>
-                        <a:t>Rp</a:t>
+                        <a:rPr lang="en-US" dirty="0"/>
+                        <a:t>Rp. 50.000</a:t>
                       </a:r>
-                      <a:r>
-                        <a:rPr lang="en-US" dirty="0"/>
-                        <a:t>. </a:t>
-                      </a:r>
-                      <a:r>
-                        <a:rPr lang="id-ID" dirty="0"/>
-                        <a:t>50.000</a:t>
-                      </a:r>
+                      <a:endParaRPr lang="id-ID" dirty="0"/>
                     </a:p>
                   </a:txBody>
                   <a:tcPr/>
                 </a:tc>
                 <a:extLst>
                   <a:ext uri="{0D108BD9-81ED-4DB2-BD59-A6C34878D82A}">
-                    <a16:rowId xmlns:a16="http://schemas.microsoft.com/office/drawing/2014/main" val="121826189"/>
+                    <a16:rowId xmlns:a16="http://schemas.microsoft.com/office/drawing/2014/main" val="3868958307"/>
                   </a:ext>
                 </a:extLst>
               </a:tr>
@@ -18939,9 +16128,14 @@
                     <a:lstStyle/>
                     <a:p>
                       <a:r>
-                        <a:rPr lang="id-ID" dirty="0"/>
-                        <a:t>Biaya Kirim</a:t>
+                        <a:rPr lang="en-US" dirty="0" err="1"/>
+                        <a:t>Biaya</a:t>
                       </a:r>
+                      <a:r>
+                        <a:rPr lang="en-US" dirty="0"/>
+                        <a:t> Kirim</a:t>
+                      </a:r>
+                      <a:endParaRPr lang="id-ID" dirty="0"/>
                     </a:p>
                   </a:txBody>
                   <a:tcPr/>
@@ -18952,24 +16146,17 @@
                     <a:lstStyle/>
                     <a:p>
                       <a:r>
-                        <a:rPr lang="id-ID" dirty="0"/>
-                        <a:t>Rp</a:t>
+                        <a:rPr lang="en-US" dirty="0"/>
+                        <a:t>Rp. 10.000</a:t>
                       </a:r>
-                      <a:r>
-                        <a:rPr lang="en-US" dirty="0"/>
-                        <a:t>. </a:t>
-                      </a:r>
-                      <a:r>
-                        <a:rPr lang="id-ID" dirty="0"/>
-                        <a:t>10.000</a:t>
-                      </a:r>
+                      <a:endParaRPr lang="id-ID" dirty="0"/>
                     </a:p>
                   </a:txBody>
                   <a:tcPr/>
                 </a:tc>
                 <a:extLst>
                   <a:ext uri="{0D108BD9-81ED-4DB2-BD59-A6C34878D82A}">
-                    <a16:rowId xmlns:a16="http://schemas.microsoft.com/office/drawing/2014/main" val="987375495"/>
+                    <a16:rowId xmlns:a16="http://schemas.microsoft.com/office/drawing/2014/main" val="2207045580"/>
                   </a:ext>
                 </a:extLst>
               </a:tr>
@@ -18979,10 +16166,10 @@
       </p:graphicFrame>
       <p:sp>
         <p:nvSpPr>
-          <p:cNvPr id="5" name="TextBox 4">
+          <p:cNvPr id="7" name="TextBox 6">
             <a:extLst>
               <a:ext uri="{FF2B5EF4-FFF2-40B4-BE49-F238E27FC236}">
-                <a16:creationId xmlns:a16="http://schemas.microsoft.com/office/drawing/2014/main" id="{B4F9D91C-EB75-84E4-C519-CA436081B2CA}"/>
+                <a16:creationId xmlns:a16="http://schemas.microsoft.com/office/drawing/2014/main" id="{9AFAB1D5-F552-A616-B428-0981BE94DF4C}"/>
               </a:ext>
             </a:extLst>
           </p:cNvPr>
@@ -18991,8 +16178,8 @@
         </p:nvSpPr>
         <p:spPr>
           <a:xfrm>
-            <a:off x="2143594" y="4754609"/>
-            <a:ext cx="2529860" cy="369332"/>
+            <a:off x="2589212" y="5030952"/>
+            <a:ext cx="2603598" cy="369332"/>
           </a:xfrm>
           <a:prstGeom prst="rect">
             <a:avLst/>
@@ -19006,36 +16193,16 @@
           <a:lstStyle/>
           <a:p>
             <a:r>
-              <a:rPr lang="id-ID" dirty="0">
+              <a:rPr lang="id-ID" b="1" dirty="0">
                 <a:solidFill>
                   <a:schemeClr val="accent5">
                     <a:lumMod val="50000"/>
                   </a:schemeClr>
                 </a:solidFill>
               </a:rPr>
-              <a:t>Margin rata-rata</a:t>
+              <a:t>Margin Rata-rata 30%</a:t>
             </a:r>
-            <a:r>
-              <a:rPr lang="en-US" dirty="0">
-                <a:solidFill>
-                  <a:schemeClr val="accent5">
-                    <a:lumMod val="50000"/>
-                  </a:schemeClr>
-                </a:solidFill>
-              </a:rPr>
-              <a:t> </a:t>
-            </a:r>
-            <a:r>
-              <a:rPr lang="en-US" b="1" dirty="0">
-                <a:solidFill>
-                  <a:schemeClr val="accent5">
-                    <a:lumMod val="50000"/>
-                  </a:schemeClr>
-                </a:solidFill>
-              </a:rPr>
-              <a:t>30%</a:t>
-            </a:r>
-            <a:endParaRPr lang="id-ID" b="1" dirty="0">
+            <a:endParaRPr lang="id-ID" dirty="0">
               <a:solidFill>
                 <a:schemeClr val="accent5">
                   <a:lumMod val="50000"/>
@@ -19045,184 +16212,305 @@
           </a:p>
         </p:txBody>
       </p:sp>
-      <p:graphicFrame>
-        <p:nvGraphicFramePr>
-          <p:cNvPr id="6" name="Diagram 5">
+      <p:sp>
+        <p:nvSpPr>
+          <p:cNvPr id="8" name="Rectangle: Rounded Corners 7">
             <a:extLst>
               <a:ext uri="{FF2B5EF4-FFF2-40B4-BE49-F238E27FC236}">
-                <a16:creationId xmlns:a16="http://schemas.microsoft.com/office/drawing/2014/main" id="{7F859E85-F86F-A035-3C58-1C38B2F91B60}"/>
+                <a16:creationId xmlns:a16="http://schemas.microsoft.com/office/drawing/2014/main" id="{3EE7BA5E-518F-6BDF-409E-BF849412F957}"/>
               </a:ext>
             </a:extLst>
           </p:cNvPr>
-          <p:cNvGraphicFramePr/>
-          <p:nvPr>
-            <p:extLst>
-              <p:ext uri="{D42A27DB-BD31-4B8C-83A1-F6EECF244321}">
-                <p14:modId xmlns:p14="http://schemas.microsoft.com/office/powerpoint/2010/main" val="4177709847"/>
-              </p:ext>
-            </p:extLst>
-          </p:nvPr>
-        </p:nvGraphicFramePr>
-        <p:xfrm>
-          <a:off x="2143594" y="5336892"/>
-          <a:ext cx="8128000" cy="728904"/>
-        </p:xfrm>
-        <a:graphic>
-          <a:graphicData uri="http://schemas.openxmlformats.org/drawingml/2006/diagram">
-            <dgm:relIds xmlns:dgm="http://schemas.openxmlformats.org/drawingml/2006/diagram" xmlns:r="http://schemas.openxmlformats.org/officeDocument/2006/relationships" r:dm="rId2" r:lo="rId3" r:qs="rId4" r:cs="rId5"/>
-          </a:graphicData>
-        </a:graphic>
-      </p:graphicFrame>
-      <p:sp>
-        <p:nvSpPr>
-          <p:cNvPr id="7" name="TextBox 6">
-            <a:extLst>
-              <a:ext uri="{FF2B5EF4-FFF2-40B4-BE49-F238E27FC236}">
-                <a16:creationId xmlns:a16="http://schemas.microsoft.com/office/drawing/2014/main" id="{CCA8E00C-9A76-0621-6358-011331EB3950}"/>
-              </a:ext>
-            </a:extLst>
-          </p:cNvPr>
-          <p:cNvSpPr txBox="1"/>
+          <p:cNvSpPr/>
           <p:nvPr/>
         </p:nvSpPr>
         <p:spPr>
           <a:xfrm>
-            <a:off x="6546784" y="1738859"/>
-            <a:ext cx="3642609" cy="1477328"/>
+            <a:off x="2589212" y="5681273"/>
+            <a:ext cx="2087719" cy="614597"/>
           </a:xfrm>
-          <a:prstGeom prst="rect">
+          <a:prstGeom prst="roundRect">
             <a:avLst/>
           </a:prstGeom>
-          <a:noFill/>
+          <a:solidFill>
+            <a:schemeClr val="accent5">
+              <a:lumMod val="50000"/>
+            </a:schemeClr>
+          </a:solidFill>
+          <a:ln>
+            <a:noFill/>
+          </a:ln>
         </p:spPr>
+        <p:style>
+          <a:lnRef idx="2">
+            <a:schemeClr val="accent1">
+              <a:shade val="15000"/>
+            </a:schemeClr>
+          </a:lnRef>
+          <a:fillRef idx="1">
+            <a:schemeClr val="accent1"/>
+          </a:fillRef>
+          <a:effectRef idx="0">
+            <a:schemeClr val="accent1"/>
+          </a:effectRef>
+          <a:fontRef idx="minor">
+            <a:schemeClr val="lt1"/>
+          </a:fontRef>
+        </p:style>
         <p:txBody>
-          <a:bodyPr wrap="square" rtlCol="0">
-            <a:spAutoFit/>
-          </a:bodyPr>
+          <a:bodyPr rtlCol="0" anchor="ctr"/>
           <a:lstStyle/>
           <a:p>
+            <a:pPr algn="ctr"/>
             <a:r>
-              <a:rPr lang="id-ID" b="1" dirty="0">
-                <a:solidFill>
-                  <a:schemeClr val="accent5">
-                    <a:lumMod val="50000"/>
-                  </a:schemeClr>
-                </a:solidFill>
-              </a:rPr>
-              <a:t>Biaya Operasional</a:t>
+              <a:rPr lang="en-US" sz="2000" b="1" dirty="0"/>
+              <a:t>Supplier</a:t>
             </a:r>
-            <a:endParaRPr lang="en-US" b="1" dirty="0">
-              <a:solidFill>
-                <a:schemeClr val="accent5">
-                  <a:lumMod val="50000"/>
-                </a:schemeClr>
-              </a:solidFill>
-            </a:endParaRPr>
+            <a:endParaRPr lang="id-ID" b="1" dirty="0"/>
           </a:p>
+        </p:txBody>
+      </p:sp>
+      <p:sp>
+        <p:nvSpPr>
+          <p:cNvPr id="9" name="Rectangle: Rounded Corners 8">
+            <a:extLst>
+              <a:ext uri="{FF2B5EF4-FFF2-40B4-BE49-F238E27FC236}">
+                <a16:creationId xmlns:a16="http://schemas.microsoft.com/office/drawing/2014/main" id="{BE46560B-961E-B2EC-C3EA-9885838C82DF}"/>
+              </a:ext>
+            </a:extLst>
+          </p:cNvPr>
+          <p:cNvSpPr/>
+          <p:nvPr/>
+        </p:nvSpPr>
+        <p:spPr>
+          <a:xfrm>
+            <a:off x="5609352" y="5681273"/>
+            <a:ext cx="2087719" cy="614597"/>
+          </a:xfrm>
+          <a:prstGeom prst="roundRect">
+            <a:avLst/>
+          </a:prstGeom>
+          <a:solidFill>
+            <a:schemeClr val="accent5">
+              <a:lumMod val="50000"/>
+            </a:schemeClr>
+          </a:solidFill>
+          <a:ln>
+            <a:noFill/>
+          </a:ln>
+        </p:spPr>
+        <p:style>
+          <a:lnRef idx="2">
+            <a:schemeClr val="accent1">
+              <a:shade val="15000"/>
+            </a:schemeClr>
+          </a:lnRef>
+          <a:fillRef idx="1">
+            <a:schemeClr val="accent1"/>
+          </a:fillRef>
+          <a:effectRef idx="0">
+            <a:schemeClr val="accent1"/>
+          </a:effectRef>
+          <a:fontRef idx="minor">
+            <a:schemeClr val="lt1"/>
+          </a:fontRef>
+        </p:style>
+        <p:txBody>
+          <a:bodyPr rtlCol="0" anchor="ctr"/>
+          <a:lstStyle/>
           <a:p>
-            <a:pPr marL="285750" indent="-285750">
-              <a:buFont typeface="Wingdings" panose="05000000000000000000" pitchFamily="2" charset="2"/>
-              <a:buChar char="ü"/>
-            </a:pPr>
+            <a:pPr algn="ctr"/>
             <a:r>
-              <a:rPr lang="id-ID" dirty="0">
-                <a:solidFill>
-                  <a:schemeClr val="accent5">
-                    <a:lumMod val="50000"/>
-                  </a:schemeClr>
-                </a:solidFill>
-              </a:rPr>
-              <a:t>Biaya tenaga kerja</a:t>
+              <a:rPr lang="en-US" sz="2000" b="1" dirty="0" err="1"/>
+              <a:t>FreshBox</a:t>
             </a:r>
-            <a:endParaRPr lang="en-US" dirty="0">
-              <a:solidFill>
-                <a:schemeClr val="accent5">
-                  <a:lumMod val="50000"/>
-                </a:schemeClr>
-              </a:solidFill>
-            </a:endParaRPr>
+            <a:endParaRPr lang="id-ID" dirty="0"/>
           </a:p>
+        </p:txBody>
+      </p:sp>
+      <p:sp>
+        <p:nvSpPr>
+          <p:cNvPr id="10" name="Rectangle: Rounded Corners 9">
+            <a:extLst>
+              <a:ext uri="{FF2B5EF4-FFF2-40B4-BE49-F238E27FC236}">
+                <a16:creationId xmlns:a16="http://schemas.microsoft.com/office/drawing/2014/main" id="{07A1C42C-B29E-D352-E274-955D44A1461A}"/>
+              </a:ext>
+            </a:extLst>
+          </p:cNvPr>
+          <p:cNvSpPr/>
+          <p:nvPr/>
+        </p:nvSpPr>
+        <p:spPr>
+          <a:xfrm>
+            <a:off x="8629492" y="5681272"/>
+            <a:ext cx="2087719" cy="614597"/>
+          </a:xfrm>
+          <a:prstGeom prst="roundRect">
+            <a:avLst/>
+          </a:prstGeom>
+          <a:solidFill>
+            <a:schemeClr val="accent5">
+              <a:lumMod val="50000"/>
+            </a:schemeClr>
+          </a:solidFill>
+          <a:ln>
+            <a:noFill/>
+          </a:ln>
+        </p:spPr>
+        <p:style>
+          <a:lnRef idx="2">
+            <a:schemeClr val="accent1">
+              <a:shade val="15000"/>
+            </a:schemeClr>
+          </a:lnRef>
+          <a:fillRef idx="1">
+            <a:schemeClr val="accent1"/>
+          </a:fillRef>
+          <a:effectRef idx="0">
+            <a:schemeClr val="accent1"/>
+          </a:effectRef>
+          <a:fontRef idx="minor">
+            <a:schemeClr val="lt1"/>
+          </a:fontRef>
+        </p:style>
+        <p:txBody>
+          <a:bodyPr rtlCol="0" anchor="ctr"/>
+          <a:lstStyle/>
           <a:p>
-            <a:pPr marL="285750" indent="-285750">
-              <a:buFont typeface="Wingdings" panose="05000000000000000000" pitchFamily="2" charset="2"/>
-              <a:buChar char="ü"/>
-            </a:pPr>
+            <a:pPr algn="ctr"/>
             <a:r>
-              <a:rPr lang="id-ID" dirty="0">
-                <a:solidFill>
-                  <a:schemeClr val="accent5">
-                    <a:lumMod val="50000"/>
-                  </a:schemeClr>
-                </a:solidFill>
-              </a:rPr>
-              <a:t>Biaya alat dan mesin</a:t>
+              <a:rPr lang="en-US" sz="2000" b="1" dirty="0"/>
+              <a:t>Customer</a:t>
             </a:r>
-            <a:endParaRPr lang="en-US" dirty="0">
-              <a:solidFill>
-                <a:schemeClr val="accent5">
-                  <a:lumMod val="50000"/>
-                </a:schemeClr>
-              </a:solidFill>
-            </a:endParaRPr>
+            <a:endParaRPr lang="id-ID" b="1" dirty="0"/>
           </a:p>
+        </p:txBody>
+      </p:sp>
+      <p:sp>
+        <p:nvSpPr>
+          <p:cNvPr id="11" name="Arrow: Right 10">
+            <a:extLst>
+              <a:ext uri="{FF2B5EF4-FFF2-40B4-BE49-F238E27FC236}">
+                <a16:creationId xmlns:a16="http://schemas.microsoft.com/office/drawing/2014/main" id="{70AFA93F-294D-4E8C-904B-C80EB744D8E2}"/>
+              </a:ext>
+            </a:extLst>
+          </p:cNvPr>
+          <p:cNvSpPr/>
+          <p:nvPr/>
+        </p:nvSpPr>
+        <p:spPr>
+          <a:xfrm>
+            <a:off x="4910454" y="5681272"/>
+            <a:ext cx="479685" cy="614597"/>
+          </a:xfrm>
+          <a:prstGeom prst="rightArrow">
+            <a:avLst/>
+          </a:prstGeom>
+          <a:solidFill>
+            <a:schemeClr val="accent5">
+              <a:lumMod val="50000"/>
+            </a:schemeClr>
+          </a:solidFill>
+          <a:ln>
+            <a:noFill/>
+          </a:ln>
+        </p:spPr>
+        <p:style>
+          <a:lnRef idx="2">
+            <a:schemeClr val="accent1">
+              <a:shade val="15000"/>
+            </a:schemeClr>
+          </a:lnRef>
+          <a:fillRef idx="1">
+            <a:schemeClr val="accent1"/>
+          </a:fillRef>
+          <a:effectRef idx="0">
+            <a:schemeClr val="accent1"/>
+          </a:effectRef>
+          <a:fontRef idx="minor">
+            <a:schemeClr val="lt1"/>
+          </a:fontRef>
+        </p:style>
+        <p:txBody>
+          <a:bodyPr rtlCol="0" anchor="ctr"/>
+          <a:lstStyle/>
           <a:p>
-            <a:pPr marL="285750" indent="-285750">
-              <a:buFont typeface="Wingdings" panose="05000000000000000000" pitchFamily="2" charset="2"/>
-              <a:buChar char="ü"/>
-            </a:pPr>
-            <a:r>
-              <a:rPr lang="id-ID" dirty="0">
-                <a:solidFill>
-                  <a:schemeClr val="accent5">
-                    <a:lumMod val="50000"/>
-                  </a:schemeClr>
-                </a:solidFill>
-              </a:rPr>
-              <a:t>Biaya sewa tempat</a:t>
-            </a:r>
-            <a:endParaRPr lang="en-US" dirty="0">
-              <a:solidFill>
-                <a:schemeClr val="accent5">
-                  <a:lumMod val="50000"/>
-                </a:schemeClr>
-              </a:solidFill>
-            </a:endParaRPr>
+            <a:pPr algn="ctr"/>
+            <a:endParaRPr lang="id-ID"/>
           </a:p>
+        </p:txBody>
+      </p:sp>
+      <p:sp>
+        <p:nvSpPr>
+          <p:cNvPr id="12" name="Arrow: Right 11">
+            <a:extLst>
+              <a:ext uri="{FF2B5EF4-FFF2-40B4-BE49-F238E27FC236}">
+                <a16:creationId xmlns:a16="http://schemas.microsoft.com/office/drawing/2014/main" id="{B63DD1BC-401B-5137-C1CB-8B64F0978A52}"/>
+              </a:ext>
+            </a:extLst>
+          </p:cNvPr>
+          <p:cNvSpPr/>
+          <p:nvPr/>
+        </p:nvSpPr>
+        <p:spPr>
+          <a:xfrm>
+            <a:off x="7923439" y="5681272"/>
+            <a:ext cx="479685" cy="614597"/>
+          </a:xfrm>
+          <a:prstGeom prst="rightArrow">
+            <a:avLst/>
+          </a:prstGeom>
+          <a:solidFill>
+            <a:schemeClr val="accent5">
+              <a:lumMod val="50000"/>
+            </a:schemeClr>
+          </a:solidFill>
+          <a:ln>
+            <a:noFill/>
+          </a:ln>
+        </p:spPr>
+        <p:style>
+          <a:lnRef idx="2">
+            <a:schemeClr val="accent1">
+              <a:shade val="15000"/>
+            </a:schemeClr>
+          </a:lnRef>
+          <a:fillRef idx="1">
+            <a:schemeClr val="accent1"/>
+          </a:fillRef>
+          <a:effectRef idx="0">
+            <a:schemeClr val="accent1"/>
+          </a:effectRef>
+          <a:fontRef idx="minor">
+            <a:schemeClr val="lt1"/>
+          </a:fontRef>
+        </p:style>
+        <p:txBody>
+          <a:bodyPr rtlCol="0" anchor="ctr"/>
+          <a:lstStyle/>
           <a:p>
-            <a:pPr marL="285750" indent="-285750">
-              <a:buFont typeface="Wingdings" panose="05000000000000000000" pitchFamily="2" charset="2"/>
-              <a:buChar char="ü"/>
-            </a:pPr>
-            <a:r>
-              <a:rPr lang="id-ID" dirty="0">
-                <a:solidFill>
-                  <a:schemeClr val="accent5">
-                    <a:lumMod val="50000"/>
-                  </a:schemeClr>
-                </a:solidFill>
-              </a:rPr>
-              <a:t>Biaya listrik dan air</a:t>
-            </a:r>
+            <a:pPr algn="ctr"/>
+            <a:endParaRPr lang="id-ID"/>
           </a:p>
         </p:txBody>
       </p:sp>
     </p:spTree>
     <p:extLst>
       <p:ext uri="{BB962C8B-B14F-4D97-AF65-F5344CB8AC3E}">
-        <p14:creationId xmlns:p14="http://schemas.microsoft.com/office/powerpoint/2010/main" val="1139618390"/>
+        <p14:creationId xmlns:p14="http://schemas.microsoft.com/office/powerpoint/2010/main" val="1280359640"/>
       </p:ext>
     </p:extLst>
   </p:cSld>
   <p:clrMapOvr>
     <a:masterClrMapping/>
   </p:clrMapOvr>
-  <mc:AlternateContent xmlns:mc="http://schemas.openxmlformats.org/markup-compatibility/2006">
-    <mc:Choice xmlns:p159="http://schemas.microsoft.com/office/powerpoint/2015/09/main" Requires="p159">
+  <mc:AlternateContent xmlns:mc="http://schemas.openxmlformats.org/markup-compatibility/2006" xmlns:p159="http://schemas.microsoft.com/office/powerpoint/2015/09/main">
+    <mc:Choice Requires="p159">
       <p:transition>
         <p159:morph option="byObject"/>
       </p:transition>
     </mc:Choice>
-    <mc:Fallback>
+    <mc:Fallback xmlns="">
       <p:transition>
         <p:fade/>
       </p:transition>
@@ -19569,7 +16857,7 @@
                                           </p:stCondLst>
                                         </p:cTn>
                                         <p:tgtEl>
-                                          <p:spTgt spid="7">
+                                          <p:spTgt spid="4">
                                             <p:txEl>
                                               <p:pRg st="0" end="0"/>
                                             </p:txEl>
@@ -19587,7 +16875,7 @@
                                       <p:cBhvr>
                                         <p:cTn id="31" dur="500"/>
                                         <p:tgtEl>
-                                          <p:spTgt spid="7">
+                                          <p:spTgt spid="4">
                                             <p:txEl>
                                               <p:pRg st="0" end="0"/>
                                             </p:txEl>
@@ -19621,7 +16909,7 @@
                                           </p:stCondLst>
                                         </p:cTn>
                                         <p:tgtEl>
-                                          <p:spTgt spid="7">
+                                          <p:spTgt spid="4">
                                             <p:txEl>
                                               <p:pRg st="1" end="1"/>
                                             </p:txEl>
@@ -19639,7 +16927,7 @@
                                       <p:cBhvr>
                                         <p:cTn id="35" dur="500"/>
                                         <p:tgtEl>
-                                          <p:spTgt spid="7">
+                                          <p:spTgt spid="4">
                                             <p:txEl>
                                               <p:pRg st="1" end="1"/>
                                             </p:txEl>
@@ -19673,7 +16961,7 @@
                                           </p:stCondLst>
                                         </p:cTn>
                                         <p:tgtEl>
-                                          <p:spTgt spid="7">
+                                          <p:spTgt spid="4">
                                             <p:txEl>
                                               <p:pRg st="2" end="2"/>
                                             </p:txEl>
@@ -19691,7 +16979,7 @@
                                       <p:cBhvr>
                                         <p:cTn id="39" dur="500"/>
                                         <p:tgtEl>
-                                          <p:spTgt spid="7">
+                                          <p:spTgt spid="4">
                                             <p:txEl>
                                               <p:pRg st="2" end="2"/>
                                             </p:txEl>
@@ -19725,7 +17013,7 @@
                                           </p:stCondLst>
                                         </p:cTn>
                                         <p:tgtEl>
-                                          <p:spTgt spid="7">
+                                          <p:spTgt spid="4">
                                             <p:txEl>
                                               <p:pRg st="3" end="3"/>
                                             </p:txEl>
@@ -19743,7 +17031,7 @@
                                       <p:cBhvr>
                                         <p:cTn id="43" dur="500"/>
                                         <p:tgtEl>
-                                          <p:spTgt spid="7">
+                                          <p:spTgt spid="4">
                                             <p:txEl>
                                               <p:pRg st="3" end="3"/>
                                             </p:txEl>
@@ -19777,7 +17065,7 @@
                                           </p:stCondLst>
                                         </p:cTn>
                                         <p:tgtEl>
-                                          <p:spTgt spid="7">
+                                          <p:spTgt spid="4">
                                             <p:txEl>
                                               <p:pRg st="4" end="4"/>
                                             </p:txEl>
@@ -19795,7 +17083,7 @@
                                       <p:cBhvr>
                                         <p:cTn id="47" dur="500"/>
                                         <p:tgtEl>
-                                          <p:spTgt spid="7">
+                                          <p:spTgt spid="4">
                                             <p:txEl>
                                               <p:pRg st="4" end="4"/>
                                             </p:txEl>
@@ -19829,7 +17117,7 @@
                                           </p:stCondLst>
                                         </p:cTn>
                                         <p:tgtEl>
-                                          <p:spTgt spid="4"/>
+                                          <p:spTgt spid="6"/>
                                         </p:tgtEl>
                                         <p:attrNameLst>
                                           <p:attrName>style.visibility</p:attrName>
@@ -19843,7 +17131,7 @@
                                       <p:cBhvr>
                                         <p:cTn id="51" dur="500"/>
                                         <p:tgtEl>
-                                          <p:spTgt spid="4"/>
+                                          <p:spTgt spid="6"/>
                                         </p:tgtEl>
                                       </p:cBhvr>
                                     </p:animEffect>
@@ -19873,7 +17161,7 @@
                                           </p:stCondLst>
                                         </p:cTn>
                                         <p:tgtEl>
-                                          <p:spTgt spid="5"/>
+                                          <p:spTgt spid="7"/>
                                         </p:tgtEl>
                                         <p:attrNameLst>
                                           <p:attrName>style.visibility</p:attrName>
@@ -19887,7 +17175,7 @@
                                       <p:cBhvr>
                                         <p:cTn id="55" dur="500"/>
                                         <p:tgtEl>
-                                          <p:spTgt spid="5"/>
+                                          <p:spTgt spid="7"/>
                                         </p:tgtEl>
                                       </p:cBhvr>
                                     </p:animEffect>
@@ -19917,7 +17205,7 @@
                                           </p:stCondLst>
                                         </p:cTn>
                                         <p:tgtEl>
-                                          <p:spTgt spid="6"/>
+                                          <p:spTgt spid="8"/>
                                         </p:tgtEl>
                                         <p:attrNameLst>
                                           <p:attrName>style.visibility</p:attrName>
@@ -19929,9 +17217,185 @@
                                     </p:set>
                                     <p:animEffect transition="in" filter="wipe(left)">
                                       <p:cBhvr>
-                                        <p:cTn id="59" dur="500"/>
+                                        <p:cTn id="59" dur="250"/>
                                         <p:tgtEl>
-                                          <p:spTgt spid="6"/>
+                                          <p:spTgt spid="8"/>
+                                        </p:tgtEl>
+                                      </p:cBhvr>
+                                    </p:animEffect>
+                                  </p:childTnLst>
+                                </p:cTn>
+                              </p:par>
+                            </p:childTnLst>
+                          </p:cTn>
+                        </p:par>
+                        <p:par>
+                          <p:cTn id="60" fill="hold">
+                            <p:stCondLst>
+                              <p:cond delay="6750"/>
+                            </p:stCondLst>
+                            <p:childTnLst>
+                              <p:par>
+                                <p:cTn id="61" presetID="22" presetClass="entr" presetSubtype="8" fill="hold" grpId="0" nodeType="afterEffect">
+                                  <p:stCondLst>
+                                    <p:cond delay="0"/>
+                                  </p:stCondLst>
+                                  <p:childTnLst>
+                                    <p:set>
+                                      <p:cBhvr>
+                                        <p:cTn id="62" dur="1" fill="hold">
+                                          <p:stCondLst>
+                                            <p:cond delay="0"/>
+                                          </p:stCondLst>
+                                        </p:cTn>
+                                        <p:tgtEl>
+                                          <p:spTgt spid="11"/>
+                                        </p:tgtEl>
+                                        <p:attrNameLst>
+                                          <p:attrName>style.visibility</p:attrName>
+                                        </p:attrNameLst>
+                                      </p:cBhvr>
+                                      <p:to>
+                                        <p:strVal val="visible"/>
+                                      </p:to>
+                                    </p:set>
+                                    <p:animEffect transition="in" filter="wipe(left)">
+                                      <p:cBhvr>
+                                        <p:cTn id="63" dur="250"/>
+                                        <p:tgtEl>
+                                          <p:spTgt spid="11"/>
+                                        </p:tgtEl>
+                                      </p:cBhvr>
+                                    </p:animEffect>
+                                  </p:childTnLst>
+                                </p:cTn>
+                              </p:par>
+                            </p:childTnLst>
+                          </p:cTn>
+                        </p:par>
+                        <p:par>
+                          <p:cTn id="64" fill="hold">
+                            <p:stCondLst>
+                              <p:cond delay="7000"/>
+                            </p:stCondLst>
+                            <p:childTnLst>
+                              <p:par>
+                                <p:cTn id="65" presetID="22" presetClass="entr" presetSubtype="8" fill="hold" grpId="0" nodeType="afterEffect">
+                                  <p:stCondLst>
+                                    <p:cond delay="0"/>
+                                  </p:stCondLst>
+                                  <p:childTnLst>
+                                    <p:set>
+                                      <p:cBhvr>
+                                        <p:cTn id="66" dur="1" fill="hold">
+                                          <p:stCondLst>
+                                            <p:cond delay="0"/>
+                                          </p:stCondLst>
+                                        </p:cTn>
+                                        <p:tgtEl>
+                                          <p:spTgt spid="9"/>
+                                        </p:tgtEl>
+                                        <p:attrNameLst>
+                                          <p:attrName>style.visibility</p:attrName>
+                                        </p:attrNameLst>
+                                      </p:cBhvr>
+                                      <p:to>
+                                        <p:strVal val="visible"/>
+                                      </p:to>
+                                    </p:set>
+                                    <p:animEffect transition="in" filter="wipe(left)">
+                                      <p:cBhvr>
+                                        <p:cTn id="67" dur="250"/>
+                                        <p:tgtEl>
+                                          <p:spTgt spid="9"/>
+                                        </p:tgtEl>
+                                      </p:cBhvr>
+                                    </p:animEffect>
+                                  </p:childTnLst>
+                                </p:cTn>
+                              </p:par>
+                            </p:childTnLst>
+                          </p:cTn>
+                        </p:par>
+                        <p:par>
+                          <p:cTn id="68" fill="hold">
+                            <p:stCondLst>
+                              <p:cond delay="7250"/>
+                            </p:stCondLst>
+                            <p:childTnLst>
+                              <p:par>
+                                <p:cTn id="69" presetID="22" presetClass="entr" presetSubtype="8" fill="hold" grpId="0" nodeType="afterEffect">
+                                  <p:stCondLst>
+                                    <p:cond delay="0"/>
+                                  </p:stCondLst>
+                                  <p:childTnLst>
+                                    <p:set>
+                                      <p:cBhvr>
+                                        <p:cTn id="70" dur="1" fill="hold">
+                                          <p:stCondLst>
+                                            <p:cond delay="0"/>
+                                          </p:stCondLst>
+                                        </p:cTn>
+                                        <p:tgtEl>
+                                          <p:spTgt spid="12"/>
+                                        </p:tgtEl>
+                                        <p:attrNameLst>
+                                          <p:attrName>style.visibility</p:attrName>
+                                        </p:attrNameLst>
+                                      </p:cBhvr>
+                                      <p:to>
+                                        <p:strVal val="visible"/>
+                                      </p:to>
+                                    </p:set>
+                                    <p:animEffect transition="in" filter="wipe(left)">
+                                      <p:cBhvr>
+                                        <p:cTn id="71" dur="250"/>
+                                        <p:tgtEl>
+                                          <p:spTgt spid="12"/>
+                                        </p:tgtEl>
+                                      </p:cBhvr>
+                                    </p:animEffect>
+                                  </p:childTnLst>
+                                </p:cTn>
+                              </p:par>
+                            </p:childTnLst>
+                          </p:cTn>
+                        </p:par>
+                        <p:par>
+                          <p:cTn id="72" fill="hold">
+                            <p:stCondLst>
+                              <p:cond delay="7500"/>
+                            </p:stCondLst>
+                            <p:childTnLst>
+                              <p:par>
+                                <p:cTn id="73" presetID="22" presetClass="entr" presetSubtype="8" fill="hold" grpId="0" nodeType="afterEffect">
+                                  <p:stCondLst>
+                                    <p:cond delay="0"/>
+                                  </p:stCondLst>
+                                  <p:childTnLst>
+                                    <p:set>
+                                      <p:cBhvr>
+                                        <p:cTn id="74" dur="1" fill="hold">
+                                          <p:stCondLst>
+                                            <p:cond delay="0"/>
+                                          </p:stCondLst>
+                                        </p:cTn>
+                                        <p:tgtEl>
+                                          <p:spTgt spid="10"/>
+                                        </p:tgtEl>
+                                        <p:attrNameLst>
+                                          <p:attrName>style.visibility</p:attrName>
+                                        </p:attrNameLst>
+                                      </p:cBhvr>
+                                      <p:to>
+                                        <p:strVal val="visible"/>
+                                      </p:to>
+                                    </p:set>
+                                    <p:animEffect transition="in" filter="wipe(left)">
+                                      <p:cBhvr>
+                                        <p:cTn id="75" dur="250"/>
+                                        <p:tgtEl>
+                                          <p:spTgt spid="10"/>
                                         </p:tgtEl>
                                       </p:cBhvr>
                                     </p:animEffect>
@@ -19968,11 +17432,13 @@
     <p:bldLst>
       <p:bldP spid="2" grpId="0"/>
       <p:bldP spid="3" grpId="0" uiExpand="1" build="p"/>
-      <p:bldP spid="5" grpId="0"/>
-      <p:bldGraphic spid="6" grpId="0">
-        <p:bldAsOne/>
-      </p:bldGraphic>
-      <p:bldP spid="7" grpId="0" uiExpand="1" build="p"/>
+      <p:bldP spid="4" grpId="0" uiExpand="1" build="p"/>
+      <p:bldP spid="7" grpId="0"/>
+      <p:bldP spid="8" grpId="0" animBg="1"/>
+      <p:bldP spid="9" grpId="0" animBg="1"/>
+      <p:bldP spid="10" grpId="0" animBg="1"/>
+      <p:bldP spid="11" grpId="0" animBg="1"/>
+      <p:bldP spid="12" grpId="0" animBg="1"/>
     </p:bldLst>
   </p:timing>
 </p:sld>
@@ -20048,11 +17514,6 @@
           </p:cNvGraphicFramePr>
           <p:nvPr>
             <p:ph sz="half" idx="2"/>
-            <p:extLst>
-              <p:ext uri="{D42A27DB-BD31-4B8C-83A1-F6EECF244321}">
-                <p14:modId xmlns:p14="http://schemas.microsoft.com/office/powerpoint/2010/main" val="3417568107"/>
-              </p:ext>
-            </p:extLst>
           </p:nvPr>
         </p:nvGraphicFramePr>
         <p:xfrm>
@@ -20260,13 +17721,7 @@
             </a:extLst>
           </p:cNvPr>
           <p:cNvGraphicFramePr/>
-          <p:nvPr>
-            <p:extLst>
-              <p:ext uri="{D42A27DB-BD31-4B8C-83A1-F6EECF244321}">
-                <p14:modId xmlns:p14="http://schemas.microsoft.com/office/powerpoint/2010/main" val="4227876857"/>
-              </p:ext>
-            </p:extLst>
-          </p:nvPr>
+          <p:nvPr/>
         </p:nvGraphicFramePr>
         <p:xfrm>
           <a:off x="5676018" y="1825677"/>
@@ -20288,13 +17743,13 @@
   <p:clrMapOvr>
     <a:masterClrMapping/>
   </p:clrMapOvr>
-  <mc:AlternateContent xmlns:mc="http://schemas.openxmlformats.org/markup-compatibility/2006">
-    <mc:Choice xmlns:p159="http://schemas.microsoft.com/office/powerpoint/2015/09/main" Requires="p159">
+  <mc:AlternateContent xmlns:mc="http://schemas.openxmlformats.org/markup-compatibility/2006" xmlns:p159="http://schemas.microsoft.com/office/powerpoint/2015/09/main">
+    <mc:Choice Requires="p159">
       <p:transition>
         <p159:morph option="byObject"/>
       </p:transition>
     </mc:Choice>
-    <mc:Fallback>
+    <mc:Fallback xmlns="">
       <p:transition>
         <p:fade/>
       </p:transition>
@@ -20425,11 +17880,7 @@
                                           </p:stCondLst>
                                         </p:cTn>
                                         <p:tgtEl>
-                                          <p:spTgt spid="3">
-                                            <p:graphicEl>
-                                              <a:dgm id="{E26C24AF-F31A-4342-A2ED-E0970E0275F7}"/>
-                                            </p:graphicEl>
-                                          </p:spTgt>
+                                          <p:spTgt spid="3"/>
                                         </p:tgtEl>
                                         <p:attrNameLst>
                                           <p:attrName>style.visibility</p:attrName>
@@ -20441,533 +17892,9 @@
                                     </p:set>
                                     <p:animEffect transition="in" filter="wipe(up)">
                                       <p:cBhvr>
-                                        <p:cTn id="15" dur="500"/>
+                                        <p:cTn id="15" dur="2000"/>
                                         <p:tgtEl>
-                                          <p:spTgt spid="3">
-                                            <p:graphicEl>
-                                              <a:dgm id="{E26C24AF-F31A-4342-A2ED-E0970E0275F7}"/>
-                                            </p:graphicEl>
-                                          </p:spTgt>
-                                        </p:tgtEl>
-                                      </p:cBhvr>
-                                    </p:animEffect>
-                                  </p:childTnLst>
-                                </p:cTn>
-                              </p:par>
-                            </p:childTnLst>
-                          </p:cTn>
-                        </p:par>
-                        <p:par>
-                          <p:cTn id="16" fill="hold">
-                            <p:stCondLst>
-                              <p:cond delay="1500"/>
-                            </p:stCondLst>
-                            <p:childTnLst>
-                              <p:par>
-                                <p:cTn id="17" presetID="22" presetClass="entr" presetSubtype="1" fill="hold" grpId="0" nodeType="afterEffect">
-                                  <p:stCondLst>
-                                    <p:cond delay="0"/>
-                                  </p:stCondLst>
-                                  <p:childTnLst>
-                                    <p:set>
-                                      <p:cBhvr>
-                                        <p:cTn id="18" dur="1" fill="hold">
-                                          <p:stCondLst>
-                                            <p:cond delay="0"/>
-                                          </p:stCondLst>
-                                        </p:cTn>
-                                        <p:tgtEl>
-                                          <p:spTgt spid="3">
-                                            <p:graphicEl>
-                                              <a:dgm id="{65F724A1-5677-4B1D-8450-9FA69AEB0EE7}"/>
-                                            </p:graphicEl>
-                                          </p:spTgt>
-                                        </p:tgtEl>
-                                        <p:attrNameLst>
-                                          <p:attrName>style.visibility</p:attrName>
-                                        </p:attrNameLst>
-                                      </p:cBhvr>
-                                      <p:to>
-                                        <p:strVal val="visible"/>
-                                      </p:to>
-                                    </p:set>
-                                    <p:animEffect transition="in" filter="wipe(up)">
-                                      <p:cBhvr>
-                                        <p:cTn id="19" dur="500"/>
-                                        <p:tgtEl>
-                                          <p:spTgt spid="3">
-                                            <p:graphicEl>
-                                              <a:dgm id="{65F724A1-5677-4B1D-8450-9FA69AEB0EE7}"/>
-                                            </p:graphicEl>
-                                          </p:spTgt>
-                                        </p:tgtEl>
-                                      </p:cBhvr>
-                                    </p:animEffect>
-                                  </p:childTnLst>
-                                </p:cTn>
-                              </p:par>
-                            </p:childTnLst>
-                          </p:cTn>
-                        </p:par>
-                        <p:par>
-                          <p:cTn id="20" fill="hold">
-                            <p:stCondLst>
-                              <p:cond delay="2000"/>
-                            </p:stCondLst>
-                            <p:childTnLst>
-                              <p:par>
-                                <p:cTn id="21" presetID="22" presetClass="entr" presetSubtype="1" fill="hold" grpId="0" nodeType="afterEffect">
-                                  <p:stCondLst>
-                                    <p:cond delay="0"/>
-                                  </p:stCondLst>
-                                  <p:childTnLst>
-                                    <p:set>
-                                      <p:cBhvr>
-                                        <p:cTn id="22" dur="1" fill="hold">
-                                          <p:stCondLst>
-                                            <p:cond delay="0"/>
-                                          </p:stCondLst>
-                                        </p:cTn>
-                                        <p:tgtEl>
-                                          <p:spTgt spid="3">
-                                            <p:graphicEl>
-                                              <a:dgm id="{C3A039F2-3BB1-4F31-A224-92C956D199AB}"/>
-                                            </p:graphicEl>
-                                          </p:spTgt>
-                                        </p:tgtEl>
-                                        <p:attrNameLst>
-                                          <p:attrName>style.visibility</p:attrName>
-                                        </p:attrNameLst>
-                                      </p:cBhvr>
-                                      <p:to>
-                                        <p:strVal val="visible"/>
-                                      </p:to>
-                                    </p:set>
-                                    <p:animEffect transition="in" filter="wipe(up)">
-                                      <p:cBhvr>
-                                        <p:cTn id="23" dur="500"/>
-                                        <p:tgtEl>
-                                          <p:spTgt spid="3">
-                                            <p:graphicEl>
-                                              <a:dgm id="{C3A039F2-3BB1-4F31-A224-92C956D199AB}"/>
-                                            </p:graphicEl>
-                                          </p:spTgt>
-                                        </p:tgtEl>
-                                      </p:cBhvr>
-                                    </p:animEffect>
-                                  </p:childTnLst>
-                                </p:cTn>
-                              </p:par>
-                            </p:childTnLst>
-                          </p:cTn>
-                        </p:par>
-                        <p:par>
-                          <p:cTn id="24" fill="hold">
-                            <p:stCondLst>
-                              <p:cond delay="2500"/>
-                            </p:stCondLst>
-                            <p:childTnLst>
-                              <p:par>
-                                <p:cTn id="25" presetID="22" presetClass="entr" presetSubtype="1" fill="hold" grpId="0" nodeType="afterEffect">
-                                  <p:stCondLst>
-                                    <p:cond delay="0"/>
-                                  </p:stCondLst>
-                                  <p:childTnLst>
-                                    <p:set>
-                                      <p:cBhvr>
-                                        <p:cTn id="26" dur="1" fill="hold">
-                                          <p:stCondLst>
-                                            <p:cond delay="0"/>
-                                          </p:stCondLst>
-                                        </p:cTn>
-                                        <p:tgtEl>
-                                          <p:spTgt spid="3">
-                                            <p:graphicEl>
-                                              <a:dgm id="{C94BC069-BA8D-4140-88A8-30374D281B6D}"/>
-                                            </p:graphicEl>
-                                          </p:spTgt>
-                                        </p:tgtEl>
-                                        <p:attrNameLst>
-                                          <p:attrName>style.visibility</p:attrName>
-                                        </p:attrNameLst>
-                                      </p:cBhvr>
-                                      <p:to>
-                                        <p:strVal val="visible"/>
-                                      </p:to>
-                                    </p:set>
-                                    <p:animEffect transition="in" filter="wipe(up)">
-                                      <p:cBhvr>
-                                        <p:cTn id="27" dur="500"/>
-                                        <p:tgtEl>
-                                          <p:spTgt spid="3">
-                                            <p:graphicEl>
-                                              <a:dgm id="{C94BC069-BA8D-4140-88A8-30374D281B6D}"/>
-                                            </p:graphicEl>
-                                          </p:spTgt>
-                                        </p:tgtEl>
-                                      </p:cBhvr>
-                                    </p:animEffect>
-                                  </p:childTnLst>
-                                </p:cTn>
-                              </p:par>
-                            </p:childTnLst>
-                          </p:cTn>
-                        </p:par>
-                        <p:par>
-                          <p:cTn id="28" fill="hold">
-                            <p:stCondLst>
-                              <p:cond delay="3000"/>
-                            </p:stCondLst>
-                            <p:childTnLst>
-                              <p:par>
-                                <p:cTn id="29" presetID="22" presetClass="entr" presetSubtype="1" fill="hold" grpId="0" nodeType="afterEffect">
-                                  <p:stCondLst>
-                                    <p:cond delay="0"/>
-                                  </p:stCondLst>
-                                  <p:childTnLst>
-                                    <p:set>
-                                      <p:cBhvr>
-                                        <p:cTn id="30" dur="1" fill="hold">
-                                          <p:stCondLst>
-                                            <p:cond delay="0"/>
-                                          </p:stCondLst>
-                                        </p:cTn>
-                                        <p:tgtEl>
-                                          <p:spTgt spid="3">
-                                            <p:graphicEl>
-                                              <a:dgm id="{39011096-CF31-4590-87F0-2E6AC5750F06}"/>
-                                            </p:graphicEl>
-                                          </p:spTgt>
-                                        </p:tgtEl>
-                                        <p:attrNameLst>
-                                          <p:attrName>style.visibility</p:attrName>
-                                        </p:attrNameLst>
-                                      </p:cBhvr>
-                                      <p:to>
-                                        <p:strVal val="visible"/>
-                                      </p:to>
-                                    </p:set>
-                                    <p:animEffect transition="in" filter="wipe(up)">
-                                      <p:cBhvr>
-                                        <p:cTn id="31" dur="500"/>
-                                        <p:tgtEl>
-                                          <p:spTgt spid="3">
-                                            <p:graphicEl>
-                                              <a:dgm id="{39011096-CF31-4590-87F0-2E6AC5750F06}"/>
-                                            </p:graphicEl>
-                                          </p:spTgt>
-                                        </p:tgtEl>
-                                      </p:cBhvr>
-                                    </p:animEffect>
-                                  </p:childTnLst>
-                                </p:cTn>
-                              </p:par>
-                            </p:childTnLst>
-                          </p:cTn>
-                        </p:par>
-                        <p:par>
-                          <p:cTn id="32" fill="hold">
-                            <p:stCondLst>
-                              <p:cond delay="3500"/>
-                            </p:stCondLst>
-                            <p:childTnLst>
-                              <p:par>
-                                <p:cTn id="33" presetID="22" presetClass="entr" presetSubtype="1" fill="hold" grpId="0" nodeType="afterEffect">
-                                  <p:stCondLst>
-                                    <p:cond delay="0"/>
-                                  </p:stCondLst>
-                                  <p:childTnLst>
-                                    <p:set>
-                                      <p:cBhvr>
-                                        <p:cTn id="34" dur="1" fill="hold">
-                                          <p:stCondLst>
-                                            <p:cond delay="0"/>
-                                          </p:stCondLst>
-                                        </p:cTn>
-                                        <p:tgtEl>
-                                          <p:spTgt spid="3">
-                                            <p:graphicEl>
-                                              <a:dgm id="{C32FD7F3-FE3C-45EB-A660-40806D142DEB}"/>
-                                            </p:graphicEl>
-                                          </p:spTgt>
-                                        </p:tgtEl>
-                                        <p:attrNameLst>
-                                          <p:attrName>style.visibility</p:attrName>
-                                        </p:attrNameLst>
-                                      </p:cBhvr>
-                                      <p:to>
-                                        <p:strVal val="visible"/>
-                                      </p:to>
-                                    </p:set>
-                                    <p:animEffect transition="in" filter="wipe(up)">
-                                      <p:cBhvr>
-                                        <p:cTn id="35" dur="500"/>
-                                        <p:tgtEl>
-                                          <p:spTgt spid="3">
-                                            <p:graphicEl>
-                                              <a:dgm id="{C32FD7F3-FE3C-45EB-A660-40806D142DEB}"/>
-                                            </p:graphicEl>
-                                          </p:spTgt>
-                                        </p:tgtEl>
-                                      </p:cBhvr>
-                                    </p:animEffect>
-                                  </p:childTnLst>
-                                </p:cTn>
-                              </p:par>
-                            </p:childTnLst>
-                          </p:cTn>
-                        </p:par>
-                        <p:par>
-                          <p:cTn id="36" fill="hold">
-                            <p:stCondLst>
-                              <p:cond delay="4000"/>
-                            </p:stCondLst>
-                            <p:childTnLst>
-                              <p:par>
-                                <p:cTn id="37" presetID="22" presetClass="entr" presetSubtype="1" fill="hold" grpId="0" nodeType="afterEffect">
-                                  <p:stCondLst>
-                                    <p:cond delay="0"/>
-                                  </p:stCondLst>
-                                  <p:childTnLst>
-                                    <p:set>
-                                      <p:cBhvr>
-                                        <p:cTn id="38" dur="1" fill="hold">
-                                          <p:stCondLst>
-                                            <p:cond delay="0"/>
-                                          </p:stCondLst>
-                                        </p:cTn>
-                                        <p:tgtEl>
-                                          <p:spTgt spid="3">
-                                            <p:graphicEl>
-                                              <a:dgm id="{CBC7A6BA-DBF4-49B3-A920-D36DAB4BB02C}"/>
-                                            </p:graphicEl>
-                                          </p:spTgt>
-                                        </p:tgtEl>
-                                        <p:attrNameLst>
-                                          <p:attrName>style.visibility</p:attrName>
-                                        </p:attrNameLst>
-                                      </p:cBhvr>
-                                      <p:to>
-                                        <p:strVal val="visible"/>
-                                      </p:to>
-                                    </p:set>
-                                    <p:animEffect transition="in" filter="wipe(up)">
-                                      <p:cBhvr>
-                                        <p:cTn id="39" dur="500"/>
-                                        <p:tgtEl>
-                                          <p:spTgt spid="3">
-                                            <p:graphicEl>
-                                              <a:dgm id="{CBC7A6BA-DBF4-49B3-A920-D36DAB4BB02C}"/>
-                                            </p:graphicEl>
-                                          </p:spTgt>
-                                        </p:tgtEl>
-                                      </p:cBhvr>
-                                    </p:animEffect>
-                                  </p:childTnLst>
-                                </p:cTn>
-                              </p:par>
-                            </p:childTnLst>
-                          </p:cTn>
-                        </p:par>
-                        <p:par>
-                          <p:cTn id="40" fill="hold">
-                            <p:stCondLst>
-                              <p:cond delay="4500"/>
-                            </p:stCondLst>
-                            <p:childTnLst>
-                              <p:par>
-                                <p:cTn id="41" presetID="22" presetClass="entr" presetSubtype="1" fill="hold" grpId="0" nodeType="afterEffect">
-                                  <p:stCondLst>
-                                    <p:cond delay="0"/>
-                                  </p:stCondLst>
-                                  <p:childTnLst>
-                                    <p:set>
-                                      <p:cBhvr>
-                                        <p:cTn id="42" dur="1" fill="hold">
-                                          <p:stCondLst>
-                                            <p:cond delay="0"/>
-                                          </p:stCondLst>
-                                        </p:cTn>
-                                        <p:tgtEl>
-                                          <p:spTgt spid="3">
-                                            <p:graphicEl>
-                                              <a:dgm id="{E20DD563-4C7F-488B-98F7-449803B5E305}"/>
-                                            </p:graphicEl>
-                                          </p:spTgt>
-                                        </p:tgtEl>
-                                        <p:attrNameLst>
-                                          <p:attrName>style.visibility</p:attrName>
-                                        </p:attrNameLst>
-                                      </p:cBhvr>
-                                      <p:to>
-                                        <p:strVal val="visible"/>
-                                      </p:to>
-                                    </p:set>
-                                    <p:animEffect transition="in" filter="wipe(up)">
-                                      <p:cBhvr>
-                                        <p:cTn id="43" dur="500"/>
-                                        <p:tgtEl>
-                                          <p:spTgt spid="3">
-                                            <p:graphicEl>
-                                              <a:dgm id="{E20DD563-4C7F-488B-98F7-449803B5E305}"/>
-                                            </p:graphicEl>
-                                          </p:spTgt>
-                                        </p:tgtEl>
-                                      </p:cBhvr>
-                                    </p:animEffect>
-                                  </p:childTnLst>
-                                </p:cTn>
-                              </p:par>
-                            </p:childTnLst>
-                          </p:cTn>
-                        </p:par>
-                        <p:par>
-                          <p:cTn id="44" fill="hold">
-                            <p:stCondLst>
-                              <p:cond delay="5000"/>
-                            </p:stCondLst>
-                            <p:childTnLst>
-                              <p:par>
-                                <p:cTn id="45" presetID="22" presetClass="entr" presetSubtype="1" fill="hold" grpId="0" nodeType="afterEffect">
-                                  <p:stCondLst>
-                                    <p:cond delay="0"/>
-                                  </p:stCondLst>
-                                  <p:childTnLst>
-                                    <p:set>
-                                      <p:cBhvr>
-                                        <p:cTn id="46" dur="1" fill="hold">
-                                          <p:stCondLst>
-                                            <p:cond delay="0"/>
-                                          </p:stCondLst>
-                                        </p:cTn>
-                                        <p:tgtEl>
-                                          <p:spTgt spid="3">
-                                            <p:graphicEl>
-                                              <a:dgm id="{AF7E8FEA-80E2-4306-BB24-9AF4B3C5DAB0}"/>
-                                            </p:graphicEl>
-                                          </p:spTgt>
-                                        </p:tgtEl>
-                                        <p:attrNameLst>
-                                          <p:attrName>style.visibility</p:attrName>
-                                        </p:attrNameLst>
-                                      </p:cBhvr>
-                                      <p:to>
-                                        <p:strVal val="visible"/>
-                                      </p:to>
-                                    </p:set>
-                                    <p:animEffect transition="in" filter="wipe(up)">
-                                      <p:cBhvr>
-                                        <p:cTn id="47" dur="500"/>
-                                        <p:tgtEl>
-                                          <p:spTgt spid="3">
-                                            <p:graphicEl>
-                                              <a:dgm id="{AF7E8FEA-80E2-4306-BB24-9AF4B3C5DAB0}"/>
-                                            </p:graphicEl>
-                                          </p:spTgt>
-                                        </p:tgtEl>
-                                      </p:cBhvr>
-                                    </p:animEffect>
-                                  </p:childTnLst>
-                                </p:cTn>
-                              </p:par>
-                            </p:childTnLst>
-                          </p:cTn>
-                        </p:par>
-                        <p:par>
-                          <p:cTn id="48" fill="hold">
-                            <p:stCondLst>
-                              <p:cond delay="5500"/>
-                            </p:stCondLst>
-                            <p:childTnLst>
-                              <p:par>
-                                <p:cTn id="49" presetID="22" presetClass="entr" presetSubtype="1" fill="hold" grpId="0" nodeType="afterEffect">
-                                  <p:stCondLst>
-                                    <p:cond delay="0"/>
-                                  </p:stCondLst>
-                                  <p:childTnLst>
-                                    <p:set>
-                                      <p:cBhvr>
-                                        <p:cTn id="50" dur="1" fill="hold">
-                                          <p:stCondLst>
-                                            <p:cond delay="0"/>
-                                          </p:stCondLst>
-                                        </p:cTn>
-                                        <p:tgtEl>
-                                          <p:spTgt spid="3">
-                                            <p:graphicEl>
-                                              <a:dgm id="{4B5B8D77-5B5F-4048-8685-7AB41802E6E5}"/>
-                                            </p:graphicEl>
-                                          </p:spTgt>
-                                        </p:tgtEl>
-                                        <p:attrNameLst>
-                                          <p:attrName>style.visibility</p:attrName>
-                                        </p:attrNameLst>
-                                      </p:cBhvr>
-                                      <p:to>
-                                        <p:strVal val="visible"/>
-                                      </p:to>
-                                    </p:set>
-                                    <p:animEffect transition="in" filter="wipe(up)">
-                                      <p:cBhvr>
-                                        <p:cTn id="51" dur="500"/>
-                                        <p:tgtEl>
-                                          <p:spTgt spid="3">
-                                            <p:graphicEl>
-                                              <a:dgm id="{4B5B8D77-5B5F-4048-8685-7AB41802E6E5}"/>
-                                            </p:graphicEl>
-                                          </p:spTgt>
-                                        </p:tgtEl>
-                                      </p:cBhvr>
-                                    </p:animEffect>
-                                  </p:childTnLst>
-                                </p:cTn>
-                              </p:par>
-                            </p:childTnLst>
-                          </p:cTn>
-                        </p:par>
-                        <p:par>
-                          <p:cTn id="52" fill="hold">
-                            <p:stCondLst>
-                              <p:cond delay="6000"/>
-                            </p:stCondLst>
-                            <p:childTnLst>
-                              <p:par>
-                                <p:cTn id="53" presetID="22" presetClass="entr" presetSubtype="1" fill="hold" grpId="0" nodeType="afterEffect">
-                                  <p:stCondLst>
-                                    <p:cond delay="0"/>
-                                  </p:stCondLst>
-                                  <p:childTnLst>
-                                    <p:set>
-                                      <p:cBhvr>
-                                        <p:cTn id="54" dur="1" fill="hold">
-                                          <p:stCondLst>
-                                            <p:cond delay="0"/>
-                                          </p:stCondLst>
-                                        </p:cTn>
-                                        <p:tgtEl>
-                                          <p:spTgt spid="3">
-                                            <p:graphicEl>
-                                              <a:dgm id="{87B44B90-0C7D-4F22-825A-52F34EFE71E4}"/>
-                                            </p:graphicEl>
-                                          </p:spTgt>
-                                        </p:tgtEl>
-                                        <p:attrNameLst>
-                                          <p:attrName>style.visibility</p:attrName>
-                                        </p:attrNameLst>
-                                      </p:cBhvr>
-                                      <p:to>
-                                        <p:strVal val="visible"/>
-                                      </p:to>
-                                    </p:set>
-                                    <p:animEffect transition="in" filter="wipe(up)">
-                                      <p:cBhvr>
-                                        <p:cTn id="55" dur="500"/>
-                                        <p:tgtEl>
-                                          <p:spTgt spid="3">
-                                            <p:graphicEl>
-                                              <a:dgm id="{87B44B90-0C7D-4F22-825A-52F34EFE71E4}"/>
-                                            </p:graphicEl>
-                                          </p:spTgt>
+                                          <p:spTgt spid="3"/>
                                         </p:tgtEl>
                                       </p:cBhvr>
                                     </p:animEffect>
@@ -21004,9 +17931,7 @@
     <p:bldLst>
       <p:bldP spid="2" grpId="0"/>
       <p:bldGraphic spid="3" grpId="0">
-        <p:bldSub>
-          <a:bldDgm bld="lvlOne"/>
-        </p:bldSub>
+        <p:bldAsOne/>
       </p:bldGraphic>
     </p:bldLst>
   </p:timing>
@@ -21363,13 +18288,13 @@
   <p:clrMapOvr>
     <a:masterClrMapping/>
   </p:clrMapOvr>
-  <mc:AlternateContent xmlns:mc="http://schemas.openxmlformats.org/markup-compatibility/2006">
-    <mc:Choice xmlns:p159="http://schemas.microsoft.com/office/powerpoint/2015/09/main" Requires="p159">
+  <mc:AlternateContent xmlns:mc="http://schemas.openxmlformats.org/markup-compatibility/2006" xmlns:p159="http://schemas.microsoft.com/office/powerpoint/2015/09/main">
+    <mc:Choice Requires="p159">
       <p:transition>
         <p159:morph option="byObject"/>
       </p:transition>
     </mc:Choice>
-    <mc:Fallback>
+    <mc:Fallback xmlns="">
       <p:transition>
         <p:fade/>
       </p:transition>

--- a/assets/files/Business-Pitch-Deck-7-Slide.pptx
+++ b/assets/files/Business-Pitch-Deck-7-Slide.pptx
@@ -2161,8 +2161,8 @@
       </dsp:nvSpPr>
       <dsp:spPr>
         <a:xfrm>
-          <a:off x="3013022" y="749120"/>
-          <a:ext cx="157091" cy="688209"/>
+          <a:off x="2127054" y="749367"/>
+          <a:ext cx="157059" cy="688069"/>
         </a:xfrm>
         <a:custGeom>
           <a:avLst/>
@@ -2173,13 +2173,13 @@
           <a:pathLst>
             <a:path>
               <a:moveTo>
-                <a:pt x="157091" y="0"/>
+                <a:pt x="157059" y="0"/>
               </a:moveTo>
               <a:lnTo>
-                <a:pt x="157091" y="688209"/>
+                <a:pt x="157059" y="688069"/>
               </a:lnTo>
               <a:lnTo>
-                <a:pt x="0" y="688209"/>
+                <a:pt x="0" y="688069"/>
               </a:lnTo>
             </a:path>
           </a:pathLst>
@@ -2219,8 +2219,8 @@
       </dsp:nvSpPr>
       <dsp:spPr>
         <a:xfrm>
-          <a:off x="3013022" y="2873593"/>
-          <a:ext cx="157091" cy="688209"/>
+          <a:off x="2127054" y="2873409"/>
+          <a:ext cx="157059" cy="688069"/>
         </a:xfrm>
         <a:custGeom>
           <a:avLst/>
@@ -2231,13 +2231,13 @@
           <a:pathLst>
             <a:path>
               <a:moveTo>
-                <a:pt x="157091" y="0"/>
+                <a:pt x="157059" y="0"/>
               </a:moveTo>
               <a:lnTo>
-                <a:pt x="157091" y="688209"/>
+                <a:pt x="157059" y="688069"/>
               </a:lnTo>
               <a:lnTo>
-                <a:pt x="0" y="688209"/>
+                <a:pt x="0" y="688069"/>
               </a:lnTo>
             </a:path>
           </a:pathLst>
@@ -2277,8 +2277,8 @@
       </dsp:nvSpPr>
       <dsp:spPr>
         <a:xfrm>
-          <a:off x="3124394" y="749120"/>
-          <a:ext cx="91440" cy="1376418"/>
+          <a:off x="2238393" y="749367"/>
+          <a:ext cx="91440" cy="1376139"/>
         </a:xfrm>
         <a:custGeom>
           <a:avLst/>
@@ -2292,7 +2292,7 @@
                 <a:pt x="45720" y="0"/>
               </a:moveTo>
               <a:lnTo>
-                <a:pt x="45720" y="1376418"/>
+                <a:pt x="45720" y="1376139"/>
               </a:lnTo>
             </a:path>
           </a:pathLst>
@@ -2332,8 +2332,8 @@
       </dsp:nvSpPr>
       <dsp:spPr>
         <a:xfrm>
-          <a:off x="2422060" y="1066"/>
-          <a:ext cx="1496107" cy="748053"/>
+          <a:off x="1536211" y="1465"/>
+          <a:ext cx="1495803" cy="747901"/>
         </a:xfrm>
         <a:prstGeom prst="rect">
           <a:avLst/>
@@ -2374,7 +2374,7 @@
         </a:fontRef>
       </dsp:style>
       <dsp:txBody>
-        <a:bodyPr spcFirstLastPara="0" vert="horz" wrap="square" lIns="554183" tIns="9525" rIns="9525" bIns="9525" numCol="1" spcCol="1270" anchor="ctr" anchorCtr="0">
+        <a:bodyPr spcFirstLastPara="0" vert="horz" wrap="square" lIns="554071" tIns="9525" rIns="9525" bIns="9525" numCol="1" spcCol="1270" anchor="ctr" anchorCtr="0">
           <a:noAutofit/>
         </a:bodyPr>
         <a:lstStyle/>
@@ -2399,8 +2399,8 @@
         </a:p>
       </dsp:txBody>
       <dsp:txXfrm>
-        <a:off x="2422060" y="1066"/>
-        <a:ext cx="1496107" cy="748053"/>
+        <a:off x="1536211" y="1465"/>
+        <a:ext cx="1495803" cy="747901"/>
       </dsp:txXfrm>
     </dsp:sp>
     <dsp:sp modelId="{E26C24AF-F31A-4342-A2ED-E0970E0275F7}">
@@ -2410,8 +2410,8 @@
       </dsp:nvSpPr>
       <dsp:spPr>
         <a:xfrm>
-          <a:off x="2496865" y="75872"/>
-          <a:ext cx="448832" cy="598442"/>
+          <a:off x="1611001" y="76256"/>
+          <a:ext cx="448741" cy="598321"/>
         </a:xfrm>
         <a:prstGeom prst="rect">
           <a:avLst/>
@@ -2456,8 +2456,8 @@
       </dsp:nvSpPr>
       <dsp:spPr>
         <a:xfrm>
-          <a:off x="2422060" y="2125539"/>
-          <a:ext cx="1496107" cy="748053"/>
+          <a:off x="1536211" y="2125507"/>
+          <a:ext cx="1495803" cy="747901"/>
         </a:xfrm>
         <a:prstGeom prst="rect">
           <a:avLst/>
@@ -2498,7 +2498,7 @@
         </a:fontRef>
       </dsp:style>
       <dsp:txBody>
-        <a:bodyPr spcFirstLastPara="0" vert="horz" wrap="square" lIns="554183" tIns="9525" rIns="9525" bIns="9525" numCol="1" spcCol="1270" anchor="ctr" anchorCtr="0">
+        <a:bodyPr spcFirstLastPara="0" vert="horz" wrap="square" lIns="554071" tIns="9525" rIns="9525" bIns="9525" numCol="1" spcCol="1270" anchor="ctr" anchorCtr="0">
           <a:noAutofit/>
         </a:bodyPr>
         <a:lstStyle/>
@@ -2522,8 +2522,8 @@
         </a:p>
       </dsp:txBody>
       <dsp:txXfrm>
-        <a:off x="2422060" y="2125539"/>
-        <a:ext cx="1496107" cy="748053"/>
+        <a:off x="1536211" y="2125507"/>
+        <a:ext cx="1495803" cy="747901"/>
       </dsp:txXfrm>
     </dsp:sp>
     <dsp:sp modelId="{CBC7A6BA-DBF4-49B3-A920-D36DAB4BB02C}">
@@ -2533,8 +2533,8 @@
       </dsp:nvSpPr>
       <dsp:spPr>
         <a:xfrm>
-          <a:off x="2496865" y="2200344"/>
-          <a:ext cx="448832" cy="598442"/>
+          <a:off x="1611001" y="2200297"/>
+          <a:ext cx="448741" cy="598321"/>
         </a:xfrm>
         <a:prstGeom prst="rect">
           <a:avLst/>
@@ -2579,8 +2579,8 @@
       </dsp:nvSpPr>
       <dsp:spPr>
         <a:xfrm>
-          <a:off x="1516915" y="3187775"/>
-          <a:ext cx="1496107" cy="748053"/>
+          <a:off x="631250" y="3187528"/>
+          <a:ext cx="1495803" cy="747901"/>
         </a:xfrm>
         <a:prstGeom prst="rect">
           <a:avLst/>
@@ -2621,7 +2621,7 @@
         </a:fontRef>
       </dsp:style>
       <dsp:txBody>
-        <a:bodyPr spcFirstLastPara="0" vert="horz" wrap="square" lIns="554183" tIns="9525" rIns="9525" bIns="9525" numCol="1" spcCol="1270" anchor="ctr" anchorCtr="0">
+        <a:bodyPr spcFirstLastPara="0" vert="horz" wrap="square" lIns="554071" tIns="9525" rIns="9525" bIns="9525" numCol="1" spcCol="1270" anchor="ctr" anchorCtr="0">
           <a:noAutofit/>
         </a:bodyPr>
         <a:lstStyle/>
@@ -2646,8 +2646,8 @@
         </a:p>
       </dsp:txBody>
       <dsp:txXfrm>
-        <a:off x="1516915" y="3187775"/>
-        <a:ext cx="1496107" cy="748053"/>
+        <a:off x="631250" y="3187528"/>
+        <a:ext cx="1495803" cy="747901"/>
       </dsp:txXfrm>
     </dsp:sp>
     <dsp:sp modelId="{4B5B8D77-5B5F-4048-8685-7AB41802E6E5}">
@@ -2657,8 +2657,8 @@
       </dsp:nvSpPr>
       <dsp:spPr>
         <a:xfrm>
-          <a:off x="1591720" y="3262580"/>
-          <a:ext cx="448832" cy="598442"/>
+          <a:off x="706040" y="3262318"/>
+          <a:ext cx="448741" cy="598321"/>
         </a:xfrm>
         <a:prstGeom prst="rect">
           <a:avLst/>
@@ -2703,8 +2703,8 @@
       </dsp:nvSpPr>
       <dsp:spPr>
         <a:xfrm>
-          <a:off x="1516915" y="1063302"/>
-          <a:ext cx="1496107" cy="748053"/>
+          <a:off x="631250" y="1063486"/>
+          <a:ext cx="1495803" cy="747901"/>
         </a:xfrm>
         <a:prstGeom prst="rect">
           <a:avLst/>
@@ -2745,7 +2745,7 @@
         </a:fontRef>
       </dsp:style>
       <dsp:txBody>
-        <a:bodyPr spcFirstLastPara="0" vert="horz" wrap="square" lIns="554183" tIns="9525" rIns="9525" bIns="9525" numCol="1" spcCol="1270" anchor="ctr" anchorCtr="0">
+        <a:bodyPr spcFirstLastPara="0" vert="horz" wrap="square" lIns="554071" tIns="9525" rIns="9525" bIns="9525" numCol="1" spcCol="1270" anchor="ctr" anchorCtr="0">
           <a:noAutofit/>
         </a:bodyPr>
         <a:lstStyle/>
@@ -2770,8 +2770,8 @@
         </a:p>
       </dsp:txBody>
       <dsp:txXfrm>
-        <a:off x="1516915" y="1063302"/>
-        <a:ext cx="1496107" cy="748053"/>
+        <a:off x="631250" y="1063486"/>
+        <a:ext cx="1495803" cy="747901"/>
       </dsp:txXfrm>
     </dsp:sp>
     <dsp:sp modelId="{C94BC069-BA8D-4140-88A8-30374D281B6D}">
@@ -2781,8 +2781,8 @@
       </dsp:nvSpPr>
       <dsp:spPr>
         <a:xfrm>
-          <a:off x="1591720" y="1138108"/>
-          <a:ext cx="448832" cy="598442"/>
+          <a:off x="706040" y="1138276"/>
+          <a:ext cx="448741" cy="598321"/>
         </a:xfrm>
         <a:prstGeom prst="rect">
           <a:avLst/>
@@ -5279,7 +5279,7 @@
           <a:p>
             <a:fld id="{B7B1A7B3-9184-487D-8853-119DD9BF06ED}" type="datetimeFigureOut">
               <a:rPr lang="id-ID" smtClean="0"/>
-              <a:t>16/07/2026</a:t>
+              <a:t>17/07/2026</a:t>
             </a:fld>
             <a:endParaRPr lang="id-ID"/>
           </a:p>
@@ -5617,7 +5617,7 @@
           <a:p>
             <a:fld id="{B7B1A7B3-9184-487D-8853-119DD9BF06ED}" type="datetimeFigureOut">
               <a:rPr lang="id-ID" smtClean="0"/>
-              <a:t>16/07/2026</a:t>
+              <a:t>17/07/2026</a:t>
             </a:fld>
             <a:endParaRPr lang="id-ID"/>
           </a:p>
@@ -6018,7 +6018,7 @@
           <a:p>
             <a:fld id="{B7B1A7B3-9184-487D-8853-119DD9BF06ED}" type="datetimeFigureOut">
               <a:rPr lang="id-ID" smtClean="0"/>
-              <a:t>16/07/2026</a:t>
+              <a:t>17/07/2026</a:t>
             </a:fld>
             <a:endParaRPr lang="id-ID"/>
           </a:p>
@@ -6354,7 +6354,7 @@
           <a:p>
             <a:fld id="{B7B1A7B3-9184-487D-8853-119DD9BF06ED}" type="datetimeFigureOut">
               <a:rPr lang="id-ID" smtClean="0"/>
-              <a:t>16/07/2026</a:t>
+              <a:t>17/07/2026</a:t>
             </a:fld>
             <a:endParaRPr lang="id-ID"/>
           </a:p>
@@ -6674,7 +6674,7 @@
           <a:p>
             <a:fld id="{B7B1A7B3-9184-487D-8853-119DD9BF06ED}" type="datetimeFigureOut">
               <a:rPr lang="id-ID" smtClean="0"/>
-              <a:t>16/07/2026</a:t>
+              <a:t>17/07/2026</a:t>
             </a:fld>
             <a:endParaRPr lang="id-ID"/>
           </a:p>
@@ -7070,7 +7070,7 @@
           <a:p>
             <a:fld id="{B7B1A7B3-9184-487D-8853-119DD9BF06ED}" type="datetimeFigureOut">
               <a:rPr lang="id-ID" smtClean="0"/>
-              <a:t>16/07/2026</a:t>
+              <a:t>17/07/2026</a:t>
             </a:fld>
             <a:endParaRPr lang="id-ID"/>
           </a:p>
@@ -7327,7 +7327,7 @@
           <a:p>
             <a:fld id="{B7B1A7B3-9184-487D-8853-119DD9BF06ED}" type="datetimeFigureOut">
               <a:rPr lang="id-ID" smtClean="0"/>
-              <a:t>16/07/2026</a:t>
+              <a:t>17/07/2026</a:t>
             </a:fld>
             <a:endParaRPr lang="id-ID"/>
           </a:p>
@@ -7589,7 +7589,7 @@
           <a:p>
             <a:fld id="{B7B1A7B3-9184-487D-8853-119DD9BF06ED}" type="datetimeFigureOut">
               <a:rPr lang="id-ID" smtClean="0"/>
-              <a:t>16/07/2026</a:t>
+              <a:t>17/07/2026</a:t>
             </a:fld>
             <a:endParaRPr lang="id-ID"/>
           </a:p>
@@ -7851,7 +7851,7 @@
           <a:p>
             <a:fld id="{B7B1A7B3-9184-487D-8853-119DD9BF06ED}" type="datetimeFigureOut">
               <a:rPr lang="id-ID" smtClean="0"/>
-              <a:t>16/07/2026</a:t>
+              <a:t>17/07/2026</a:t>
             </a:fld>
             <a:endParaRPr lang="id-ID"/>
           </a:p>
@@ -8180,7 +8180,7 @@
           <a:p>
             <a:fld id="{B7B1A7B3-9184-487D-8853-119DD9BF06ED}" type="datetimeFigureOut">
               <a:rPr lang="id-ID" smtClean="0"/>
-              <a:t>16/07/2026</a:t>
+              <a:t>17/07/2026</a:t>
             </a:fld>
             <a:endParaRPr lang="id-ID"/>
           </a:p>
@@ -8503,7 +8503,7 @@
           <a:p>
             <a:fld id="{B7B1A7B3-9184-487D-8853-119DD9BF06ED}" type="datetimeFigureOut">
               <a:rPr lang="id-ID" smtClean="0"/>
-              <a:t>16/07/2026</a:t>
+              <a:t>17/07/2026</a:t>
             </a:fld>
             <a:endParaRPr lang="id-ID"/>
           </a:p>
@@ -8960,7 +8960,7 @@
           <a:p>
             <a:fld id="{B7B1A7B3-9184-487D-8853-119DD9BF06ED}" type="datetimeFigureOut">
               <a:rPr lang="id-ID" smtClean="0"/>
-              <a:t>16/07/2026</a:t>
+              <a:t>17/07/2026</a:t>
             </a:fld>
             <a:endParaRPr lang="id-ID"/>
           </a:p>
@@ -9165,7 +9165,7 @@
           <a:p>
             <a:fld id="{B7B1A7B3-9184-487D-8853-119DD9BF06ED}" type="datetimeFigureOut">
               <a:rPr lang="id-ID" smtClean="0"/>
-              <a:t>16/07/2026</a:t>
+              <a:t>17/07/2026</a:t>
             </a:fld>
             <a:endParaRPr lang="id-ID"/>
           </a:p>
@@ -9342,7 +9342,7 @@
           <a:p>
             <a:fld id="{B7B1A7B3-9184-487D-8853-119DD9BF06ED}" type="datetimeFigureOut">
               <a:rPr lang="id-ID" smtClean="0"/>
-              <a:t>16/07/2026</a:t>
+              <a:t>17/07/2026</a:t>
             </a:fld>
             <a:endParaRPr lang="id-ID"/>
           </a:p>
@@ -9675,7 +9675,7 @@
           <a:p>
             <a:fld id="{B7B1A7B3-9184-487D-8853-119DD9BF06ED}" type="datetimeFigureOut">
               <a:rPr lang="id-ID" smtClean="0"/>
-              <a:t>16/07/2026</a:t>
+              <a:t>17/07/2026</a:t>
             </a:fld>
             <a:endParaRPr lang="id-ID"/>
           </a:p>
@@ -10020,7 +10020,7 @@
           <a:p>
             <a:fld id="{B7B1A7B3-9184-487D-8853-119DD9BF06ED}" type="datetimeFigureOut">
               <a:rPr lang="id-ID" smtClean="0"/>
-              <a:t>16/07/2026</a:t>
+              <a:t>17/07/2026</a:t>
             </a:fld>
             <a:endParaRPr lang="id-ID"/>
           </a:p>
@@ -12137,7 +12137,7 @@
           <a:p>
             <a:fld id="{B7B1A7B3-9184-487D-8853-119DD9BF06ED}" type="datetimeFigureOut">
               <a:rPr lang="id-ID" smtClean="0"/>
-              <a:t>16/07/2026</a:t>
+              <a:t>17/07/2026</a:t>
             </a:fld>
             <a:endParaRPr lang="id-ID"/>
           </a:p>
@@ -13416,8 +13416,8 @@
         </p:nvSpPr>
         <p:spPr>
           <a:xfrm>
-            <a:off x="2592924" y="2123841"/>
-            <a:ext cx="4313864" cy="3777622"/>
+            <a:off x="2592924" y="2579793"/>
+            <a:ext cx="4313864" cy="2373208"/>
           </a:xfrm>
         </p:spPr>
         <p:txBody>
@@ -13504,7 +13504,12 @@
             <p:ph sz="half" idx="2"/>
           </p:nvPr>
         </p:nvSpPr>
-        <p:spPr/>
+        <p:spPr>
+          <a:xfrm>
+            <a:off x="7190747" y="2582174"/>
+            <a:ext cx="4313864" cy="2373208"/>
+          </a:xfrm>
+        </p:spPr>
         <p:txBody>
           <a:bodyPr/>
           <a:lstStyle/>
@@ -17477,12 +17482,7 @@
             <p:ph type="title"/>
           </p:nvPr>
         </p:nvSpPr>
-        <p:spPr>
-          <a:xfrm>
-            <a:off x="2008307" y="624110"/>
-            <a:ext cx="8911687" cy="1280890"/>
-          </a:xfrm>
-        </p:spPr>
+        <p:spPr/>
         <p:txBody>
           <a:bodyPr/>
           <a:lstStyle/>
@@ -17513,11 +17513,16 @@
             <a:graphicFrameLocks noGrp="1"/>
           </p:cNvGraphicFramePr>
           <p:nvPr>
-            <p:ph sz="half" idx="2"/>
+            <p:ph sz="half" idx="4294967295"/>
+            <p:extLst>
+              <p:ext uri="{D42A27DB-BD31-4B8C-83A1-F6EECF244321}">
+                <p14:modId xmlns:p14="http://schemas.microsoft.com/office/powerpoint/2010/main" val="2773201951"/>
+              </p:ext>
+            </p:extLst>
           </p:nvPr>
         </p:nvGraphicFramePr>
         <p:xfrm>
-          <a:off x="2008307" y="2867025"/>
+          <a:off x="2218545" y="2867025"/>
           <a:ext cx="4313238" cy="1854200"/>
         </p:xfrm>
         <a:graphic>
@@ -17721,11 +17726,17 @@
             </a:extLst>
           </p:cNvPr>
           <p:cNvGraphicFramePr/>
-          <p:nvPr/>
+          <p:nvPr>
+            <p:extLst>
+              <p:ext uri="{D42A27DB-BD31-4B8C-83A1-F6EECF244321}">
+                <p14:modId xmlns:p14="http://schemas.microsoft.com/office/powerpoint/2010/main" val="2986627334"/>
+              </p:ext>
+            </p:extLst>
+          </p:nvPr>
         </p:nvGraphicFramePr>
         <p:xfrm>
-          <a:off x="5676018" y="1825677"/>
-          <a:ext cx="5435083" cy="3936896"/>
+          <a:off x="6955437" y="1825677"/>
+          <a:ext cx="3663266" cy="3936896"/>
         </p:xfrm>
         <a:graphic>
           <a:graphicData uri="http://schemas.openxmlformats.org/drawingml/2006/diagram">
@@ -17971,12 +17982,7 @@
             <p:ph type="title"/>
           </p:nvPr>
         </p:nvSpPr>
-        <p:spPr>
-          <a:xfrm>
-            <a:off x="2038288" y="624110"/>
-            <a:ext cx="8911687" cy="1280890"/>
-          </a:xfrm>
-        </p:spPr>
+        <p:spPr/>
         <p:txBody>
           <a:bodyPr/>
           <a:lstStyle/>
@@ -18008,8 +18014,8 @@
         </p:nvSpPr>
         <p:spPr>
           <a:xfrm>
-            <a:off x="2038288" y="1614791"/>
-            <a:ext cx="6670623" cy="1477328"/>
+            <a:off x="2143218" y="1584810"/>
+            <a:ext cx="6670623" cy="2117183"/>
           </a:xfrm>
           <a:prstGeom prst="rect">
             <a:avLst/>
@@ -18022,6 +18028,11 @@
           </a:bodyPr>
           <a:lstStyle/>
           <a:p>
+            <a:pPr>
+              <a:lnSpc>
+                <a:spcPct val="150000"/>
+              </a:lnSpc>
+            </a:pPr>
             <a:r>
               <a:rPr lang="id-ID" b="1" dirty="0">
                 <a:solidFill>
@@ -18042,6 +18053,9 @@
           </a:p>
           <a:p>
             <a:pPr marL="285750" indent="-285750">
+              <a:lnSpc>
+                <a:spcPct val="150000"/>
+              </a:lnSpc>
               <a:buFont typeface="Wingdings" panose="05000000000000000000" pitchFamily="2" charset="2"/>
               <a:buChar char="ü"/>
             </a:pPr>
@@ -18065,6 +18079,9 @@
           </a:p>
           <a:p>
             <a:pPr marL="285750" indent="-285750">
+              <a:lnSpc>
+                <a:spcPct val="150000"/>
+              </a:lnSpc>
               <a:buFont typeface="Wingdings" panose="05000000000000000000" pitchFamily="2" charset="2"/>
               <a:buChar char="ü"/>
             </a:pPr>
@@ -18088,6 +18105,9 @@
           </a:p>
           <a:p>
             <a:pPr marL="285750" indent="-285750">
+              <a:lnSpc>
+                <a:spcPct val="150000"/>
+              </a:lnSpc>
               <a:buFont typeface="Wingdings" panose="05000000000000000000" pitchFamily="2" charset="2"/>
               <a:buChar char="ü"/>
             </a:pPr>
@@ -18111,6 +18131,9 @@
           </a:p>
           <a:p>
             <a:pPr marL="285750" indent="-285750">
+              <a:lnSpc>
+                <a:spcPct val="150000"/>
+              </a:lnSpc>
               <a:buFont typeface="Wingdings" panose="05000000000000000000" pitchFamily="2" charset="2"/>
               <a:buChar char="ü"/>
             </a:pPr>
@@ -18141,7 +18164,7 @@
         </p:nvSpPr>
         <p:spPr>
           <a:xfrm>
-            <a:off x="2038288" y="3368640"/>
+            <a:off x="2143218" y="3926306"/>
             <a:ext cx="6670623" cy="1200329"/>
           </a:xfrm>
           <a:prstGeom prst="rect">
@@ -18251,7 +18274,7 @@
         </p:nvSpPr>
         <p:spPr>
           <a:xfrm>
-            <a:off x="2143594" y="5066675"/>
+            <a:off x="2183192" y="5350948"/>
             <a:ext cx="8806381" cy="646331"/>
           </a:xfrm>
           <a:prstGeom prst="rect">
@@ -18268,9 +18291,7 @@
             <a:r>
               <a:rPr lang="id-ID" i="1" dirty="0">
                 <a:solidFill>
-                  <a:schemeClr val="accent5">
-                    <a:lumMod val="50000"/>
-                  </a:schemeClr>
+                  <a:srgbClr val="002060"/>
                 </a:solidFill>
               </a:rPr>
               <a:t>"Bersama FreshBox, belanja kebutuhan segar menjadi lebih mudah, cepat, dan terpercaya."</a:t>
@@ -18324,7 +18345,7 @@
                             </p:stCondLst>
                             <p:childTnLst>
                               <p:par>
-                                <p:cTn id="5" presetID="10" presetClass="entr" presetSubtype="0" fill="hold" grpId="0" nodeType="afterEffect">
+                                <p:cTn id="5" presetID="53" presetClass="entr" presetSubtype="16" fill="hold" grpId="0" nodeType="afterEffect">
                                   <p:stCondLst>
                                     <p:cond delay="0"/>
                                   </p:stCondLst>
@@ -18347,9 +18368,55 @@
                                         <p:strVal val="visible"/>
                                       </p:to>
                                     </p:set>
+                                    <p:anim calcmode="lin" valueType="num">
+                                      <p:cBhvr>
+                                        <p:cTn id="7" dur="250" fill="hold"/>
+                                        <p:tgtEl>
+                                          <p:spTgt spid="2"/>
+                                        </p:tgtEl>
+                                        <p:attrNameLst>
+                                          <p:attrName>ppt_w</p:attrName>
+                                        </p:attrNameLst>
+                                      </p:cBhvr>
+                                      <p:tavLst>
+                                        <p:tav tm="0">
+                                          <p:val>
+                                            <p:fltVal val="0"/>
+                                          </p:val>
+                                        </p:tav>
+                                        <p:tav tm="100000">
+                                          <p:val>
+                                            <p:strVal val="#ppt_w"/>
+                                          </p:val>
+                                        </p:tav>
+                                      </p:tavLst>
+                                    </p:anim>
+                                    <p:anim calcmode="lin" valueType="num">
+                                      <p:cBhvr>
+                                        <p:cTn id="8" dur="250" fill="hold"/>
+                                        <p:tgtEl>
+                                          <p:spTgt spid="2"/>
+                                        </p:tgtEl>
+                                        <p:attrNameLst>
+                                          <p:attrName>ppt_h</p:attrName>
+                                        </p:attrNameLst>
+                                      </p:cBhvr>
+                                      <p:tavLst>
+                                        <p:tav tm="0">
+                                          <p:val>
+                                            <p:fltVal val="0"/>
+                                          </p:val>
+                                        </p:tav>
+                                        <p:tav tm="100000">
+                                          <p:val>
+                                            <p:strVal val="#ppt_h"/>
+                                          </p:val>
+                                        </p:tav>
+                                      </p:tavLst>
+                                    </p:anim>
                                     <p:animEffect transition="in" filter="fade">
                                       <p:cBhvr>
-                                        <p:cTn id="7" dur="500"/>
+                                        <p:cTn id="9" dur="250"/>
                                         <p:tgtEl>
                                           <p:spTgt spid="2"/>
                                         </p:tgtEl>
@@ -18362,20 +18429,20 @@
                           </p:cTn>
                         </p:par>
                         <p:par>
-                          <p:cTn id="8" fill="hold">
+                          <p:cTn id="10" fill="hold">
                             <p:stCondLst>
-                              <p:cond delay="500"/>
+                              <p:cond delay="250"/>
                             </p:stCondLst>
                             <p:childTnLst>
                               <p:par>
-                                <p:cTn id="9" presetID="22" presetClass="entr" presetSubtype="8" fill="hold" grpId="0" nodeType="afterEffect">
+                                <p:cTn id="11" presetID="22" presetClass="entr" presetSubtype="8" fill="hold" grpId="0" nodeType="afterEffect">
                                   <p:stCondLst>
                                     <p:cond delay="0"/>
                                   </p:stCondLst>
                                   <p:childTnLst>
                                     <p:set>
                                       <p:cBhvr>
-                                        <p:cTn id="10" dur="1" fill="hold">
+                                        <p:cTn id="12" dur="1" fill="hold">
                                           <p:stCondLst>
                                             <p:cond delay="0"/>
                                           </p:stCondLst>
@@ -18397,7 +18464,7 @@
                                     </p:set>
                                     <p:animEffect transition="in" filter="wipe(left)">
                                       <p:cBhvr>
-                                        <p:cTn id="11" dur="500"/>
+                                        <p:cTn id="13" dur="500"/>
                                         <p:tgtEl>
                                           <p:spTgt spid="3">
                                             <p:txEl>
@@ -18414,20 +18481,20 @@
                           </p:cTn>
                         </p:par>
                         <p:par>
-                          <p:cTn id="12" fill="hold">
+                          <p:cTn id="14" fill="hold">
                             <p:stCondLst>
-                              <p:cond delay="1000"/>
+                              <p:cond delay="750"/>
                             </p:stCondLst>
                             <p:childTnLst>
                               <p:par>
-                                <p:cTn id="13" presetID="22" presetClass="entr" presetSubtype="8" fill="hold" grpId="0" nodeType="afterEffect">
+                                <p:cTn id="15" presetID="22" presetClass="entr" presetSubtype="8" fill="hold" grpId="0" nodeType="afterEffect">
                                   <p:stCondLst>
                                     <p:cond delay="0"/>
                                   </p:stCondLst>
                                   <p:childTnLst>
                                     <p:set>
                                       <p:cBhvr>
-                                        <p:cTn id="14" dur="1" fill="hold">
+                                        <p:cTn id="16" dur="1" fill="hold">
                                           <p:stCondLst>
                                             <p:cond delay="0"/>
                                           </p:stCondLst>
@@ -18449,7 +18516,7 @@
                                     </p:set>
                                     <p:animEffect transition="in" filter="wipe(left)">
                                       <p:cBhvr>
-                                        <p:cTn id="15" dur="500"/>
+                                        <p:cTn id="17" dur="500"/>
                                         <p:tgtEl>
                                           <p:spTgt spid="3">
                                             <p:txEl>
@@ -18466,20 +18533,20 @@
                           </p:cTn>
                         </p:par>
                         <p:par>
-                          <p:cTn id="16" fill="hold">
+                          <p:cTn id="18" fill="hold">
                             <p:stCondLst>
-                              <p:cond delay="1500"/>
+                              <p:cond delay="1250"/>
                             </p:stCondLst>
                             <p:childTnLst>
                               <p:par>
-                                <p:cTn id="17" presetID="22" presetClass="entr" presetSubtype="8" fill="hold" grpId="0" nodeType="afterEffect">
+                                <p:cTn id="19" presetID="22" presetClass="entr" presetSubtype="8" fill="hold" grpId="0" nodeType="afterEffect">
                                   <p:stCondLst>
                                     <p:cond delay="0"/>
                                   </p:stCondLst>
                                   <p:childTnLst>
                                     <p:set>
                                       <p:cBhvr>
-                                        <p:cTn id="18" dur="1" fill="hold">
+                                        <p:cTn id="20" dur="1" fill="hold">
                                           <p:stCondLst>
                                             <p:cond delay="0"/>
                                           </p:stCondLst>
@@ -18501,7 +18568,7 @@
                                     </p:set>
                                     <p:animEffect transition="in" filter="wipe(left)">
                                       <p:cBhvr>
-                                        <p:cTn id="19" dur="500"/>
+                                        <p:cTn id="21" dur="500"/>
                                         <p:tgtEl>
                                           <p:spTgt spid="3">
                                             <p:txEl>
@@ -18518,20 +18585,20 @@
                           </p:cTn>
                         </p:par>
                         <p:par>
-                          <p:cTn id="20" fill="hold">
+                          <p:cTn id="22" fill="hold">
                             <p:stCondLst>
-                              <p:cond delay="2000"/>
+                              <p:cond delay="1750"/>
                             </p:stCondLst>
                             <p:childTnLst>
                               <p:par>
-                                <p:cTn id="21" presetID="22" presetClass="entr" presetSubtype="8" fill="hold" grpId="0" nodeType="afterEffect">
+                                <p:cTn id="23" presetID="22" presetClass="entr" presetSubtype="8" fill="hold" grpId="0" nodeType="afterEffect">
                                   <p:stCondLst>
                                     <p:cond delay="0"/>
                                   </p:stCondLst>
                                   <p:childTnLst>
                                     <p:set>
                                       <p:cBhvr>
-                                        <p:cTn id="22" dur="1" fill="hold">
+                                        <p:cTn id="24" dur="1" fill="hold">
                                           <p:stCondLst>
                                             <p:cond delay="0"/>
                                           </p:stCondLst>
@@ -18553,7 +18620,7 @@
                                     </p:set>
                                     <p:animEffect transition="in" filter="wipe(left)">
                                       <p:cBhvr>
-                                        <p:cTn id="23" dur="500"/>
+                                        <p:cTn id="25" dur="500"/>
                                         <p:tgtEl>
                                           <p:spTgt spid="3">
                                             <p:txEl>
@@ -18570,20 +18637,20 @@
                           </p:cTn>
                         </p:par>
                         <p:par>
-                          <p:cTn id="24" fill="hold">
+                          <p:cTn id="26" fill="hold">
                             <p:stCondLst>
-                              <p:cond delay="2500"/>
+                              <p:cond delay="2250"/>
                             </p:stCondLst>
                             <p:childTnLst>
                               <p:par>
-                                <p:cTn id="25" presetID="22" presetClass="entr" presetSubtype="8" fill="hold" grpId="0" nodeType="afterEffect">
+                                <p:cTn id="27" presetID="22" presetClass="entr" presetSubtype="8" fill="hold" grpId="0" nodeType="afterEffect">
                                   <p:stCondLst>
                                     <p:cond delay="0"/>
                                   </p:stCondLst>
                                   <p:childTnLst>
                                     <p:set>
                                       <p:cBhvr>
-                                        <p:cTn id="26" dur="1" fill="hold">
+                                        <p:cTn id="28" dur="1" fill="hold">
                                           <p:stCondLst>
                                             <p:cond delay="0"/>
                                           </p:stCondLst>
@@ -18605,7 +18672,7 @@
                                     </p:set>
                                     <p:animEffect transition="in" filter="wipe(left)">
                                       <p:cBhvr>
-                                        <p:cTn id="27" dur="500"/>
+                                        <p:cTn id="29" dur="500"/>
                                         <p:tgtEl>
                                           <p:spTgt spid="3">
                                             <p:txEl>
@@ -18622,20 +18689,20 @@
                           </p:cTn>
                         </p:par>
                         <p:par>
-                          <p:cTn id="28" fill="hold">
+                          <p:cTn id="30" fill="hold">
                             <p:stCondLst>
-                              <p:cond delay="3000"/>
+                              <p:cond delay="2750"/>
                             </p:stCondLst>
                             <p:childTnLst>
                               <p:par>
-                                <p:cTn id="29" presetID="22" presetClass="entr" presetSubtype="8" fill="hold" grpId="0" nodeType="afterEffect">
+                                <p:cTn id="31" presetID="22" presetClass="entr" presetSubtype="8" fill="hold" grpId="0" nodeType="afterEffect">
                                   <p:stCondLst>
                                     <p:cond delay="0"/>
                                   </p:stCondLst>
                                   <p:childTnLst>
                                     <p:set>
                                       <p:cBhvr>
-                                        <p:cTn id="30" dur="1" fill="hold">
+                                        <p:cTn id="32" dur="1" fill="hold">
                                           <p:stCondLst>
                                             <p:cond delay="0"/>
                                           </p:stCondLst>
@@ -18657,7 +18724,7 @@
                                     </p:set>
                                     <p:animEffect transition="in" filter="wipe(left)">
                                       <p:cBhvr>
-                                        <p:cTn id="31" dur="500"/>
+                                        <p:cTn id="33" dur="500"/>
                                         <p:tgtEl>
                                           <p:spTgt spid="4">
                                             <p:txEl>
@@ -18674,20 +18741,20 @@
                           </p:cTn>
                         </p:par>
                         <p:par>
-                          <p:cTn id="32" fill="hold">
+                          <p:cTn id="34" fill="hold">
                             <p:stCondLst>
-                              <p:cond delay="3500"/>
+                              <p:cond delay="3250"/>
                             </p:stCondLst>
                             <p:childTnLst>
                               <p:par>
-                                <p:cTn id="33" presetID="22" presetClass="entr" presetSubtype="8" fill="hold" grpId="0" nodeType="afterEffect">
+                                <p:cTn id="35" presetID="22" presetClass="entr" presetSubtype="8" fill="hold" grpId="0" nodeType="afterEffect">
                                   <p:stCondLst>
                                     <p:cond delay="0"/>
                                   </p:stCondLst>
                                   <p:childTnLst>
                                     <p:set>
                                       <p:cBhvr>
-                                        <p:cTn id="34" dur="1" fill="hold">
+                                        <p:cTn id="36" dur="1" fill="hold">
                                           <p:stCondLst>
                                             <p:cond delay="0"/>
                                           </p:stCondLst>
@@ -18709,7 +18776,7 @@
                                     </p:set>
                                     <p:animEffect transition="in" filter="wipe(left)">
                                       <p:cBhvr>
-                                        <p:cTn id="35" dur="500"/>
+                                        <p:cTn id="37" dur="500"/>
                                         <p:tgtEl>
                                           <p:spTgt spid="4">
                                             <p:txEl>
@@ -18726,20 +18793,20 @@
                           </p:cTn>
                         </p:par>
                         <p:par>
-                          <p:cTn id="36" fill="hold">
+                          <p:cTn id="38" fill="hold">
                             <p:stCondLst>
-                              <p:cond delay="4000"/>
+                              <p:cond delay="3750"/>
                             </p:stCondLst>
                             <p:childTnLst>
                               <p:par>
-                                <p:cTn id="37" presetID="22" presetClass="entr" presetSubtype="8" fill="hold" grpId="0" nodeType="afterEffect">
+                                <p:cTn id="39" presetID="22" presetClass="entr" presetSubtype="8" fill="hold" grpId="0" nodeType="afterEffect">
                                   <p:stCondLst>
                                     <p:cond delay="0"/>
                                   </p:stCondLst>
                                   <p:childTnLst>
                                     <p:set>
                                       <p:cBhvr>
-                                        <p:cTn id="38" dur="1" fill="hold">
+                                        <p:cTn id="40" dur="1" fill="hold">
                                           <p:stCondLst>
                                             <p:cond delay="0"/>
                                           </p:stCondLst>
@@ -18761,7 +18828,7 @@
                                     </p:set>
                                     <p:animEffect transition="in" filter="wipe(left)">
                                       <p:cBhvr>
-                                        <p:cTn id="39" dur="500"/>
+                                        <p:cTn id="41" dur="500"/>
                                         <p:tgtEl>
                                           <p:spTgt spid="4">
                                             <p:txEl>
@@ -18778,20 +18845,20 @@
                           </p:cTn>
                         </p:par>
                         <p:par>
-                          <p:cTn id="40" fill="hold">
+                          <p:cTn id="42" fill="hold">
                             <p:stCondLst>
-                              <p:cond delay="4500"/>
+                              <p:cond delay="4250"/>
                             </p:stCondLst>
                             <p:childTnLst>
                               <p:par>
-                                <p:cTn id="41" presetID="22" presetClass="entr" presetSubtype="8" fill="hold" grpId="0" nodeType="afterEffect">
+                                <p:cTn id="43" presetID="22" presetClass="entr" presetSubtype="8" fill="hold" grpId="0" nodeType="afterEffect">
                                   <p:stCondLst>
                                     <p:cond delay="0"/>
                                   </p:stCondLst>
                                   <p:childTnLst>
                                     <p:set>
                                       <p:cBhvr>
-                                        <p:cTn id="42" dur="1" fill="hold">
+                                        <p:cTn id="44" dur="1" fill="hold">
                                           <p:stCondLst>
                                             <p:cond delay="0"/>
                                           </p:stCondLst>
@@ -18813,7 +18880,7 @@
                                     </p:set>
                                     <p:animEffect transition="in" filter="wipe(left)">
                                       <p:cBhvr>
-                                        <p:cTn id="43" dur="500"/>
+                                        <p:cTn id="45" dur="500"/>
                                         <p:tgtEl>
                                           <p:spTgt spid="4">
                                             <p:txEl>
@@ -18830,20 +18897,20 @@
                           </p:cTn>
                         </p:par>
                         <p:par>
-                          <p:cTn id="44" fill="hold">
+                          <p:cTn id="46" fill="hold">
                             <p:stCondLst>
-                              <p:cond delay="5000"/>
+                              <p:cond delay="4750"/>
                             </p:stCondLst>
                             <p:childTnLst>
                               <p:par>
-                                <p:cTn id="45" presetID="22" presetClass="entr" presetSubtype="8" fill="hold" grpId="0" nodeType="afterEffect">
+                                <p:cTn id="47" presetID="22" presetClass="entr" presetSubtype="8" fill="hold" grpId="0" nodeType="afterEffect">
                                   <p:stCondLst>
                                     <p:cond delay="0"/>
                                   </p:stCondLst>
                                   <p:childTnLst>
                                     <p:set>
                                       <p:cBhvr>
-                                        <p:cTn id="46" dur="1" fill="hold">
+                                        <p:cTn id="48" dur="1" fill="hold">
                                           <p:stCondLst>
                                             <p:cond delay="0"/>
                                           </p:stCondLst>
@@ -18865,7 +18932,7 @@
                                     </p:set>
                                     <p:animEffect transition="in" filter="wipe(left)">
                                       <p:cBhvr>
-                                        <p:cTn id="47" dur="1000"/>
+                                        <p:cTn id="49" dur="1000"/>
                                         <p:tgtEl>
                                           <p:spTgt spid="5">
                                             <p:txEl>

--- a/assets/files/Business-Pitch-Deck-7-Slide.pptx
+++ b/assets/files/Business-Pitch-Deck-7-Slide.pptx
@@ -18464,7 +18464,7 @@
                                     </p:set>
                                     <p:animEffect transition="in" filter="wipe(left)">
                                       <p:cBhvr>
-                                        <p:cTn id="13" dur="500"/>
+                                        <p:cTn id="13" dur="250"/>
                                         <p:tgtEl>
                                           <p:spTgt spid="3">
                                             <p:txEl>
@@ -18483,7 +18483,7 @@
                         <p:par>
                           <p:cTn id="14" fill="hold">
                             <p:stCondLst>
-                              <p:cond delay="750"/>
+                              <p:cond delay="500"/>
                             </p:stCondLst>
                             <p:childTnLst>
                               <p:par>
@@ -18516,7 +18516,7 @@
                                     </p:set>
                                     <p:animEffect transition="in" filter="wipe(left)">
                                       <p:cBhvr>
-                                        <p:cTn id="17" dur="500"/>
+                                        <p:cTn id="17" dur="250"/>
                                         <p:tgtEl>
                                           <p:spTgt spid="3">
                                             <p:txEl>
@@ -18535,7 +18535,7 @@
                         <p:par>
                           <p:cTn id="18" fill="hold">
                             <p:stCondLst>
-                              <p:cond delay="1250"/>
+                              <p:cond delay="750"/>
                             </p:stCondLst>
                             <p:childTnLst>
                               <p:par>
@@ -18568,7 +18568,7 @@
                                     </p:set>
                                     <p:animEffect transition="in" filter="wipe(left)">
                                       <p:cBhvr>
-                                        <p:cTn id="21" dur="500"/>
+                                        <p:cTn id="21" dur="250"/>
                                         <p:tgtEl>
                                           <p:spTgt spid="3">
                                             <p:txEl>
@@ -18587,7 +18587,7 @@
                         <p:par>
                           <p:cTn id="22" fill="hold">
                             <p:stCondLst>
-                              <p:cond delay="1750"/>
+                              <p:cond delay="1000"/>
                             </p:stCondLst>
                             <p:childTnLst>
                               <p:par>
@@ -18620,7 +18620,7 @@
                                     </p:set>
                                     <p:animEffect transition="in" filter="wipe(left)">
                                       <p:cBhvr>
-                                        <p:cTn id="25" dur="500"/>
+                                        <p:cTn id="25" dur="250"/>
                                         <p:tgtEl>
                                           <p:spTgt spid="3">
                                             <p:txEl>
@@ -18639,7 +18639,7 @@
                         <p:par>
                           <p:cTn id="26" fill="hold">
                             <p:stCondLst>
-                              <p:cond delay="2250"/>
+                              <p:cond delay="1250"/>
                             </p:stCondLst>
                             <p:childTnLst>
                               <p:par>
@@ -18672,7 +18672,7 @@
                                     </p:set>
                                     <p:animEffect transition="in" filter="wipe(left)">
                                       <p:cBhvr>
-                                        <p:cTn id="29" dur="500"/>
+                                        <p:cTn id="29" dur="250"/>
                                         <p:tgtEl>
                                           <p:spTgt spid="3">
                                             <p:txEl>
@@ -18691,7 +18691,7 @@
                         <p:par>
                           <p:cTn id="30" fill="hold">
                             <p:stCondLst>
-                              <p:cond delay="2750"/>
+                              <p:cond delay="1500"/>
                             </p:stCondLst>
                             <p:childTnLst>
                               <p:par>
@@ -18724,7 +18724,7 @@
                                     </p:set>
                                     <p:animEffect transition="in" filter="wipe(left)">
                                       <p:cBhvr>
-                                        <p:cTn id="33" dur="500"/>
+                                        <p:cTn id="33" dur="250"/>
                                         <p:tgtEl>
                                           <p:spTgt spid="4">
                                             <p:txEl>
@@ -18743,7 +18743,7 @@
                         <p:par>
                           <p:cTn id="34" fill="hold">
                             <p:stCondLst>
-                              <p:cond delay="3250"/>
+                              <p:cond delay="1750"/>
                             </p:stCondLst>
                             <p:childTnLst>
                               <p:par>
@@ -18776,7 +18776,7 @@
                                     </p:set>
                                     <p:animEffect transition="in" filter="wipe(left)">
                                       <p:cBhvr>
-                                        <p:cTn id="37" dur="500"/>
+                                        <p:cTn id="37" dur="250"/>
                                         <p:tgtEl>
                                           <p:spTgt spid="4">
                                             <p:txEl>
@@ -18795,7 +18795,7 @@
                         <p:par>
                           <p:cTn id="38" fill="hold">
                             <p:stCondLst>
-                              <p:cond delay="3750"/>
+                              <p:cond delay="2000"/>
                             </p:stCondLst>
                             <p:childTnLst>
                               <p:par>
@@ -18828,7 +18828,7 @@
                                     </p:set>
                                     <p:animEffect transition="in" filter="wipe(left)">
                                       <p:cBhvr>
-                                        <p:cTn id="41" dur="500"/>
+                                        <p:cTn id="41" dur="250"/>
                                         <p:tgtEl>
                                           <p:spTgt spid="4">
                                             <p:txEl>
@@ -18847,7 +18847,7 @@
                         <p:par>
                           <p:cTn id="42" fill="hold">
                             <p:stCondLst>
-                              <p:cond delay="4250"/>
+                              <p:cond delay="2250"/>
                             </p:stCondLst>
                             <p:childTnLst>
                               <p:par>
@@ -18880,7 +18880,7 @@
                                     </p:set>
                                     <p:animEffect transition="in" filter="wipe(left)">
                                       <p:cBhvr>
-                                        <p:cTn id="45" dur="500"/>
+                                        <p:cTn id="45" dur="250"/>
                                         <p:tgtEl>
                                           <p:spTgt spid="4">
                                             <p:txEl>
@@ -18899,7 +18899,7 @@
                         <p:par>
                           <p:cTn id="46" fill="hold">
                             <p:stCondLst>
-                              <p:cond delay="4750"/>
+                              <p:cond delay="2500"/>
                             </p:stCondLst>
                             <p:childTnLst>
                               <p:par>
@@ -18974,8 +18974,8 @@
     </p:tnLst>
     <p:bldLst>
       <p:bldP spid="2" grpId="0"/>
-      <p:bldP spid="3" grpId="0" build="p"/>
-      <p:bldP spid="4" grpId="0" build="p"/>
+      <p:bldP spid="3" grpId="0" uiExpand="1" build="p"/>
+      <p:bldP spid="4" grpId="0" uiExpand="1" build="p"/>
       <p:bldP spid="5" grpId="0" build="allAtOnce"/>
     </p:bldLst>
   </p:timing>
